--- a/ai-case-library/research/ventures/grid-plain-deck.pptx
+++ b/ai-case-library/research/ventures/grid-plain-deck.pptx
@@ -18,9 +18,10 @@
     <p:sldId id="266" r:id="rId12"/>
     <p:sldId id="267" r:id="rId13"/>
     <p:sldId id="268" r:id="rId14"/>
+    <p:sldId id="269" r:id="rId15"/>
   </p:sldIdLst>
   <p:notesMasterIdLst>
-    <p:notesMasterId r:id="rId15"/>
+    <p:notesMasterId r:id="rId16"/>
   </p:notesMasterIdLst>
   <p:sldSz cx="12192000" cy="6858000"/>
   <p:notesSz cx="6858000" cy="12192000"/>
@@ -602,7 +603,7 @@
           <a:p>
             <a:r>
               <a:rPr lang="en-US" dirty="0"/>
-              <a:t>Плейсхолдеры. Заполнить: имена, роли, одна строка опыта. Честно ответить на вопрос «вы когда-нибудь проектировали подстанцию или покупали компанию?» — через блок «кого добавляем первым».</a:t>
+              <a:t>Факты из корпоративной презентации Океан Тех (2026): 48 проектов, 32 клиента, 64 сотрудника, 7 отраслей; Центр исследований основан в 2025, 14 исследователей; фреймворк — 59% сокращения сроков; публикации Inc., RTVI, TAdviser. 277 кейсов — база Центра исследований.</a:t>
             </a:r>
             <a:endParaRPr lang="en-US" dirty="0"/>
           </a:p>
@@ -690,7 +691,7 @@
           <a:p>
             <a:r>
               <a:rPr lang="en-US" dirty="0"/>
-              <a:t>Потребность по финмодели ~21 млн $ против 30 — остальное запас на дороже купленные фирмы или третий рынок; сказать самому. Не брать 30 сразу — транши защищают обе стороны.</a:t>
+              <a:t>Биографии — из корпоративной презентации Океан Тех. Честный ответ на «вы проектировали подстанции?» — нет, поэтому первая покупка и первый найм — инженер-партнёр с лицензией; ИИ и метод — наши.</a:t>
             </a:r>
             <a:endParaRPr lang="en-US" dirty="0"/>
           </a:p>
@@ -778,7 +779,7 @@
           <a:p>
             <a:r>
               <a:rPr lang="en-US" dirty="0"/>
-              <a:t>Раскрывать только по вопросу. Роботы — не Индия и не США; академия — требования аккредитации не проверены; данные — права на данные в контрактах с первого дня.</a:t>
+              <a:t>Потребность по финмодели ~21 млн $ против 30 — остальное запас на дороже купленные фирмы или третий рынок; сказать самому. Не брать 30 сразу — транши защищают обе стороны.</a:t>
             </a:r>
             <a:endParaRPr lang="en-US" dirty="0"/>
           </a:p>
@@ -866,7 +867,7 @@
           <a:p>
             <a:r>
               <a:rPr lang="en-US" dirty="0"/>
-              <a:t/>
+              <a:t>Раскрывать только по вопросу. Роботы — не Индия и не США; академия — требования аккредитации не проверены; данные — права на данные в контрактах с первого дня.</a:t>
             </a:r>
             <a:endParaRPr lang="en-US" dirty="0"/>
           </a:p>
@@ -890,6 +891,94 @@
             <a:fld id="{F7021451-1387-4CA6-816F-3879F97B5CBC}" type="slidenum">
               <a:rPr lang="en-US"/>
               <a:t>13</a:t>
+            </a:fld>
+            <a:endParaRPr lang="en-US"/>
+          </a:p>
+        </p:txBody>
+      </p:sp>
+    </p:spTree>
+    <p:extLst>
+      <p:ext uri="{BB962C8B-B14F-4D97-AF65-F5344CB8AC3E}">
+        <p14:creationId xmlns:p14="http://schemas.microsoft.com/office/powerpoint/2010/main" val="1024086991"/>
+      </p:ext>
+    </p:extLst>
+  </p:cSld>
+  <p:clrMapOvr>
+    <a:masterClrMapping/>
+  </p:clrMapOvr>
+</p:notes>
+</file>
+
+<file path=ppt/notesSlides/notesSlide14.xml><?xml version="1.0" encoding="utf-8"?>
+<p:notes xmlns:a="http://schemas.openxmlformats.org/drawingml/2006/main" xmlns:r="http://schemas.openxmlformats.org/officeDocument/2006/relationships" xmlns:p="http://schemas.openxmlformats.org/presentationml/2006/main">
+  <p:cSld>
+    <p:spTree>
+      <p:nvGrpSpPr>
+        <p:cNvPr id="1" name=""/>
+        <p:cNvGrpSpPr/>
+        <p:nvPr/>
+      </p:nvGrpSpPr>
+      <p:grpSpPr>
+        <a:xfrm>
+          <a:off x="0" y="0"/>
+          <a:ext cx="0" cy="0"/>
+          <a:chOff x="0" y="0"/>
+          <a:chExt cx="0" cy="0"/>
+        </a:xfrm>
+      </p:grpSpPr>
+      <p:sp>
+        <p:nvSpPr>
+          <p:cNvPr id="2" name="Slide Image Placeholder 1"/>
+          <p:cNvSpPr>
+            <a:spLocks noGrp="1" noRot="1" noChangeAspect="1"/>
+          </p:cNvSpPr>
+          <p:nvPr>
+            <p:ph type="sldImg"/>
+          </p:nvPr>
+        </p:nvSpPr>
+        <p:spPr/>
+      </p:sp>
+      <p:sp>
+        <p:nvSpPr>
+          <p:cNvPr id="3" name="Notes Placeholder 2"/>
+          <p:cNvSpPr>
+            <a:spLocks noGrp="1"/>
+          </p:cNvSpPr>
+          <p:nvPr>
+            <p:ph type="body" idx="1"/>
+          </p:nvPr>
+        </p:nvSpPr>
+        <p:spPr/>
+        <p:txBody>
+          <a:bodyPr/>
+          <a:lstStyle/>
+          <a:p>
+            <a:r>
+              <a:rPr lang="en-US" dirty="0"/>
+              <a:t/>
+            </a:r>
+            <a:endParaRPr lang="en-US" dirty="0"/>
+          </a:p>
+        </p:txBody>
+      </p:sp>
+      <p:sp>
+        <p:nvSpPr>
+          <p:cNvPr id="4" name="Slide Number Placeholder 3"/>
+          <p:cNvSpPr>
+            <a:spLocks noGrp="1"/>
+          </p:cNvSpPr>
+          <p:nvPr>
+            <p:ph type="sldNum" sz="quarter" idx="10"/>
+          </p:nvPr>
+        </p:nvSpPr>
+        <p:spPr/>
+        <p:txBody>
+          <a:bodyPr/>
+          <a:lstStyle/>
+          <a:p>
+            <a:fld id="{F7021451-1387-4CA6-816F-3879F97B5CBC}" type="slidenum">
+              <a:rPr lang="en-US"/>
+              <a:t>14</a:t>
             </a:fld>
             <a:endParaRPr lang="en-US"/>
           </a:p>
@@ -2284,7 +2373,7 @@
                 <a:ea typeface="Courier New" pitchFamily="34" charset="-122"/>
                 <a:cs typeface="Courier New" pitchFamily="34" charset="-120"/>
               </a:rPr>
-              <a:t>8 · КОМАНДА</a:t>
+              <a:t>8 · КТО МЫ</a:t>
             </a:r>
             <a:endParaRPr lang="en-US" sz="950" dirty="0"/>
           </a:p>
@@ -2323,7 +2412,7 @@
                 <a:ea typeface="Arial" pitchFamily="34" charset="-122"/>
                 <a:cs typeface="Arial" pitchFamily="34" charset="-120"/>
               </a:rPr>
-              <a:t>[Заголовок: кто мы и почему именно мы]</a:t>
+              <a:t>Океан Тех — компания, которая исследует искусственный интеллект и строит решения для бизнеса</a:t>
             </a:r>
             <a:endParaRPr lang="en-US" sz="2800" dirty="0"/>
           </a:p>
@@ -2362,7 +2451,7 @@
                 <a:ea typeface="Courier New" pitchFamily="34" charset="-122"/>
                 <a:cs typeface="Courier New" pitchFamily="34" charset="-120"/>
               </a:rPr>
-              <a:t>10 / 13</a:t>
+              <a:t>10 / 14</a:t>
             </a:r>
             <a:endParaRPr lang="en-US" sz="900" dirty="0"/>
           </a:p>
@@ -2377,11 +2466,11 @@
         <p:spPr>
           <a:xfrm>
             <a:off x="548640" y="2103120"/>
-            <a:ext cx="2601468" cy="2834640"/>
+            <a:ext cx="2601468" cy="1737360"/>
           </a:xfrm>
           <a:prstGeom prst="roundRect">
             <a:avLst>
-              <a:gd name="adj" fmla="val 6327"/>
+              <a:gd name="adj" fmla="val 9474"/>
             </a:avLst>
           </a:prstGeom>
           <a:solidFill>
@@ -2389,207 +2478,104 @@
           </a:solidFill>
           <a:ln w="12700">
             <a:solidFill>
-              <a:srgbClr val="D6D9DE"/>
+              <a:srgbClr val="F7F7F7"/>
             </a:solidFill>
-            <a:prstDash val="dash"/>
+            <a:prstDash val="solid"/>
           </a:ln>
         </p:spPr>
       </p:sp>
       <p:sp>
         <p:nvSpPr>
-          <p:cNvPr id="7" name="Shape 5"/>
+          <p:cNvPr id="7" name="Text 5"/>
+          <p:cNvSpPr txBox="1"/>
+          <p:nvPr/>
+        </p:nvSpPr>
+        <p:spPr>
+          <a:xfrm>
+            <a:off x="822960" y="2286000"/>
+            <a:ext cx="2052828" cy="731520"/>
+          </a:xfrm>
+          <a:prstGeom prst="rect">
+            <a:avLst/>
+          </a:prstGeom>
+          <a:noFill/>
+          <a:ln/>
+        </p:spPr>
+        <p:txBody>
+          <a:bodyPr wrap="square" lIns="0" tIns="0" rIns="0" bIns="0" rtlCol="0" anchor="t"/>
+          <a:lstStyle/>
+          <a:p>
+            <a:pPr indent="0" marL="0">
+              <a:buNone/>
+            </a:pPr>
+            <a:r>
+              <a:rPr lang="en-US" sz="4000" b="1" dirty="0">
+                <a:solidFill>
+                  <a:srgbClr val="141A22"/>
+                </a:solidFill>
+                <a:latin typeface="Arial" pitchFamily="34" charset="0"/>
+                <a:ea typeface="Arial" pitchFamily="34" charset="-122"/>
+                <a:cs typeface="Arial" pitchFamily="34" charset="-120"/>
+              </a:rPr>
+              <a:t>48</a:t>
+            </a:r>
+            <a:endParaRPr lang="en-US" sz="4000" dirty="0"/>
+          </a:p>
+        </p:txBody>
+      </p:sp>
+      <p:sp>
+        <p:nvSpPr>
+          <p:cNvPr id="8" name="Text 6"/>
+          <p:cNvSpPr txBox="1"/>
+          <p:nvPr/>
+        </p:nvSpPr>
+        <p:spPr>
+          <a:xfrm>
+            <a:off x="822960" y="3017520"/>
+            <a:ext cx="2052828" cy="731520"/>
+          </a:xfrm>
+          <a:prstGeom prst="rect">
+            <a:avLst/>
+          </a:prstGeom>
+          <a:noFill/>
+          <a:ln/>
+        </p:spPr>
+        <p:txBody>
+          <a:bodyPr wrap="square" lIns="0" tIns="0" rIns="0" bIns="0" rtlCol="0" anchor="t"/>
+          <a:lstStyle/>
+          <a:p>
+            <a:pPr indent="0" marL="0">
+              <a:buNone/>
+            </a:pPr>
+            <a:r>
+              <a:rPr lang="en-US" sz="1150" dirty="0">
+                <a:solidFill>
+                  <a:srgbClr val="5C6067"/>
+                </a:solidFill>
+                <a:latin typeface="Arial" pitchFamily="34" charset="0"/>
+                <a:ea typeface="Arial" pitchFamily="34" charset="-122"/>
+                <a:cs typeface="Arial" pitchFamily="34" charset="-120"/>
+              </a:rPr>
+              <a:t>проектов реализовано</a:t>
+            </a:r>
+            <a:endParaRPr lang="en-US" sz="1150" dirty="0"/>
+          </a:p>
+        </p:txBody>
+      </p:sp>
+      <p:sp>
+        <p:nvSpPr>
+          <p:cNvPr id="9" name="Shape 7"/>
           <p:cNvSpPr/>
           <p:nvPr/>
         </p:nvSpPr>
         <p:spPr>
           <a:xfrm>
-            <a:off x="822960" y="2377440"/>
-            <a:ext cx="914400" cy="914400"/>
-          </a:xfrm>
-          <a:prstGeom prst="ellipse">
-            <a:avLst/>
-          </a:prstGeom>
-          <a:solidFill>
-            <a:srgbClr val="E4E6EA"/>
-          </a:solidFill>
-          <a:ln w="12700">
-            <a:solidFill>
-              <a:srgbClr val="C9CDD3"/>
-            </a:solidFill>
-            <a:prstDash val="dash"/>
-          </a:ln>
-        </p:spPr>
-      </p:sp>
-      <p:sp>
-        <p:nvSpPr>
-          <p:cNvPr id="8" name="Text 6"/>
-          <p:cNvSpPr txBox="1"/>
-          <p:nvPr/>
-        </p:nvSpPr>
-        <p:spPr>
-          <a:xfrm>
-            <a:off x="822960" y="2377440"/>
-            <a:ext cx="914400" cy="914400"/>
-          </a:xfrm>
-          <a:prstGeom prst="rect">
-            <a:avLst/>
-          </a:prstGeom>
-          <a:noFill/>
-          <a:ln/>
-        </p:spPr>
-        <p:txBody>
-          <a:bodyPr wrap="square" lIns="0" tIns="0" rIns="0" bIns="0" rtlCol="0" anchor="ctr"/>
-          <a:lstStyle/>
-          <a:p>
-            <a:pPr algn="ctr" indent="0" marL="0">
-              <a:buNone/>
-            </a:pPr>
-            <a:r>
-              <a:rPr lang="en-US" sz="900" dirty="0">
-                <a:solidFill>
-                  <a:srgbClr val="8A8E94"/>
-                </a:solidFill>
-                <a:latin typeface="Arial" pitchFamily="34" charset="0"/>
-                <a:ea typeface="Arial" pitchFamily="34" charset="-122"/>
-                <a:cs typeface="Arial" pitchFamily="34" charset="-120"/>
-              </a:rPr>
-              <a:t>[фото]</a:t>
-            </a:r>
-            <a:endParaRPr lang="en-US" sz="900" dirty="0"/>
-          </a:p>
-        </p:txBody>
-      </p:sp>
-      <p:sp>
-        <p:nvSpPr>
-          <p:cNvPr id="9" name="Text 7"/>
-          <p:cNvSpPr txBox="1"/>
-          <p:nvPr/>
-        </p:nvSpPr>
-        <p:spPr>
-          <a:xfrm>
-            <a:off x="822960" y="3474720"/>
-            <a:ext cx="2052828" cy="320040"/>
-          </a:xfrm>
-          <a:prstGeom prst="rect">
-            <a:avLst/>
-          </a:prstGeom>
-          <a:noFill/>
-          <a:ln/>
-        </p:spPr>
-        <p:txBody>
-          <a:bodyPr wrap="square" lIns="0" tIns="0" rIns="0" bIns="0" rtlCol="0" anchor="ctr"/>
-          <a:lstStyle/>
-          <a:p>
-            <a:pPr indent="0" marL="0">
-              <a:buNone/>
-            </a:pPr>
-            <a:r>
-              <a:rPr lang="en-US" sz="1500" b="1" dirty="0">
-                <a:solidFill>
-                  <a:srgbClr val="141A22"/>
-                </a:solidFill>
-                <a:latin typeface="Arial" pitchFamily="34" charset="0"/>
-                <a:ea typeface="Arial" pitchFamily="34" charset="-122"/>
-                <a:cs typeface="Arial" pitchFamily="34" charset="-120"/>
-              </a:rPr>
-              <a:t>[Имя Фамилия]</a:t>
-            </a:r>
-            <a:endParaRPr lang="en-US" sz="1500" dirty="0"/>
-          </a:p>
-        </p:txBody>
-      </p:sp>
-      <p:sp>
-        <p:nvSpPr>
-          <p:cNvPr id="10" name="Text 8"/>
-          <p:cNvSpPr txBox="1"/>
-          <p:nvPr/>
-        </p:nvSpPr>
-        <p:spPr>
-          <a:xfrm>
-            <a:off x="822960" y="3794760"/>
-            <a:ext cx="2052828" cy="274320"/>
-          </a:xfrm>
-          <a:prstGeom prst="rect">
-            <a:avLst/>
-          </a:prstGeom>
-          <a:noFill/>
-          <a:ln/>
-        </p:spPr>
-        <p:txBody>
-          <a:bodyPr wrap="square" lIns="0" tIns="0" rIns="0" bIns="0" rtlCol="0" anchor="ctr"/>
-          <a:lstStyle/>
-          <a:p>
-            <a:pPr indent="0" marL="0">
-              <a:buNone/>
-            </a:pPr>
-            <a:r>
-              <a:rPr lang="en-US" sz="1200" dirty="0">
-                <a:solidFill>
-                  <a:srgbClr val="0460F5"/>
-                </a:solidFill>
-                <a:latin typeface="Arial" pitchFamily="34" charset="0"/>
-                <a:ea typeface="Arial" pitchFamily="34" charset="-122"/>
-                <a:cs typeface="Arial" pitchFamily="34" charset="-120"/>
-              </a:rPr>
-              <a:t>[Роль в проекте]</a:t>
-            </a:r>
-            <a:endParaRPr lang="en-US" sz="1200" dirty="0"/>
-          </a:p>
-        </p:txBody>
-      </p:sp>
-      <p:sp>
-        <p:nvSpPr>
-          <p:cNvPr id="11" name="Text 9"/>
-          <p:cNvSpPr txBox="1"/>
-          <p:nvPr/>
-        </p:nvSpPr>
-        <p:spPr>
-          <a:xfrm>
-            <a:off x="822960" y="4114800"/>
-            <a:ext cx="2052828" cy="731520"/>
-          </a:xfrm>
-          <a:prstGeom prst="rect">
-            <a:avLst/>
-          </a:prstGeom>
-          <a:noFill/>
-          <a:ln/>
-        </p:spPr>
-        <p:txBody>
-          <a:bodyPr wrap="square" lIns="0" tIns="0" rIns="0" bIns="0" rtlCol="0" anchor="t"/>
-          <a:lstStyle/>
-          <a:p>
-            <a:pPr indent="0" marL="0">
-              <a:buNone/>
-            </a:pPr>
-            <a:r>
-              <a:rPr lang="en-US" sz="1150" dirty="0">
-                <a:solidFill>
-                  <a:srgbClr val="5C6067"/>
-                </a:solidFill>
-                <a:latin typeface="Arial" pitchFamily="34" charset="0"/>
-                <a:ea typeface="Arial" pitchFamily="34" charset="-122"/>
-                <a:cs typeface="Arial" pitchFamily="34" charset="-120"/>
-              </a:rPr>
-              <a:t>[Одна строка: чем занимался раньше и что делает здесь]</a:t>
-            </a:r>
-            <a:endParaRPr lang="en-US" sz="1150" dirty="0"/>
-          </a:p>
-        </p:txBody>
-      </p:sp>
-      <p:sp>
-        <p:nvSpPr>
-          <p:cNvPr id="12" name="Shape 10"/>
-          <p:cNvSpPr/>
-          <p:nvPr/>
-        </p:nvSpPr>
-        <p:spPr>
-          <a:xfrm>
             <a:off x="3378708" y="2103120"/>
-            <a:ext cx="2601468" cy="2834640"/>
+            <a:ext cx="2601468" cy="1737360"/>
           </a:xfrm>
           <a:prstGeom prst="roundRect">
             <a:avLst>
-              <a:gd name="adj" fmla="val 6327"/>
+              <a:gd name="adj" fmla="val 9474"/>
             </a:avLst>
           </a:prstGeom>
           <a:solidFill>
@@ -2597,207 +2583,104 @@
           </a:solidFill>
           <a:ln w="12700">
             <a:solidFill>
-              <a:srgbClr val="D6D9DE"/>
+              <a:srgbClr val="F7F7F7"/>
             </a:solidFill>
-            <a:prstDash val="dash"/>
+            <a:prstDash val="solid"/>
           </a:ln>
         </p:spPr>
       </p:sp>
       <p:sp>
         <p:nvSpPr>
-          <p:cNvPr id="13" name="Shape 11"/>
+          <p:cNvPr id="10" name="Text 8"/>
+          <p:cNvSpPr txBox="1"/>
+          <p:nvPr/>
+        </p:nvSpPr>
+        <p:spPr>
+          <a:xfrm>
+            <a:off x="3653028" y="2286000"/>
+            <a:ext cx="2052828" cy="731520"/>
+          </a:xfrm>
+          <a:prstGeom prst="rect">
+            <a:avLst/>
+          </a:prstGeom>
+          <a:noFill/>
+          <a:ln/>
+        </p:spPr>
+        <p:txBody>
+          <a:bodyPr wrap="square" lIns="0" tIns="0" rIns="0" bIns="0" rtlCol="0" anchor="t"/>
+          <a:lstStyle/>
+          <a:p>
+            <a:pPr indent="0" marL="0">
+              <a:buNone/>
+            </a:pPr>
+            <a:r>
+              <a:rPr lang="en-US" sz="4000" b="1" dirty="0">
+                <a:solidFill>
+                  <a:srgbClr val="141A22"/>
+                </a:solidFill>
+                <a:latin typeface="Arial" pitchFamily="34" charset="0"/>
+                <a:ea typeface="Arial" pitchFamily="34" charset="-122"/>
+                <a:cs typeface="Arial" pitchFamily="34" charset="-120"/>
+              </a:rPr>
+              <a:t>32</a:t>
+            </a:r>
+            <a:endParaRPr lang="en-US" sz="4000" dirty="0"/>
+          </a:p>
+        </p:txBody>
+      </p:sp>
+      <p:sp>
+        <p:nvSpPr>
+          <p:cNvPr id="11" name="Text 9"/>
+          <p:cNvSpPr txBox="1"/>
+          <p:nvPr/>
+        </p:nvSpPr>
+        <p:spPr>
+          <a:xfrm>
+            <a:off x="3653028" y="3017520"/>
+            <a:ext cx="2052828" cy="731520"/>
+          </a:xfrm>
+          <a:prstGeom prst="rect">
+            <a:avLst/>
+          </a:prstGeom>
+          <a:noFill/>
+          <a:ln/>
+        </p:spPr>
+        <p:txBody>
+          <a:bodyPr wrap="square" lIns="0" tIns="0" rIns="0" bIns="0" rtlCol="0" anchor="t"/>
+          <a:lstStyle/>
+          <a:p>
+            <a:pPr indent="0" marL="0">
+              <a:buNone/>
+            </a:pPr>
+            <a:r>
+              <a:rPr lang="en-US" sz="1150" dirty="0">
+                <a:solidFill>
+                  <a:srgbClr val="5C6067"/>
+                </a:solidFill>
+                <a:latin typeface="Arial" pitchFamily="34" charset="0"/>
+                <a:ea typeface="Arial" pitchFamily="34" charset="-122"/>
+                <a:cs typeface="Arial" pitchFamily="34" charset="-120"/>
+              </a:rPr>
+              <a:t>клиента из разных отраслей</a:t>
+            </a:r>
+            <a:endParaRPr lang="en-US" sz="1150" dirty="0"/>
+          </a:p>
+        </p:txBody>
+      </p:sp>
+      <p:sp>
+        <p:nvSpPr>
+          <p:cNvPr id="12" name="Shape 10"/>
           <p:cNvSpPr/>
           <p:nvPr/>
         </p:nvSpPr>
         <p:spPr>
           <a:xfrm>
-            <a:off x="3653028" y="2377440"/>
-            <a:ext cx="914400" cy="914400"/>
-          </a:xfrm>
-          <a:prstGeom prst="ellipse">
-            <a:avLst/>
-          </a:prstGeom>
-          <a:solidFill>
-            <a:srgbClr val="E4E6EA"/>
-          </a:solidFill>
-          <a:ln w="12700">
-            <a:solidFill>
-              <a:srgbClr val="C9CDD3"/>
-            </a:solidFill>
-            <a:prstDash val="dash"/>
-          </a:ln>
-        </p:spPr>
-      </p:sp>
-      <p:sp>
-        <p:nvSpPr>
-          <p:cNvPr id="14" name="Text 12"/>
-          <p:cNvSpPr txBox="1"/>
-          <p:nvPr/>
-        </p:nvSpPr>
-        <p:spPr>
-          <a:xfrm>
-            <a:off x="3653028" y="2377440"/>
-            <a:ext cx="914400" cy="914400"/>
-          </a:xfrm>
-          <a:prstGeom prst="rect">
-            <a:avLst/>
-          </a:prstGeom>
-          <a:noFill/>
-          <a:ln/>
-        </p:spPr>
-        <p:txBody>
-          <a:bodyPr wrap="square" lIns="0" tIns="0" rIns="0" bIns="0" rtlCol="0" anchor="ctr"/>
-          <a:lstStyle/>
-          <a:p>
-            <a:pPr algn="ctr" indent="0" marL="0">
-              <a:buNone/>
-            </a:pPr>
-            <a:r>
-              <a:rPr lang="en-US" sz="900" dirty="0">
-                <a:solidFill>
-                  <a:srgbClr val="8A8E94"/>
-                </a:solidFill>
-                <a:latin typeface="Arial" pitchFamily="34" charset="0"/>
-                <a:ea typeface="Arial" pitchFamily="34" charset="-122"/>
-                <a:cs typeface="Arial" pitchFamily="34" charset="-120"/>
-              </a:rPr>
-              <a:t>[фото]</a:t>
-            </a:r>
-            <a:endParaRPr lang="en-US" sz="900" dirty="0"/>
-          </a:p>
-        </p:txBody>
-      </p:sp>
-      <p:sp>
-        <p:nvSpPr>
-          <p:cNvPr id="15" name="Text 13"/>
-          <p:cNvSpPr txBox="1"/>
-          <p:nvPr/>
-        </p:nvSpPr>
-        <p:spPr>
-          <a:xfrm>
-            <a:off x="3653028" y="3474720"/>
-            <a:ext cx="2052828" cy="320040"/>
-          </a:xfrm>
-          <a:prstGeom prst="rect">
-            <a:avLst/>
-          </a:prstGeom>
-          <a:noFill/>
-          <a:ln/>
-        </p:spPr>
-        <p:txBody>
-          <a:bodyPr wrap="square" lIns="0" tIns="0" rIns="0" bIns="0" rtlCol="0" anchor="ctr"/>
-          <a:lstStyle/>
-          <a:p>
-            <a:pPr indent="0" marL="0">
-              <a:buNone/>
-            </a:pPr>
-            <a:r>
-              <a:rPr lang="en-US" sz="1500" b="1" dirty="0">
-                <a:solidFill>
-                  <a:srgbClr val="141A22"/>
-                </a:solidFill>
-                <a:latin typeface="Arial" pitchFamily="34" charset="0"/>
-                <a:ea typeface="Arial" pitchFamily="34" charset="-122"/>
-                <a:cs typeface="Arial" pitchFamily="34" charset="-120"/>
-              </a:rPr>
-              <a:t>[Имя Фамилия]</a:t>
-            </a:r>
-            <a:endParaRPr lang="en-US" sz="1500" dirty="0"/>
-          </a:p>
-        </p:txBody>
-      </p:sp>
-      <p:sp>
-        <p:nvSpPr>
-          <p:cNvPr id="16" name="Text 14"/>
-          <p:cNvSpPr txBox="1"/>
-          <p:nvPr/>
-        </p:nvSpPr>
-        <p:spPr>
-          <a:xfrm>
-            <a:off x="3653028" y="3794760"/>
-            <a:ext cx="2052828" cy="274320"/>
-          </a:xfrm>
-          <a:prstGeom prst="rect">
-            <a:avLst/>
-          </a:prstGeom>
-          <a:noFill/>
-          <a:ln/>
-        </p:spPr>
-        <p:txBody>
-          <a:bodyPr wrap="square" lIns="0" tIns="0" rIns="0" bIns="0" rtlCol="0" anchor="ctr"/>
-          <a:lstStyle/>
-          <a:p>
-            <a:pPr indent="0" marL="0">
-              <a:buNone/>
-            </a:pPr>
-            <a:r>
-              <a:rPr lang="en-US" sz="1200" dirty="0">
-                <a:solidFill>
-                  <a:srgbClr val="0460F5"/>
-                </a:solidFill>
-                <a:latin typeface="Arial" pitchFamily="34" charset="0"/>
-                <a:ea typeface="Arial" pitchFamily="34" charset="-122"/>
-                <a:cs typeface="Arial" pitchFamily="34" charset="-120"/>
-              </a:rPr>
-              <a:t>[Роль в проекте]</a:t>
-            </a:r>
-            <a:endParaRPr lang="en-US" sz="1200" dirty="0"/>
-          </a:p>
-        </p:txBody>
-      </p:sp>
-      <p:sp>
-        <p:nvSpPr>
-          <p:cNvPr id="17" name="Text 15"/>
-          <p:cNvSpPr txBox="1"/>
-          <p:nvPr/>
-        </p:nvSpPr>
-        <p:spPr>
-          <a:xfrm>
-            <a:off x="3653028" y="4114800"/>
-            <a:ext cx="2052828" cy="731520"/>
-          </a:xfrm>
-          <a:prstGeom prst="rect">
-            <a:avLst/>
-          </a:prstGeom>
-          <a:noFill/>
-          <a:ln/>
-        </p:spPr>
-        <p:txBody>
-          <a:bodyPr wrap="square" lIns="0" tIns="0" rIns="0" bIns="0" rtlCol="0" anchor="t"/>
-          <a:lstStyle/>
-          <a:p>
-            <a:pPr indent="0" marL="0">
-              <a:buNone/>
-            </a:pPr>
-            <a:r>
-              <a:rPr lang="en-US" sz="1150" dirty="0">
-                <a:solidFill>
-                  <a:srgbClr val="5C6067"/>
-                </a:solidFill>
-                <a:latin typeface="Arial" pitchFamily="34" charset="0"/>
-                <a:ea typeface="Arial" pitchFamily="34" charset="-122"/>
-                <a:cs typeface="Arial" pitchFamily="34" charset="-120"/>
-              </a:rPr>
-              <a:t>[Одна строка: чем занимался раньше и что делает здесь]</a:t>
-            </a:r>
-            <a:endParaRPr lang="en-US" sz="1150" dirty="0"/>
-          </a:p>
-        </p:txBody>
-      </p:sp>
-      <p:sp>
-        <p:nvSpPr>
-          <p:cNvPr id="18" name="Shape 16"/>
-          <p:cNvSpPr/>
-          <p:nvPr/>
-        </p:nvSpPr>
-        <p:spPr>
-          <a:xfrm>
             <a:off x="6208776" y="2103120"/>
-            <a:ext cx="2601468" cy="2834640"/>
+            <a:ext cx="2601468" cy="1737360"/>
           </a:xfrm>
           <a:prstGeom prst="roundRect">
             <a:avLst>
-              <a:gd name="adj" fmla="val 6327"/>
+              <a:gd name="adj" fmla="val 9474"/>
             </a:avLst>
           </a:prstGeom>
           <a:solidFill>
@@ -2805,207 +2688,104 @@
           </a:solidFill>
           <a:ln w="12700">
             <a:solidFill>
-              <a:srgbClr val="D6D9DE"/>
+              <a:srgbClr val="F7F7F7"/>
             </a:solidFill>
-            <a:prstDash val="dash"/>
+            <a:prstDash val="solid"/>
           </a:ln>
         </p:spPr>
       </p:sp>
       <p:sp>
         <p:nvSpPr>
-          <p:cNvPr id="19" name="Shape 17"/>
+          <p:cNvPr id="13" name="Text 11"/>
+          <p:cNvSpPr txBox="1"/>
+          <p:nvPr/>
+        </p:nvSpPr>
+        <p:spPr>
+          <a:xfrm>
+            <a:off x="6483096" y="2286000"/>
+            <a:ext cx="2052828" cy="731520"/>
+          </a:xfrm>
+          <a:prstGeom prst="rect">
+            <a:avLst/>
+          </a:prstGeom>
+          <a:noFill/>
+          <a:ln/>
+        </p:spPr>
+        <p:txBody>
+          <a:bodyPr wrap="square" lIns="0" tIns="0" rIns="0" bIns="0" rtlCol="0" anchor="t"/>
+          <a:lstStyle/>
+          <a:p>
+            <a:pPr indent="0" marL="0">
+              <a:buNone/>
+            </a:pPr>
+            <a:r>
+              <a:rPr lang="en-US" sz="4000" b="1" dirty="0">
+                <a:solidFill>
+                  <a:srgbClr val="141A22"/>
+                </a:solidFill>
+                <a:latin typeface="Arial" pitchFamily="34" charset="0"/>
+                <a:ea typeface="Arial" pitchFamily="34" charset="-122"/>
+                <a:cs typeface="Arial" pitchFamily="34" charset="-120"/>
+              </a:rPr>
+              <a:t>64</a:t>
+            </a:r>
+            <a:endParaRPr lang="en-US" sz="4000" dirty="0"/>
+          </a:p>
+        </p:txBody>
+      </p:sp>
+      <p:sp>
+        <p:nvSpPr>
+          <p:cNvPr id="14" name="Text 12"/>
+          <p:cNvSpPr txBox="1"/>
+          <p:nvPr/>
+        </p:nvSpPr>
+        <p:spPr>
+          <a:xfrm>
+            <a:off x="6483096" y="3017520"/>
+            <a:ext cx="2052828" cy="731520"/>
+          </a:xfrm>
+          <a:prstGeom prst="rect">
+            <a:avLst/>
+          </a:prstGeom>
+          <a:noFill/>
+          <a:ln/>
+        </p:spPr>
+        <p:txBody>
+          <a:bodyPr wrap="square" lIns="0" tIns="0" rIns="0" bIns="0" rtlCol="0" anchor="t"/>
+          <a:lstStyle/>
+          <a:p>
+            <a:pPr indent="0" marL="0">
+              <a:buNone/>
+            </a:pPr>
+            <a:r>
+              <a:rPr lang="en-US" sz="1150" dirty="0">
+                <a:solidFill>
+                  <a:srgbClr val="5C6067"/>
+                </a:solidFill>
+                <a:latin typeface="Arial" pitchFamily="34" charset="0"/>
+                <a:ea typeface="Arial" pitchFamily="34" charset="-122"/>
+                <a:cs typeface="Arial" pitchFamily="34" charset="-120"/>
+              </a:rPr>
+              <a:t>человека в штате: исследователи, инженеры, продуктовые дизайнеры</a:t>
+            </a:r>
+            <a:endParaRPr lang="en-US" sz="1150" dirty="0"/>
+          </a:p>
+        </p:txBody>
+      </p:sp>
+      <p:sp>
+        <p:nvSpPr>
+          <p:cNvPr id="15" name="Shape 13"/>
           <p:cNvSpPr/>
           <p:nvPr/>
         </p:nvSpPr>
         <p:spPr>
           <a:xfrm>
-            <a:off x="6483096" y="2377440"/>
-            <a:ext cx="914400" cy="914400"/>
-          </a:xfrm>
-          <a:prstGeom prst="ellipse">
-            <a:avLst/>
-          </a:prstGeom>
-          <a:solidFill>
-            <a:srgbClr val="E4E6EA"/>
-          </a:solidFill>
-          <a:ln w="12700">
-            <a:solidFill>
-              <a:srgbClr val="C9CDD3"/>
-            </a:solidFill>
-            <a:prstDash val="dash"/>
-          </a:ln>
-        </p:spPr>
-      </p:sp>
-      <p:sp>
-        <p:nvSpPr>
-          <p:cNvPr id="20" name="Text 18"/>
-          <p:cNvSpPr txBox="1"/>
-          <p:nvPr/>
-        </p:nvSpPr>
-        <p:spPr>
-          <a:xfrm>
-            <a:off x="6483096" y="2377440"/>
-            <a:ext cx="914400" cy="914400"/>
-          </a:xfrm>
-          <a:prstGeom prst="rect">
-            <a:avLst/>
-          </a:prstGeom>
-          <a:noFill/>
-          <a:ln/>
-        </p:spPr>
-        <p:txBody>
-          <a:bodyPr wrap="square" lIns="0" tIns="0" rIns="0" bIns="0" rtlCol="0" anchor="ctr"/>
-          <a:lstStyle/>
-          <a:p>
-            <a:pPr algn="ctr" indent="0" marL="0">
-              <a:buNone/>
-            </a:pPr>
-            <a:r>
-              <a:rPr lang="en-US" sz="900" dirty="0">
-                <a:solidFill>
-                  <a:srgbClr val="8A8E94"/>
-                </a:solidFill>
-                <a:latin typeface="Arial" pitchFamily="34" charset="0"/>
-                <a:ea typeface="Arial" pitchFamily="34" charset="-122"/>
-                <a:cs typeface="Arial" pitchFamily="34" charset="-120"/>
-              </a:rPr>
-              <a:t>[фото]</a:t>
-            </a:r>
-            <a:endParaRPr lang="en-US" sz="900" dirty="0"/>
-          </a:p>
-        </p:txBody>
-      </p:sp>
-      <p:sp>
-        <p:nvSpPr>
-          <p:cNvPr id="21" name="Text 19"/>
-          <p:cNvSpPr txBox="1"/>
-          <p:nvPr/>
-        </p:nvSpPr>
-        <p:spPr>
-          <a:xfrm>
-            <a:off x="6483096" y="3474720"/>
-            <a:ext cx="2052828" cy="320040"/>
-          </a:xfrm>
-          <a:prstGeom prst="rect">
-            <a:avLst/>
-          </a:prstGeom>
-          <a:noFill/>
-          <a:ln/>
-        </p:spPr>
-        <p:txBody>
-          <a:bodyPr wrap="square" lIns="0" tIns="0" rIns="0" bIns="0" rtlCol="0" anchor="ctr"/>
-          <a:lstStyle/>
-          <a:p>
-            <a:pPr indent="0" marL="0">
-              <a:buNone/>
-            </a:pPr>
-            <a:r>
-              <a:rPr lang="en-US" sz="1500" b="1" dirty="0">
-                <a:solidFill>
-                  <a:srgbClr val="141A22"/>
-                </a:solidFill>
-                <a:latin typeface="Arial" pitchFamily="34" charset="0"/>
-                <a:ea typeface="Arial" pitchFamily="34" charset="-122"/>
-                <a:cs typeface="Arial" pitchFamily="34" charset="-120"/>
-              </a:rPr>
-              <a:t>[Имя Фамилия]</a:t>
-            </a:r>
-            <a:endParaRPr lang="en-US" sz="1500" dirty="0"/>
-          </a:p>
-        </p:txBody>
-      </p:sp>
-      <p:sp>
-        <p:nvSpPr>
-          <p:cNvPr id="22" name="Text 20"/>
-          <p:cNvSpPr txBox="1"/>
-          <p:nvPr/>
-        </p:nvSpPr>
-        <p:spPr>
-          <a:xfrm>
-            <a:off x="6483096" y="3794760"/>
-            <a:ext cx="2052828" cy="274320"/>
-          </a:xfrm>
-          <a:prstGeom prst="rect">
-            <a:avLst/>
-          </a:prstGeom>
-          <a:noFill/>
-          <a:ln/>
-        </p:spPr>
-        <p:txBody>
-          <a:bodyPr wrap="square" lIns="0" tIns="0" rIns="0" bIns="0" rtlCol="0" anchor="ctr"/>
-          <a:lstStyle/>
-          <a:p>
-            <a:pPr indent="0" marL="0">
-              <a:buNone/>
-            </a:pPr>
-            <a:r>
-              <a:rPr lang="en-US" sz="1200" dirty="0">
-                <a:solidFill>
-                  <a:srgbClr val="0460F5"/>
-                </a:solidFill>
-                <a:latin typeface="Arial" pitchFamily="34" charset="0"/>
-                <a:ea typeface="Arial" pitchFamily="34" charset="-122"/>
-                <a:cs typeface="Arial" pitchFamily="34" charset="-120"/>
-              </a:rPr>
-              <a:t>[Роль в проекте]</a:t>
-            </a:r>
-            <a:endParaRPr lang="en-US" sz="1200" dirty="0"/>
-          </a:p>
-        </p:txBody>
-      </p:sp>
-      <p:sp>
-        <p:nvSpPr>
-          <p:cNvPr id="23" name="Text 21"/>
-          <p:cNvSpPr txBox="1"/>
-          <p:nvPr/>
-        </p:nvSpPr>
-        <p:spPr>
-          <a:xfrm>
-            <a:off x="6483096" y="4114800"/>
-            <a:ext cx="2052828" cy="731520"/>
-          </a:xfrm>
-          <a:prstGeom prst="rect">
-            <a:avLst/>
-          </a:prstGeom>
-          <a:noFill/>
-          <a:ln/>
-        </p:spPr>
-        <p:txBody>
-          <a:bodyPr wrap="square" lIns="0" tIns="0" rIns="0" bIns="0" rtlCol="0" anchor="t"/>
-          <a:lstStyle/>
-          <a:p>
-            <a:pPr indent="0" marL="0">
-              <a:buNone/>
-            </a:pPr>
-            <a:r>
-              <a:rPr lang="en-US" sz="1150" dirty="0">
-                <a:solidFill>
-                  <a:srgbClr val="5C6067"/>
-                </a:solidFill>
-                <a:latin typeface="Arial" pitchFamily="34" charset="0"/>
-                <a:ea typeface="Arial" pitchFamily="34" charset="-122"/>
-                <a:cs typeface="Arial" pitchFamily="34" charset="-120"/>
-              </a:rPr>
-              <a:t>[Одна строка: чем занимался раньше и что делает здесь]</a:t>
-            </a:r>
-            <a:endParaRPr lang="en-US" sz="1150" dirty="0"/>
-          </a:p>
-        </p:txBody>
-      </p:sp>
-      <p:sp>
-        <p:nvSpPr>
-          <p:cNvPr id="24" name="Shape 22"/>
-          <p:cNvSpPr/>
-          <p:nvPr/>
-        </p:nvSpPr>
-        <p:spPr>
-          <a:xfrm>
             <a:off x="9038844" y="2103120"/>
-            <a:ext cx="2601468" cy="2834640"/>
+            <a:ext cx="2601468" cy="1737360"/>
           </a:xfrm>
           <a:prstGeom prst="roundRect">
             <a:avLst>
-              <a:gd name="adj" fmla="val 6327"/>
+              <a:gd name="adj" fmla="val 9474"/>
             </a:avLst>
           </a:prstGeom>
           <a:solidFill>
@@ -3013,102 +2793,38 @@
           </a:solidFill>
           <a:ln w="12700">
             <a:solidFill>
-              <a:srgbClr val="D6D9DE"/>
+              <a:srgbClr val="F7F7F7"/>
             </a:solidFill>
-            <a:prstDash val="dash"/>
+            <a:prstDash val="solid"/>
           </a:ln>
         </p:spPr>
       </p:sp>
       <p:sp>
         <p:nvSpPr>
-          <p:cNvPr id="25" name="Shape 23"/>
-          <p:cNvSpPr/>
-          <p:nvPr/>
-        </p:nvSpPr>
-        <p:spPr>
-          <a:xfrm>
-            <a:off x="9313164" y="2377440"/>
-            <a:ext cx="914400" cy="914400"/>
-          </a:xfrm>
-          <a:prstGeom prst="ellipse">
-            <a:avLst/>
-          </a:prstGeom>
-          <a:solidFill>
-            <a:srgbClr val="E4E6EA"/>
-          </a:solidFill>
-          <a:ln w="12700">
-            <a:solidFill>
-              <a:srgbClr val="C9CDD3"/>
-            </a:solidFill>
-            <a:prstDash val="dash"/>
-          </a:ln>
-        </p:spPr>
-      </p:sp>
-      <p:sp>
-        <p:nvSpPr>
-          <p:cNvPr id="26" name="Text 24"/>
-          <p:cNvSpPr txBox="1"/>
-          <p:nvPr/>
-        </p:nvSpPr>
-        <p:spPr>
-          <a:xfrm>
-            <a:off x="9313164" y="2377440"/>
-            <a:ext cx="914400" cy="914400"/>
-          </a:xfrm>
-          <a:prstGeom prst="rect">
-            <a:avLst/>
-          </a:prstGeom>
-          <a:noFill/>
-          <a:ln/>
-        </p:spPr>
-        <p:txBody>
-          <a:bodyPr wrap="square" lIns="0" tIns="0" rIns="0" bIns="0" rtlCol="0" anchor="ctr"/>
-          <a:lstStyle/>
-          <a:p>
-            <a:pPr algn="ctr" indent="0" marL="0">
-              <a:buNone/>
-            </a:pPr>
-            <a:r>
-              <a:rPr lang="en-US" sz="900" dirty="0">
-                <a:solidFill>
-                  <a:srgbClr val="8A8E94"/>
-                </a:solidFill>
-                <a:latin typeface="Arial" pitchFamily="34" charset="0"/>
-                <a:ea typeface="Arial" pitchFamily="34" charset="-122"/>
-                <a:cs typeface="Arial" pitchFamily="34" charset="-120"/>
-              </a:rPr>
-              <a:t>[фото]</a:t>
-            </a:r>
-            <a:endParaRPr lang="en-US" sz="900" dirty="0"/>
-          </a:p>
-        </p:txBody>
-      </p:sp>
-      <p:sp>
-        <p:nvSpPr>
-          <p:cNvPr id="27" name="Text 25"/>
-          <p:cNvSpPr txBox="1"/>
-          <p:nvPr/>
-        </p:nvSpPr>
-        <p:spPr>
-          <a:xfrm>
-            <a:off x="9313164" y="3474720"/>
-            <a:ext cx="2052828" cy="320040"/>
-          </a:xfrm>
-          <a:prstGeom prst="rect">
-            <a:avLst/>
-          </a:prstGeom>
-          <a:noFill/>
-          <a:ln/>
-        </p:spPr>
-        <p:txBody>
-          <a:bodyPr wrap="square" lIns="0" tIns="0" rIns="0" bIns="0" rtlCol="0" anchor="ctr"/>
-          <a:lstStyle/>
-          <a:p>
-            <a:pPr indent="0" marL="0">
-              <a:buNone/>
-            </a:pPr>
-            <a:r>
-              <a:rPr lang="en-US" sz="1500" b="1" dirty="0">
+          <p:cNvPr id="16" name="Text 14"/>
+          <p:cNvSpPr txBox="1"/>
+          <p:nvPr/>
+        </p:nvSpPr>
+        <p:spPr>
+          <a:xfrm>
+            <a:off x="9313164" y="2286000"/>
+            <a:ext cx="2052828" cy="731520"/>
+          </a:xfrm>
+          <a:prstGeom prst="rect">
+            <a:avLst/>
+          </a:prstGeom>
+          <a:noFill/>
+          <a:ln/>
+        </p:spPr>
+        <p:txBody>
+          <a:bodyPr wrap="square" lIns="0" tIns="0" rIns="0" bIns="0" rtlCol="0" anchor="t"/>
+          <a:lstStyle/>
+          <a:p>
+            <a:pPr indent="0" marL="0">
+              <a:buNone/>
+            </a:pPr>
+            <a:r>
+              <a:rPr lang="en-US" sz="4000" b="1" dirty="0">
                 <a:solidFill>
                   <a:srgbClr val="141A22"/>
                 </a:solidFill>
@@ -3116,60 +2832,21 @@
                 <a:ea typeface="Arial" pitchFamily="34" charset="-122"/>
                 <a:cs typeface="Arial" pitchFamily="34" charset="-120"/>
               </a:rPr>
-              <a:t>[Имя Фамилия]</a:t>
-            </a:r>
-            <a:endParaRPr lang="en-US" sz="1500" dirty="0"/>
-          </a:p>
-        </p:txBody>
-      </p:sp>
-      <p:sp>
-        <p:nvSpPr>
-          <p:cNvPr id="28" name="Text 26"/>
-          <p:cNvSpPr txBox="1"/>
-          <p:nvPr/>
-        </p:nvSpPr>
-        <p:spPr>
-          <a:xfrm>
-            <a:off x="9313164" y="3794760"/>
-            <a:ext cx="2052828" cy="274320"/>
-          </a:xfrm>
-          <a:prstGeom prst="rect">
-            <a:avLst/>
-          </a:prstGeom>
-          <a:noFill/>
-          <a:ln/>
-        </p:spPr>
-        <p:txBody>
-          <a:bodyPr wrap="square" lIns="0" tIns="0" rIns="0" bIns="0" rtlCol="0" anchor="ctr"/>
-          <a:lstStyle/>
-          <a:p>
-            <a:pPr indent="0" marL="0">
-              <a:buNone/>
-            </a:pPr>
-            <a:r>
-              <a:rPr lang="en-US" sz="1200" dirty="0">
-                <a:solidFill>
-                  <a:srgbClr val="0460F5"/>
-                </a:solidFill>
-                <a:latin typeface="Arial" pitchFamily="34" charset="0"/>
-                <a:ea typeface="Arial" pitchFamily="34" charset="-122"/>
-                <a:cs typeface="Arial" pitchFamily="34" charset="-120"/>
-              </a:rPr>
-              <a:t>[Роль в проекте]</a:t>
-            </a:r>
-            <a:endParaRPr lang="en-US" sz="1200" dirty="0"/>
-          </a:p>
-        </p:txBody>
-      </p:sp>
-      <p:sp>
-        <p:nvSpPr>
-          <p:cNvPr id="29" name="Text 27"/>
-          <p:cNvSpPr txBox="1"/>
-          <p:nvPr/>
-        </p:nvSpPr>
-        <p:spPr>
-          <a:xfrm>
-            <a:off x="9313164" y="4114800"/>
+              <a:t>7</a:t>
+            </a:r>
+            <a:endParaRPr lang="en-US" sz="4000" dirty="0"/>
+          </a:p>
+        </p:txBody>
+      </p:sp>
+      <p:sp>
+        <p:nvSpPr>
+          <p:cNvPr id="17" name="Text 15"/>
+          <p:cNvSpPr txBox="1"/>
+          <p:nvPr/>
+        </p:nvSpPr>
+        <p:spPr>
+          <a:xfrm>
+            <a:off x="9313164" y="3017520"/>
             <a:ext cx="2052828" cy="731520"/>
           </a:xfrm>
           <a:prstGeom prst="rect">
@@ -3194,7 +2871,7 @@
                 <a:ea typeface="Arial" pitchFamily="34" charset="-122"/>
                 <a:cs typeface="Arial" pitchFamily="34" charset="-120"/>
               </a:rPr>
-              <a:t>[Одна строка: чем занимался раньше и что делает здесь]</a:t>
+              <a:t>отраслей фокуса: финансы, медицина, производство, e-commerce и другие</a:t>
             </a:r>
             <a:endParaRPr lang="en-US" sz="1150" dirty="0"/>
           </a:p>
@@ -3202,67 +2879,153 @@
       </p:sp>
       <p:sp>
         <p:nvSpPr>
-          <p:cNvPr id="30" name="Shape 28"/>
-          <p:cNvSpPr/>
-          <p:nvPr/>
-        </p:nvSpPr>
-        <p:spPr>
-          <a:xfrm>
-            <a:off x="548640" y="5166360"/>
-            <a:ext cx="11091672" cy="822960"/>
-          </a:xfrm>
-          <a:prstGeom prst="roundRect">
-            <a:avLst>
-              <a:gd name="adj" fmla="val 13333"/>
-            </a:avLst>
-          </a:prstGeom>
-          <a:solidFill>
-            <a:srgbClr val="FFFFFF"/>
-          </a:solidFill>
-          <a:ln w="12700">
-            <a:solidFill>
-              <a:srgbClr val="D6D9DE"/>
-            </a:solidFill>
-            <a:prstDash val="dash"/>
-          </a:ln>
-        </p:spPr>
-      </p:sp>
-      <p:sp>
-        <p:nvSpPr>
-          <p:cNvPr id="31" name="Text 29"/>
-          <p:cNvSpPr txBox="1"/>
-          <p:nvPr/>
-        </p:nvSpPr>
-        <p:spPr>
-          <a:xfrm>
-            <a:off x="822960" y="5166360"/>
-            <a:ext cx="10543032" cy="822960"/>
-          </a:xfrm>
-          <a:prstGeom prst="rect">
-            <a:avLst/>
-          </a:prstGeom>
-          <a:noFill/>
-          <a:ln/>
-        </p:spPr>
-        <p:txBody>
-          <a:bodyPr wrap="square" lIns="0" tIns="0" rIns="0" bIns="0" rtlCol="0" anchor="ctr"/>
-          <a:lstStyle/>
-          <a:p>
-            <a:pPr indent="0" marL="0">
-              <a:buNone/>
-            </a:pPr>
-            <a:r>
-              <a:rPr lang="en-US" sz="1250" dirty="0">
-                <a:solidFill>
-                  <a:srgbClr val="8A8E94"/>
-                </a:solidFill>
-                <a:latin typeface="Arial" pitchFamily="34" charset="0"/>
-                <a:ea typeface="Arial" pitchFamily="34" charset="-122"/>
-                <a:cs typeface="Arial" pitchFamily="34" charset="-120"/>
-              </a:rPr>
-              <a:t>[Чего в команде пока нет и кого добавляем первым — например, инженер-партнёр с лицензией на целевом рынке]</a:t>
-            </a:r>
-            <a:endParaRPr lang="en-US" sz="1250" dirty="0"/>
+          <p:cNvPr id="18" name="Text 16"/>
+          <p:cNvSpPr txBox="1"/>
+          <p:nvPr/>
+        </p:nvSpPr>
+        <p:spPr>
+          <a:xfrm>
+            <a:off x="548640" y="4114800"/>
+            <a:ext cx="10725912" cy="2011680"/>
+          </a:xfrm>
+          <a:prstGeom prst="rect">
+            <a:avLst/>
+          </a:prstGeom>
+          <a:noFill/>
+          <a:ln/>
+        </p:spPr>
+        <p:txBody>
+          <a:bodyPr wrap="square" lIns="0" tIns="0" rIns="0" bIns="0" rtlCol="0" anchor="t"/>
+          <a:lstStyle/>
+          <a:p>
+            <a:pPr marL="228600" indent="-228600">
+              <a:lnSpc>
+                <a:spcPct val="110000"/>
+              </a:lnSpc>
+              <a:spcAft>
+                <a:spcPts val="800"/>
+              </a:spcAft>
+              <a:buSzPct val="100000"/>
+              <a:buChar char="•"/>
+            </a:pPr>
+            <a:r>
+              <a:rPr lang="en-US" sz="1300" b="1" dirty="0">
+                <a:solidFill>
+                  <a:srgbClr val="141A22"/>
+                </a:solidFill>
+                <a:latin typeface="Arial" pitchFamily="34" charset="0"/>
+                <a:ea typeface="Arial" pitchFamily="34" charset="-122"/>
+                <a:cs typeface="Arial" pitchFamily="34" charset="-120"/>
+              </a:rPr>
+              <a:t>Центр исследований </a:t>
+            </a:r>
+            <a:pPr indent="0" marL="0">
+              <a:lnSpc>
+                <a:spcPct val="110000"/>
+              </a:lnSpc>
+              <a:spcAft>
+                <a:spcPts val="800"/>
+              </a:spcAft>
+              <a:buNone/>
+            </a:pPr>
+            <a:r>
+              <a:rPr lang="en-US" sz="1300" dirty="0">
+                <a:solidFill>
+                  <a:srgbClr val="141A22"/>
+                </a:solidFill>
+                <a:latin typeface="Arial" pitchFamily="34" charset="0"/>
+                <a:ea typeface="Arial" pitchFamily="34" charset="-122"/>
+                <a:cs typeface="Arial" pitchFamily="34" charset="-120"/>
+              </a:rPr>
+              <a:t>изучает поведение языковых моделей и агентов на реальных задачах бизнеса: 14 исследователей и ML-инженеров, база из 277 верифицированных кейсов ИИ. Это он за день проверил одиннадцать гипотез и оставил одну.</a:t>
+            </a:r>
+            <a:endParaRPr lang="en-US" sz="1300" dirty="0"/>
+          </a:p>
+          <a:p>
+            <a:pPr indent="0" marL="0">
+              <a:lnSpc>
+                <a:spcPct val="110000"/>
+              </a:lnSpc>
+              <a:spcAft>
+                <a:spcPts val="800"/>
+              </a:spcAft>
+              <a:buNone/>
+            </a:pPr>
+            <a:r>
+              <a:rPr lang="en-US" sz="1300" b="1" dirty="0">
+                <a:solidFill>
+                  <a:srgbClr val="141A22"/>
+                </a:solidFill>
+                <a:latin typeface="Arial" pitchFamily="34" charset="0"/>
+                <a:ea typeface="Arial" pitchFamily="34" charset="-122"/>
+                <a:cs typeface="Arial" pitchFamily="34" charset="-120"/>
+              </a:rPr>
+              <a:t>Департамент разработки </a:t>
+            </a:r>
+            <a:pPr indent="0" marL="0">
+              <a:lnSpc>
+                <a:spcPct val="110000"/>
+              </a:lnSpc>
+              <a:spcAft>
+                <a:spcPts val="800"/>
+              </a:spcAft>
+              <a:buNone/>
+            </a:pPr>
+            <a:r>
+              <a:rPr lang="en-US" sz="1300" dirty="0">
+                <a:solidFill>
+                  <a:srgbClr val="141A22"/>
+                </a:solidFill>
+                <a:latin typeface="Arial" pitchFamily="34" charset="0"/>
+                <a:ea typeface="Arial" pitchFamily="34" charset="-122"/>
+                <a:cs typeface="Arial" pitchFamily="34" charset="-120"/>
+              </a:rPr>
+              <a:t>строит и внедряет ИИ в сложных системах — от высоконагруженных сервисов до корпоративных внедрений. Собственный фреймворк сокращает сроки создания и интеграции решений на 59%.</a:t>
+            </a:r>
+            <a:endParaRPr lang="en-US" sz="1300" dirty="0"/>
+          </a:p>
+          <a:p>
+            <a:pPr indent="0" marL="0">
+              <a:lnSpc>
+                <a:spcPct val="110000"/>
+              </a:lnSpc>
+              <a:spcAft>
+                <a:spcPts val="800"/>
+              </a:spcAft>
+              <a:buNone/>
+            </a:pPr>
+            <a:r>
+              <a:rPr lang="en-US" sz="1300" b="1" dirty="0">
+                <a:solidFill>
+                  <a:srgbClr val="141A22"/>
+                </a:solidFill>
+                <a:latin typeface="Arial" pitchFamily="34" charset="0"/>
+                <a:ea typeface="Arial" pitchFamily="34" charset="-122"/>
+                <a:cs typeface="Arial" pitchFamily="34" charset="-120"/>
+              </a:rPr>
+              <a:t>О нас пишут </a:t>
+            </a:r>
+            <a:pPr indent="0" marL="0">
+              <a:lnSpc>
+                <a:spcPct val="110000"/>
+              </a:lnSpc>
+              <a:spcAft>
+                <a:spcPts val="800"/>
+              </a:spcAft>
+              <a:buNone/>
+            </a:pPr>
+            <a:r>
+              <a:rPr lang="en-US" sz="1300" dirty="0">
+                <a:solidFill>
+                  <a:srgbClr val="141A22"/>
+                </a:solidFill>
+                <a:latin typeface="Arial" pitchFamily="34" charset="0"/>
+                <a:ea typeface="Arial" pitchFamily="34" charset="-122"/>
+                <a:cs typeface="Arial" pitchFamily="34" charset="-120"/>
+              </a:rPr>
+              <a:t>Inc., RTVI, TAdviser — методы, данные и разбор реальных внедрений.</a:t>
+            </a:r>
+            <a:endParaRPr lang="en-US" sz="1300" dirty="0"/>
           </a:p>
         </p:txBody>
       </p:sp>
@@ -3277,6 +3040,737 @@
 <file path=ppt/slides/slide11.xml><?xml version="1.0" encoding="utf-8"?>
 <p:sld xmlns:a="http://schemas.openxmlformats.org/drawingml/2006/main" xmlns:r="http://schemas.openxmlformats.org/officeDocument/2006/relationships" xmlns:p="http://schemas.openxmlformats.org/presentationml/2006/main">
   <p:cSld name="Slide 11">
+    <p:bg>
+      <p:bgPr>
+        <a:solidFill>
+          <a:srgbClr val="FFFFFF"/>
+        </a:solidFill>
+      </p:bgPr>
+    </p:bg>
+    <p:spTree>
+      <p:nvGrpSpPr>
+        <p:cNvPr id="1" name=""/>
+        <p:cNvGrpSpPr/>
+        <p:nvPr/>
+      </p:nvGrpSpPr>
+      <p:grpSpPr>
+        <a:xfrm>
+          <a:off x="0" y="0"/>
+          <a:ext cx="0" cy="0"/>
+          <a:chOff x="0" y="0"/>
+          <a:chExt cx="0" cy="0"/>
+        </a:xfrm>
+      </p:grpSpPr>
+      <p:sp>
+        <p:nvSpPr>
+          <p:cNvPr id="2" name="Text 0"/>
+          <p:cNvSpPr txBox="1"/>
+          <p:nvPr/>
+        </p:nvSpPr>
+        <p:spPr>
+          <a:xfrm>
+            <a:off x="9354312" y="320040"/>
+            <a:ext cx="2286000" cy="274320"/>
+          </a:xfrm>
+          <a:prstGeom prst="rect">
+            <a:avLst/>
+          </a:prstGeom>
+          <a:noFill/>
+          <a:ln/>
+        </p:spPr>
+        <p:txBody>
+          <a:bodyPr wrap="square" lIns="0" tIns="0" rIns="0" bIns="0" rtlCol="0" anchor="ctr"/>
+          <a:lstStyle/>
+          <a:p>
+            <a:pPr algn="r" indent="0" marL="0">
+              <a:buNone/>
+            </a:pPr>
+            <a:r>
+              <a:rPr lang="en-US" sz="900" spc="300" kern="0" dirty="0">
+                <a:solidFill>
+                  <a:srgbClr val="8A8E94"/>
+                </a:solidFill>
+                <a:latin typeface="Courier New" pitchFamily="34" charset="0"/>
+                <a:ea typeface="Courier New" pitchFamily="34" charset="-122"/>
+                <a:cs typeface="Courier New" pitchFamily="34" charset="-120"/>
+              </a:rPr>
+              <a:t>ОКЕАН ТЕХ</a:t>
+            </a:r>
+            <a:endParaRPr lang="en-US" sz="900" dirty="0"/>
+          </a:p>
+        </p:txBody>
+      </p:sp>
+      <p:sp>
+        <p:nvSpPr>
+          <p:cNvPr id="3" name="Text 1"/>
+          <p:cNvSpPr txBox="1"/>
+          <p:nvPr/>
+        </p:nvSpPr>
+        <p:spPr>
+          <a:xfrm>
+            <a:off x="548640" y="411480"/>
+            <a:ext cx="7315200" cy="274320"/>
+          </a:xfrm>
+          <a:prstGeom prst="rect">
+            <a:avLst/>
+          </a:prstGeom>
+          <a:noFill/>
+          <a:ln/>
+        </p:spPr>
+        <p:txBody>
+          <a:bodyPr wrap="square" lIns="0" tIns="0" rIns="0" bIns="0" rtlCol="0" anchor="ctr"/>
+          <a:lstStyle/>
+          <a:p>
+            <a:pPr indent="0" marL="0">
+              <a:buNone/>
+            </a:pPr>
+            <a:r>
+              <a:rPr lang="en-US" sz="950" spc="300" kern="0" dirty="0">
+                <a:solidFill>
+                  <a:srgbClr val="0460F5"/>
+                </a:solidFill>
+                <a:latin typeface="Courier New" pitchFamily="34" charset="0"/>
+                <a:ea typeface="Courier New" pitchFamily="34" charset="-122"/>
+                <a:cs typeface="Courier New" pitchFamily="34" charset="-120"/>
+              </a:rPr>
+              <a:t>9 · КОМАНДА</a:t>
+            </a:r>
+            <a:endParaRPr lang="en-US" sz="950" dirty="0"/>
+          </a:p>
+        </p:txBody>
+      </p:sp>
+      <p:sp>
+        <p:nvSpPr>
+          <p:cNvPr id="4" name="Text 2"/>
+          <p:cNvSpPr txBox="1"/>
+          <p:nvPr/>
+        </p:nvSpPr>
+        <p:spPr>
+          <a:xfrm>
+            <a:off x="548640" y="731520"/>
+            <a:ext cx="11091672" cy="1188720"/>
+          </a:xfrm>
+          <a:prstGeom prst="rect">
+            <a:avLst/>
+          </a:prstGeom>
+          <a:noFill/>
+          <a:ln/>
+        </p:spPr>
+        <p:txBody>
+          <a:bodyPr wrap="square" lIns="0" tIns="0" rIns="0" bIns="0" rtlCol="0" anchor="t"/>
+          <a:lstStyle/>
+          <a:p>
+            <a:pPr indent="0" marL="0">
+              <a:buNone/>
+            </a:pPr>
+            <a:r>
+              <a:rPr lang="en-US" sz="2800" b="1" dirty="0">
+                <a:solidFill>
+                  <a:srgbClr val="141A22"/>
+                </a:solidFill>
+                <a:latin typeface="Arial" pitchFamily="34" charset="0"/>
+                <a:ea typeface="Arial" pitchFamily="34" charset="-122"/>
+                <a:cs typeface="Arial" pitchFamily="34" charset="-120"/>
+              </a:rPr>
+              <a:t>Управленческая дисциплина, понимание задач бизнеса и инженерный уровень</a:t>
+            </a:r>
+            <a:endParaRPr lang="en-US" sz="2800" dirty="0"/>
+          </a:p>
+        </p:txBody>
+      </p:sp>
+      <p:sp>
+        <p:nvSpPr>
+          <p:cNvPr id="5" name="Text 3"/>
+          <p:cNvSpPr txBox="1"/>
+          <p:nvPr/>
+        </p:nvSpPr>
+        <p:spPr>
+          <a:xfrm>
+            <a:off x="10268712" y="6400800"/>
+            <a:ext cx="1371600" cy="274320"/>
+          </a:xfrm>
+          <a:prstGeom prst="rect">
+            <a:avLst/>
+          </a:prstGeom>
+          <a:noFill/>
+          <a:ln/>
+        </p:spPr>
+        <p:txBody>
+          <a:bodyPr wrap="square" lIns="0" tIns="0" rIns="0" bIns="0" rtlCol="0" anchor="ctr"/>
+          <a:lstStyle/>
+          <a:p>
+            <a:pPr algn="r" indent="0" marL="0">
+              <a:buNone/>
+            </a:pPr>
+            <a:r>
+              <a:rPr lang="en-US" sz="900" dirty="0">
+                <a:solidFill>
+                  <a:srgbClr val="8A8E94"/>
+                </a:solidFill>
+                <a:latin typeface="Courier New" pitchFamily="34" charset="0"/>
+                <a:ea typeface="Courier New" pitchFamily="34" charset="-122"/>
+                <a:cs typeface="Courier New" pitchFamily="34" charset="-120"/>
+              </a:rPr>
+              <a:t>11 / 14</a:t>
+            </a:r>
+            <a:endParaRPr lang="en-US" sz="900" dirty="0"/>
+          </a:p>
+        </p:txBody>
+      </p:sp>
+      <p:sp>
+        <p:nvSpPr>
+          <p:cNvPr id="6" name="Shape 4"/>
+          <p:cNvSpPr/>
+          <p:nvPr/>
+        </p:nvSpPr>
+        <p:spPr>
+          <a:xfrm>
+            <a:off x="548640" y="2103120"/>
+            <a:ext cx="3544824" cy="3794760"/>
+          </a:xfrm>
+          <a:prstGeom prst="roundRect">
+            <a:avLst>
+              <a:gd name="adj" fmla="val 4643"/>
+            </a:avLst>
+          </a:prstGeom>
+          <a:solidFill>
+            <a:srgbClr val="F7F7F7"/>
+          </a:solidFill>
+          <a:ln w="12700">
+            <a:solidFill>
+              <a:srgbClr val="F7F7F7"/>
+            </a:solidFill>
+            <a:prstDash val="solid"/>
+          </a:ln>
+        </p:spPr>
+      </p:sp>
+      <p:pic>
+        <p:nvPicPr>
+          <p:cNvPr id="7" name="Image 0" descr="/tmp/claude-0/-home-user/5ac64fc3-708b-5ba2-8575-a96a48f05f03/scratchpad/okean/penkov.png">    </p:cNvPr>
+          <p:cNvPicPr>
+            <a:picLocks noChangeAspect="1"/>
+          </p:cNvPicPr>
+          <p:nvPr/>
+        </p:nvPicPr>
+        <p:blipFill>
+          <a:blip r:embed="rId1"/>
+          <a:stretch>
+            <a:fillRect/>
+          </a:stretch>
+        </p:blipFill>
+        <p:spPr>
+          <a:xfrm>
+            <a:off x="822960" y="2331720"/>
+            <a:ext cx="1612087" cy="1874520"/>
+          </a:xfrm>
+          <a:prstGeom prst="rect">
+            <a:avLst/>
+          </a:prstGeom>
+        </p:spPr>
+      </p:pic>
+      <p:sp>
+        <p:nvSpPr>
+          <p:cNvPr id="8" name="Text 5"/>
+          <p:cNvSpPr txBox="1"/>
+          <p:nvPr/>
+        </p:nvSpPr>
+        <p:spPr>
+          <a:xfrm>
+            <a:off x="822960" y="4343400"/>
+            <a:ext cx="2996184" cy="320040"/>
+          </a:xfrm>
+          <a:prstGeom prst="rect">
+            <a:avLst/>
+          </a:prstGeom>
+          <a:noFill/>
+          <a:ln/>
+        </p:spPr>
+        <p:txBody>
+          <a:bodyPr wrap="square" lIns="0" tIns="0" rIns="0" bIns="0" rtlCol="0" anchor="ctr"/>
+          <a:lstStyle/>
+          <a:p>
+            <a:pPr indent="0" marL="0">
+              <a:buNone/>
+            </a:pPr>
+            <a:r>
+              <a:rPr lang="en-US" sz="1500" b="1" dirty="0">
+                <a:solidFill>
+                  <a:srgbClr val="141A22"/>
+                </a:solidFill>
+                <a:latin typeface="Arial" pitchFamily="34" charset="0"/>
+                <a:ea typeface="Arial" pitchFamily="34" charset="-122"/>
+                <a:cs typeface="Arial" pitchFamily="34" charset="-120"/>
+              </a:rPr>
+              <a:t>Дмитрий Пеньков</a:t>
+            </a:r>
+            <a:endParaRPr lang="en-US" sz="1500" dirty="0"/>
+          </a:p>
+        </p:txBody>
+      </p:sp>
+      <p:sp>
+        <p:nvSpPr>
+          <p:cNvPr id="9" name="Text 6"/>
+          <p:cNvSpPr txBox="1"/>
+          <p:nvPr/>
+        </p:nvSpPr>
+        <p:spPr>
+          <a:xfrm>
+            <a:off x="822960" y="4663440"/>
+            <a:ext cx="2996184" cy="274320"/>
+          </a:xfrm>
+          <a:prstGeom prst="rect">
+            <a:avLst/>
+          </a:prstGeom>
+          <a:noFill/>
+          <a:ln/>
+        </p:spPr>
+        <p:txBody>
+          <a:bodyPr wrap="square" lIns="0" tIns="0" rIns="0" bIns="0" rtlCol="0" anchor="ctr"/>
+          <a:lstStyle/>
+          <a:p>
+            <a:pPr indent="0" marL="0">
+              <a:buNone/>
+            </a:pPr>
+            <a:r>
+              <a:rPr lang="en-US" sz="1150" dirty="0">
+                <a:solidFill>
+                  <a:srgbClr val="0460F5"/>
+                </a:solidFill>
+                <a:latin typeface="Arial" pitchFamily="34" charset="0"/>
+                <a:ea typeface="Arial" pitchFamily="34" charset="-122"/>
+                <a:cs typeface="Arial" pitchFamily="34" charset="-120"/>
+              </a:rPr>
+              <a:t>Генеральный директор, основатель</a:t>
+            </a:r>
+            <a:endParaRPr lang="en-US" sz="1150" dirty="0"/>
+          </a:p>
+        </p:txBody>
+      </p:sp>
+      <p:sp>
+        <p:nvSpPr>
+          <p:cNvPr id="10" name="Text 7"/>
+          <p:cNvSpPr txBox="1"/>
+          <p:nvPr/>
+        </p:nvSpPr>
+        <p:spPr>
+          <a:xfrm>
+            <a:off x="822960" y="4983480"/>
+            <a:ext cx="2996184" cy="822960"/>
+          </a:xfrm>
+          <a:prstGeom prst="rect">
+            <a:avLst/>
+          </a:prstGeom>
+          <a:noFill/>
+          <a:ln/>
+        </p:spPr>
+        <p:txBody>
+          <a:bodyPr wrap="square" lIns="0" tIns="0" rIns="0" bIns="0" rtlCol="0" anchor="t"/>
+          <a:lstStyle/>
+          <a:p>
+            <a:pPr indent="0" marL="0">
+              <a:buNone/>
+            </a:pPr>
+            <a:r>
+              <a:rPr lang="en-US" sz="1050" dirty="0">
+                <a:solidFill>
+                  <a:srgbClr val="5C6067"/>
+                </a:solidFill>
+                <a:latin typeface="Arial" pitchFamily="34" charset="0"/>
+                <a:ea typeface="Arial" pitchFamily="34" charset="-122"/>
+                <a:cs typeface="Arial" pitchFamily="34" charset="-120"/>
+              </a:rPr>
+              <a:t>Предприниматель с опытом в технологиях. Buckswood School (Англия), МИРБИС, экономический лицей МБИ им. А. Собчака, MBA при МГИМО.</a:t>
+            </a:r>
+            <a:endParaRPr lang="en-US" sz="1050" dirty="0"/>
+          </a:p>
+        </p:txBody>
+      </p:sp>
+      <p:sp>
+        <p:nvSpPr>
+          <p:cNvPr id="11" name="Shape 8"/>
+          <p:cNvSpPr/>
+          <p:nvPr/>
+        </p:nvSpPr>
+        <p:spPr>
+          <a:xfrm>
+            <a:off x="4322064" y="2103120"/>
+            <a:ext cx="3544824" cy="3794760"/>
+          </a:xfrm>
+          <a:prstGeom prst="roundRect">
+            <a:avLst>
+              <a:gd name="adj" fmla="val 4643"/>
+            </a:avLst>
+          </a:prstGeom>
+          <a:solidFill>
+            <a:srgbClr val="F7F7F7"/>
+          </a:solidFill>
+          <a:ln w="12700">
+            <a:solidFill>
+              <a:srgbClr val="F7F7F7"/>
+            </a:solidFill>
+            <a:prstDash val="solid"/>
+          </a:ln>
+        </p:spPr>
+      </p:sp>
+      <p:pic>
+        <p:nvPicPr>
+          <p:cNvPr id="12" name="Image 1" descr="/tmp/claude-0/-home-user/5ac64fc3-708b-5ba2-8575-a96a48f05f03/scratchpad/okean/moroshin.png">    </p:cNvPr>
+          <p:cNvPicPr>
+            <a:picLocks noChangeAspect="1"/>
+          </p:cNvPicPr>
+          <p:nvPr/>
+        </p:nvPicPr>
+        <p:blipFill>
+          <a:blip r:embed="rId2"/>
+          <a:stretch>
+            <a:fillRect/>
+          </a:stretch>
+        </p:blipFill>
+        <p:spPr>
+          <a:xfrm>
+            <a:off x="4596384" y="2331720"/>
+            <a:ext cx="1612087" cy="1874520"/>
+          </a:xfrm>
+          <a:prstGeom prst="rect">
+            <a:avLst/>
+          </a:prstGeom>
+        </p:spPr>
+      </p:pic>
+      <p:sp>
+        <p:nvSpPr>
+          <p:cNvPr id="13" name="Text 9"/>
+          <p:cNvSpPr txBox="1"/>
+          <p:nvPr/>
+        </p:nvSpPr>
+        <p:spPr>
+          <a:xfrm>
+            <a:off x="4596384" y="4343400"/>
+            <a:ext cx="2996184" cy="320040"/>
+          </a:xfrm>
+          <a:prstGeom prst="rect">
+            <a:avLst/>
+          </a:prstGeom>
+          <a:noFill/>
+          <a:ln/>
+        </p:spPr>
+        <p:txBody>
+          <a:bodyPr wrap="square" lIns="0" tIns="0" rIns="0" bIns="0" rtlCol="0" anchor="ctr"/>
+          <a:lstStyle/>
+          <a:p>
+            <a:pPr indent="0" marL="0">
+              <a:buNone/>
+            </a:pPr>
+            <a:r>
+              <a:rPr lang="en-US" sz="1500" b="1" dirty="0">
+                <a:solidFill>
+                  <a:srgbClr val="141A22"/>
+                </a:solidFill>
+                <a:latin typeface="Arial" pitchFamily="34" charset="0"/>
+                <a:ea typeface="Arial" pitchFamily="34" charset="-122"/>
+                <a:cs typeface="Arial" pitchFamily="34" charset="-120"/>
+              </a:rPr>
+              <a:t>Константин Морошин</a:t>
+            </a:r>
+            <a:endParaRPr lang="en-US" sz="1500" dirty="0"/>
+          </a:p>
+        </p:txBody>
+      </p:sp>
+      <p:sp>
+        <p:nvSpPr>
+          <p:cNvPr id="14" name="Text 10"/>
+          <p:cNvSpPr txBox="1"/>
+          <p:nvPr/>
+        </p:nvSpPr>
+        <p:spPr>
+          <a:xfrm>
+            <a:off x="4596384" y="4663440"/>
+            <a:ext cx="2996184" cy="274320"/>
+          </a:xfrm>
+          <a:prstGeom prst="rect">
+            <a:avLst/>
+          </a:prstGeom>
+          <a:noFill/>
+          <a:ln/>
+        </p:spPr>
+        <p:txBody>
+          <a:bodyPr wrap="square" lIns="0" tIns="0" rIns="0" bIns="0" rtlCol="0" anchor="ctr"/>
+          <a:lstStyle/>
+          <a:p>
+            <a:pPr indent="0" marL="0">
+              <a:buNone/>
+            </a:pPr>
+            <a:r>
+              <a:rPr lang="en-US" sz="1150" dirty="0">
+                <a:solidFill>
+                  <a:srgbClr val="0460F5"/>
+                </a:solidFill>
+                <a:latin typeface="Arial" pitchFamily="34" charset="0"/>
+                <a:ea typeface="Arial" pitchFamily="34" charset="-122"/>
+                <a:cs typeface="Arial" pitchFamily="34" charset="-120"/>
+              </a:rPr>
+              <a:t>Глава Центра исследований</a:t>
+            </a:r>
+            <a:endParaRPr lang="en-US" sz="1150" dirty="0"/>
+          </a:p>
+        </p:txBody>
+      </p:sp>
+      <p:sp>
+        <p:nvSpPr>
+          <p:cNvPr id="15" name="Text 11"/>
+          <p:cNvSpPr txBox="1"/>
+          <p:nvPr/>
+        </p:nvSpPr>
+        <p:spPr>
+          <a:xfrm>
+            <a:off x="4596384" y="4983480"/>
+            <a:ext cx="2996184" cy="822960"/>
+          </a:xfrm>
+          <a:prstGeom prst="rect">
+            <a:avLst/>
+          </a:prstGeom>
+          <a:noFill/>
+          <a:ln/>
+        </p:spPr>
+        <p:txBody>
+          <a:bodyPr wrap="square" lIns="0" tIns="0" rIns="0" bIns="0" rtlCol="0" anchor="t"/>
+          <a:lstStyle/>
+          <a:p>
+            <a:pPr indent="0" marL="0">
+              <a:buNone/>
+            </a:pPr>
+            <a:r>
+              <a:rPr lang="en-US" sz="1050" dirty="0">
+                <a:solidFill>
+                  <a:srgbClr val="5C6067"/>
+                </a:solidFill>
+                <a:latin typeface="Arial" pitchFamily="34" charset="0"/>
+                <a:ea typeface="Arial" pitchFamily="34" charset="-122"/>
+                <a:cs typeface="Arial" pitchFamily="34" charset="-120"/>
+              </a:rPr>
+              <a:t>Исследователь UX в B2B ИТ. Проекты для МТС Ред, КРОК, Инностейдж, Сбера. Более 10 лет продаж ИТ в энтерпрайзе.</a:t>
+            </a:r>
+            <a:endParaRPr lang="en-US" sz="1050" dirty="0"/>
+          </a:p>
+        </p:txBody>
+      </p:sp>
+      <p:sp>
+        <p:nvSpPr>
+          <p:cNvPr id="16" name="Shape 12"/>
+          <p:cNvSpPr/>
+          <p:nvPr/>
+        </p:nvSpPr>
+        <p:spPr>
+          <a:xfrm>
+            <a:off x="8095488" y="2103120"/>
+            <a:ext cx="3544824" cy="3794760"/>
+          </a:xfrm>
+          <a:prstGeom prst="roundRect">
+            <a:avLst>
+              <a:gd name="adj" fmla="val 4643"/>
+            </a:avLst>
+          </a:prstGeom>
+          <a:solidFill>
+            <a:srgbClr val="F7F7F7"/>
+          </a:solidFill>
+          <a:ln w="12700">
+            <a:solidFill>
+              <a:srgbClr val="F7F7F7"/>
+            </a:solidFill>
+            <a:prstDash val="solid"/>
+          </a:ln>
+        </p:spPr>
+      </p:sp>
+      <p:pic>
+        <p:nvPicPr>
+          <p:cNvPr id="17" name="Image 2" descr="/tmp/claude-0/-home-user/5ac64fc3-708b-5ba2-8575-a96a48f05f03/scratchpad/okean/kovalev.png">    </p:cNvPr>
+          <p:cNvPicPr>
+            <a:picLocks noChangeAspect="1"/>
+          </p:cNvPicPr>
+          <p:nvPr/>
+        </p:nvPicPr>
+        <p:blipFill>
+          <a:blip r:embed="rId3"/>
+          <a:stretch>
+            <a:fillRect/>
+          </a:stretch>
+        </p:blipFill>
+        <p:spPr>
+          <a:xfrm>
+            <a:off x="8369808" y="2331720"/>
+            <a:ext cx="1612087" cy="1874520"/>
+          </a:xfrm>
+          <a:prstGeom prst="rect">
+            <a:avLst/>
+          </a:prstGeom>
+        </p:spPr>
+      </p:pic>
+      <p:sp>
+        <p:nvSpPr>
+          <p:cNvPr id="18" name="Text 13"/>
+          <p:cNvSpPr txBox="1"/>
+          <p:nvPr/>
+        </p:nvSpPr>
+        <p:spPr>
+          <a:xfrm>
+            <a:off x="8369808" y="4343400"/>
+            <a:ext cx="2996184" cy="320040"/>
+          </a:xfrm>
+          <a:prstGeom prst="rect">
+            <a:avLst/>
+          </a:prstGeom>
+          <a:noFill/>
+          <a:ln/>
+        </p:spPr>
+        <p:txBody>
+          <a:bodyPr wrap="square" lIns="0" tIns="0" rIns="0" bIns="0" rtlCol="0" anchor="ctr"/>
+          <a:lstStyle/>
+          <a:p>
+            <a:pPr indent="0" marL="0">
+              <a:buNone/>
+            </a:pPr>
+            <a:r>
+              <a:rPr lang="en-US" sz="1500" b="1" dirty="0">
+                <a:solidFill>
+                  <a:srgbClr val="141A22"/>
+                </a:solidFill>
+                <a:latin typeface="Arial" pitchFamily="34" charset="0"/>
+                <a:ea typeface="Arial" pitchFamily="34" charset="-122"/>
+                <a:cs typeface="Arial" pitchFamily="34" charset="-120"/>
+              </a:rPr>
+              <a:t>Сергей Ковалёв</a:t>
+            </a:r>
+            <a:endParaRPr lang="en-US" sz="1500" dirty="0"/>
+          </a:p>
+        </p:txBody>
+      </p:sp>
+      <p:sp>
+        <p:nvSpPr>
+          <p:cNvPr id="19" name="Text 14"/>
+          <p:cNvSpPr txBox="1"/>
+          <p:nvPr/>
+        </p:nvSpPr>
+        <p:spPr>
+          <a:xfrm>
+            <a:off x="8369808" y="4663440"/>
+            <a:ext cx="2996184" cy="274320"/>
+          </a:xfrm>
+          <a:prstGeom prst="rect">
+            <a:avLst/>
+          </a:prstGeom>
+          <a:noFill/>
+          <a:ln/>
+        </p:spPr>
+        <p:txBody>
+          <a:bodyPr wrap="square" lIns="0" tIns="0" rIns="0" bIns="0" rtlCol="0" anchor="ctr"/>
+          <a:lstStyle/>
+          <a:p>
+            <a:pPr indent="0" marL="0">
+              <a:buNone/>
+            </a:pPr>
+            <a:r>
+              <a:rPr lang="en-US" sz="1150" dirty="0">
+                <a:solidFill>
+                  <a:srgbClr val="0460F5"/>
+                </a:solidFill>
+                <a:latin typeface="Arial" pitchFamily="34" charset="0"/>
+                <a:ea typeface="Arial" pitchFamily="34" charset="-122"/>
+                <a:cs typeface="Arial" pitchFamily="34" charset="-120"/>
+              </a:rPr>
+              <a:t>Управляющий партнёр</a:t>
+            </a:r>
+            <a:endParaRPr lang="en-US" sz="1150" dirty="0"/>
+          </a:p>
+        </p:txBody>
+      </p:sp>
+      <p:sp>
+        <p:nvSpPr>
+          <p:cNvPr id="20" name="Text 15"/>
+          <p:cNvSpPr txBox="1"/>
+          <p:nvPr/>
+        </p:nvSpPr>
+        <p:spPr>
+          <a:xfrm>
+            <a:off x="8369808" y="4983480"/>
+            <a:ext cx="2996184" cy="822960"/>
+          </a:xfrm>
+          <a:prstGeom prst="rect">
+            <a:avLst/>
+          </a:prstGeom>
+          <a:noFill/>
+          <a:ln/>
+        </p:spPr>
+        <p:txBody>
+          <a:bodyPr wrap="square" lIns="0" tIns="0" rIns="0" bIns="0" rtlCol="0" anchor="t"/>
+          <a:lstStyle/>
+          <a:p>
+            <a:pPr indent="0" marL="0">
+              <a:buNone/>
+            </a:pPr>
+            <a:r>
+              <a:rPr lang="en-US" sz="1050" dirty="0">
+                <a:solidFill>
+                  <a:srgbClr val="5C6067"/>
+                </a:solidFill>
+                <a:latin typeface="Arial" pitchFamily="34" charset="0"/>
+                <a:ea typeface="Arial" pitchFamily="34" charset="-122"/>
+                <a:cs typeface="Arial" pitchFamily="34" charset="-120"/>
+              </a:rPr>
+              <a:t>Предприниматель и стратег с обширным опытом в области искусственного интеллекта и Web3.</a:t>
+            </a:r>
+            <a:endParaRPr lang="en-US" sz="1050" dirty="0"/>
+          </a:p>
+        </p:txBody>
+      </p:sp>
+      <p:sp>
+        <p:nvSpPr>
+          <p:cNvPr id="21" name="Text 16"/>
+          <p:cNvSpPr txBox="1"/>
+          <p:nvPr/>
+        </p:nvSpPr>
+        <p:spPr>
+          <a:xfrm>
+            <a:off x="548640" y="6035040"/>
+            <a:ext cx="9445752" cy="457200"/>
+          </a:xfrm>
+          <a:prstGeom prst="rect">
+            <a:avLst/>
+          </a:prstGeom>
+          <a:noFill/>
+          <a:ln/>
+        </p:spPr>
+        <p:txBody>
+          <a:bodyPr wrap="square" lIns="0" tIns="0" rIns="0" bIns="0" rtlCol="0" anchor="t"/>
+          <a:lstStyle/>
+          <a:p>
+            <a:pPr indent="0" marL="0">
+              <a:buNone/>
+            </a:pPr>
+            <a:r>
+              <a:rPr lang="en-US" sz="1000" dirty="0">
+                <a:solidFill>
+                  <a:srgbClr val="8A8E94"/>
+                </a:solidFill>
+                <a:latin typeface="Arial" pitchFamily="34" charset="0"/>
+                <a:ea typeface="Arial" pitchFamily="34" charset="-122"/>
+                <a:cs typeface="Arial" pitchFamily="34" charset="-120"/>
+              </a:rPr>
+              <a:t>60+ человек в штате: исследователи, инженеры, продуктовые дизайнеры. Чего в команде пока нет и кого добавляем первым — инженер-партнёр с лицензией на целевом рынке.</a:t>
+            </a:r>
+            <a:endParaRPr lang="en-US" sz="1000" dirty="0"/>
+          </a:p>
+        </p:txBody>
+      </p:sp>
+    </p:spTree>
+  </p:cSld>
+  <p:clrMapOvr>
+    <a:masterClrMapping/>
+  </p:clrMapOvr>
+</p:sld>
+</file>
+
+<file path=ppt/slides/slide12.xml><?xml version="1.0" encoding="utf-8"?>
+<p:sld xmlns:a="http://schemas.openxmlformats.org/drawingml/2006/main" xmlns:r="http://schemas.openxmlformats.org/officeDocument/2006/relationships" xmlns:p="http://schemas.openxmlformats.org/presentationml/2006/main">
+  <p:cSld name="Slide 12">
     <p:bg>
       <p:bgPr>
         <a:solidFill>
@@ -3448,7 +3942,7 @@
                 <a:ea typeface="Courier New" pitchFamily="34" charset="-122"/>
                 <a:cs typeface="Courier New" pitchFamily="34" charset="-120"/>
               </a:rPr>
-              <a:t>11 / 13</a:t>
+              <a:t>12 / 14</a:t>
             </a:r>
             <a:endParaRPr lang="en-US" sz="900" dirty="0"/>
           </a:p>
@@ -4003,809 +4497,6 @@
               <a:t>Константин Морошин · Океан Тех · sales@okeantech.ru · okeantech.ru</a:t>
             </a:r>
             <a:endParaRPr lang="en-US" sz="1300" dirty="0"/>
-          </a:p>
-        </p:txBody>
-      </p:sp>
-    </p:spTree>
-  </p:cSld>
-  <p:clrMapOvr>
-    <a:masterClrMapping/>
-  </p:clrMapOvr>
-</p:sld>
-</file>
-
-<file path=ppt/slides/slide12.xml><?xml version="1.0" encoding="utf-8"?>
-<p:sld xmlns:a="http://schemas.openxmlformats.org/drawingml/2006/main" xmlns:r="http://schemas.openxmlformats.org/officeDocument/2006/relationships" xmlns:p="http://schemas.openxmlformats.org/presentationml/2006/main">
-  <p:cSld name="Slide 12">
-    <p:bg>
-      <p:bgPr>
-        <a:solidFill>
-          <a:srgbClr val="FFFFFF"/>
-        </a:solidFill>
-      </p:bgPr>
-    </p:bg>
-    <p:spTree>
-      <p:nvGrpSpPr>
-        <p:cNvPr id="1" name=""/>
-        <p:cNvGrpSpPr/>
-        <p:nvPr/>
-      </p:nvGrpSpPr>
-      <p:grpSpPr>
-        <a:xfrm>
-          <a:off x="0" y="0"/>
-          <a:ext cx="0" cy="0"/>
-          <a:chOff x="0" y="0"/>
-          <a:chExt cx="0" cy="0"/>
-        </a:xfrm>
-      </p:grpSpPr>
-      <p:sp>
-        <p:nvSpPr>
-          <p:cNvPr id="2" name="Text 0"/>
-          <p:cNvSpPr txBox="1"/>
-          <p:nvPr/>
-        </p:nvSpPr>
-        <p:spPr>
-          <a:xfrm>
-            <a:off x="9354312" y="320040"/>
-            <a:ext cx="2286000" cy="274320"/>
-          </a:xfrm>
-          <a:prstGeom prst="rect">
-            <a:avLst/>
-          </a:prstGeom>
-          <a:noFill/>
-          <a:ln/>
-        </p:spPr>
-        <p:txBody>
-          <a:bodyPr wrap="square" lIns="0" tIns="0" rIns="0" bIns="0" rtlCol="0" anchor="ctr"/>
-          <a:lstStyle/>
-          <a:p>
-            <a:pPr algn="r" indent="0" marL="0">
-              <a:buNone/>
-            </a:pPr>
-            <a:r>
-              <a:rPr lang="en-US" sz="900" spc="300" kern="0" dirty="0">
-                <a:solidFill>
-                  <a:srgbClr val="8A8E94"/>
-                </a:solidFill>
-                <a:latin typeface="Courier New" pitchFamily="34" charset="0"/>
-                <a:ea typeface="Courier New" pitchFamily="34" charset="-122"/>
-                <a:cs typeface="Courier New" pitchFamily="34" charset="-120"/>
-              </a:rPr>
-              <a:t>ОКЕАН ТЕХ</a:t>
-            </a:r>
-            <a:endParaRPr lang="en-US" sz="900" dirty="0"/>
-          </a:p>
-        </p:txBody>
-      </p:sp>
-      <p:sp>
-        <p:nvSpPr>
-          <p:cNvPr id="3" name="Text 1"/>
-          <p:cNvSpPr txBox="1"/>
-          <p:nvPr/>
-        </p:nvSpPr>
-        <p:spPr>
-          <a:xfrm>
-            <a:off x="548640" y="411480"/>
-            <a:ext cx="7315200" cy="274320"/>
-          </a:xfrm>
-          <a:prstGeom prst="rect">
-            <a:avLst/>
-          </a:prstGeom>
-          <a:noFill/>
-          <a:ln/>
-        </p:spPr>
-        <p:txBody>
-          <a:bodyPr wrap="square" lIns="0" tIns="0" rIns="0" bIns="0" rtlCol="0" anchor="ctr"/>
-          <a:lstStyle/>
-          <a:p>
-            <a:pPr indent="0" marL="0">
-              <a:buNone/>
-            </a:pPr>
-            <a:r>
-              <a:rPr lang="en-US" sz="950" spc="300" kern="0" dirty="0">
-                <a:solidFill>
-                  <a:srgbClr val="0460F5"/>
-                </a:solidFill>
-                <a:latin typeface="Courier New" pitchFamily="34" charset="0"/>
-                <a:ea typeface="Courier New" pitchFamily="34" charset="-122"/>
-                <a:cs typeface="Courier New" pitchFamily="34" charset="-120"/>
-              </a:rPr>
-              <a:t>ПРИЛОЖЕНИЕ · ЕСЛИ СПРОСЯТ</a:t>
-            </a:r>
-            <a:endParaRPr lang="en-US" sz="950" dirty="0"/>
-          </a:p>
-        </p:txBody>
-      </p:sp>
-      <p:sp>
-        <p:nvSpPr>
-          <p:cNvPr id="4" name="Text 2"/>
-          <p:cNvSpPr txBox="1"/>
-          <p:nvPr/>
-        </p:nvSpPr>
-        <p:spPr>
-          <a:xfrm>
-            <a:off x="548640" y="731520"/>
-            <a:ext cx="11091672" cy="1188720"/>
-          </a:xfrm>
-          <a:prstGeom prst="rect">
-            <a:avLst/>
-          </a:prstGeom>
-          <a:noFill/>
-          <a:ln/>
-        </p:spPr>
-        <p:txBody>
-          <a:bodyPr wrap="square" lIns="0" tIns="0" rIns="0" bIns="0" rtlCol="0" anchor="t"/>
-          <a:lstStyle/>
-          <a:p>
-            <a:pPr indent="0" marL="0">
-              <a:buNone/>
-            </a:pPr>
-            <a:r>
-              <a:rPr lang="en-US" sz="2800" b="1" dirty="0">
-                <a:solidFill>
-                  <a:srgbClr val="141A22"/>
-                </a:solidFill>
-                <a:latin typeface="Arial" pitchFamily="34" charset="0"/>
-                <a:ea typeface="Arial" pitchFamily="34" charset="-122"/>
-                <a:cs typeface="Arial" pitchFamily="34" charset="-120"/>
-              </a:rPr>
-              <a:t>Что ещё умеет та же компания — опционы, не обещания раунда</a:t>
-            </a:r>
-            <a:endParaRPr lang="en-US" sz="2800" dirty="0"/>
-          </a:p>
-        </p:txBody>
-      </p:sp>
-      <p:sp>
-        <p:nvSpPr>
-          <p:cNvPr id="5" name="Text 3"/>
-          <p:cNvSpPr txBox="1"/>
-          <p:nvPr/>
-        </p:nvSpPr>
-        <p:spPr>
-          <a:xfrm>
-            <a:off x="10268712" y="6400800"/>
-            <a:ext cx="1371600" cy="274320"/>
-          </a:xfrm>
-          <a:prstGeom prst="rect">
-            <a:avLst/>
-          </a:prstGeom>
-          <a:noFill/>
-          <a:ln/>
-        </p:spPr>
-        <p:txBody>
-          <a:bodyPr wrap="square" lIns="0" tIns="0" rIns="0" bIns="0" rtlCol="0" anchor="ctr"/>
-          <a:lstStyle/>
-          <a:p>
-            <a:pPr algn="r" indent="0" marL="0">
-              <a:buNone/>
-            </a:pPr>
-            <a:r>
-              <a:rPr lang="en-US" sz="900" dirty="0">
-                <a:solidFill>
-                  <a:srgbClr val="8A8E94"/>
-                </a:solidFill>
-                <a:latin typeface="Courier New" pitchFamily="34" charset="0"/>
-                <a:ea typeface="Courier New" pitchFamily="34" charset="-122"/>
-                <a:cs typeface="Courier New" pitchFamily="34" charset="-120"/>
-              </a:rPr>
-              <a:t>12 / 13</a:t>
-            </a:r>
-            <a:endParaRPr lang="en-US" sz="900" dirty="0"/>
-          </a:p>
-        </p:txBody>
-      </p:sp>
-      <p:sp>
-        <p:nvSpPr>
-          <p:cNvPr id="6" name="Shape 4"/>
-          <p:cNvSpPr/>
-          <p:nvPr/>
-        </p:nvSpPr>
-        <p:spPr>
-          <a:xfrm>
-            <a:off x="548640" y="2103120"/>
-            <a:ext cx="2601468" cy="2651760"/>
-          </a:xfrm>
-          <a:prstGeom prst="roundRect">
-            <a:avLst>
-              <a:gd name="adj" fmla="val 6327"/>
-            </a:avLst>
-          </a:prstGeom>
-          <a:solidFill>
-            <a:srgbClr val="F7F7F7"/>
-          </a:solidFill>
-          <a:ln w="12700">
-            <a:solidFill>
-              <a:srgbClr val="F7F7F7"/>
-            </a:solidFill>
-            <a:prstDash val="solid"/>
-          </a:ln>
-        </p:spPr>
-      </p:sp>
-      <p:sp>
-        <p:nvSpPr>
-          <p:cNvPr id="7" name="Text 5"/>
-          <p:cNvSpPr txBox="1"/>
-          <p:nvPr/>
-        </p:nvSpPr>
-        <p:spPr>
-          <a:xfrm>
-            <a:off x="822960" y="2331720"/>
-            <a:ext cx="2052828" cy="274320"/>
-          </a:xfrm>
-          <a:prstGeom prst="rect">
-            <a:avLst/>
-          </a:prstGeom>
-          <a:noFill/>
-          <a:ln/>
-        </p:spPr>
-        <p:txBody>
-          <a:bodyPr wrap="square" lIns="0" tIns="0" rIns="0" bIns="0" rtlCol="0" anchor="ctr"/>
-          <a:lstStyle/>
-          <a:p>
-            <a:pPr indent="0" marL="0">
-              <a:buNone/>
-            </a:pPr>
-            <a:r>
-              <a:rPr lang="en-US" sz="950" spc="200" kern="0" dirty="0">
-                <a:solidFill>
-                  <a:srgbClr val="0460F5"/>
-                </a:solidFill>
-                <a:latin typeface="Courier New" pitchFamily="34" charset="0"/>
-                <a:ea typeface="Courier New" pitchFamily="34" charset="-122"/>
-                <a:cs typeface="Courier New" pitchFamily="34" charset="-120"/>
-              </a:rPr>
-              <a:t>ОПЦИОН 1</a:t>
-            </a:r>
-            <a:endParaRPr lang="en-US" sz="950" dirty="0"/>
-          </a:p>
-        </p:txBody>
-      </p:sp>
-      <p:sp>
-        <p:nvSpPr>
-          <p:cNvPr id="8" name="Text 6"/>
-          <p:cNvSpPr txBox="1"/>
-          <p:nvPr/>
-        </p:nvSpPr>
-        <p:spPr>
-          <a:xfrm>
-            <a:off x="822960" y="2651760"/>
-            <a:ext cx="2052828" cy="411480"/>
-          </a:xfrm>
-          <a:prstGeom prst="rect">
-            <a:avLst/>
-          </a:prstGeom>
-          <a:noFill/>
-          <a:ln/>
-        </p:spPr>
-        <p:txBody>
-          <a:bodyPr wrap="square" lIns="0" tIns="0" rIns="0" bIns="0" rtlCol="0" anchor="ctr"/>
-          <a:lstStyle/>
-          <a:p>
-            <a:pPr indent="0" marL="0">
-              <a:buNone/>
-            </a:pPr>
-            <a:r>
-              <a:rPr lang="en-US" sz="1600" b="1" dirty="0">
-                <a:solidFill>
-                  <a:srgbClr val="141A22"/>
-                </a:solidFill>
-                <a:latin typeface="Arial" pitchFamily="34" charset="0"/>
-                <a:ea typeface="Arial" pitchFamily="34" charset="-122"/>
-                <a:cs typeface="Arial" pitchFamily="34" charset="-120"/>
-              </a:rPr>
-              <a:t>Роботы</a:t>
-            </a:r>
-            <a:endParaRPr lang="en-US" sz="1600" dirty="0"/>
-          </a:p>
-        </p:txBody>
-      </p:sp>
-      <p:sp>
-        <p:nvSpPr>
-          <p:cNvPr id="9" name="Text 7"/>
-          <p:cNvSpPr txBox="1"/>
-          <p:nvPr/>
-        </p:nvSpPr>
-        <p:spPr>
-          <a:xfrm>
-            <a:off x="822960" y="3108960"/>
-            <a:ext cx="2052828" cy="1463040"/>
-          </a:xfrm>
-          <a:prstGeom prst="rect">
-            <a:avLst/>
-          </a:prstGeom>
-          <a:noFill/>
-          <a:ln/>
-        </p:spPr>
-        <p:txBody>
-          <a:bodyPr wrap="square" lIns="0" tIns="0" rIns="0" bIns="0" rtlCol="0" anchor="t"/>
-          <a:lstStyle/>
-          <a:p>
-            <a:pPr indent="0" marL="0">
-              <a:buNone/>
-            </a:pPr>
-            <a:r>
-              <a:rPr lang="en-US" sz="1250" dirty="0">
-                <a:solidFill>
-                  <a:srgbClr val="5C6067"/>
-                </a:solidFill>
-                <a:latin typeface="Arial" pitchFamily="34" charset="0"/>
-                <a:ea typeface="Arial" pitchFamily="34" charset="-122"/>
-                <a:cs typeface="Arial" pitchFamily="34" charset="-120"/>
-              </a:rPr>
-              <a:t>Роботы-инспекторы на подстанциях, которые мы спроектировали. Китайская сетевая компания State Grid покупает 8500 роботов в год; поставщик — DEEP Robotics. Годы 3–5.</a:t>
-            </a:r>
-            <a:endParaRPr lang="en-US" sz="1250" dirty="0"/>
-          </a:p>
-        </p:txBody>
-      </p:sp>
-      <p:sp>
-        <p:nvSpPr>
-          <p:cNvPr id="10" name="Shape 8"/>
-          <p:cNvSpPr/>
-          <p:nvPr/>
-        </p:nvSpPr>
-        <p:spPr>
-          <a:xfrm>
-            <a:off x="3378708" y="2103120"/>
-            <a:ext cx="2601468" cy="2651760"/>
-          </a:xfrm>
-          <a:prstGeom prst="roundRect">
-            <a:avLst>
-              <a:gd name="adj" fmla="val 6327"/>
-            </a:avLst>
-          </a:prstGeom>
-          <a:solidFill>
-            <a:srgbClr val="F7F7F7"/>
-          </a:solidFill>
-          <a:ln w="12700">
-            <a:solidFill>
-              <a:srgbClr val="F7F7F7"/>
-            </a:solidFill>
-            <a:prstDash val="solid"/>
-          </a:ln>
-        </p:spPr>
-      </p:sp>
-      <p:sp>
-        <p:nvSpPr>
-          <p:cNvPr id="11" name="Text 9"/>
-          <p:cNvSpPr txBox="1"/>
-          <p:nvPr/>
-        </p:nvSpPr>
-        <p:spPr>
-          <a:xfrm>
-            <a:off x="3653028" y="2331720"/>
-            <a:ext cx="2052828" cy="274320"/>
-          </a:xfrm>
-          <a:prstGeom prst="rect">
-            <a:avLst/>
-          </a:prstGeom>
-          <a:noFill/>
-          <a:ln/>
-        </p:spPr>
-        <p:txBody>
-          <a:bodyPr wrap="square" lIns="0" tIns="0" rIns="0" bIns="0" rtlCol="0" anchor="ctr"/>
-          <a:lstStyle/>
-          <a:p>
-            <a:pPr indent="0" marL="0">
-              <a:buNone/>
-            </a:pPr>
-            <a:r>
-              <a:rPr lang="en-US" sz="950" spc="200" kern="0" dirty="0">
-                <a:solidFill>
-                  <a:srgbClr val="0460F5"/>
-                </a:solidFill>
-                <a:latin typeface="Courier New" pitchFamily="34" charset="0"/>
-                <a:ea typeface="Courier New" pitchFamily="34" charset="-122"/>
-                <a:cs typeface="Courier New" pitchFamily="34" charset="-120"/>
-              </a:rPr>
-              <a:t>ОПЦИОН 2</a:t>
-            </a:r>
-            <a:endParaRPr lang="en-US" sz="950" dirty="0"/>
-          </a:p>
-        </p:txBody>
-      </p:sp>
-      <p:sp>
-        <p:nvSpPr>
-          <p:cNvPr id="12" name="Text 10"/>
-          <p:cNvSpPr txBox="1"/>
-          <p:nvPr/>
-        </p:nvSpPr>
-        <p:spPr>
-          <a:xfrm>
-            <a:off x="3653028" y="2651760"/>
-            <a:ext cx="2052828" cy="411480"/>
-          </a:xfrm>
-          <a:prstGeom prst="rect">
-            <a:avLst/>
-          </a:prstGeom>
-          <a:noFill/>
-          <a:ln/>
-        </p:spPr>
-        <p:txBody>
-          <a:bodyPr wrap="square" lIns="0" tIns="0" rIns="0" bIns="0" rtlCol="0" anchor="ctr"/>
-          <a:lstStyle/>
-          <a:p>
-            <a:pPr indent="0" marL="0">
-              <a:buNone/>
-            </a:pPr>
-            <a:r>
-              <a:rPr lang="en-US" sz="1600" b="1" dirty="0">
-                <a:solidFill>
-                  <a:srgbClr val="141A22"/>
-                </a:solidFill>
-                <a:latin typeface="Arial" pitchFamily="34" charset="0"/>
-                <a:ea typeface="Arial" pitchFamily="34" charset="-122"/>
-                <a:cs typeface="Arial" pitchFamily="34" charset="-120"/>
-              </a:rPr>
-              <a:t>Стройка</a:t>
-            </a:r>
-            <a:endParaRPr lang="en-US" sz="1600" dirty="0"/>
-          </a:p>
-        </p:txBody>
-      </p:sp>
-      <p:sp>
-        <p:nvSpPr>
-          <p:cNvPr id="13" name="Text 11"/>
-          <p:cNvSpPr txBox="1"/>
-          <p:nvPr/>
-        </p:nvSpPr>
-        <p:spPr>
-          <a:xfrm>
-            <a:off x="3653028" y="3108960"/>
-            <a:ext cx="2052828" cy="1463040"/>
-          </a:xfrm>
-          <a:prstGeom prst="rect">
-            <a:avLst/>
-          </a:prstGeom>
-          <a:noFill/>
-          <a:ln/>
-        </p:spPr>
-        <p:txBody>
-          <a:bodyPr wrap="square" lIns="0" tIns="0" rIns="0" bIns="0" rtlCol="0" anchor="t"/>
-          <a:lstStyle/>
-          <a:p>
-            <a:pPr indent="0" marL="0">
-              <a:buNone/>
-            </a:pPr>
-            <a:r>
-              <a:rPr lang="en-US" sz="1250" dirty="0">
-                <a:solidFill>
-                  <a:srgbClr val="5C6067"/>
-                </a:solidFill>
-                <a:latin typeface="Arial" pitchFamily="34" charset="0"/>
-                <a:ea typeface="Arial" pitchFamily="34" charset="-122"/>
-                <a:cs typeface="Arial" pitchFamily="34" charset="-120"/>
-              </a:rPr>
-              <a:t>Инженер, который проектировал, сопровождает стройку и приёмку: ещё 15–35% к гонорару с того же проекта.</a:t>
-            </a:r>
-            <a:endParaRPr lang="en-US" sz="1250" dirty="0"/>
-          </a:p>
-        </p:txBody>
-      </p:sp>
-      <p:sp>
-        <p:nvSpPr>
-          <p:cNvPr id="14" name="Shape 12"/>
-          <p:cNvSpPr/>
-          <p:nvPr/>
-        </p:nvSpPr>
-        <p:spPr>
-          <a:xfrm>
-            <a:off x="6208776" y="2103120"/>
-            <a:ext cx="2601468" cy="2651760"/>
-          </a:xfrm>
-          <a:prstGeom prst="roundRect">
-            <a:avLst>
-              <a:gd name="adj" fmla="val 6327"/>
-            </a:avLst>
-          </a:prstGeom>
-          <a:solidFill>
-            <a:srgbClr val="F7F7F7"/>
-          </a:solidFill>
-          <a:ln w="12700">
-            <a:solidFill>
-              <a:srgbClr val="F7F7F7"/>
-            </a:solidFill>
-            <a:prstDash val="solid"/>
-          </a:ln>
-        </p:spPr>
-      </p:sp>
-      <p:sp>
-        <p:nvSpPr>
-          <p:cNvPr id="15" name="Text 13"/>
-          <p:cNvSpPr txBox="1"/>
-          <p:nvPr/>
-        </p:nvSpPr>
-        <p:spPr>
-          <a:xfrm>
-            <a:off x="6483096" y="2331720"/>
-            <a:ext cx="2052828" cy="274320"/>
-          </a:xfrm>
-          <a:prstGeom prst="rect">
-            <a:avLst/>
-          </a:prstGeom>
-          <a:noFill/>
-          <a:ln/>
-        </p:spPr>
-        <p:txBody>
-          <a:bodyPr wrap="square" lIns="0" tIns="0" rIns="0" bIns="0" rtlCol="0" anchor="ctr"/>
-          <a:lstStyle/>
-          <a:p>
-            <a:pPr indent="0" marL="0">
-              <a:buNone/>
-            </a:pPr>
-            <a:r>
-              <a:rPr lang="en-US" sz="950" spc="200" kern="0" dirty="0">
-                <a:solidFill>
-                  <a:srgbClr val="0460F5"/>
-                </a:solidFill>
-                <a:latin typeface="Courier New" pitchFamily="34" charset="0"/>
-                <a:ea typeface="Courier New" pitchFamily="34" charset="-122"/>
-                <a:cs typeface="Courier New" pitchFamily="34" charset="-120"/>
-              </a:rPr>
-              <a:t>ОПЦИОН 3</a:t>
-            </a:r>
-            <a:endParaRPr lang="en-US" sz="950" dirty="0"/>
-          </a:p>
-        </p:txBody>
-      </p:sp>
-      <p:sp>
-        <p:nvSpPr>
-          <p:cNvPr id="16" name="Text 14"/>
-          <p:cNvSpPr txBox="1"/>
-          <p:nvPr/>
-        </p:nvSpPr>
-        <p:spPr>
-          <a:xfrm>
-            <a:off x="6483096" y="2651760"/>
-            <a:ext cx="2052828" cy="411480"/>
-          </a:xfrm>
-          <a:prstGeom prst="rect">
-            <a:avLst/>
-          </a:prstGeom>
-          <a:noFill/>
-          <a:ln/>
-        </p:spPr>
-        <p:txBody>
-          <a:bodyPr wrap="square" lIns="0" tIns="0" rIns="0" bIns="0" rtlCol="0" anchor="ctr"/>
-          <a:lstStyle/>
-          <a:p>
-            <a:pPr indent="0" marL="0">
-              <a:buNone/>
-            </a:pPr>
-            <a:r>
-              <a:rPr lang="en-US" sz="1600" b="1" dirty="0">
-                <a:solidFill>
-                  <a:srgbClr val="141A22"/>
-                </a:solidFill>
-                <a:latin typeface="Arial" pitchFamily="34" charset="0"/>
-                <a:ea typeface="Arial" pitchFamily="34" charset="-122"/>
-                <a:cs typeface="Arial" pitchFamily="34" charset="-120"/>
-              </a:rPr>
-              <a:t>Обучение</a:t>
-            </a:r>
-            <a:endParaRPr lang="en-US" sz="1600" dirty="0"/>
-          </a:p>
-        </p:txBody>
-      </p:sp>
-      <p:sp>
-        <p:nvSpPr>
-          <p:cNvPr id="17" name="Text 15"/>
-          <p:cNvSpPr txBox="1"/>
-          <p:nvPr/>
-        </p:nvSpPr>
-        <p:spPr>
-          <a:xfrm>
-            <a:off x="6483096" y="3108960"/>
-            <a:ext cx="2052828" cy="1463040"/>
-          </a:xfrm>
-          <a:prstGeom prst="rect">
-            <a:avLst/>
-          </a:prstGeom>
-          <a:noFill/>
-          <a:ln/>
-        </p:spPr>
-        <p:txBody>
-          <a:bodyPr wrap="square" lIns="0" tIns="0" rIns="0" bIns="0" rtlCol="0" anchor="t"/>
-          <a:lstStyle/>
-          <a:p>
-            <a:pPr indent="0" marL="0">
-              <a:buNone/>
-            </a:pPr>
-            <a:r>
-              <a:rPr lang="en-US" sz="1250" dirty="0">
-                <a:solidFill>
-                  <a:srgbClr val="5C6067"/>
-                </a:solidFill>
-                <a:latin typeface="Arial" pitchFamily="34" charset="0"/>
-                <a:ea typeface="Arial" pitchFamily="34" charset="-122"/>
-                <a:cs typeface="Arial" pitchFamily="34" charset="-120"/>
-              </a:rPr>
-              <a:t>Обучение инженеров под квоты: Саудовская Аравия требует 30% граждан на инженерных позициях. Наш ИИ быстро доводит выпускника до рабочего инженера.</a:t>
-            </a:r>
-            <a:endParaRPr lang="en-US" sz="1250" dirty="0"/>
-          </a:p>
-        </p:txBody>
-      </p:sp>
-      <p:sp>
-        <p:nvSpPr>
-          <p:cNvPr id="18" name="Shape 16"/>
-          <p:cNvSpPr/>
-          <p:nvPr/>
-        </p:nvSpPr>
-        <p:spPr>
-          <a:xfrm>
-            <a:off x="9038844" y="2103120"/>
-            <a:ext cx="2601468" cy="2651760"/>
-          </a:xfrm>
-          <a:prstGeom prst="roundRect">
-            <a:avLst>
-              <a:gd name="adj" fmla="val 6327"/>
-            </a:avLst>
-          </a:prstGeom>
-          <a:solidFill>
-            <a:srgbClr val="F7F7F7"/>
-          </a:solidFill>
-          <a:ln w="12700">
-            <a:solidFill>
-              <a:srgbClr val="F7F7F7"/>
-            </a:solidFill>
-            <a:prstDash val="solid"/>
-          </a:ln>
-        </p:spPr>
-      </p:sp>
-      <p:sp>
-        <p:nvSpPr>
-          <p:cNvPr id="19" name="Text 17"/>
-          <p:cNvSpPr txBox="1"/>
-          <p:nvPr/>
-        </p:nvSpPr>
-        <p:spPr>
-          <a:xfrm>
-            <a:off x="9313164" y="2331720"/>
-            <a:ext cx="2052828" cy="274320"/>
-          </a:xfrm>
-          <a:prstGeom prst="rect">
-            <a:avLst/>
-          </a:prstGeom>
-          <a:noFill/>
-          <a:ln/>
-        </p:spPr>
-        <p:txBody>
-          <a:bodyPr wrap="square" lIns="0" tIns="0" rIns="0" bIns="0" rtlCol="0" anchor="ctr"/>
-          <a:lstStyle/>
-          <a:p>
-            <a:pPr indent="0" marL="0">
-              <a:buNone/>
-            </a:pPr>
-            <a:r>
-              <a:rPr lang="en-US" sz="950" spc="200" kern="0" dirty="0">
-                <a:solidFill>
-                  <a:srgbClr val="0460F5"/>
-                </a:solidFill>
-                <a:latin typeface="Courier New" pitchFamily="34" charset="0"/>
-                <a:ea typeface="Courier New" pitchFamily="34" charset="-122"/>
-                <a:cs typeface="Courier New" pitchFamily="34" charset="-120"/>
-              </a:rPr>
-              <a:t>ОПЦИОН 4</a:t>
-            </a:r>
-            <a:endParaRPr lang="en-US" sz="950" dirty="0"/>
-          </a:p>
-        </p:txBody>
-      </p:sp>
-      <p:sp>
-        <p:nvSpPr>
-          <p:cNvPr id="20" name="Text 18"/>
-          <p:cNvSpPr txBox="1"/>
-          <p:nvPr/>
-        </p:nvSpPr>
-        <p:spPr>
-          <a:xfrm>
-            <a:off x="9313164" y="2651760"/>
-            <a:ext cx="2052828" cy="411480"/>
-          </a:xfrm>
-          <a:prstGeom prst="rect">
-            <a:avLst/>
-          </a:prstGeom>
-          <a:noFill/>
-          <a:ln/>
-        </p:spPr>
-        <p:txBody>
-          <a:bodyPr wrap="square" lIns="0" tIns="0" rIns="0" bIns="0" rtlCol="0" anchor="ctr"/>
-          <a:lstStyle/>
-          <a:p>
-            <a:pPr indent="0" marL="0">
-              <a:buNone/>
-            </a:pPr>
-            <a:r>
-              <a:rPr lang="en-US" sz="1600" b="1" dirty="0">
-                <a:solidFill>
-                  <a:srgbClr val="141A22"/>
-                </a:solidFill>
-                <a:latin typeface="Arial" pitchFamily="34" charset="0"/>
-                <a:ea typeface="Arial" pitchFamily="34" charset="-122"/>
-                <a:cs typeface="Arial" pitchFamily="34" charset="-120"/>
-              </a:rPr>
-              <a:t>Данные</a:t>
-            </a:r>
-            <a:endParaRPr lang="en-US" sz="1600" dirty="0"/>
-          </a:p>
-        </p:txBody>
-      </p:sp>
-      <p:sp>
-        <p:nvSpPr>
-          <p:cNvPr id="21" name="Text 19"/>
-          <p:cNvSpPr txBox="1"/>
-          <p:nvPr/>
-        </p:nvSpPr>
-        <p:spPr>
-          <a:xfrm>
-            <a:off x="9313164" y="3108960"/>
-            <a:ext cx="2052828" cy="1463040"/>
-          </a:xfrm>
-          <a:prstGeom prst="rect">
-            <a:avLst/>
-          </a:prstGeom>
-          <a:noFill/>
-          <a:ln/>
-        </p:spPr>
-        <p:txBody>
-          <a:bodyPr wrap="square" lIns="0" tIns="0" rIns="0" bIns="0" rtlCol="0" anchor="t"/>
-          <a:lstStyle/>
-          <a:p>
-            <a:pPr indent="0" marL="0">
-              <a:buNone/>
-            </a:pPr>
-            <a:r>
-              <a:rPr lang="en-US" sz="1250" dirty="0">
-                <a:solidFill>
-                  <a:srgbClr val="5C6067"/>
-                </a:solidFill>
-                <a:latin typeface="Arial" pitchFamily="34" charset="0"/>
-                <a:ea typeface="Arial" pitchFamily="34" charset="-122"/>
-                <a:cs typeface="Arial" pitchFamily="34" charset="-120"/>
-              </a:rPr>
-              <a:t>База данных о подключениях: сотни проектов в год — данные, которых нет ни у кого. Enverus купил Pearl Street именно за такие данные.</a:t>
-            </a:r>
-            <a:endParaRPr lang="en-US" sz="1250" dirty="0"/>
-          </a:p>
-        </p:txBody>
-      </p:sp>
-      <p:sp>
-        <p:nvSpPr>
-          <p:cNvPr id="22" name="Text 20"/>
-          <p:cNvSpPr txBox="1"/>
-          <p:nvPr/>
-        </p:nvSpPr>
-        <p:spPr>
-          <a:xfrm>
-            <a:off x="548640" y="5029200"/>
-            <a:ext cx="9445752" cy="457200"/>
-          </a:xfrm>
-          <a:prstGeom prst="rect">
-            <a:avLst/>
-          </a:prstGeom>
-          <a:noFill/>
-          <a:ln/>
-        </p:spPr>
-        <p:txBody>
-          <a:bodyPr wrap="square" lIns="0" tIns="0" rIns="0" bIns="0" rtlCol="0" anchor="t"/>
-          <a:lstStyle/>
-          <a:p>
-            <a:pPr indent="0" marL="0">
-              <a:buNone/>
-            </a:pPr>
-            <a:r>
-              <a:rPr lang="en-US" sz="1000" dirty="0">
-                <a:solidFill>
-                  <a:srgbClr val="8A8E94"/>
-                </a:solidFill>
-                <a:latin typeface="Arial" pitchFamily="34" charset="0"/>
-                <a:ea typeface="Arial" pitchFamily="34" charset="-122"/>
-                <a:cs typeface="Arial" pitchFamily="34" charset="-120"/>
-              </a:rPr>
-              <a:t>В выручку раунда заложено только проектирование. Остальное вводим по одному и только после измерения.</a:t>
-            </a:r>
-            <a:endParaRPr lang="en-US" sz="1000" dirty="0"/>
           </a:p>
         </p:txBody>
       </p:sp>
@@ -4913,7 +4604,7 @@
                 <a:ea typeface="Courier New" pitchFamily="34" charset="-122"/>
                 <a:cs typeface="Courier New" pitchFamily="34" charset="-120"/>
               </a:rPr>
-              <a:t>ПРИЛОЖЕНИЕ · ИСТОЧНИКИ</a:t>
+              <a:t>ПРИЛОЖЕНИЕ · ЕСЛИ СПРОСЯТ</a:t>
             </a:r>
             <a:endParaRPr lang="en-US" sz="950" dirty="0"/>
           </a:p>
@@ -4952,7 +4643,7 @@
                 <a:ea typeface="Arial" pitchFamily="34" charset="-122"/>
                 <a:cs typeface="Arial" pitchFamily="34" charset="-120"/>
               </a:rPr>
-              <a:t>Откуда цифры</a:t>
+              <a:t>Что ещё умеет та же компания — опционы, не обещания раунда</a:t>
             </a:r>
             <a:endParaRPr lang="en-US" sz="2800" dirty="0"/>
           </a:p>
@@ -4991,7 +4682,810 @@
                 <a:ea typeface="Courier New" pitchFamily="34" charset="-122"/>
                 <a:cs typeface="Courier New" pitchFamily="34" charset="-120"/>
               </a:rPr>
-              <a:t>13 / 13</a:t>
+              <a:t>13 / 14</a:t>
+            </a:r>
+            <a:endParaRPr lang="en-US" sz="900" dirty="0"/>
+          </a:p>
+        </p:txBody>
+      </p:sp>
+      <p:sp>
+        <p:nvSpPr>
+          <p:cNvPr id="6" name="Shape 4"/>
+          <p:cNvSpPr/>
+          <p:nvPr/>
+        </p:nvSpPr>
+        <p:spPr>
+          <a:xfrm>
+            <a:off x="548640" y="2103120"/>
+            <a:ext cx="2601468" cy="2651760"/>
+          </a:xfrm>
+          <a:prstGeom prst="roundRect">
+            <a:avLst>
+              <a:gd name="adj" fmla="val 6327"/>
+            </a:avLst>
+          </a:prstGeom>
+          <a:solidFill>
+            <a:srgbClr val="F7F7F7"/>
+          </a:solidFill>
+          <a:ln w="12700">
+            <a:solidFill>
+              <a:srgbClr val="F7F7F7"/>
+            </a:solidFill>
+            <a:prstDash val="solid"/>
+          </a:ln>
+        </p:spPr>
+      </p:sp>
+      <p:sp>
+        <p:nvSpPr>
+          <p:cNvPr id="7" name="Text 5"/>
+          <p:cNvSpPr txBox="1"/>
+          <p:nvPr/>
+        </p:nvSpPr>
+        <p:spPr>
+          <a:xfrm>
+            <a:off x="822960" y="2331720"/>
+            <a:ext cx="2052828" cy="274320"/>
+          </a:xfrm>
+          <a:prstGeom prst="rect">
+            <a:avLst/>
+          </a:prstGeom>
+          <a:noFill/>
+          <a:ln/>
+        </p:spPr>
+        <p:txBody>
+          <a:bodyPr wrap="square" lIns="0" tIns="0" rIns="0" bIns="0" rtlCol="0" anchor="ctr"/>
+          <a:lstStyle/>
+          <a:p>
+            <a:pPr indent="0" marL="0">
+              <a:buNone/>
+            </a:pPr>
+            <a:r>
+              <a:rPr lang="en-US" sz="950" spc="200" kern="0" dirty="0">
+                <a:solidFill>
+                  <a:srgbClr val="0460F5"/>
+                </a:solidFill>
+                <a:latin typeface="Courier New" pitchFamily="34" charset="0"/>
+                <a:ea typeface="Courier New" pitchFamily="34" charset="-122"/>
+                <a:cs typeface="Courier New" pitchFamily="34" charset="-120"/>
+              </a:rPr>
+              <a:t>ОПЦИОН 1</a:t>
+            </a:r>
+            <a:endParaRPr lang="en-US" sz="950" dirty="0"/>
+          </a:p>
+        </p:txBody>
+      </p:sp>
+      <p:sp>
+        <p:nvSpPr>
+          <p:cNvPr id="8" name="Text 6"/>
+          <p:cNvSpPr txBox="1"/>
+          <p:nvPr/>
+        </p:nvSpPr>
+        <p:spPr>
+          <a:xfrm>
+            <a:off x="822960" y="2651760"/>
+            <a:ext cx="2052828" cy="411480"/>
+          </a:xfrm>
+          <a:prstGeom prst="rect">
+            <a:avLst/>
+          </a:prstGeom>
+          <a:noFill/>
+          <a:ln/>
+        </p:spPr>
+        <p:txBody>
+          <a:bodyPr wrap="square" lIns="0" tIns="0" rIns="0" bIns="0" rtlCol="0" anchor="ctr"/>
+          <a:lstStyle/>
+          <a:p>
+            <a:pPr indent="0" marL="0">
+              <a:buNone/>
+            </a:pPr>
+            <a:r>
+              <a:rPr lang="en-US" sz="1600" b="1" dirty="0">
+                <a:solidFill>
+                  <a:srgbClr val="141A22"/>
+                </a:solidFill>
+                <a:latin typeface="Arial" pitchFamily="34" charset="0"/>
+                <a:ea typeface="Arial" pitchFamily="34" charset="-122"/>
+                <a:cs typeface="Arial" pitchFamily="34" charset="-120"/>
+              </a:rPr>
+              <a:t>Роботы</a:t>
+            </a:r>
+            <a:endParaRPr lang="en-US" sz="1600" dirty="0"/>
+          </a:p>
+        </p:txBody>
+      </p:sp>
+      <p:sp>
+        <p:nvSpPr>
+          <p:cNvPr id="9" name="Text 7"/>
+          <p:cNvSpPr txBox="1"/>
+          <p:nvPr/>
+        </p:nvSpPr>
+        <p:spPr>
+          <a:xfrm>
+            <a:off x="822960" y="3108960"/>
+            <a:ext cx="2052828" cy="1463040"/>
+          </a:xfrm>
+          <a:prstGeom prst="rect">
+            <a:avLst/>
+          </a:prstGeom>
+          <a:noFill/>
+          <a:ln/>
+        </p:spPr>
+        <p:txBody>
+          <a:bodyPr wrap="square" lIns="0" tIns="0" rIns="0" bIns="0" rtlCol="0" anchor="t"/>
+          <a:lstStyle/>
+          <a:p>
+            <a:pPr indent="0" marL="0">
+              <a:buNone/>
+            </a:pPr>
+            <a:r>
+              <a:rPr lang="en-US" sz="1250" dirty="0">
+                <a:solidFill>
+                  <a:srgbClr val="5C6067"/>
+                </a:solidFill>
+                <a:latin typeface="Arial" pitchFamily="34" charset="0"/>
+                <a:ea typeface="Arial" pitchFamily="34" charset="-122"/>
+                <a:cs typeface="Arial" pitchFamily="34" charset="-120"/>
+              </a:rPr>
+              <a:t>Роботы-инспекторы на подстанциях, которые мы спроектировали. Китайская сетевая компания State Grid покупает 8500 роботов в год; поставщик — DEEP Robotics. Годы 3–5.</a:t>
+            </a:r>
+            <a:endParaRPr lang="en-US" sz="1250" dirty="0"/>
+          </a:p>
+        </p:txBody>
+      </p:sp>
+      <p:sp>
+        <p:nvSpPr>
+          <p:cNvPr id="10" name="Shape 8"/>
+          <p:cNvSpPr/>
+          <p:nvPr/>
+        </p:nvSpPr>
+        <p:spPr>
+          <a:xfrm>
+            <a:off x="3378708" y="2103120"/>
+            <a:ext cx="2601468" cy="2651760"/>
+          </a:xfrm>
+          <a:prstGeom prst="roundRect">
+            <a:avLst>
+              <a:gd name="adj" fmla="val 6327"/>
+            </a:avLst>
+          </a:prstGeom>
+          <a:solidFill>
+            <a:srgbClr val="F7F7F7"/>
+          </a:solidFill>
+          <a:ln w="12700">
+            <a:solidFill>
+              <a:srgbClr val="F7F7F7"/>
+            </a:solidFill>
+            <a:prstDash val="solid"/>
+          </a:ln>
+        </p:spPr>
+      </p:sp>
+      <p:sp>
+        <p:nvSpPr>
+          <p:cNvPr id="11" name="Text 9"/>
+          <p:cNvSpPr txBox="1"/>
+          <p:nvPr/>
+        </p:nvSpPr>
+        <p:spPr>
+          <a:xfrm>
+            <a:off x="3653028" y="2331720"/>
+            <a:ext cx="2052828" cy="274320"/>
+          </a:xfrm>
+          <a:prstGeom prst="rect">
+            <a:avLst/>
+          </a:prstGeom>
+          <a:noFill/>
+          <a:ln/>
+        </p:spPr>
+        <p:txBody>
+          <a:bodyPr wrap="square" lIns="0" tIns="0" rIns="0" bIns="0" rtlCol="0" anchor="ctr"/>
+          <a:lstStyle/>
+          <a:p>
+            <a:pPr indent="0" marL="0">
+              <a:buNone/>
+            </a:pPr>
+            <a:r>
+              <a:rPr lang="en-US" sz="950" spc="200" kern="0" dirty="0">
+                <a:solidFill>
+                  <a:srgbClr val="0460F5"/>
+                </a:solidFill>
+                <a:latin typeface="Courier New" pitchFamily="34" charset="0"/>
+                <a:ea typeface="Courier New" pitchFamily="34" charset="-122"/>
+                <a:cs typeface="Courier New" pitchFamily="34" charset="-120"/>
+              </a:rPr>
+              <a:t>ОПЦИОН 2</a:t>
+            </a:r>
+            <a:endParaRPr lang="en-US" sz="950" dirty="0"/>
+          </a:p>
+        </p:txBody>
+      </p:sp>
+      <p:sp>
+        <p:nvSpPr>
+          <p:cNvPr id="12" name="Text 10"/>
+          <p:cNvSpPr txBox="1"/>
+          <p:nvPr/>
+        </p:nvSpPr>
+        <p:spPr>
+          <a:xfrm>
+            <a:off x="3653028" y="2651760"/>
+            <a:ext cx="2052828" cy="411480"/>
+          </a:xfrm>
+          <a:prstGeom prst="rect">
+            <a:avLst/>
+          </a:prstGeom>
+          <a:noFill/>
+          <a:ln/>
+        </p:spPr>
+        <p:txBody>
+          <a:bodyPr wrap="square" lIns="0" tIns="0" rIns="0" bIns="0" rtlCol="0" anchor="ctr"/>
+          <a:lstStyle/>
+          <a:p>
+            <a:pPr indent="0" marL="0">
+              <a:buNone/>
+            </a:pPr>
+            <a:r>
+              <a:rPr lang="en-US" sz="1600" b="1" dirty="0">
+                <a:solidFill>
+                  <a:srgbClr val="141A22"/>
+                </a:solidFill>
+                <a:latin typeface="Arial" pitchFamily="34" charset="0"/>
+                <a:ea typeface="Arial" pitchFamily="34" charset="-122"/>
+                <a:cs typeface="Arial" pitchFamily="34" charset="-120"/>
+              </a:rPr>
+              <a:t>Стройка</a:t>
+            </a:r>
+            <a:endParaRPr lang="en-US" sz="1600" dirty="0"/>
+          </a:p>
+        </p:txBody>
+      </p:sp>
+      <p:sp>
+        <p:nvSpPr>
+          <p:cNvPr id="13" name="Text 11"/>
+          <p:cNvSpPr txBox="1"/>
+          <p:nvPr/>
+        </p:nvSpPr>
+        <p:spPr>
+          <a:xfrm>
+            <a:off x="3653028" y="3108960"/>
+            <a:ext cx="2052828" cy="1463040"/>
+          </a:xfrm>
+          <a:prstGeom prst="rect">
+            <a:avLst/>
+          </a:prstGeom>
+          <a:noFill/>
+          <a:ln/>
+        </p:spPr>
+        <p:txBody>
+          <a:bodyPr wrap="square" lIns="0" tIns="0" rIns="0" bIns="0" rtlCol="0" anchor="t"/>
+          <a:lstStyle/>
+          <a:p>
+            <a:pPr indent="0" marL="0">
+              <a:buNone/>
+            </a:pPr>
+            <a:r>
+              <a:rPr lang="en-US" sz="1250" dirty="0">
+                <a:solidFill>
+                  <a:srgbClr val="5C6067"/>
+                </a:solidFill>
+                <a:latin typeface="Arial" pitchFamily="34" charset="0"/>
+                <a:ea typeface="Arial" pitchFamily="34" charset="-122"/>
+                <a:cs typeface="Arial" pitchFamily="34" charset="-120"/>
+              </a:rPr>
+              <a:t>Инженер, который проектировал, сопровождает стройку и приёмку: ещё 15–35% к гонорару с того же проекта.</a:t>
+            </a:r>
+            <a:endParaRPr lang="en-US" sz="1250" dirty="0"/>
+          </a:p>
+        </p:txBody>
+      </p:sp>
+      <p:sp>
+        <p:nvSpPr>
+          <p:cNvPr id="14" name="Shape 12"/>
+          <p:cNvSpPr/>
+          <p:nvPr/>
+        </p:nvSpPr>
+        <p:spPr>
+          <a:xfrm>
+            <a:off x="6208776" y="2103120"/>
+            <a:ext cx="2601468" cy="2651760"/>
+          </a:xfrm>
+          <a:prstGeom prst="roundRect">
+            <a:avLst>
+              <a:gd name="adj" fmla="val 6327"/>
+            </a:avLst>
+          </a:prstGeom>
+          <a:solidFill>
+            <a:srgbClr val="F7F7F7"/>
+          </a:solidFill>
+          <a:ln w="12700">
+            <a:solidFill>
+              <a:srgbClr val="F7F7F7"/>
+            </a:solidFill>
+            <a:prstDash val="solid"/>
+          </a:ln>
+        </p:spPr>
+      </p:sp>
+      <p:sp>
+        <p:nvSpPr>
+          <p:cNvPr id="15" name="Text 13"/>
+          <p:cNvSpPr txBox="1"/>
+          <p:nvPr/>
+        </p:nvSpPr>
+        <p:spPr>
+          <a:xfrm>
+            <a:off x="6483096" y="2331720"/>
+            <a:ext cx="2052828" cy="274320"/>
+          </a:xfrm>
+          <a:prstGeom prst="rect">
+            <a:avLst/>
+          </a:prstGeom>
+          <a:noFill/>
+          <a:ln/>
+        </p:spPr>
+        <p:txBody>
+          <a:bodyPr wrap="square" lIns="0" tIns="0" rIns="0" bIns="0" rtlCol="0" anchor="ctr"/>
+          <a:lstStyle/>
+          <a:p>
+            <a:pPr indent="0" marL="0">
+              <a:buNone/>
+            </a:pPr>
+            <a:r>
+              <a:rPr lang="en-US" sz="950" spc="200" kern="0" dirty="0">
+                <a:solidFill>
+                  <a:srgbClr val="0460F5"/>
+                </a:solidFill>
+                <a:latin typeface="Courier New" pitchFamily="34" charset="0"/>
+                <a:ea typeface="Courier New" pitchFamily="34" charset="-122"/>
+                <a:cs typeface="Courier New" pitchFamily="34" charset="-120"/>
+              </a:rPr>
+              <a:t>ОПЦИОН 3</a:t>
+            </a:r>
+            <a:endParaRPr lang="en-US" sz="950" dirty="0"/>
+          </a:p>
+        </p:txBody>
+      </p:sp>
+      <p:sp>
+        <p:nvSpPr>
+          <p:cNvPr id="16" name="Text 14"/>
+          <p:cNvSpPr txBox="1"/>
+          <p:nvPr/>
+        </p:nvSpPr>
+        <p:spPr>
+          <a:xfrm>
+            <a:off x="6483096" y="2651760"/>
+            <a:ext cx="2052828" cy="411480"/>
+          </a:xfrm>
+          <a:prstGeom prst="rect">
+            <a:avLst/>
+          </a:prstGeom>
+          <a:noFill/>
+          <a:ln/>
+        </p:spPr>
+        <p:txBody>
+          <a:bodyPr wrap="square" lIns="0" tIns="0" rIns="0" bIns="0" rtlCol="0" anchor="ctr"/>
+          <a:lstStyle/>
+          <a:p>
+            <a:pPr indent="0" marL="0">
+              <a:buNone/>
+            </a:pPr>
+            <a:r>
+              <a:rPr lang="en-US" sz="1600" b="1" dirty="0">
+                <a:solidFill>
+                  <a:srgbClr val="141A22"/>
+                </a:solidFill>
+                <a:latin typeface="Arial" pitchFamily="34" charset="0"/>
+                <a:ea typeface="Arial" pitchFamily="34" charset="-122"/>
+                <a:cs typeface="Arial" pitchFamily="34" charset="-120"/>
+              </a:rPr>
+              <a:t>Обучение</a:t>
+            </a:r>
+            <a:endParaRPr lang="en-US" sz="1600" dirty="0"/>
+          </a:p>
+        </p:txBody>
+      </p:sp>
+      <p:sp>
+        <p:nvSpPr>
+          <p:cNvPr id="17" name="Text 15"/>
+          <p:cNvSpPr txBox="1"/>
+          <p:nvPr/>
+        </p:nvSpPr>
+        <p:spPr>
+          <a:xfrm>
+            <a:off x="6483096" y="3108960"/>
+            <a:ext cx="2052828" cy="1463040"/>
+          </a:xfrm>
+          <a:prstGeom prst="rect">
+            <a:avLst/>
+          </a:prstGeom>
+          <a:noFill/>
+          <a:ln/>
+        </p:spPr>
+        <p:txBody>
+          <a:bodyPr wrap="square" lIns="0" tIns="0" rIns="0" bIns="0" rtlCol="0" anchor="t"/>
+          <a:lstStyle/>
+          <a:p>
+            <a:pPr indent="0" marL="0">
+              <a:buNone/>
+            </a:pPr>
+            <a:r>
+              <a:rPr lang="en-US" sz="1250" dirty="0">
+                <a:solidFill>
+                  <a:srgbClr val="5C6067"/>
+                </a:solidFill>
+                <a:latin typeface="Arial" pitchFamily="34" charset="0"/>
+                <a:ea typeface="Arial" pitchFamily="34" charset="-122"/>
+                <a:cs typeface="Arial" pitchFamily="34" charset="-120"/>
+              </a:rPr>
+              <a:t>Обучение инженеров под квоты: Саудовская Аравия требует 30% граждан на инженерных позициях. Наш ИИ быстро доводит выпускника до рабочего инженера.</a:t>
+            </a:r>
+            <a:endParaRPr lang="en-US" sz="1250" dirty="0"/>
+          </a:p>
+        </p:txBody>
+      </p:sp>
+      <p:sp>
+        <p:nvSpPr>
+          <p:cNvPr id="18" name="Shape 16"/>
+          <p:cNvSpPr/>
+          <p:nvPr/>
+        </p:nvSpPr>
+        <p:spPr>
+          <a:xfrm>
+            <a:off x="9038844" y="2103120"/>
+            <a:ext cx="2601468" cy="2651760"/>
+          </a:xfrm>
+          <a:prstGeom prst="roundRect">
+            <a:avLst>
+              <a:gd name="adj" fmla="val 6327"/>
+            </a:avLst>
+          </a:prstGeom>
+          <a:solidFill>
+            <a:srgbClr val="F7F7F7"/>
+          </a:solidFill>
+          <a:ln w="12700">
+            <a:solidFill>
+              <a:srgbClr val="F7F7F7"/>
+            </a:solidFill>
+            <a:prstDash val="solid"/>
+          </a:ln>
+        </p:spPr>
+      </p:sp>
+      <p:sp>
+        <p:nvSpPr>
+          <p:cNvPr id="19" name="Text 17"/>
+          <p:cNvSpPr txBox="1"/>
+          <p:nvPr/>
+        </p:nvSpPr>
+        <p:spPr>
+          <a:xfrm>
+            <a:off x="9313164" y="2331720"/>
+            <a:ext cx="2052828" cy="274320"/>
+          </a:xfrm>
+          <a:prstGeom prst="rect">
+            <a:avLst/>
+          </a:prstGeom>
+          <a:noFill/>
+          <a:ln/>
+        </p:spPr>
+        <p:txBody>
+          <a:bodyPr wrap="square" lIns="0" tIns="0" rIns="0" bIns="0" rtlCol="0" anchor="ctr"/>
+          <a:lstStyle/>
+          <a:p>
+            <a:pPr indent="0" marL="0">
+              <a:buNone/>
+            </a:pPr>
+            <a:r>
+              <a:rPr lang="en-US" sz="950" spc="200" kern="0" dirty="0">
+                <a:solidFill>
+                  <a:srgbClr val="0460F5"/>
+                </a:solidFill>
+                <a:latin typeface="Courier New" pitchFamily="34" charset="0"/>
+                <a:ea typeface="Courier New" pitchFamily="34" charset="-122"/>
+                <a:cs typeface="Courier New" pitchFamily="34" charset="-120"/>
+              </a:rPr>
+              <a:t>ОПЦИОН 4</a:t>
+            </a:r>
+            <a:endParaRPr lang="en-US" sz="950" dirty="0"/>
+          </a:p>
+        </p:txBody>
+      </p:sp>
+      <p:sp>
+        <p:nvSpPr>
+          <p:cNvPr id="20" name="Text 18"/>
+          <p:cNvSpPr txBox="1"/>
+          <p:nvPr/>
+        </p:nvSpPr>
+        <p:spPr>
+          <a:xfrm>
+            <a:off x="9313164" y="2651760"/>
+            <a:ext cx="2052828" cy="411480"/>
+          </a:xfrm>
+          <a:prstGeom prst="rect">
+            <a:avLst/>
+          </a:prstGeom>
+          <a:noFill/>
+          <a:ln/>
+        </p:spPr>
+        <p:txBody>
+          <a:bodyPr wrap="square" lIns="0" tIns="0" rIns="0" bIns="0" rtlCol="0" anchor="ctr"/>
+          <a:lstStyle/>
+          <a:p>
+            <a:pPr indent="0" marL="0">
+              <a:buNone/>
+            </a:pPr>
+            <a:r>
+              <a:rPr lang="en-US" sz="1600" b="1" dirty="0">
+                <a:solidFill>
+                  <a:srgbClr val="141A22"/>
+                </a:solidFill>
+                <a:latin typeface="Arial" pitchFamily="34" charset="0"/>
+                <a:ea typeface="Arial" pitchFamily="34" charset="-122"/>
+                <a:cs typeface="Arial" pitchFamily="34" charset="-120"/>
+              </a:rPr>
+              <a:t>Данные</a:t>
+            </a:r>
+            <a:endParaRPr lang="en-US" sz="1600" dirty="0"/>
+          </a:p>
+        </p:txBody>
+      </p:sp>
+      <p:sp>
+        <p:nvSpPr>
+          <p:cNvPr id="21" name="Text 19"/>
+          <p:cNvSpPr txBox="1"/>
+          <p:nvPr/>
+        </p:nvSpPr>
+        <p:spPr>
+          <a:xfrm>
+            <a:off x="9313164" y="3108960"/>
+            <a:ext cx="2052828" cy="1463040"/>
+          </a:xfrm>
+          <a:prstGeom prst="rect">
+            <a:avLst/>
+          </a:prstGeom>
+          <a:noFill/>
+          <a:ln/>
+        </p:spPr>
+        <p:txBody>
+          <a:bodyPr wrap="square" lIns="0" tIns="0" rIns="0" bIns="0" rtlCol="0" anchor="t"/>
+          <a:lstStyle/>
+          <a:p>
+            <a:pPr indent="0" marL="0">
+              <a:buNone/>
+            </a:pPr>
+            <a:r>
+              <a:rPr lang="en-US" sz="1250" dirty="0">
+                <a:solidFill>
+                  <a:srgbClr val="5C6067"/>
+                </a:solidFill>
+                <a:latin typeface="Arial" pitchFamily="34" charset="0"/>
+                <a:ea typeface="Arial" pitchFamily="34" charset="-122"/>
+                <a:cs typeface="Arial" pitchFamily="34" charset="-120"/>
+              </a:rPr>
+              <a:t>База данных о подключениях: сотни проектов в год — данные, которых нет ни у кого. Enverus купил Pearl Street именно за такие данные.</a:t>
+            </a:r>
+            <a:endParaRPr lang="en-US" sz="1250" dirty="0"/>
+          </a:p>
+        </p:txBody>
+      </p:sp>
+      <p:sp>
+        <p:nvSpPr>
+          <p:cNvPr id="22" name="Text 20"/>
+          <p:cNvSpPr txBox="1"/>
+          <p:nvPr/>
+        </p:nvSpPr>
+        <p:spPr>
+          <a:xfrm>
+            <a:off x="548640" y="5029200"/>
+            <a:ext cx="9445752" cy="457200"/>
+          </a:xfrm>
+          <a:prstGeom prst="rect">
+            <a:avLst/>
+          </a:prstGeom>
+          <a:noFill/>
+          <a:ln/>
+        </p:spPr>
+        <p:txBody>
+          <a:bodyPr wrap="square" lIns="0" tIns="0" rIns="0" bIns="0" rtlCol="0" anchor="t"/>
+          <a:lstStyle/>
+          <a:p>
+            <a:pPr indent="0" marL="0">
+              <a:buNone/>
+            </a:pPr>
+            <a:r>
+              <a:rPr lang="en-US" sz="1000" dirty="0">
+                <a:solidFill>
+                  <a:srgbClr val="8A8E94"/>
+                </a:solidFill>
+                <a:latin typeface="Arial" pitchFamily="34" charset="0"/>
+                <a:ea typeface="Arial" pitchFamily="34" charset="-122"/>
+                <a:cs typeface="Arial" pitchFamily="34" charset="-120"/>
+              </a:rPr>
+              <a:t>В выручку раунда заложено только проектирование. Остальное вводим по одному и только после измерения.</a:t>
+            </a:r>
+            <a:endParaRPr lang="en-US" sz="1000" dirty="0"/>
+          </a:p>
+        </p:txBody>
+      </p:sp>
+    </p:spTree>
+  </p:cSld>
+  <p:clrMapOvr>
+    <a:masterClrMapping/>
+  </p:clrMapOvr>
+</p:sld>
+</file>
+
+<file path=ppt/slides/slide14.xml><?xml version="1.0" encoding="utf-8"?>
+<p:sld xmlns:a="http://schemas.openxmlformats.org/drawingml/2006/main" xmlns:r="http://schemas.openxmlformats.org/officeDocument/2006/relationships" xmlns:p="http://schemas.openxmlformats.org/presentationml/2006/main">
+  <p:cSld name="Slide 14">
+    <p:bg>
+      <p:bgPr>
+        <a:solidFill>
+          <a:srgbClr val="FFFFFF"/>
+        </a:solidFill>
+      </p:bgPr>
+    </p:bg>
+    <p:spTree>
+      <p:nvGrpSpPr>
+        <p:cNvPr id="1" name=""/>
+        <p:cNvGrpSpPr/>
+        <p:nvPr/>
+      </p:nvGrpSpPr>
+      <p:grpSpPr>
+        <a:xfrm>
+          <a:off x="0" y="0"/>
+          <a:ext cx="0" cy="0"/>
+          <a:chOff x="0" y="0"/>
+          <a:chExt cx="0" cy="0"/>
+        </a:xfrm>
+      </p:grpSpPr>
+      <p:sp>
+        <p:nvSpPr>
+          <p:cNvPr id="2" name="Text 0"/>
+          <p:cNvSpPr txBox="1"/>
+          <p:nvPr/>
+        </p:nvSpPr>
+        <p:spPr>
+          <a:xfrm>
+            <a:off x="9354312" y="320040"/>
+            <a:ext cx="2286000" cy="274320"/>
+          </a:xfrm>
+          <a:prstGeom prst="rect">
+            <a:avLst/>
+          </a:prstGeom>
+          <a:noFill/>
+          <a:ln/>
+        </p:spPr>
+        <p:txBody>
+          <a:bodyPr wrap="square" lIns="0" tIns="0" rIns="0" bIns="0" rtlCol="0" anchor="ctr"/>
+          <a:lstStyle/>
+          <a:p>
+            <a:pPr algn="r" indent="0" marL="0">
+              <a:buNone/>
+            </a:pPr>
+            <a:r>
+              <a:rPr lang="en-US" sz="900" spc="300" kern="0" dirty="0">
+                <a:solidFill>
+                  <a:srgbClr val="8A8E94"/>
+                </a:solidFill>
+                <a:latin typeface="Courier New" pitchFamily="34" charset="0"/>
+                <a:ea typeface="Courier New" pitchFamily="34" charset="-122"/>
+                <a:cs typeface="Courier New" pitchFamily="34" charset="-120"/>
+              </a:rPr>
+              <a:t>ОКЕАН ТЕХ</a:t>
+            </a:r>
+            <a:endParaRPr lang="en-US" sz="900" dirty="0"/>
+          </a:p>
+        </p:txBody>
+      </p:sp>
+      <p:sp>
+        <p:nvSpPr>
+          <p:cNvPr id="3" name="Text 1"/>
+          <p:cNvSpPr txBox="1"/>
+          <p:nvPr/>
+        </p:nvSpPr>
+        <p:spPr>
+          <a:xfrm>
+            <a:off x="548640" y="411480"/>
+            <a:ext cx="7315200" cy="274320"/>
+          </a:xfrm>
+          <a:prstGeom prst="rect">
+            <a:avLst/>
+          </a:prstGeom>
+          <a:noFill/>
+          <a:ln/>
+        </p:spPr>
+        <p:txBody>
+          <a:bodyPr wrap="square" lIns="0" tIns="0" rIns="0" bIns="0" rtlCol="0" anchor="ctr"/>
+          <a:lstStyle/>
+          <a:p>
+            <a:pPr indent="0" marL="0">
+              <a:buNone/>
+            </a:pPr>
+            <a:r>
+              <a:rPr lang="en-US" sz="950" spc="300" kern="0" dirty="0">
+                <a:solidFill>
+                  <a:srgbClr val="0460F5"/>
+                </a:solidFill>
+                <a:latin typeface="Courier New" pitchFamily="34" charset="0"/>
+                <a:ea typeface="Courier New" pitchFamily="34" charset="-122"/>
+                <a:cs typeface="Courier New" pitchFamily="34" charset="-120"/>
+              </a:rPr>
+              <a:t>ПРИЛОЖЕНИЕ · ИСТОЧНИКИ</a:t>
+            </a:r>
+            <a:endParaRPr lang="en-US" sz="950" dirty="0"/>
+          </a:p>
+        </p:txBody>
+      </p:sp>
+      <p:sp>
+        <p:nvSpPr>
+          <p:cNvPr id="4" name="Text 2"/>
+          <p:cNvSpPr txBox="1"/>
+          <p:nvPr/>
+        </p:nvSpPr>
+        <p:spPr>
+          <a:xfrm>
+            <a:off x="548640" y="731520"/>
+            <a:ext cx="11091672" cy="1188720"/>
+          </a:xfrm>
+          <a:prstGeom prst="rect">
+            <a:avLst/>
+          </a:prstGeom>
+          <a:noFill/>
+          <a:ln/>
+        </p:spPr>
+        <p:txBody>
+          <a:bodyPr wrap="square" lIns="0" tIns="0" rIns="0" bIns="0" rtlCol="0" anchor="t"/>
+          <a:lstStyle/>
+          <a:p>
+            <a:pPr indent="0" marL="0">
+              <a:buNone/>
+            </a:pPr>
+            <a:r>
+              <a:rPr lang="en-US" sz="2800" b="1" dirty="0">
+                <a:solidFill>
+                  <a:srgbClr val="141A22"/>
+                </a:solidFill>
+                <a:latin typeface="Arial" pitchFamily="34" charset="0"/>
+                <a:ea typeface="Arial" pitchFamily="34" charset="-122"/>
+                <a:cs typeface="Arial" pitchFamily="34" charset="-120"/>
+              </a:rPr>
+              <a:t>Откуда цифры</a:t>
+            </a:r>
+            <a:endParaRPr lang="en-US" sz="2800" dirty="0"/>
+          </a:p>
+        </p:txBody>
+      </p:sp>
+      <p:sp>
+        <p:nvSpPr>
+          <p:cNvPr id="5" name="Text 3"/>
+          <p:cNvSpPr txBox="1"/>
+          <p:nvPr/>
+        </p:nvSpPr>
+        <p:spPr>
+          <a:xfrm>
+            <a:off x="10268712" y="6400800"/>
+            <a:ext cx="1371600" cy="274320"/>
+          </a:xfrm>
+          <a:prstGeom prst="rect">
+            <a:avLst/>
+          </a:prstGeom>
+          <a:noFill/>
+          <a:ln/>
+        </p:spPr>
+        <p:txBody>
+          <a:bodyPr wrap="square" lIns="0" tIns="0" rIns="0" bIns="0" rtlCol="0" anchor="ctr"/>
+          <a:lstStyle/>
+          <a:p>
+            <a:pPr algn="r" indent="0" marL="0">
+              <a:buNone/>
+            </a:pPr>
+            <a:r>
+              <a:rPr lang="en-US" sz="900" dirty="0">
+                <a:solidFill>
+                  <a:srgbClr val="8A8E94"/>
+                </a:solidFill>
+                <a:latin typeface="Courier New" pitchFamily="34" charset="0"/>
+                <a:ea typeface="Courier New" pitchFamily="34" charset="-122"/>
+                <a:cs typeface="Courier New" pitchFamily="34" charset="-120"/>
+              </a:rPr>
+              <a:t>14 / 14</a:t>
             </a:r>
             <a:endParaRPr lang="en-US" sz="900" dirty="0"/>
           </a:p>
@@ -5390,7 +5884,7 @@
                 <a:ea typeface="Courier New" pitchFamily="34" charset="-122"/>
                 <a:cs typeface="Courier New" pitchFamily="34" charset="-120"/>
               </a:rPr>
-              <a:t>2 / 13</a:t>
+              <a:t>2 / 14</a:t>
             </a:r>
             <a:endParaRPr lang="en-US" sz="900" dirty="0"/>
           </a:p>
@@ -5869,7 +6363,7 @@
                 <a:ea typeface="Courier New" pitchFamily="34" charset="-122"/>
                 <a:cs typeface="Courier New" pitchFamily="34" charset="-120"/>
               </a:rPr>
-              <a:t>3 / 13</a:t>
+              <a:t>3 / 14</a:t>
             </a:r>
             <a:endParaRPr lang="en-US" sz="900" dirty="0"/>
           </a:p>
@@ -6531,7 +7025,7 @@
                 <a:ea typeface="Courier New" pitchFamily="34" charset="-122"/>
                 <a:cs typeface="Courier New" pitchFamily="34" charset="-120"/>
               </a:rPr>
-              <a:t>4 / 13</a:t>
+              <a:t>4 / 14</a:t>
             </a:r>
             <a:endParaRPr lang="en-US" sz="900" dirty="0"/>
           </a:p>
@@ -7271,7 +7765,7 @@
                 <a:ea typeface="Courier New" pitchFamily="34" charset="-122"/>
                 <a:cs typeface="Courier New" pitchFamily="34" charset="-120"/>
               </a:rPr>
-              <a:t>5 / 13</a:t>
+              <a:t>5 / 14</a:t>
             </a:r>
             <a:endParaRPr lang="en-US" sz="900" dirty="0"/>
           </a:p>
@@ -7933,7 +8427,7 @@
                 <a:ea typeface="Courier New" pitchFamily="34" charset="-122"/>
                 <a:cs typeface="Courier New" pitchFamily="34" charset="-120"/>
               </a:rPr>
-              <a:t>6 / 13</a:t>
+              <a:t>6 / 14</a:t>
             </a:r>
             <a:endParaRPr lang="en-US" sz="900" dirty="0"/>
           </a:p>
@@ -8595,7 +9089,7 @@
                 <a:ea typeface="Courier New" pitchFamily="34" charset="-122"/>
                 <a:cs typeface="Courier New" pitchFamily="34" charset="-120"/>
               </a:rPr>
-              <a:t>7 / 13</a:t>
+              <a:t>7 / 14</a:t>
             </a:r>
             <a:endParaRPr lang="en-US" sz="900" dirty="0"/>
           </a:p>
@@ -9152,7 +9646,7 @@
                 <a:ea typeface="Courier New" pitchFamily="34" charset="-122"/>
                 <a:cs typeface="Courier New" pitchFamily="34" charset="-120"/>
               </a:rPr>
-              <a:t>8 / 13</a:t>
+              <a:t>8 / 14</a:t>
             </a:r>
             <a:endParaRPr lang="en-US" sz="900" dirty="0"/>
           </a:p>
@@ -9631,7 +10125,7 @@
                 <a:ea typeface="Courier New" pitchFamily="34" charset="-122"/>
                 <a:cs typeface="Courier New" pitchFamily="34" charset="-120"/>
               </a:rPr>
-              <a:t>9 / 13</a:t>
+              <a:t>9 / 14</a:t>
             </a:r>
             <a:endParaRPr lang="en-US" sz="900" dirty="0"/>
           </a:p>

--- a/ai-case-library/research/ventures/grid-plain-deck.pptx
+++ b/ai-case-library/research/ventures/grid-plain-deck.pptx
@@ -2079,8 +2079,8 @@
         </p:nvSpPr>
         <p:spPr>
           <a:xfrm>
-            <a:off x="548640" y="1371600"/>
-            <a:ext cx="11091672" cy="2377440"/>
+            <a:off x="548640" y="1463040"/>
+            <a:ext cx="11091672" cy="2011680"/>
           </a:xfrm>
           <a:prstGeom prst="rect">
             <a:avLst/>
@@ -2094,12 +2094,12 @@
           <a:p>
             <a:pPr indent="0" marL="0">
               <a:lnSpc>
-                <a:spcPct val="110000"/>
+                <a:spcPct val="105000"/>
               </a:lnSpc>
               <a:buNone/>
             </a:pPr>
             <a:r>
-              <a:rPr lang="en-US" sz="3000" b="1" dirty="0">
+              <a:rPr lang="en-US" sz="4000" b="1" dirty="0">
                 <a:solidFill>
                   <a:srgbClr val="FFFFFF"/>
                 </a:solidFill>
@@ -2107,9 +2107,29 @@
                 <a:ea typeface="Arial" pitchFamily="34" charset="-122"/>
                 <a:cs typeface="Arial" pitchFamily="34" charset="-120"/>
               </a:rPr>
-              <a:t>Мы покупаем небольшие инженерные компании, которые проектируют подключение к электросети, и с помощью ИИ делаем их вдвое производительнее.</a:t>
-            </a:r>
-            <a:endParaRPr lang="en-US" sz="3000" dirty="0"/>
+              <a:t>Электричество — новая нефть эпохи ИИ.</a:t>
+            </a:r>
+            <a:endParaRPr lang="en-US" sz="4000" dirty="0"/>
+          </a:p>
+          <a:p>
+            <a:pPr indent="0" marL="0">
+              <a:lnSpc>
+                <a:spcPct val="105000"/>
+              </a:lnSpc>
+              <a:buNone/>
+            </a:pPr>
+            <a:r>
+              <a:rPr lang="en-US" sz="4000" b="1" dirty="0">
+                <a:solidFill>
+                  <a:srgbClr val="FFFFFF"/>
+                </a:solidFill>
+                <a:latin typeface="Arial" pitchFamily="34" charset="0"/>
+                <a:ea typeface="Arial" pitchFamily="34" charset="-122"/>
+                <a:cs typeface="Arial" pitchFamily="34" charset="-120"/>
+              </a:rPr>
+              <a:t>Мы строим тех, кто её добывает.</a:t>
+            </a:r>
+            <a:endParaRPr lang="en-US" sz="4000" dirty="0"/>
           </a:p>
         </p:txBody>
       </p:sp>
@@ -2121,8 +2141,8 @@
         </p:nvSpPr>
         <p:spPr>
           <a:xfrm>
-            <a:off x="548640" y="3931920"/>
-            <a:ext cx="9601200" cy="822960"/>
+            <a:off x="548640" y="3749040"/>
+            <a:ext cx="9875520" cy="914400"/>
           </a:xfrm>
           <a:prstGeom prst="rect">
             <a:avLst/>
@@ -2138,7 +2158,46 @@
               <a:buNone/>
             </a:pPr>
             <a:r>
-              <a:rPr lang="en-US" sz="1700" dirty="0">
+              <a:rPr lang="en-US" sz="1800" dirty="0">
+                <a:solidFill>
+                  <a:srgbClr val="FFFFFF"/>
+                </a:solidFill>
+                <a:latin typeface="Arial" pitchFamily="34" charset="0"/>
+                <a:ea typeface="Arial" pitchFamily="34" charset="-122"/>
+                <a:cs typeface="Arial" pitchFamily="34" charset="-120"/>
+              </a:rPr>
+              <a:t>Покупаем небольшие инженерные компании, которые проектируют подключение к электросети, и с помощью ИИ делаем их вдвое производительнее.</a:t>
+            </a:r>
+            <a:endParaRPr lang="en-US" sz="1800" dirty="0"/>
+          </a:p>
+        </p:txBody>
+      </p:sp>
+      <p:sp>
+        <p:nvSpPr>
+          <p:cNvPr id="5" name="Text 3"/>
+          <p:cNvSpPr txBox="1"/>
+          <p:nvPr/>
+        </p:nvSpPr>
+        <p:spPr>
+          <a:xfrm>
+            <a:off x="548640" y="4800600"/>
+            <a:ext cx="9601200" cy="640080"/>
+          </a:xfrm>
+          <a:prstGeom prst="rect">
+            <a:avLst/>
+          </a:prstGeom>
+          <a:noFill/>
+          <a:ln/>
+        </p:spPr>
+        <p:txBody>
+          <a:bodyPr wrap="square" lIns="0" tIns="0" rIns="0" bIns="0" rtlCol="0" anchor="t"/>
+          <a:lstStyle/>
+          <a:p>
+            <a:pPr indent="0" marL="0">
+              <a:buNone/>
+            </a:pPr>
+            <a:r>
+              <a:rPr lang="en-US" sz="1400" dirty="0">
                 <a:solidFill>
                   <a:srgbClr val="B8B8B8"/>
                 </a:solidFill>
@@ -2146,48 +2205,9 @@
                 <a:ea typeface="Arial" pitchFamily="34" charset="-122"/>
                 <a:cs typeface="Arial" pitchFamily="34" charset="-120"/>
               </a:rPr>
-              <a:t>Таких инженеров не хватает во всём мире — и это главный тормоз для дата-центров и новой энергетики.</a:t>
-            </a:r>
-            <a:endParaRPr lang="en-US" sz="1700" dirty="0"/>
-          </a:p>
-        </p:txBody>
-      </p:sp>
-      <p:sp>
-        <p:nvSpPr>
-          <p:cNvPr id="5" name="Text 3"/>
-          <p:cNvSpPr txBox="1"/>
-          <p:nvPr/>
-        </p:nvSpPr>
-        <p:spPr>
-          <a:xfrm>
-            <a:off x="548640" y="4937760"/>
-            <a:ext cx="9601200" cy="457200"/>
-          </a:xfrm>
-          <a:prstGeom prst="rect">
-            <a:avLst/>
-          </a:prstGeom>
-          <a:noFill/>
-          <a:ln/>
-        </p:spPr>
-        <p:txBody>
-          <a:bodyPr wrap="square" lIns="0" tIns="0" rIns="0" bIns="0" rtlCol="0" anchor="ctr"/>
-          <a:lstStyle/>
-          <a:p>
-            <a:pPr indent="0" marL="0">
-              <a:buNone/>
-            </a:pPr>
-            <a:r>
-              <a:rPr lang="en-US" sz="1500" i="1" dirty="0">
-                <a:solidFill>
-                  <a:srgbClr val="D5F774"/>
-                </a:solidFill>
-                <a:latin typeface="Arial" pitchFamily="34" charset="0"/>
-                <a:ea typeface="Arial" pitchFamily="34" charset="-122"/>
-                <a:cs typeface="Arial" pitchFamily="34" charset="-120"/>
-              </a:rPr>
-              <a:t>Электричество — новая нефть эпохи ИИ. Мы строим тех, кто её добывает.</a:t>
-            </a:r>
-            <a:endParaRPr lang="en-US" sz="1500" dirty="0"/>
+              <a:t>Таких инженеров не хватает во всём мире — это главный тормоз для дата-центров и новой энергетики.</a:t>
+            </a:r>
+            <a:endParaRPr lang="en-US" sz="1400" dirty="0"/>
           </a:p>
         </p:txBody>
       </p:sp>
@@ -2412,7 +2432,7 @@
                 <a:ea typeface="Arial" pitchFamily="34" charset="-122"/>
                 <a:cs typeface="Arial" pitchFamily="34" charset="-120"/>
               </a:rPr>
-              <a:t>Океан Тех — компания, которая исследует искусственный интеллект и строит решения для бизнеса</a:t>
+              <a:t>Океан Тех: исследуем ИИ и строим решения для бизнеса</a:t>
             </a:r>
             <a:endParaRPr lang="en-US" sz="2800" dirty="0"/>
           </a:p>
@@ -3172,7 +3192,7 @@
                 <a:ea typeface="Arial" pitchFamily="34" charset="-122"/>
                 <a:cs typeface="Arial" pitchFamily="34" charset="-120"/>
               </a:rPr>
-              <a:t>Управленческая дисциплина, понимание задач бизнеса и инженерный уровень</a:t>
+              <a:t>Три основателя и 60+ человек в штате</a:t>
             </a:r>
             <a:endParaRPr lang="en-US" sz="2800" dirty="0"/>
           </a:p>
@@ -3903,7 +3923,7 @@
                 <a:ea typeface="Arial" pitchFamily="34" charset="-122"/>
                 <a:cs typeface="Arial" pitchFamily="34" charset="-120"/>
               </a:rPr>
-              <a:t>30 млн $: десять — на ИИ и первую фирму, двадцать — на покупку ещё четырёх</a:t>
+              <a:t>30 млн $: десять на ИИ и первую фирму, двадцать на ещё четыре</a:t>
             </a:r>
             <a:endParaRPr lang="en-US" sz="2800" dirty="0"/>
           </a:p>
@@ -4643,7 +4663,7 @@
                 <a:ea typeface="Arial" pitchFamily="34" charset="-122"/>
                 <a:cs typeface="Arial" pitchFamily="34" charset="-120"/>
               </a:rPr>
-              <a:t>Что ещё умеет та же компания — опционы, не обещания раунда</a:t>
+              <a:t>Что ещё умеет та же компания</a:t>
             </a:r>
             <a:endParaRPr lang="en-US" sz="2800" dirty="0"/>
           </a:p>
@@ -5845,7 +5865,7 @@
                 <a:ea typeface="Arial" pitchFamily="34" charset="-122"/>
                 <a:cs typeface="Arial" pitchFamily="34" charset="-120"/>
               </a:rPr>
-              <a:t>Дата-центры и электростанции годами ждут подключения к сети</a:t>
+              <a:t>Дата-центры годами ждут подключения к сети</a:t>
             </a:r>
             <a:endParaRPr lang="en-US" sz="2800" dirty="0"/>
           </a:p>
@@ -6986,7 +7006,7 @@
                 <a:ea typeface="Arial" pitchFamily="34" charset="-122"/>
                 <a:cs typeface="Arial" pitchFamily="34" charset="-120"/>
               </a:rPr>
-              <a:t>Покупаем инженерную компанию с лицензией — и даём её инженерам искусственный интеллект</a:t>
+              <a:t>Покупаем инженерную компанию — и даём её инженерам ИИ</a:t>
             </a:r>
             <a:endParaRPr lang="en-US" sz="2800" dirty="0"/>
           </a:p>
@@ -7726,7 +7746,7 @@
                 <a:ea typeface="Arial" pitchFamily="34" charset="-122"/>
                 <a:cs typeface="Arial" pitchFamily="34" charset="-120"/>
               </a:rPr>
-              <a:t>Клиент приносит площадку — и получает одобренный проект вдвое быстрее</a:t>
+              <a:t>Площадка на входе — одобренный проект на выходе, вдвое быстрее</a:t>
             </a:r>
             <a:endParaRPr lang="en-US" sz="2800" dirty="0"/>
           </a:p>
@@ -9050,7 +9070,7 @@
                 <a:ea typeface="Arial" pitchFamily="34" charset="-122"/>
                 <a:cs typeface="Arial" pitchFamily="34" charset="-120"/>
               </a:rPr>
-              <a:t>Зарабатываем как инженерная фирма — только заметно больше с тех же людей</a:t>
+              <a:t>Та же фирма, те же люди — в полтора раза больше выручки</a:t>
             </a:r>
             <a:endParaRPr lang="en-US" sz="2800" dirty="0"/>
           </a:p>

--- a/ai-case-library/research/ventures/grid-plain-deck.pptx
+++ b/ai-case-library/research/ventures/grid-plain-deck.pptx
@@ -19,9 +19,10 @@
     <p:sldId id="267" r:id="rId13"/>
     <p:sldId id="268" r:id="rId14"/>
     <p:sldId id="269" r:id="rId15"/>
+    <p:sldId id="270" r:id="rId16"/>
   </p:sldIdLst>
   <p:notesMasterIdLst>
-    <p:notesMasterId r:id="rId16"/>
+    <p:notesMasterId r:id="rId17"/>
   </p:notesMasterIdLst>
   <p:sldSz cx="12192000" cy="6858000"/>
   <p:notesSz cx="6858000" cy="12192000"/>
@@ -779,7 +780,7 @@
           <a:p>
             <a:r>
               <a:rPr lang="en-US" dirty="0"/>
-              <a:t>Потребность по финмодели ~21 млн $ против 30 — остальное запас на дороже купленные фирмы или третий рынок; сказать самому. Не брать 30 сразу — транши защищают обе стороны.</a:t>
+              <a:t>Риски названы до того, как инвестор их спросит. Консервативный сценарий финмодели (×1,2) убыточен — это критерий остановки, и он встроен в первый шаг.</a:t>
             </a:r>
             <a:endParaRPr lang="en-US" dirty="0"/>
           </a:p>
@@ -867,7 +868,7 @@
           <a:p>
             <a:r>
               <a:rPr lang="en-US" dirty="0"/>
-              <a:t>Раскрывать только по вопросу. Роботы — не Индия и не США; академия — требования аккредитации не проверены; данные — права на данные в контрактах с первого дня.</a:t>
+              <a:t>Потребность по финмодели ~21 млн $ против 30 — остальное запас на дороже купленные фирмы или третий рынок; сказать самому. Не брать 30 сразу — транши защищают обе стороны.</a:t>
             </a:r>
             <a:endParaRPr lang="en-US" dirty="0"/>
           </a:p>
@@ -955,7 +956,7 @@
           <a:p>
             <a:r>
               <a:rPr lang="en-US" dirty="0"/>
-              <a:t/>
+              <a:t>Раскрывать только по вопросу. Роботы — не Индия и не США; академия — требования аккредитации не проверены; данные — права на данные в контрактах с первого дня.</a:t>
             </a:r>
             <a:endParaRPr lang="en-US" dirty="0"/>
           </a:p>
@@ -979,6 +980,94 @@
             <a:fld id="{F7021451-1387-4CA6-816F-3879F97B5CBC}" type="slidenum">
               <a:rPr lang="en-US"/>
               <a:t>14</a:t>
+            </a:fld>
+            <a:endParaRPr lang="en-US"/>
+          </a:p>
+        </p:txBody>
+      </p:sp>
+    </p:spTree>
+    <p:extLst>
+      <p:ext uri="{BB962C8B-B14F-4D97-AF65-F5344CB8AC3E}">
+        <p14:creationId xmlns:p14="http://schemas.microsoft.com/office/powerpoint/2010/main" val="1024086991"/>
+      </p:ext>
+    </p:extLst>
+  </p:cSld>
+  <p:clrMapOvr>
+    <a:masterClrMapping/>
+  </p:clrMapOvr>
+</p:notes>
+</file>
+
+<file path=ppt/notesSlides/notesSlide15.xml><?xml version="1.0" encoding="utf-8"?>
+<p:notes xmlns:a="http://schemas.openxmlformats.org/drawingml/2006/main" xmlns:r="http://schemas.openxmlformats.org/officeDocument/2006/relationships" xmlns:p="http://schemas.openxmlformats.org/presentationml/2006/main">
+  <p:cSld>
+    <p:spTree>
+      <p:nvGrpSpPr>
+        <p:cNvPr id="1" name=""/>
+        <p:cNvGrpSpPr/>
+        <p:nvPr/>
+      </p:nvGrpSpPr>
+      <p:grpSpPr>
+        <a:xfrm>
+          <a:off x="0" y="0"/>
+          <a:ext cx="0" cy="0"/>
+          <a:chOff x="0" y="0"/>
+          <a:chExt cx="0" cy="0"/>
+        </a:xfrm>
+      </p:grpSpPr>
+      <p:sp>
+        <p:nvSpPr>
+          <p:cNvPr id="2" name="Slide Image Placeholder 1"/>
+          <p:cNvSpPr>
+            <a:spLocks noGrp="1" noRot="1" noChangeAspect="1"/>
+          </p:cNvSpPr>
+          <p:nvPr>
+            <p:ph type="sldImg"/>
+          </p:nvPr>
+        </p:nvSpPr>
+        <p:spPr/>
+      </p:sp>
+      <p:sp>
+        <p:nvSpPr>
+          <p:cNvPr id="3" name="Notes Placeholder 2"/>
+          <p:cNvSpPr>
+            <a:spLocks noGrp="1"/>
+          </p:cNvSpPr>
+          <p:nvPr>
+            <p:ph type="body" idx="1"/>
+          </p:nvPr>
+        </p:nvSpPr>
+        <p:spPr/>
+        <p:txBody>
+          <a:bodyPr/>
+          <a:lstStyle/>
+          <a:p>
+            <a:r>
+              <a:rPr lang="en-US" dirty="0"/>
+              <a:t/>
+            </a:r>
+            <a:endParaRPr lang="en-US" dirty="0"/>
+          </a:p>
+        </p:txBody>
+      </p:sp>
+      <p:sp>
+        <p:nvSpPr>
+          <p:cNvPr id="4" name="Slide Number Placeholder 3"/>
+          <p:cNvSpPr>
+            <a:spLocks noGrp="1"/>
+          </p:cNvSpPr>
+          <p:nvPr>
+            <p:ph type="sldNum" sz="quarter" idx="10"/>
+          </p:nvPr>
+        </p:nvSpPr>
+        <p:spPr/>
+        <p:txBody>
+          <a:bodyPr/>
+          <a:lstStyle/>
+          <a:p>
+            <a:fld id="{F7021451-1387-4CA6-816F-3879F97B5CBC}" type="slidenum">
+              <a:rPr lang="en-US"/>
+              <a:t>15</a:t>
             </a:fld>
             <a:endParaRPr lang="en-US"/>
           </a:p>
@@ -2471,7 +2560,7 @@
                 <a:ea typeface="Courier New" pitchFamily="34" charset="-122"/>
                 <a:cs typeface="Courier New" pitchFamily="34" charset="-120"/>
               </a:rPr>
-              <a:t>10 / 14</a:t>
+              <a:t>10 / 15</a:t>
             </a:r>
             <a:endParaRPr lang="en-US" sz="900" dirty="0"/>
           </a:p>
@@ -2957,7 +3046,7 @@
                 <a:ea typeface="Arial" pitchFamily="34" charset="-122"/>
                 <a:cs typeface="Arial" pitchFamily="34" charset="-120"/>
               </a:rPr>
-              <a:t>изучает поведение языковых моделей и агентов на реальных задачах бизнеса: 14 исследователей и ML-инженеров, база из 277 верифицированных кейсов ИИ. Это он за день проверил одиннадцать гипотез и оставил одну.</a:t>
+              <a:t>изучает поведение языковых моделей и агентов на реальных задачах бизнеса: 14 исследователей и ML-инженеров, база из 277 верифицированных кейсов ИИ. Прежде чем прийти с этой идеей, мы проверили и отбросили десять других.</a:t>
             </a:r>
             <a:endParaRPr lang="en-US" sz="1300" dirty="0"/>
           </a:p>
@@ -3231,7 +3320,7 @@
                 <a:ea typeface="Courier New" pitchFamily="34" charset="-122"/>
                 <a:cs typeface="Courier New" pitchFamily="34" charset="-120"/>
               </a:rPr>
-              <a:t>11 / 14</a:t>
+              <a:t>11 / 15</a:t>
             </a:r>
             <a:endParaRPr lang="en-US" sz="900" dirty="0"/>
           </a:p>
@@ -3791,6 +3880,668 @@
 <file path=ppt/slides/slide12.xml><?xml version="1.0" encoding="utf-8"?>
 <p:sld xmlns:a="http://schemas.openxmlformats.org/drawingml/2006/main" xmlns:r="http://schemas.openxmlformats.org/officeDocument/2006/relationships" xmlns:p="http://schemas.openxmlformats.org/presentationml/2006/main">
   <p:cSld name="Slide 12">
+    <p:bg>
+      <p:bgPr>
+        <a:solidFill>
+          <a:srgbClr val="FFFFFF"/>
+        </a:solidFill>
+      </p:bgPr>
+    </p:bg>
+    <p:spTree>
+      <p:nvGrpSpPr>
+        <p:cNvPr id="1" name=""/>
+        <p:cNvGrpSpPr/>
+        <p:nvPr/>
+      </p:nvGrpSpPr>
+      <p:grpSpPr>
+        <a:xfrm>
+          <a:off x="0" y="0"/>
+          <a:ext cx="0" cy="0"/>
+          <a:chOff x="0" y="0"/>
+          <a:chExt cx="0" cy="0"/>
+        </a:xfrm>
+      </p:grpSpPr>
+      <p:sp>
+        <p:nvSpPr>
+          <p:cNvPr id="2" name="Text 0"/>
+          <p:cNvSpPr txBox="1"/>
+          <p:nvPr/>
+        </p:nvSpPr>
+        <p:spPr>
+          <a:xfrm>
+            <a:off x="9354312" y="320040"/>
+            <a:ext cx="2286000" cy="274320"/>
+          </a:xfrm>
+          <a:prstGeom prst="rect">
+            <a:avLst/>
+          </a:prstGeom>
+          <a:noFill/>
+          <a:ln/>
+        </p:spPr>
+        <p:txBody>
+          <a:bodyPr wrap="square" lIns="0" tIns="0" rIns="0" bIns="0" rtlCol="0" anchor="ctr"/>
+          <a:lstStyle/>
+          <a:p>
+            <a:pPr algn="r" indent="0" marL="0">
+              <a:buNone/>
+            </a:pPr>
+            <a:r>
+              <a:rPr lang="en-US" sz="900" spc="300" kern="0" dirty="0">
+                <a:solidFill>
+                  <a:srgbClr val="8A8E94"/>
+                </a:solidFill>
+                <a:latin typeface="Courier New" pitchFamily="34" charset="0"/>
+                <a:ea typeface="Courier New" pitchFamily="34" charset="-122"/>
+                <a:cs typeface="Courier New" pitchFamily="34" charset="-120"/>
+              </a:rPr>
+              <a:t>ОКЕАН ТЕХ</a:t>
+            </a:r>
+            <a:endParaRPr lang="en-US" sz="900" dirty="0"/>
+          </a:p>
+        </p:txBody>
+      </p:sp>
+      <p:sp>
+        <p:nvSpPr>
+          <p:cNvPr id="3" name="Text 1"/>
+          <p:cNvSpPr txBox="1"/>
+          <p:nvPr/>
+        </p:nvSpPr>
+        <p:spPr>
+          <a:xfrm>
+            <a:off x="548640" y="411480"/>
+            <a:ext cx="7315200" cy="274320"/>
+          </a:xfrm>
+          <a:prstGeom prst="rect">
+            <a:avLst/>
+          </a:prstGeom>
+          <a:noFill/>
+          <a:ln/>
+        </p:spPr>
+        <p:txBody>
+          <a:bodyPr wrap="square" lIns="0" tIns="0" rIns="0" bIns="0" rtlCol="0" anchor="ctr"/>
+          <a:lstStyle/>
+          <a:p>
+            <a:pPr indent="0" marL="0">
+              <a:buNone/>
+            </a:pPr>
+            <a:r>
+              <a:rPr lang="en-US" sz="950" spc="300" kern="0" dirty="0">
+                <a:solidFill>
+                  <a:srgbClr val="0460F5"/>
+                </a:solidFill>
+                <a:latin typeface="Courier New" pitchFamily="34" charset="0"/>
+                <a:ea typeface="Courier New" pitchFamily="34" charset="-122"/>
+                <a:cs typeface="Courier New" pitchFamily="34" charset="-120"/>
+              </a:rPr>
+              <a:t>10 · ЧТО МОЖЕТ ПОЙТИ НЕ ТАК</a:t>
+            </a:r>
+            <a:endParaRPr lang="en-US" sz="950" dirty="0"/>
+          </a:p>
+        </p:txBody>
+      </p:sp>
+      <p:sp>
+        <p:nvSpPr>
+          <p:cNvPr id="4" name="Text 2"/>
+          <p:cNvSpPr txBox="1"/>
+          <p:nvPr/>
+        </p:nvSpPr>
+        <p:spPr>
+          <a:xfrm>
+            <a:off x="548640" y="731520"/>
+            <a:ext cx="11091672" cy="1188720"/>
+          </a:xfrm>
+          <a:prstGeom prst="rect">
+            <a:avLst/>
+          </a:prstGeom>
+          <a:noFill/>
+          <a:ln/>
+        </p:spPr>
+        <p:txBody>
+          <a:bodyPr wrap="square" lIns="0" tIns="0" rIns="0" bIns="0" rtlCol="0" anchor="t"/>
+          <a:lstStyle/>
+          <a:p>
+            <a:pPr indent="0" marL="0">
+              <a:buNone/>
+            </a:pPr>
+            <a:r>
+              <a:rPr lang="en-US" sz="2800" b="1" dirty="0">
+                <a:solidFill>
+                  <a:srgbClr val="141A22"/>
+                </a:solidFill>
+                <a:latin typeface="Arial" pitchFamily="34" charset="0"/>
+                <a:ea typeface="Arial" pitchFamily="34" charset="-122"/>
+                <a:cs typeface="Arial" pitchFamily="34" charset="-120"/>
+              </a:rPr>
+              <a:t>Три риска — и что мы с ними делаем</a:t>
+            </a:r>
+            <a:endParaRPr lang="en-US" sz="2800" dirty="0"/>
+          </a:p>
+        </p:txBody>
+      </p:sp>
+      <p:sp>
+        <p:nvSpPr>
+          <p:cNvPr id="5" name="Text 3"/>
+          <p:cNvSpPr txBox="1"/>
+          <p:nvPr/>
+        </p:nvSpPr>
+        <p:spPr>
+          <a:xfrm>
+            <a:off x="10268712" y="6400800"/>
+            <a:ext cx="1371600" cy="274320"/>
+          </a:xfrm>
+          <a:prstGeom prst="rect">
+            <a:avLst/>
+          </a:prstGeom>
+          <a:noFill/>
+          <a:ln/>
+        </p:spPr>
+        <p:txBody>
+          <a:bodyPr wrap="square" lIns="0" tIns="0" rIns="0" bIns="0" rtlCol="0" anchor="ctr"/>
+          <a:lstStyle/>
+          <a:p>
+            <a:pPr algn="r" indent="0" marL="0">
+              <a:buNone/>
+            </a:pPr>
+            <a:r>
+              <a:rPr lang="en-US" sz="900" dirty="0">
+                <a:solidFill>
+                  <a:srgbClr val="8A8E94"/>
+                </a:solidFill>
+                <a:latin typeface="Courier New" pitchFamily="34" charset="0"/>
+                <a:ea typeface="Courier New" pitchFamily="34" charset="-122"/>
+                <a:cs typeface="Courier New" pitchFamily="34" charset="-120"/>
+              </a:rPr>
+              <a:t>12 / 15</a:t>
+            </a:r>
+            <a:endParaRPr lang="en-US" sz="900" dirty="0"/>
+          </a:p>
+        </p:txBody>
+      </p:sp>
+      <p:sp>
+        <p:nvSpPr>
+          <p:cNvPr id="6" name="Shape 4"/>
+          <p:cNvSpPr/>
+          <p:nvPr/>
+        </p:nvSpPr>
+        <p:spPr>
+          <a:xfrm>
+            <a:off x="548640" y="2103120"/>
+            <a:ext cx="3544824" cy="2468880"/>
+          </a:xfrm>
+          <a:prstGeom prst="roundRect">
+            <a:avLst>
+              <a:gd name="adj" fmla="val 6667"/>
+            </a:avLst>
+          </a:prstGeom>
+          <a:solidFill>
+            <a:srgbClr val="F7F7F7"/>
+          </a:solidFill>
+          <a:ln w="12700">
+            <a:solidFill>
+              <a:srgbClr val="F7F7F7"/>
+            </a:solidFill>
+            <a:prstDash val="solid"/>
+          </a:ln>
+        </p:spPr>
+      </p:sp>
+      <p:sp>
+        <p:nvSpPr>
+          <p:cNvPr id="7" name="Text 5"/>
+          <p:cNvSpPr txBox="1"/>
+          <p:nvPr/>
+        </p:nvSpPr>
+        <p:spPr>
+          <a:xfrm>
+            <a:off x="822960" y="2331720"/>
+            <a:ext cx="2996184" cy="274320"/>
+          </a:xfrm>
+          <a:prstGeom prst="rect">
+            <a:avLst/>
+          </a:prstGeom>
+          <a:noFill/>
+          <a:ln/>
+        </p:spPr>
+        <p:txBody>
+          <a:bodyPr wrap="square" lIns="0" tIns="0" rIns="0" bIns="0" rtlCol="0" anchor="ctr"/>
+          <a:lstStyle/>
+          <a:p>
+            <a:pPr indent="0" marL="0">
+              <a:buNone/>
+            </a:pPr>
+            <a:r>
+              <a:rPr lang="en-US" sz="950" spc="200" kern="0" dirty="0">
+                <a:solidFill>
+                  <a:srgbClr val="0460F5"/>
+                </a:solidFill>
+                <a:latin typeface="Courier New" pitchFamily="34" charset="0"/>
+                <a:ea typeface="Courier New" pitchFamily="34" charset="-122"/>
+                <a:cs typeface="Courier New" pitchFamily="34" charset="-120"/>
+              </a:rPr>
+              <a:t>РИСК 1</a:t>
+            </a:r>
+            <a:endParaRPr lang="en-US" sz="950" dirty="0"/>
+          </a:p>
+        </p:txBody>
+      </p:sp>
+      <p:sp>
+        <p:nvSpPr>
+          <p:cNvPr id="8" name="Text 6"/>
+          <p:cNvSpPr txBox="1"/>
+          <p:nvPr/>
+        </p:nvSpPr>
+        <p:spPr>
+          <a:xfrm>
+            <a:off x="822960" y="2651760"/>
+            <a:ext cx="2996184" cy="411480"/>
+          </a:xfrm>
+          <a:prstGeom prst="rect">
+            <a:avLst/>
+          </a:prstGeom>
+          <a:noFill/>
+          <a:ln/>
+        </p:spPr>
+        <p:txBody>
+          <a:bodyPr wrap="square" lIns="0" tIns="0" rIns="0" bIns="0" rtlCol="0" anchor="ctr"/>
+          <a:lstStyle/>
+          <a:p>
+            <a:pPr indent="0" marL="0">
+              <a:buNone/>
+            </a:pPr>
+            <a:r>
+              <a:rPr lang="en-US" sz="1600" b="1" dirty="0">
+                <a:solidFill>
+                  <a:srgbClr val="141A22"/>
+                </a:solidFill>
+                <a:latin typeface="Arial" pitchFamily="34" charset="0"/>
+                <a:ea typeface="Arial" pitchFamily="34" charset="-122"/>
+                <a:cs typeface="Arial" pitchFamily="34" charset="-120"/>
+              </a:rPr>
+              <a:t>ИИ будет у всех</a:t>
+            </a:r>
+            <a:endParaRPr lang="en-US" sz="1600" dirty="0"/>
+          </a:p>
+        </p:txBody>
+      </p:sp>
+      <p:sp>
+        <p:nvSpPr>
+          <p:cNvPr id="9" name="Text 7"/>
+          <p:cNvSpPr txBox="1"/>
+          <p:nvPr/>
+        </p:nvSpPr>
+        <p:spPr>
+          <a:xfrm>
+            <a:off x="822960" y="3108960"/>
+            <a:ext cx="2996184" cy="1280160"/>
+          </a:xfrm>
+          <a:prstGeom prst="rect">
+            <a:avLst/>
+          </a:prstGeom>
+          <a:noFill/>
+          <a:ln/>
+        </p:spPr>
+        <p:txBody>
+          <a:bodyPr wrap="square" lIns="0" tIns="0" rIns="0" bIns="0" rtlCol="0" anchor="t"/>
+          <a:lstStyle/>
+          <a:p>
+            <a:pPr indent="0" marL="0">
+              <a:buNone/>
+            </a:pPr>
+            <a:r>
+              <a:rPr lang="en-US" sz="1250" dirty="0">
+                <a:solidFill>
+                  <a:srgbClr val="5C6067"/>
+                </a:solidFill>
+                <a:latin typeface="Arial" pitchFamily="34" charset="0"/>
+                <a:ea typeface="Arial" pitchFamily="34" charset="-122"/>
+                <a:cs typeface="Arial" pitchFamily="34" charset="-120"/>
+              </a:rPr>
+              <a:t>Через год-два такой ИИ появится у каждого. Поэтому наше преимущество — не в модели, а в купленных фирмах, их лицензиях и клиентах. Их бесплатно не раздашь.</a:t>
+            </a:r>
+            <a:endParaRPr lang="en-US" sz="1250" dirty="0"/>
+          </a:p>
+        </p:txBody>
+      </p:sp>
+      <p:sp>
+        <p:nvSpPr>
+          <p:cNvPr id="10" name="Shape 8"/>
+          <p:cNvSpPr/>
+          <p:nvPr/>
+        </p:nvSpPr>
+        <p:spPr>
+          <a:xfrm>
+            <a:off x="4322064" y="2103120"/>
+            <a:ext cx="3544824" cy="2468880"/>
+          </a:xfrm>
+          <a:prstGeom prst="roundRect">
+            <a:avLst>
+              <a:gd name="adj" fmla="val 6667"/>
+            </a:avLst>
+          </a:prstGeom>
+          <a:solidFill>
+            <a:srgbClr val="F7F7F7"/>
+          </a:solidFill>
+          <a:ln w="12700">
+            <a:solidFill>
+              <a:srgbClr val="F7F7F7"/>
+            </a:solidFill>
+            <a:prstDash val="solid"/>
+          </a:ln>
+        </p:spPr>
+      </p:sp>
+      <p:sp>
+        <p:nvSpPr>
+          <p:cNvPr id="11" name="Text 9"/>
+          <p:cNvSpPr txBox="1"/>
+          <p:nvPr/>
+        </p:nvSpPr>
+        <p:spPr>
+          <a:xfrm>
+            <a:off x="4596384" y="2331720"/>
+            <a:ext cx="2996184" cy="274320"/>
+          </a:xfrm>
+          <a:prstGeom prst="rect">
+            <a:avLst/>
+          </a:prstGeom>
+          <a:noFill/>
+          <a:ln/>
+        </p:spPr>
+        <p:txBody>
+          <a:bodyPr wrap="square" lIns="0" tIns="0" rIns="0" bIns="0" rtlCol="0" anchor="ctr"/>
+          <a:lstStyle/>
+          <a:p>
+            <a:pPr indent="0" marL="0">
+              <a:buNone/>
+            </a:pPr>
+            <a:r>
+              <a:rPr lang="en-US" sz="950" spc="200" kern="0" dirty="0">
+                <a:solidFill>
+                  <a:srgbClr val="0460F5"/>
+                </a:solidFill>
+                <a:latin typeface="Courier New" pitchFamily="34" charset="0"/>
+                <a:ea typeface="Courier New" pitchFamily="34" charset="-122"/>
+                <a:cs typeface="Courier New" pitchFamily="34" charset="-120"/>
+              </a:rPr>
+              <a:t>РИСК 2</a:t>
+            </a:r>
+            <a:endParaRPr lang="en-US" sz="950" dirty="0"/>
+          </a:p>
+        </p:txBody>
+      </p:sp>
+      <p:sp>
+        <p:nvSpPr>
+          <p:cNvPr id="12" name="Text 10"/>
+          <p:cNvSpPr txBox="1"/>
+          <p:nvPr/>
+        </p:nvSpPr>
+        <p:spPr>
+          <a:xfrm>
+            <a:off x="4596384" y="2651760"/>
+            <a:ext cx="2996184" cy="411480"/>
+          </a:xfrm>
+          <a:prstGeom prst="rect">
+            <a:avLst/>
+          </a:prstGeom>
+          <a:noFill/>
+          <a:ln/>
+        </p:spPr>
+        <p:txBody>
+          <a:bodyPr wrap="square" lIns="0" tIns="0" rIns="0" bIns="0" rtlCol="0" anchor="ctr"/>
+          <a:lstStyle/>
+          <a:p>
+            <a:pPr indent="0" marL="0">
+              <a:buNone/>
+            </a:pPr>
+            <a:r>
+              <a:rPr lang="en-US" sz="1600" b="1" dirty="0">
+                <a:solidFill>
+                  <a:srgbClr val="141A22"/>
+                </a:solidFill>
+                <a:latin typeface="Arial" pitchFamily="34" charset="0"/>
+                <a:ea typeface="Arial" pitchFamily="34" charset="-122"/>
+                <a:cs typeface="Arial" pitchFamily="34" charset="-120"/>
+              </a:rPr>
+              <a:t>Инженеры уйдут</a:t>
+            </a:r>
+            <a:endParaRPr lang="en-US" sz="1600" dirty="0"/>
+          </a:p>
+        </p:txBody>
+      </p:sp>
+      <p:sp>
+        <p:nvSpPr>
+          <p:cNvPr id="13" name="Text 11"/>
+          <p:cNvSpPr txBox="1"/>
+          <p:nvPr/>
+        </p:nvSpPr>
+        <p:spPr>
+          <a:xfrm>
+            <a:off x="4596384" y="3108960"/>
+            <a:ext cx="2996184" cy="1280160"/>
+          </a:xfrm>
+          <a:prstGeom prst="rect">
+            <a:avLst/>
+          </a:prstGeom>
+          <a:noFill/>
+          <a:ln/>
+        </p:spPr>
+        <p:txBody>
+          <a:bodyPr wrap="square" lIns="0" tIns="0" rIns="0" bIns="0" rtlCol="0" anchor="t"/>
+          <a:lstStyle/>
+          <a:p>
+            <a:pPr indent="0" marL="0">
+              <a:buNone/>
+            </a:pPr>
+            <a:r>
+              <a:rPr lang="en-US" sz="1250" dirty="0">
+                <a:solidFill>
+                  <a:srgbClr val="5C6067"/>
+                </a:solidFill>
+                <a:latin typeface="Arial" pitchFamily="34" charset="0"/>
+                <a:ea typeface="Arial" pitchFamily="34" charset="-122"/>
+                <a:cs typeface="Arial" pitchFamily="34" charset="-120"/>
+              </a:rPr>
+              <a:t>Это бизнес на людях. Покупаем фирмы с отложенной выплатой основателям, а ИИ делает работу инженеров легче, а не заменяет их.</a:t>
+            </a:r>
+            <a:endParaRPr lang="en-US" sz="1250" dirty="0"/>
+          </a:p>
+        </p:txBody>
+      </p:sp>
+      <p:sp>
+        <p:nvSpPr>
+          <p:cNvPr id="14" name="Shape 12"/>
+          <p:cNvSpPr/>
+          <p:nvPr/>
+        </p:nvSpPr>
+        <p:spPr>
+          <a:xfrm>
+            <a:off x="8095488" y="2103120"/>
+            <a:ext cx="3544824" cy="2468880"/>
+          </a:xfrm>
+          <a:prstGeom prst="roundRect">
+            <a:avLst>
+              <a:gd name="adj" fmla="val 6667"/>
+            </a:avLst>
+          </a:prstGeom>
+          <a:solidFill>
+            <a:srgbClr val="F7F7F7"/>
+          </a:solidFill>
+          <a:ln w="12700">
+            <a:solidFill>
+              <a:srgbClr val="F7F7F7"/>
+            </a:solidFill>
+            <a:prstDash val="solid"/>
+          </a:ln>
+        </p:spPr>
+      </p:sp>
+      <p:sp>
+        <p:nvSpPr>
+          <p:cNvPr id="15" name="Text 13"/>
+          <p:cNvSpPr txBox="1"/>
+          <p:nvPr/>
+        </p:nvSpPr>
+        <p:spPr>
+          <a:xfrm>
+            <a:off x="8369808" y="2331720"/>
+            <a:ext cx="2996184" cy="274320"/>
+          </a:xfrm>
+          <a:prstGeom prst="rect">
+            <a:avLst/>
+          </a:prstGeom>
+          <a:noFill/>
+          <a:ln/>
+        </p:spPr>
+        <p:txBody>
+          <a:bodyPr wrap="square" lIns="0" tIns="0" rIns="0" bIns="0" rtlCol="0" anchor="ctr"/>
+          <a:lstStyle/>
+          <a:p>
+            <a:pPr indent="0" marL="0">
+              <a:buNone/>
+            </a:pPr>
+            <a:r>
+              <a:rPr lang="en-US" sz="950" spc="200" kern="0" dirty="0">
+                <a:solidFill>
+                  <a:srgbClr val="0460F5"/>
+                </a:solidFill>
+                <a:latin typeface="Courier New" pitchFamily="34" charset="0"/>
+                <a:ea typeface="Courier New" pitchFamily="34" charset="-122"/>
+                <a:cs typeface="Courier New" pitchFamily="34" charset="-120"/>
+              </a:rPr>
+              <a:t>РИСК 3</a:t>
+            </a:r>
+            <a:endParaRPr lang="en-US" sz="950" dirty="0"/>
+          </a:p>
+        </p:txBody>
+      </p:sp>
+      <p:sp>
+        <p:nvSpPr>
+          <p:cNvPr id="16" name="Text 14"/>
+          <p:cNvSpPr txBox="1"/>
+          <p:nvPr/>
+        </p:nvSpPr>
+        <p:spPr>
+          <a:xfrm>
+            <a:off x="8369808" y="2651760"/>
+            <a:ext cx="2996184" cy="411480"/>
+          </a:xfrm>
+          <a:prstGeom prst="rect">
+            <a:avLst/>
+          </a:prstGeom>
+          <a:noFill/>
+          <a:ln/>
+        </p:spPr>
+        <p:txBody>
+          <a:bodyPr wrap="square" lIns="0" tIns="0" rIns="0" bIns="0" rtlCol="0" anchor="ctr"/>
+          <a:lstStyle/>
+          <a:p>
+            <a:pPr indent="0" marL="0">
+              <a:buNone/>
+            </a:pPr>
+            <a:r>
+              <a:rPr lang="en-US" sz="1600" b="1" dirty="0">
+                <a:solidFill>
+                  <a:srgbClr val="141A22"/>
+                </a:solidFill>
+                <a:latin typeface="Arial" pitchFamily="34" charset="0"/>
+                <a:ea typeface="Arial" pitchFamily="34" charset="-122"/>
+                <a:cs typeface="Arial" pitchFamily="34" charset="-120"/>
+              </a:rPr>
+              <a:t>Происхождение команды</a:t>
+            </a:r>
+            <a:endParaRPr lang="en-US" sz="1600" dirty="0"/>
+          </a:p>
+        </p:txBody>
+      </p:sp>
+      <p:sp>
+        <p:nvSpPr>
+          <p:cNvPr id="17" name="Text 15"/>
+          <p:cNvSpPr txBox="1"/>
+          <p:nvPr/>
+        </p:nvSpPr>
+        <p:spPr>
+          <a:xfrm>
+            <a:off x="8369808" y="3108960"/>
+            <a:ext cx="2996184" cy="1280160"/>
+          </a:xfrm>
+          <a:prstGeom prst="rect">
+            <a:avLst/>
+          </a:prstGeom>
+          <a:noFill/>
+          <a:ln/>
+        </p:spPr>
+        <p:txBody>
+          <a:bodyPr wrap="square" lIns="0" tIns="0" rIns="0" bIns="0" rtlCol="0" anchor="t"/>
+          <a:lstStyle/>
+          <a:p>
+            <a:pPr indent="0" marL="0">
+              <a:buNone/>
+            </a:pPr>
+            <a:r>
+              <a:rPr lang="en-US" sz="1250" dirty="0">
+                <a:solidFill>
+                  <a:srgbClr val="5C6067"/>
+                </a:solidFill>
+                <a:latin typeface="Arial" pitchFamily="34" charset="0"/>
+                <a:ea typeface="Arial" pitchFamily="34" charset="-122"/>
+                <a:cs typeface="Arial" pitchFamily="34" charset="-120"/>
+              </a:rPr>
+              <a:t>США и Европа для нас — позже и через партнёров. Поэтому стартуем там, куда пускают и где строят: Залив, Индия. Международная структура с первого дня.</a:t>
+            </a:r>
+            <a:endParaRPr lang="en-US" sz="1250" dirty="0"/>
+          </a:p>
+        </p:txBody>
+      </p:sp>
+      <p:sp>
+        <p:nvSpPr>
+          <p:cNvPr id="18" name="Text 16"/>
+          <p:cNvSpPr txBox="1"/>
+          <p:nvPr/>
+        </p:nvSpPr>
+        <p:spPr>
+          <a:xfrm>
+            <a:off x="548640" y="4846320"/>
+            <a:ext cx="10725912" cy="822960"/>
+          </a:xfrm>
+          <a:prstGeom prst="rect">
+            <a:avLst/>
+          </a:prstGeom>
+          <a:noFill/>
+          <a:ln/>
+        </p:spPr>
+        <p:txBody>
+          <a:bodyPr wrap="square" lIns="0" tIns="0" rIns="0" bIns="0" rtlCol="0" anchor="t"/>
+          <a:lstStyle/>
+          <a:p>
+            <a:pPr indent="0" marL="0">
+              <a:lnSpc>
+                <a:spcPct val="115000"/>
+              </a:lnSpc>
+              <a:buNone/>
+            </a:pPr>
+            <a:r>
+              <a:rPr lang="en-US" sz="1450" dirty="0">
+                <a:solidFill>
+                  <a:srgbClr val="141A22"/>
+                </a:solidFill>
+                <a:latin typeface="Arial" pitchFamily="34" charset="0"/>
+                <a:ea typeface="Arial" pitchFamily="34" charset="-122"/>
+                <a:cs typeface="Arial" pitchFamily="34" charset="-120"/>
+              </a:rPr>
+              <a:t>Четвёртый риск — что ИИ не даст даже полтора раза. Его снимает первый шаг: 250 тысяч и восемь недель до любых покупок.</a:t>
+            </a:r>
+            <a:endParaRPr lang="en-US" sz="1450" dirty="0"/>
+          </a:p>
+        </p:txBody>
+      </p:sp>
+    </p:spTree>
+  </p:cSld>
+  <p:clrMapOvr>
+    <a:masterClrMapping/>
+  </p:clrMapOvr>
+</p:sld>
+</file>
+
+<file path=ppt/slides/slide13.xml><?xml version="1.0" encoding="utf-8"?>
+<p:sld xmlns:a="http://schemas.openxmlformats.org/drawingml/2006/main" xmlns:r="http://schemas.openxmlformats.org/officeDocument/2006/relationships" xmlns:p="http://schemas.openxmlformats.org/presentationml/2006/main">
+  <p:cSld name="Slide 13">
     <p:bg>
       <p:bgPr>
         <a:solidFill>
@@ -3962,7 +4713,7 @@
                 <a:ea typeface="Courier New" pitchFamily="34" charset="-122"/>
                 <a:cs typeface="Courier New" pitchFamily="34" charset="-120"/>
               </a:rPr>
-              <a:t>12 / 14</a:t>
+              <a:t>13 / 15</a:t>
             </a:r>
             <a:endParaRPr lang="en-US" sz="900" dirty="0"/>
           </a:p>
@@ -4436,7 +5187,7 @@
                 <a:ea typeface="Arial" pitchFamily="34" charset="-122"/>
                 <a:cs typeface="Arial" pitchFamily="34" charset="-120"/>
               </a:rPr>
-              <a:t>Первый шаг — 250 тысяч долларов и восемь недель: два пилотных проекта. Если ИИ не даёт вдвое, вы узнаете это первым.</a:t>
+              <a:t>Первый шаг — 250 тысяч долларов и восемь недель: два пилотных проекта. Порог, ниже которого не идём дальше, — полтора раза; цель — два. Если ИИ не даёт, вы узнаете это первым.</a:t>
             </a:r>
             <a:endParaRPr lang="en-US" sz="1500" dirty="0"/>
           </a:p>
@@ -4517,809 +5268,6 @@
               <a:t>Константин Морошин · Океан Тех · sales@okeantech.ru · okeantech.ru</a:t>
             </a:r>
             <a:endParaRPr lang="en-US" sz="1300" dirty="0"/>
-          </a:p>
-        </p:txBody>
-      </p:sp>
-    </p:spTree>
-  </p:cSld>
-  <p:clrMapOvr>
-    <a:masterClrMapping/>
-  </p:clrMapOvr>
-</p:sld>
-</file>
-
-<file path=ppt/slides/slide13.xml><?xml version="1.0" encoding="utf-8"?>
-<p:sld xmlns:a="http://schemas.openxmlformats.org/drawingml/2006/main" xmlns:r="http://schemas.openxmlformats.org/officeDocument/2006/relationships" xmlns:p="http://schemas.openxmlformats.org/presentationml/2006/main">
-  <p:cSld name="Slide 13">
-    <p:bg>
-      <p:bgPr>
-        <a:solidFill>
-          <a:srgbClr val="FFFFFF"/>
-        </a:solidFill>
-      </p:bgPr>
-    </p:bg>
-    <p:spTree>
-      <p:nvGrpSpPr>
-        <p:cNvPr id="1" name=""/>
-        <p:cNvGrpSpPr/>
-        <p:nvPr/>
-      </p:nvGrpSpPr>
-      <p:grpSpPr>
-        <a:xfrm>
-          <a:off x="0" y="0"/>
-          <a:ext cx="0" cy="0"/>
-          <a:chOff x="0" y="0"/>
-          <a:chExt cx="0" cy="0"/>
-        </a:xfrm>
-      </p:grpSpPr>
-      <p:sp>
-        <p:nvSpPr>
-          <p:cNvPr id="2" name="Text 0"/>
-          <p:cNvSpPr txBox="1"/>
-          <p:nvPr/>
-        </p:nvSpPr>
-        <p:spPr>
-          <a:xfrm>
-            <a:off x="9354312" y="320040"/>
-            <a:ext cx="2286000" cy="274320"/>
-          </a:xfrm>
-          <a:prstGeom prst="rect">
-            <a:avLst/>
-          </a:prstGeom>
-          <a:noFill/>
-          <a:ln/>
-        </p:spPr>
-        <p:txBody>
-          <a:bodyPr wrap="square" lIns="0" tIns="0" rIns="0" bIns="0" rtlCol="0" anchor="ctr"/>
-          <a:lstStyle/>
-          <a:p>
-            <a:pPr algn="r" indent="0" marL="0">
-              <a:buNone/>
-            </a:pPr>
-            <a:r>
-              <a:rPr lang="en-US" sz="900" spc="300" kern="0" dirty="0">
-                <a:solidFill>
-                  <a:srgbClr val="8A8E94"/>
-                </a:solidFill>
-                <a:latin typeface="Courier New" pitchFamily="34" charset="0"/>
-                <a:ea typeface="Courier New" pitchFamily="34" charset="-122"/>
-                <a:cs typeface="Courier New" pitchFamily="34" charset="-120"/>
-              </a:rPr>
-              <a:t>ОКЕАН ТЕХ</a:t>
-            </a:r>
-            <a:endParaRPr lang="en-US" sz="900" dirty="0"/>
-          </a:p>
-        </p:txBody>
-      </p:sp>
-      <p:sp>
-        <p:nvSpPr>
-          <p:cNvPr id="3" name="Text 1"/>
-          <p:cNvSpPr txBox="1"/>
-          <p:nvPr/>
-        </p:nvSpPr>
-        <p:spPr>
-          <a:xfrm>
-            <a:off x="548640" y="411480"/>
-            <a:ext cx="7315200" cy="274320"/>
-          </a:xfrm>
-          <a:prstGeom prst="rect">
-            <a:avLst/>
-          </a:prstGeom>
-          <a:noFill/>
-          <a:ln/>
-        </p:spPr>
-        <p:txBody>
-          <a:bodyPr wrap="square" lIns="0" tIns="0" rIns="0" bIns="0" rtlCol="0" anchor="ctr"/>
-          <a:lstStyle/>
-          <a:p>
-            <a:pPr indent="0" marL="0">
-              <a:buNone/>
-            </a:pPr>
-            <a:r>
-              <a:rPr lang="en-US" sz="950" spc="300" kern="0" dirty="0">
-                <a:solidFill>
-                  <a:srgbClr val="0460F5"/>
-                </a:solidFill>
-                <a:latin typeface="Courier New" pitchFamily="34" charset="0"/>
-                <a:ea typeface="Courier New" pitchFamily="34" charset="-122"/>
-                <a:cs typeface="Courier New" pitchFamily="34" charset="-120"/>
-              </a:rPr>
-              <a:t>ПРИЛОЖЕНИЕ · ЕСЛИ СПРОСЯТ</a:t>
-            </a:r>
-            <a:endParaRPr lang="en-US" sz="950" dirty="0"/>
-          </a:p>
-        </p:txBody>
-      </p:sp>
-      <p:sp>
-        <p:nvSpPr>
-          <p:cNvPr id="4" name="Text 2"/>
-          <p:cNvSpPr txBox="1"/>
-          <p:nvPr/>
-        </p:nvSpPr>
-        <p:spPr>
-          <a:xfrm>
-            <a:off x="548640" y="731520"/>
-            <a:ext cx="11091672" cy="1188720"/>
-          </a:xfrm>
-          <a:prstGeom prst="rect">
-            <a:avLst/>
-          </a:prstGeom>
-          <a:noFill/>
-          <a:ln/>
-        </p:spPr>
-        <p:txBody>
-          <a:bodyPr wrap="square" lIns="0" tIns="0" rIns="0" bIns="0" rtlCol="0" anchor="t"/>
-          <a:lstStyle/>
-          <a:p>
-            <a:pPr indent="0" marL="0">
-              <a:buNone/>
-            </a:pPr>
-            <a:r>
-              <a:rPr lang="en-US" sz="2800" b="1" dirty="0">
-                <a:solidFill>
-                  <a:srgbClr val="141A22"/>
-                </a:solidFill>
-                <a:latin typeface="Arial" pitchFamily="34" charset="0"/>
-                <a:ea typeface="Arial" pitchFamily="34" charset="-122"/>
-                <a:cs typeface="Arial" pitchFamily="34" charset="-120"/>
-              </a:rPr>
-              <a:t>Что ещё умеет та же компания</a:t>
-            </a:r>
-            <a:endParaRPr lang="en-US" sz="2800" dirty="0"/>
-          </a:p>
-        </p:txBody>
-      </p:sp>
-      <p:sp>
-        <p:nvSpPr>
-          <p:cNvPr id="5" name="Text 3"/>
-          <p:cNvSpPr txBox="1"/>
-          <p:nvPr/>
-        </p:nvSpPr>
-        <p:spPr>
-          <a:xfrm>
-            <a:off x="10268712" y="6400800"/>
-            <a:ext cx="1371600" cy="274320"/>
-          </a:xfrm>
-          <a:prstGeom prst="rect">
-            <a:avLst/>
-          </a:prstGeom>
-          <a:noFill/>
-          <a:ln/>
-        </p:spPr>
-        <p:txBody>
-          <a:bodyPr wrap="square" lIns="0" tIns="0" rIns="0" bIns="0" rtlCol="0" anchor="ctr"/>
-          <a:lstStyle/>
-          <a:p>
-            <a:pPr algn="r" indent="0" marL="0">
-              <a:buNone/>
-            </a:pPr>
-            <a:r>
-              <a:rPr lang="en-US" sz="900" dirty="0">
-                <a:solidFill>
-                  <a:srgbClr val="8A8E94"/>
-                </a:solidFill>
-                <a:latin typeface="Courier New" pitchFamily="34" charset="0"/>
-                <a:ea typeface="Courier New" pitchFamily="34" charset="-122"/>
-                <a:cs typeface="Courier New" pitchFamily="34" charset="-120"/>
-              </a:rPr>
-              <a:t>13 / 14</a:t>
-            </a:r>
-            <a:endParaRPr lang="en-US" sz="900" dirty="0"/>
-          </a:p>
-        </p:txBody>
-      </p:sp>
-      <p:sp>
-        <p:nvSpPr>
-          <p:cNvPr id="6" name="Shape 4"/>
-          <p:cNvSpPr/>
-          <p:nvPr/>
-        </p:nvSpPr>
-        <p:spPr>
-          <a:xfrm>
-            <a:off x="548640" y="2103120"/>
-            <a:ext cx="2601468" cy="2651760"/>
-          </a:xfrm>
-          <a:prstGeom prst="roundRect">
-            <a:avLst>
-              <a:gd name="adj" fmla="val 6327"/>
-            </a:avLst>
-          </a:prstGeom>
-          <a:solidFill>
-            <a:srgbClr val="F7F7F7"/>
-          </a:solidFill>
-          <a:ln w="12700">
-            <a:solidFill>
-              <a:srgbClr val="F7F7F7"/>
-            </a:solidFill>
-            <a:prstDash val="solid"/>
-          </a:ln>
-        </p:spPr>
-      </p:sp>
-      <p:sp>
-        <p:nvSpPr>
-          <p:cNvPr id="7" name="Text 5"/>
-          <p:cNvSpPr txBox="1"/>
-          <p:nvPr/>
-        </p:nvSpPr>
-        <p:spPr>
-          <a:xfrm>
-            <a:off x="822960" y="2331720"/>
-            <a:ext cx="2052828" cy="274320"/>
-          </a:xfrm>
-          <a:prstGeom prst="rect">
-            <a:avLst/>
-          </a:prstGeom>
-          <a:noFill/>
-          <a:ln/>
-        </p:spPr>
-        <p:txBody>
-          <a:bodyPr wrap="square" lIns="0" tIns="0" rIns="0" bIns="0" rtlCol="0" anchor="ctr"/>
-          <a:lstStyle/>
-          <a:p>
-            <a:pPr indent="0" marL="0">
-              <a:buNone/>
-            </a:pPr>
-            <a:r>
-              <a:rPr lang="en-US" sz="950" spc="200" kern="0" dirty="0">
-                <a:solidFill>
-                  <a:srgbClr val="0460F5"/>
-                </a:solidFill>
-                <a:latin typeface="Courier New" pitchFamily="34" charset="0"/>
-                <a:ea typeface="Courier New" pitchFamily="34" charset="-122"/>
-                <a:cs typeface="Courier New" pitchFamily="34" charset="-120"/>
-              </a:rPr>
-              <a:t>ОПЦИОН 1</a:t>
-            </a:r>
-            <a:endParaRPr lang="en-US" sz="950" dirty="0"/>
-          </a:p>
-        </p:txBody>
-      </p:sp>
-      <p:sp>
-        <p:nvSpPr>
-          <p:cNvPr id="8" name="Text 6"/>
-          <p:cNvSpPr txBox="1"/>
-          <p:nvPr/>
-        </p:nvSpPr>
-        <p:spPr>
-          <a:xfrm>
-            <a:off x="822960" y="2651760"/>
-            <a:ext cx="2052828" cy="411480"/>
-          </a:xfrm>
-          <a:prstGeom prst="rect">
-            <a:avLst/>
-          </a:prstGeom>
-          <a:noFill/>
-          <a:ln/>
-        </p:spPr>
-        <p:txBody>
-          <a:bodyPr wrap="square" lIns="0" tIns="0" rIns="0" bIns="0" rtlCol="0" anchor="ctr"/>
-          <a:lstStyle/>
-          <a:p>
-            <a:pPr indent="0" marL="0">
-              <a:buNone/>
-            </a:pPr>
-            <a:r>
-              <a:rPr lang="en-US" sz="1600" b="1" dirty="0">
-                <a:solidFill>
-                  <a:srgbClr val="141A22"/>
-                </a:solidFill>
-                <a:latin typeface="Arial" pitchFamily="34" charset="0"/>
-                <a:ea typeface="Arial" pitchFamily="34" charset="-122"/>
-                <a:cs typeface="Arial" pitchFamily="34" charset="-120"/>
-              </a:rPr>
-              <a:t>Роботы</a:t>
-            </a:r>
-            <a:endParaRPr lang="en-US" sz="1600" dirty="0"/>
-          </a:p>
-        </p:txBody>
-      </p:sp>
-      <p:sp>
-        <p:nvSpPr>
-          <p:cNvPr id="9" name="Text 7"/>
-          <p:cNvSpPr txBox="1"/>
-          <p:nvPr/>
-        </p:nvSpPr>
-        <p:spPr>
-          <a:xfrm>
-            <a:off x="822960" y="3108960"/>
-            <a:ext cx="2052828" cy="1463040"/>
-          </a:xfrm>
-          <a:prstGeom prst="rect">
-            <a:avLst/>
-          </a:prstGeom>
-          <a:noFill/>
-          <a:ln/>
-        </p:spPr>
-        <p:txBody>
-          <a:bodyPr wrap="square" lIns="0" tIns="0" rIns="0" bIns="0" rtlCol="0" anchor="t"/>
-          <a:lstStyle/>
-          <a:p>
-            <a:pPr indent="0" marL="0">
-              <a:buNone/>
-            </a:pPr>
-            <a:r>
-              <a:rPr lang="en-US" sz="1250" dirty="0">
-                <a:solidFill>
-                  <a:srgbClr val="5C6067"/>
-                </a:solidFill>
-                <a:latin typeface="Arial" pitchFamily="34" charset="0"/>
-                <a:ea typeface="Arial" pitchFamily="34" charset="-122"/>
-                <a:cs typeface="Arial" pitchFamily="34" charset="-120"/>
-              </a:rPr>
-              <a:t>Роботы-инспекторы на подстанциях, которые мы спроектировали. Китайская сетевая компания State Grid покупает 8500 роботов в год; поставщик — DEEP Robotics. Годы 3–5.</a:t>
-            </a:r>
-            <a:endParaRPr lang="en-US" sz="1250" dirty="0"/>
-          </a:p>
-        </p:txBody>
-      </p:sp>
-      <p:sp>
-        <p:nvSpPr>
-          <p:cNvPr id="10" name="Shape 8"/>
-          <p:cNvSpPr/>
-          <p:nvPr/>
-        </p:nvSpPr>
-        <p:spPr>
-          <a:xfrm>
-            <a:off x="3378708" y="2103120"/>
-            <a:ext cx="2601468" cy="2651760"/>
-          </a:xfrm>
-          <a:prstGeom prst="roundRect">
-            <a:avLst>
-              <a:gd name="adj" fmla="val 6327"/>
-            </a:avLst>
-          </a:prstGeom>
-          <a:solidFill>
-            <a:srgbClr val="F7F7F7"/>
-          </a:solidFill>
-          <a:ln w="12700">
-            <a:solidFill>
-              <a:srgbClr val="F7F7F7"/>
-            </a:solidFill>
-            <a:prstDash val="solid"/>
-          </a:ln>
-        </p:spPr>
-      </p:sp>
-      <p:sp>
-        <p:nvSpPr>
-          <p:cNvPr id="11" name="Text 9"/>
-          <p:cNvSpPr txBox="1"/>
-          <p:nvPr/>
-        </p:nvSpPr>
-        <p:spPr>
-          <a:xfrm>
-            <a:off x="3653028" y="2331720"/>
-            <a:ext cx="2052828" cy="274320"/>
-          </a:xfrm>
-          <a:prstGeom prst="rect">
-            <a:avLst/>
-          </a:prstGeom>
-          <a:noFill/>
-          <a:ln/>
-        </p:spPr>
-        <p:txBody>
-          <a:bodyPr wrap="square" lIns="0" tIns="0" rIns="0" bIns="0" rtlCol="0" anchor="ctr"/>
-          <a:lstStyle/>
-          <a:p>
-            <a:pPr indent="0" marL="0">
-              <a:buNone/>
-            </a:pPr>
-            <a:r>
-              <a:rPr lang="en-US" sz="950" spc="200" kern="0" dirty="0">
-                <a:solidFill>
-                  <a:srgbClr val="0460F5"/>
-                </a:solidFill>
-                <a:latin typeface="Courier New" pitchFamily="34" charset="0"/>
-                <a:ea typeface="Courier New" pitchFamily="34" charset="-122"/>
-                <a:cs typeface="Courier New" pitchFamily="34" charset="-120"/>
-              </a:rPr>
-              <a:t>ОПЦИОН 2</a:t>
-            </a:r>
-            <a:endParaRPr lang="en-US" sz="950" dirty="0"/>
-          </a:p>
-        </p:txBody>
-      </p:sp>
-      <p:sp>
-        <p:nvSpPr>
-          <p:cNvPr id="12" name="Text 10"/>
-          <p:cNvSpPr txBox="1"/>
-          <p:nvPr/>
-        </p:nvSpPr>
-        <p:spPr>
-          <a:xfrm>
-            <a:off x="3653028" y="2651760"/>
-            <a:ext cx="2052828" cy="411480"/>
-          </a:xfrm>
-          <a:prstGeom prst="rect">
-            <a:avLst/>
-          </a:prstGeom>
-          <a:noFill/>
-          <a:ln/>
-        </p:spPr>
-        <p:txBody>
-          <a:bodyPr wrap="square" lIns="0" tIns="0" rIns="0" bIns="0" rtlCol="0" anchor="ctr"/>
-          <a:lstStyle/>
-          <a:p>
-            <a:pPr indent="0" marL="0">
-              <a:buNone/>
-            </a:pPr>
-            <a:r>
-              <a:rPr lang="en-US" sz="1600" b="1" dirty="0">
-                <a:solidFill>
-                  <a:srgbClr val="141A22"/>
-                </a:solidFill>
-                <a:latin typeface="Arial" pitchFamily="34" charset="0"/>
-                <a:ea typeface="Arial" pitchFamily="34" charset="-122"/>
-                <a:cs typeface="Arial" pitchFamily="34" charset="-120"/>
-              </a:rPr>
-              <a:t>Стройка</a:t>
-            </a:r>
-            <a:endParaRPr lang="en-US" sz="1600" dirty="0"/>
-          </a:p>
-        </p:txBody>
-      </p:sp>
-      <p:sp>
-        <p:nvSpPr>
-          <p:cNvPr id="13" name="Text 11"/>
-          <p:cNvSpPr txBox="1"/>
-          <p:nvPr/>
-        </p:nvSpPr>
-        <p:spPr>
-          <a:xfrm>
-            <a:off x="3653028" y="3108960"/>
-            <a:ext cx="2052828" cy="1463040"/>
-          </a:xfrm>
-          <a:prstGeom prst="rect">
-            <a:avLst/>
-          </a:prstGeom>
-          <a:noFill/>
-          <a:ln/>
-        </p:spPr>
-        <p:txBody>
-          <a:bodyPr wrap="square" lIns="0" tIns="0" rIns="0" bIns="0" rtlCol="0" anchor="t"/>
-          <a:lstStyle/>
-          <a:p>
-            <a:pPr indent="0" marL="0">
-              <a:buNone/>
-            </a:pPr>
-            <a:r>
-              <a:rPr lang="en-US" sz="1250" dirty="0">
-                <a:solidFill>
-                  <a:srgbClr val="5C6067"/>
-                </a:solidFill>
-                <a:latin typeface="Arial" pitchFamily="34" charset="0"/>
-                <a:ea typeface="Arial" pitchFamily="34" charset="-122"/>
-                <a:cs typeface="Arial" pitchFamily="34" charset="-120"/>
-              </a:rPr>
-              <a:t>Инженер, который проектировал, сопровождает стройку и приёмку: ещё 15–35% к гонорару с того же проекта.</a:t>
-            </a:r>
-            <a:endParaRPr lang="en-US" sz="1250" dirty="0"/>
-          </a:p>
-        </p:txBody>
-      </p:sp>
-      <p:sp>
-        <p:nvSpPr>
-          <p:cNvPr id="14" name="Shape 12"/>
-          <p:cNvSpPr/>
-          <p:nvPr/>
-        </p:nvSpPr>
-        <p:spPr>
-          <a:xfrm>
-            <a:off x="6208776" y="2103120"/>
-            <a:ext cx="2601468" cy="2651760"/>
-          </a:xfrm>
-          <a:prstGeom prst="roundRect">
-            <a:avLst>
-              <a:gd name="adj" fmla="val 6327"/>
-            </a:avLst>
-          </a:prstGeom>
-          <a:solidFill>
-            <a:srgbClr val="F7F7F7"/>
-          </a:solidFill>
-          <a:ln w="12700">
-            <a:solidFill>
-              <a:srgbClr val="F7F7F7"/>
-            </a:solidFill>
-            <a:prstDash val="solid"/>
-          </a:ln>
-        </p:spPr>
-      </p:sp>
-      <p:sp>
-        <p:nvSpPr>
-          <p:cNvPr id="15" name="Text 13"/>
-          <p:cNvSpPr txBox="1"/>
-          <p:nvPr/>
-        </p:nvSpPr>
-        <p:spPr>
-          <a:xfrm>
-            <a:off x="6483096" y="2331720"/>
-            <a:ext cx="2052828" cy="274320"/>
-          </a:xfrm>
-          <a:prstGeom prst="rect">
-            <a:avLst/>
-          </a:prstGeom>
-          <a:noFill/>
-          <a:ln/>
-        </p:spPr>
-        <p:txBody>
-          <a:bodyPr wrap="square" lIns="0" tIns="0" rIns="0" bIns="0" rtlCol="0" anchor="ctr"/>
-          <a:lstStyle/>
-          <a:p>
-            <a:pPr indent="0" marL="0">
-              <a:buNone/>
-            </a:pPr>
-            <a:r>
-              <a:rPr lang="en-US" sz="950" spc="200" kern="0" dirty="0">
-                <a:solidFill>
-                  <a:srgbClr val="0460F5"/>
-                </a:solidFill>
-                <a:latin typeface="Courier New" pitchFamily="34" charset="0"/>
-                <a:ea typeface="Courier New" pitchFamily="34" charset="-122"/>
-                <a:cs typeface="Courier New" pitchFamily="34" charset="-120"/>
-              </a:rPr>
-              <a:t>ОПЦИОН 3</a:t>
-            </a:r>
-            <a:endParaRPr lang="en-US" sz="950" dirty="0"/>
-          </a:p>
-        </p:txBody>
-      </p:sp>
-      <p:sp>
-        <p:nvSpPr>
-          <p:cNvPr id="16" name="Text 14"/>
-          <p:cNvSpPr txBox="1"/>
-          <p:nvPr/>
-        </p:nvSpPr>
-        <p:spPr>
-          <a:xfrm>
-            <a:off x="6483096" y="2651760"/>
-            <a:ext cx="2052828" cy="411480"/>
-          </a:xfrm>
-          <a:prstGeom prst="rect">
-            <a:avLst/>
-          </a:prstGeom>
-          <a:noFill/>
-          <a:ln/>
-        </p:spPr>
-        <p:txBody>
-          <a:bodyPr wrap="square" lIns="0" tIns="0" rIns="0" bIns="0" rtlCol="0" anchor="ctr"/>
-          <a:lstStyle/>
-          <a:p>
-            <a:pPr indent="0" marL="0">
-              <a:buNone/>
-            </a:pPr>
-            <a:r>
-              <a:rPr lang="en-US" sz="1600" b="1" dirty="0">
-                <a:solidFill>
-                  <a:srgbClr val="141A22"/>
-                </a:solidFill>
-                <a:latin typeface="Arial" pitchFamily="34" charset="0"/>
-                <a:ea typeface="Arial" pitchFamily="34" charset="-122"/>
-                <a:cs typeface="Arial" pitchFamily="34" charset="-120"/>
-              </a:rPr>
-              <a:t>Обучение</a:t>
-            </a:r>
-            <a:endParaRPr lang="en-US" sz="1600" dirty="0"/>
-          </a:p>
-        </p:txBody>
-      </p:sp>
-      <p:sp>
-        <p:nvSpPr>
-          <p:cNvPr id="17" name="Text 15"/>
-          <p:cNvSpPr txBox="1"/>
-          <p:nvPr/>
-        </p:nvSpPr>
-        <p:spPr>
-          <a:xfrm>
-            <a:off x="6483096" y="3108960"/>
-            <a:ext cx="2052828" cy="1463040"/>
-          </a:xfrm>
-          <a:prstGeom prst="rect">
-            <a:avLst/>
-          </a:prstGeom>
-          <a:noFill/>
-          <a:ln/>
-        </p:spPr>
-        <p:txBody>
-          <a:bodyPr wrap="square" lIns="0" tIns="0" rIns="0" bIns="0" rtlCol="0" anchor="t"/>
-          <a:lstStyle/>
-          <a:p>
-            <a:pPr indent="0" marL="0">
-              <a:buNone/>
-            </a:pPr>
-            <a:r>
-              <a:rPr lang="en-US" sz="1250" dirty="0">
-                <a:solidFill>
-                  <a:srgbClr val="5C6067"/>
-                </a:solidFill>
-                <a:latin typeface="Arial" pitchFamily="34" charset="0"/>
-                <a:ea typeface="Arial" pitchFamily="34" charset="-122"/>
-                <a:cs typeface="Arial" pitchFamily="34" charset="-120"/>
-              </a:rPr>
-              <a:t>Обучение инженеров под квоты: Саудовская Аравия требует 30% граждан на инженерных позициях. Наш ИИ быстро доводит выпускника до рабочего инженера.</a:t>
-            </a:r>
-            <a:endParaRPr lang="en-US" sz="1250" dirty="0"/>
-          </a:p>
-        </p:txBody>
-      </p:sp>
-      <p:sp>
-        <p:nvSpPr>
-          <p:cNvPr id="18" name="Shape 16"/>
-          <p:cNvSpPr/>
-          <p:nvPr/>
-        </p:nvSpPr>
-        <p:spPr>
-          <a:xfrm>
-            <a:off x="9038844" y="2103120"/>
-            <a:ext cx="2601468" cy="2651760"/>
-          </a:xfrm>
-          <a:prstGeom prst="roundRect">
-            <a:avLst>
-              <a:gd name="adj" fmla="val 6327"/>
-            </a:avLst>
-          </a:prstGeom>
-          <a:solidFill>
-            <a:srgbClr val="F7F7F7"/>
-          </a:solidFill>
-          <a:ln w="12700">
-            <a:solidFill>
-              <a:srgbClr val="F7F7F7"/>
-            </a:solidFill>
-            <a:prstDash val="solid"/>
-          </a:ln>
-        </p:spPr>
-      </p:sp>
-      <p:sp>
-        <p:nvSpPr>
-          <p:cNvPr id="19" name="Text 17"/>
-          <p:cNvSpPr txBox="1"/>
-          <p:nvPr/>
-        </p:nvSpPr>
-        <p:spPr>
-          <a:xfrm>
-            <a:off x="9313164" y="2331720"/>
-            <a:ext cx="2052828" cy="274320"/>
-          </a:xfrm>
-          <a:prstGeom prst="rect">
-            <a:avLst/>
-          </a:prstGeom>
-          <a:noFill/>
-          <a:ln/>
-        </p:spPr>
-        <p:txBody>
-          <a:bodyPr wrap="square" lIns="0" tIns="0" rIns="0" bIns="0" rtlCol="0" anchor="ctr"/>
-          <a:lstStyle/>
-          <a:p>
-            <a:pPr indent="0" marL="0">
-              <a:buNone/>
-            </a:pPr>
-            <a:r>
-              <a:rPr lang="en-US" sz="950" spc="200" kern="0" dirty="0">
-                <a:solidFill>
-                  <a:srgbClr val="0460F5"/>
-                </a:solidFill>
-                <a:latin typeface="Courier New" pitchFamily="34" charset="0"/>
-                <a:ea typeface="Courier New" pitchFamily="34" charset="-122"/>
-                <a:cs typeface="Courier New" pitchFamily="34" charset="-120"/>
-              </a:rPr>
-              <a:t>ОПЦИОН 4</a:t>
-            </a:r>
-            <a:endParaRPr lang="en-US" sz="950" dirty="0"/>
-          </a:p>
-        </p:txBody>
-      </p:sp>
-      <p:sp>
-        <p:nvSpPr>
-          <p:cNvPr id="20" name="Text 18"/>
-          <p:cNvSpPr txBox="1"/>
-          <p:nvPr/>
-        </p:nvSpPr>
-        <p:spPr>
-          <a:xfrm>
-            <a:off x="9313164" y="2651760"/>
-            <a:ext cx="2052828" cy="411480"/>
-          </a:xfrm>
-          <a:prstGeom prst="rect">
-            <a:avLst/>
-          </a:prstGeom>
-          <a:noFill/>
-          <a:ln/>
-        </p:spPr>
-        <p:txBody>
-          <a:bodyPr wrap="square" lIns="0" tIns="0" rIns="0" bIns="0" rtlCol="0" anchor="ctr"/>
-          <a:lstStyle/>
-          <a:p>
-            <a:pPr indent="0" marL="0">
-              <a:buNone/>
-            </a:pPr>
-            <a:r>
-              <a:rPr lang="en-US" sz="1600" b="1" dirty="0">
-                <a:solidFill>
-                  <a:srgbClr val="141A22"/>
-                </a:solidFill>
-                <a:latin typeface="Arial" pitchFamily="34" charset="0"/>
-                <a:ea typeface="Arial" pitchFamily="34" charset="-122"/>
-                <a:cs typeface="Arial" pitchFamily="34" charset="-120"/>
-              </a:rPr>
-              <a:t>Данные</a:t>
-            </a:r>
-            <a:endParaRPr lang="en-US" sz="1600" dirty="0"/>
-          </a:p>
-        </p:txBody>
-      </p:sp>
-      <p:sp>
-        <p:nvSpPr>
-          <p:cNvPr id="21" name="Text 19"/>
-          <p:cNvSpPr txBox="1"/>
-          <p:nvPr/>
-        </p:nvSpPr>
-        <p:spPr>
-          <a:xfrm>
-            <a:off x="9313164" y="3108960"/>
-            <a:ext cx="2052828" cy="1463040"/>
-          </a:xfrm>
-          <a:prstGeom prst="rect">
-            <a:avLst/>
-          </a:prstGeom>
-          <a:noFill/>
-          <a:ln/>
-        </p:spPr>
-        <p:txBody>
-          <a:bodyPr wrap="square" lIns="0" tIns="0" rIns="0" bIns="0" rtlCol="0" anchor="t"/>
-          <a:lstStyle/>
-          <a:p>
-            <a:pPr indent="0" marL="0">
-              <a:buNone/>
-            </a:pPr>
-            <a:r>
-              <a:rPr lang="en-US" sz="1250" dirty="0">
-                <a:solidFill>
-                  <a:srgbClr val="5C6067"/>
-                </a:solidFill>
-                <a:latin typeface="Arial" pitchFamily="34" charset="0"/>
-                <a:ea typeface="Arial" pitchFamily="34" charset="-122"/>
-                <a:cs typeface="Arial" pitchFamily="34" charset="-120"/>
-              </a:rPr>
-              <a:t>База данных о подключениях: сотни проектов в год — данные, которых нет ни у кого. Enverus купил Pearl Street именно за такие данные.</a:t>
-            </a:r>
-            <a:endParaRPr lang="en-US" sz="1250" dirty="0"/>
-          </a:p>
-        </p:txBody>
-      </p:sp>
-      <p:sp>
-        <p:nvSpPr>
-          <p:cNvPr id="22" name="Text 20"/>
-          <p:cNvSpPr txBox="1"/>
-          <p:nvPr/>
-        </p:nvSpPr>
-        <p:spPr>
-          <a:xfrm>
-            <a:off x="548640" y="5029200"/>
-            <a:ext cx="9445752" cy="457200"/>
-          </a:xfrm>
-          <a:prstGeom prst="rect">
-            <a:avLst/>
-          </a:prstGeom>
-          <a:noFill/>
-          <a:ln/>
-        </p:spPr>
-        <p:txBody>
-          <a:bodyPr wrap="square" lIns="0" tIns="0" rIns="0" bIns="0" rtlCol="0" anchor="t"/>
-          <a:lstStyle/>
-          <a:p>
-            <a:pPr indent="0" marL="0">
-              <a:buNone/>
-            </a:pPr>
-            <a:r>
-              <a:rPr lang="en-US" sz="1000" dirty="0">
-                <a:solidFill>
-                  <a:srgbClr val="8A8E94"/>
-                </a:solidFill>
-                <a:latin typeface="Arial" pitchFamily="34" charset="0"/>
-                <a:ea typeface="Arial" pitchFamily="34" charset="-122"/>
-                <a:cs typeface="Arial" pitchFamily="34" charset="-120"/>
-              </a:rPr>
-              <a:t>В выручку раунда заложено только проектирование. Остальное вводим по одному и только после измерения.</a:t>
-            </a:r>
-            <a:endParaRPr lang="en-US" sz="1000" dirty="0"/>
           </a:p>
         </p:txBody>
       </p:sp>
@@ -5427,7 +5375,7 @@
                 <a:ea typeface="Courier New" pitchFamily="34" charset="-122"/>
                 <a:cs typeface="Courier New" pitchFamily="34" charset="-120"/>
               </a:rPr>
-              <a:t>ПРИЛОЖЕНИЕ · ИСТОЧНИКИ</a:t>
+              <a:t>ПРИЛОЖЕНИЕ · ЕСЛИ СПРОСЯТ</a:t>
             </a:r>
             <a:endParaRPr lang="en-US" sz="950" dirty="0"/>
           </a:p>
@@ -5466,7 +5414,7 @@
                 <a:ea typeface="Arial" pitchFamily="34" charset="-122"/>
                 <a:cs typeface="Arial" pitchFamily="34" charset="-120"/>
               </a:rPr>
-              <a:t>Откуда цифры</a:t>
+              <a:t>Что ещё умеет та же компания</a:t>
             </a:r>
             <a:endParaRPr lang="en-US" sz="2800" dirty="0"/>
           </a:p>
@@ -5505,7 +5453,810 @@
                 <a:ea typeface="Courier New" pitchFamily="34" charset="-122"/>
                 <a:cs typeface="Courier New" pitchFamily="34" charset="-120"/>
               </a:rPr>
-              <a:t>14 / 14</a:t>
+              <a:t>14 / 15</a:t>
+            </a:r>
+            <a:endParaRPr lang="en-US" sz="900" dirty="0"/>
+          </a:p>
+        </p:txBody>
+      </p:sp>
+      <p:sp>
+        <p:nvSpPr>
+          <p:cNvPr id="6" name="Shape 4"/>
+          <p:cNvSpPr/>
+          <p:nvPr/>
+        </p:nvSpPr>
+        <p:spPr>
+          <a:xfrm>
+            <a:off x="548640" y="2103120"/>
+            <a:ext cx="2601468" cy="2651760"/>
+          </a:xfrm>
+          <a:prstGeom prst="roundRect">
+            <a:avLst>
+              <a:gd name="adj" fmla="val 6327"/>
+            </a:avLst>
+          </a:prstGeom>
+          <a:solidFill>
+            <a:srgbClr val="F7F7F7"/>
+          </a:solidFill>
+          <a:ln w="12700">
+            <a:solidFill>
+              <a:srgbClr val="F7F7F7"/>
+            </a:solidFill>
+            <a:prstDash val="solid"/>
+          </a:ln>
+        </p:spPr>
+      </p:sp>
+      <p:sp>
+        <p:nvSpPr>
+          <p:cNvPr id="7" name="Text 5"/>
+          <p:cNvSpPr txBox="1"/>
+          <p:nvPr/>
+        </p:nvSpPr>
+        <p:spPr>
+          <a:xfrm>
+            <a:off x="822960" y="2331720"/>
+            <a:ext cx="2052828" cy="274320"/>
+          </a:xfrm>
+          <a:prstGeom prst="rect">
+            <a:avLst/>
+          </a:prstGeom>
+          <a:noFill/>
+          <a:ln/>
+        </p:spPr>
+        <p:txBody>
+          <a:bodyPr wrap="square" lIns="0" tIns="0" rIns="0" bIns="0" rtlCol="0" anchor="ctr"/>
+          <a:lstStyle/>
+          <a:p>
+            <a:pPr indent="0" marL="0">
+              <a:buNone/>
+            </a:pPr>
+            <a:r>
+              <a:rPr lang="en-US" sz="950" spc="200" kern="0" dirty="0">
+                <a:solidFill>
+                  <a:srgbClr val="0460F5"/>
+                </a:solidFill>
+                <a:latin typeface="Courier New" pitchFamily="34" charset="0"/>
+                <a:ea typeface="Courier New" pitchFamily="34" charset="-122"/>
+                <a:cs typeface="Courier New" pitchFamily="34" charset="-120"/>
+              </a:rPr>
+              <a:t>ОПЦИОН 1</a:t>
+            </a:r>
+            <a:endParaRPr lang="en-US" sz="950" dirty="0"/>
+          </a:p>
+        </p:txBody>
+      </p:sp>
+      <p:sp>
+        <p:nvSpPr>
+          <p:cNvPr id="8" name="Text 6"/>
+          <p:cNvSpPr txBox="1"/>
+          <p:nvPr/>
+        </p:nvSpPr>
+        <p:spPr>
+          <a:xfrm>
+            <a:off x="822960" y="2651760"/>
+            <a:ext cx="2052828" cy="411480"/>
+          </a:xfrm>
+          <a:prstGeom prst="rect">
+            <a:avLst/>
+          </a:prstGeom>
+          <a:noFill/>
+          <a:ln/>
+        </p:spPr>
+        <p:txBody>
+          <a:bodyPr wrap="square" lIns="0" tIns="0" rIns="0" bIns="0" rtlCol="0" anchor="ctr"/>
+          <a:lstStyle/>
+          <a:p>
+            <a:pPr indent="0" marL="0">
+              <a:buNone/>
+            </a:pPr>
+            <a:r>
+              <a:rPr lang="en-US" sz="1600" b="1" dirty="0">
+                <a:solidFill>
+                  <a:srgbClr val="141A22"/>
+                </a:solidFill>
+                <a:latin typeface="Arial" pitchFamily="34" charset="0"/>
+                <a:ea typeface="Arial" pitchFamily="34" charset="-122"/>
+                <a:cs typeface="Arial" pitchFamily="34" charset="-120"/>
+              </a:rPr>
+              <a:t>Роботы</a:t>
+            </a:r>
+            <a:endParaRPr lang="en-US" sz="1600" dirty="0"/>
+          </a:p>
+        </p:txBody>
+      </p:sp>
+      <p:sp>
+        <p:nvSpPr>
+          <p:cNvPr id="9" name="Text 7"/>
+          <p:cNvSpPr txBox="1"/>
+          <p:nvPr/>
+        </p:nvSpPr>
+        <p:spPr>
+          <a:xfrm>
+            <a:off x="822960" y="3108960"/>
+            <a:ext cx="2052828" cy="1463040"/>
+          </a:xfrm>
+          <a:prstGeom prst="rect">
+            <a:avLst/>
+          </a:prstGeom>
+          <a:noFill/>
+          <a:ln/>
+        </p:spPr>
+        <p:txBody>
+          <a:bodyPr wrap="square" lIns="0" tIns="0" rIns="0" bIns="0" rtlCol="0" anchor="t"/>
+          <a:lstStyle/>
+          <a:p>
+            <a:pPr indent="0" marL="0">
+              <a:buNone/>
+            </a:pPr>
+            <a:r>
+              <a:rPr lang="en-US" sz="1250" dirty="0">
+                <a:solidFill>
+                  <a:srgbClr val="5C6067"/>
+                </a:solidFill>
+                <a:latin typeface="Arial" pitchFamily="34" charset="0"/>
+                <a:ea typeface="Arial" pitchFamily="34" charset="-122"/>
+                <a:cs typeface="Arial" pitchFamily="34" charset="-120"/>
+              </a:rPr>
+              <a:t>Роботы-инспекторы на подстанциях, которые мы спроектировали. Китайская сетевая компания State Grid покупает 8500 роботов в год; поставщик — DEEP Robotics. Годы 3–5.</a:t>
+            </a:r>
+            <a:endParaRPr lang="en-US" sz="1250" dirty="0"/>
+          </a:p>
+        </p:txBody>
+      </p:sp>
+      <p:sp>
+        <p:nvSpPr>
+          <p:cNvPr id="10" name="Shape 8"/>
+          <p:cNvSpPr/>
+          <p:nvPr/>
+        </p:nvSpPr>
+        <p:spPr>
+          <a:xfrm>
+            <a:off x="3378708" y="2103120"/>
+            <a:ext cx="2601468" cy="2651760"/>
+          </a:xfrm>
+          <a:prstGeom prst="roundRect">
+            <a:avLst>
+              <a:gd name="adj" fmla="val 6327"/>
+            </a:avLst>
+          </a:prstGeom>
+          <a:solidFill>
+            <a:srgbClr val="F7F7F7"/>
+          </a:solidFill>
+          <a:ln w="12700">
+            <a:solidFill>
+              <a:srgbClr val="F7F7F7"/>
+            </a:solidFill>
+            <a:prstDash val="solid"/>
+          </a:ln>
+        </p:spPr>
+      </p:sp>
+      <p:sp>
+        <p:nvSpPr>
+          <p:cNvPr id="11" name="Text 9"/>
+          <p:cNvSpPr txBox="1"/>
+          <p:nvPr/>
+        </p:nvSpPr>
+        <p:spPr>
+          <a:xfrm>
+            <a:off x="3653028" y="2331720"/>
+            <a:ext cx="2052828" cy="274320"/>
+          </a:xfrm>
+          <a:prstGeom prst="rect">
+            <a:avLst/>
+          </a:prstGeom>
+          <a:noFill/>
+          <a:ln/>
+        </p:spPr>
+        <p:txBody>
+          <a:bodyPr wrap="square" lIns="0" tIns="0" rIns="0" bIns="0" rtlCol="0" anchor="ctr"/>
+          <a:lstStyle/>
+          <a:p>
+            <a:pPr indent="0" marL="0">
+              <a:buNone/>
+            </a:pPr>
+            <a:r>
+              <a:rPr lang="en-US" sz="950" spc="200" kern="0" dirty="0">
+                <a:solidFill>
+                  <a:srgbClr val="0460F5"/>
+                </a:solidFill>
+                <a:latin typeface="Courier New" pitchFamily="34" charset="0"/>
+                <a:ea typeface="Courier New" pitchFamily="34" charset="-122"/>
+                <a:cs typeface="Courier New" pitchFamily="34" charset="-120"/>
+              </a:rPr>
+              <a:t>ОПЦИОН 2</a:t>
+            </a:r>
+            <a:endParaRPr lang="en-US" sz="950" dirty="0"/>
+          </a:p>
+        </p:txBody>
+      </p:sp>
+      <p:sp>
+        <p:nvSpPr>
+          <p:cNvPr id="12" name="Text 10"/>
+          <p:cNvSpPr txBox="1"/>
+          <p:nvPr/>
+        </p:nvSpPr>
+        <p:spPr>
+          <a:xfrm>
+            <a:off x="3653028" y="2651760"/>
+            <a:ext cx="2052828" cy="411480"/>
+          </a:xfrm>
+          <a:prstGeom prst="rect">
+            <a:avLst/>
+          </a:prstGeom>
+          <a:noFill/>
+          <a:ln/>
+        </p:spPr>
+        <p:txBody>
+          <a:bodyPr wrap="square" lIns="0" tIns="0" rIns="0" bIns="0" rtlCol="0" anchor="ctr"/>
+          <a:lstStyle/>
+          <a:p>
+            <a:pPr indent="0" marL="0">
+              <a:buNone/>
+            </a:pPr>
+            <a:r>
+              <a:rPr lang="en-US" sz="1600" b="1" dirty="0">
+                <a:solidFill>
+                  <a:srgbClr val="141A22"/>
+                </a:solidFill>
+                <a:latin typeface="Arial" pitchFamily="34" charset="0"/>
+                <a:ea typeface="Arial" pitchFamily="34" charset="-122"/>
+                <a:cs typeface="Arial" pitchFamily="34" charset="-120"/>
+              </a:rPr>
+              <a:t>Стройка</a:t>
+            </a:r>
+            <a:endParaRPr lang="en-US" sz="1600" dirty="0"/>
+          </a:p>
+        </p:txBody>
+      </p:sp>
+      <p:sp>
+        <p:nvSpPr>
+          <p:cNvPr id="13" name="Text 11"/>
+          <p:cNvSpPr txBox="1"/>
+          <p:nvPr/>
+        </p:nvSpPr>
+        <p:spPr>
+          <a:xfrm>
+            <a:off x="3653028" y="3108960"/>
+            <a:ext cx="2052828" cy="1463040"/>
+          </a:xfrm>
+          <a:prstGeom prst="rect">
+            <a:avLst/>
+          </a:prstGeom>
+          <a:noFill/>
+          <a:ln/>
+        </p:spPr>
+        <p:txBody>
+          <a:bodyPr wrap="square" lIns="0" tIns="0" rIns="0" bIns="0" rtlCol="0" anchor="t"/>
+          <a:lstStyle/>
+          <a:p>
+            <a:pPr indent="0" marL="0">
+              <a:buNone/>
+            </a:pPr>
+            <a:r>
+              <a:rPr lang="en-US" sz="1250" dirty="0">
+                <a:solidFill>
+                  <a:srgbClr val="5C6067"/>
+                </a:solidFill>
+                <a:latin typeface="Arial" pitchFamily="34" charset="0"/>
+                <a:ea typeface="Arial" pitchFamily="34" charset="-122"/>
+                <a:cs typeface="Arial" pitchFamily="34" charset="-120"/>
+              </a:rPr>
+              <a:t>Инженер, который проектировал, сопровождает стройку и приёмку: ещё 15–35% к гонорару с того же проекта.</a:t>
+            </a:r>
+            <a:endParaRPr lang="en-US" sz="1250" dirty="0"/>
+          </a:p>
+        </p:txBody>
+      </p:sp>
+      <p:sp>
+        <p:nvSpPr>
+          <p:cNvPr id="14" name="Shape 12"/>
+          <p:cNvSpPr/>
+          <p:nvPr/>
+        </p:nvSpPr>
+        <p:spPr>
+          <a:xfrm>
+            <a:off x="6208776" y="2103120"/>
+            <a:ext cx="2601468" cy="2651760"/>
+          </a:xfrm>
+          <a:prstGeom prst="roundRect">
+            <a:avLst>
+              <a:gd name="adj" fmla="val 6327"/>
+            </a:avLst>
+          </a:prstGeom>
+          <a:solidFill>
+            <a:srgbClr val="F7F7F7"/>
+          </a:solidFill>
+          <a:ln w="12700">
+            <a:solidFill>
+              <a:srgbClr val="F7F7F7"/>
+            </a:solidFill>
+            <a:prstDash val="solid"/>
+          </a:ln>
+        </p:spPr>
+      </p:sp>
+      <p:sp>
+        <p:nvSpPr>
+          <p:cNvPr id="15" name="Text 13"/>
+          <p:cNvSpPr txBox="1"/>
+          <p:nvPr/>
+        </p:nvSpPr>
+        <p:spPr>
+          <a:xfrm>
+            <a:off x="6483096" y="2331720"/>
+            <a:ext cx="2052828" cy="274320"/>
+          </a:xfrm>
+          <a:prstGeom prst="rect">
+            <a:avLst/>
+          </a:prstGeom>
+          <a:noFill/>
+          <a:ln/>
+        </p:spPr>
+        <p:txBody>
+          <a:bodyPr wrap="square" lIns="0" tIns="0" rIns="0" bIns="0" rtlCol="0" anchor="ctr"/>
+          <a:lstStyle/>
+          <a:p>
+            <a:pPr indent="0" marL="0">
+              <a:buNone/>
+            </a:pPr>
+            <a:r>
+              <a:rPr lang="en-US" sz="950" spc="200" kern="0" dirty="0">
+                <a:solidFill>
+                  <a:srgbClr val="0460F5"/>
+                </a:solidFill>
+                <a:latin typeface="Courier New" pitchFamily="34" charset="0"/>
+                <a:ea typeface="Courier New" pitchFamily="34" charset="-122"/>
+                <a:cs typeface="Courier New" pitchFamily="34" charset="-120"/>
+              </a:rPr>
+              <a:t>ОПЦИОН 3</a:t>
+            </a:r>
+            <a:endParaRPr lang="en-US" sz="950" dirty="0"/>
+          </a:p>
+        </p:txBody>
+      </p:sp>
+      <p:sp>
+        <p:nvSpPr>
+          <p:cNvPr id="16" name="Text 14"/>
+          <p:cNvSpPr txBox="1"/>
+          <p:nvPr/>
+        </p:nvSpPr>
+        <p:spPr>
+          <a:xfrm>
+            <a:off x="6483096" y="2651760"/>
+            <a:ext cx="2052828" cy="411480"/>
+          </a:xfrm>
+          <a:prstGeom prst="rect">
+            <a:avLst/>
+          </a:prstGeom>
+          <a:noFill/>
+          <a:ln/>
+        </p:spPr>
+        <p:txBody>
+          <a:bodyPr wrap="square" lIns="0" tIns="0" rIns="0" bIns="0" rtlCol="0" anchor="ctr"/>
+          <a:lstStyle/>
+          <a:p>
+            <a:pPr indent="0" marL="0">
+              <a:buNone/>
+            </a:pPr>
+            <a:r>
+              <a:rPr lang="en-US" sz="1600" b="1" dirty="0">
+                <a:solidFill>
+                  <a:srgbClr val="141A22"/>
+                </a:solidFill>
+                <a:latin typeface="Arial" pitchFamily="34" charset="0"/>
+                <a:ea typeface="Arial" pitchFamily="34" charset="-122"/>
+                <a:cs typeface="Arial" pitchFamily="34" charset="-120"/>
+              </a:rPr>
+              <a:t>Обучение</a:t>
+            </a:r>
+            <a:endParaRPr lang="en-US" sz="1600" dirty="0"/>
+          </a:p>
+        </p:txBody>
+      </p:sp>
+      <p:sp>
+        <p:nvSpPr>
+          <p:cNvPr id="17" name="Text 15"/>
+          <p:cNvSpPr txBox="1"/>
+          <p:nvPr/>
+        </p:nvSpPr>
+        <p:spPr>
+          <a:xfrm>
+            <a:off x="6483096" y="3108960"/>
+            <a:ext cx="2052828" cy="1463040"/>
+          </a:xfrm>
+          <a:prstGeom prst="rect">
+            <a:avLst/>
+          </a:prstGeom>
+          <a:noFill/>
+          <a:ln/>
+        </p:spPr>
+        <p:txBody>
+          <a:bodyPr wrap="square" lIns="0" tIns="0" rIns="0" bIns="0" rtlCol="0" anchor="t"/>
+          <a:lstStyle/>
+          <a:p>
+            <a:pPr indent="0" marL="0">
+              <a:buNone/>
+            </a:pPr>
+            <a:r>
+              <a:rPr lang="en-US" sz="1250" dirty="0">
+                <a:solidFill>
+                  <a:srgbClr val="5C6067"/>
+                </a:solidFill>
+                <a:latin typeface="Arial" pitchFamily="34" charset="0"/>
+                <a:ea typeface="Arial" pitchFamily="34" charset="-122"/>
+                <a:cs typeface="Arial" pitchFamily="34" charset="-120"/>
+              </a:rPr>
+              <a:t>Обучение инженеров под квоты: Саудовская Аравия требует 30% граждан на инженерных позициях. Наш ИИ быстро доводит выпускника до рабочего инженера.</a:t>
+            </a:r>
+            <a:endParaRPr lang="en-US" sz="1250" dirty="0"/>
+          </a:p>
+        </p:txBody>
+      </p:sp>
+      <p:sp>
+        <p:nvSpPr>
+          <p:cNvPr id="18" name="Shape 16"/>
+          <p:cNvSpPr/>
+          <p:nvPr/>
+        </p:nvSpPr>
+        <p:spPr>
+          <a:xfrm>
+            <a:off x="9038844" y="2103120"/>
+            <a:ext cx="2601468" cy="2651760"/>
+          </a:xfrm>
+          <a:prstGeom prst="roundRect">
+            <a:avLst>
+              <a:gd name="adj" fmla="val 6327"/>
+            </a:avLst>
+          </a:prstGeom>
+          <a:solidFill>
+            <a:srgbClr val="F7F7F7"/>
+          </a:solidFill>
+          <a:ln w="12700">
+            <a:solidFill>
+              <a:srgbClr val="F7F7F7"/>
+            </a:solidFill>
+            <a:prstDash val="solid"/>
+          </a:ln>
+        </p:spPr>
+      </p:sp>
+      <p:sp>
+        <p:nvSpPr>
+          <p:cNvPr id="19" name="Text 17"/>
+          <p:cNvSpPr txBox="1"/>
+          <p:nvPr/>
+        </p:nvSpPr>
+        <p:spPr>
+          <a:xfrm>
+            <a:off x="9313164" y="2331720"/>
+            <a:ext cx="2052828" cy="274320"/>
+          </a:xfrm>
+          <a:prstGeom prst="rect">
+            <a:avLst/>
+          </a:prstGeom>
+          <a:noFill/>
+          <a:ln/>
+        </p:spPr>
+        <p:txBody>
+          <a:bodyPr wrap="square" lIns="0" tIns="0" rIns="0" bIns="0" rtlCol="0" anchor="ctr"/>
+          <a:lstStyle/>
+          <a:p>
+            <a:pPr indent="0" marL="0">
+              <a:buNone/>
+            </a:pPr>
+            <a:r>
+              <a:rPr lang="en-US" sz="950" spc="200" kern="0" dirty="0">
+                <a:solidFill>
+                  <a:srgbClr val="0460F5"/>
+                </a:solidFill>
+                <a:latin typeface="Courier New" pitchFamily="34" charset="0"/>
+                <a:ea typeface="Courier New" pitchFamily="34" charset="-122"/>
+                <a:cs typeface="Courier New" pitchFamily="34" charset="-120"/>
+              </a:rPr>
+              <a:t>ОПЦИОН 4</a:t>
+            </a:r>
+            <a:endParaRPr lang="en-US" sz="950" dirty="0"/>
+          </a:p>
+        </p:txBody>
+      </p:sp>
+      <p:sp>
+        <p:nvSpPr>
+          <p:cNvPr id="20" name="Text 18"/>
+          <p:cNvSpPr txBox="1"/>
+          <p:nvPr/>
+        </p:nvSpPr>
+        <p:spPr>
+          <a:xfrm>
+            <a:off x="9313164" y="2651760"/>
+            <a:ext cx="2052828" cy="411480"/>
+          </a:xfrm>
+          <a:prstGeom prst="rect">
+            <a:avLst/>
+          </a:prstGeom>
+          <a:noFill/>
+          <a:ln/>
+        </p:spPr>
+        <p:txBody>
+          <a:bodyPr wrap="square" lIns="0" tIns="0" rIns="0" bIns="0" rtlCol="0" anchor="ctr"/>
+          <a:lstStyle/>
+          <a:p>
+            <a:pPr indent="0" marL="0">
+              <a:buNone/>
+            </a:pPr>
+            <a:r>
+              <a:rPr lang="en-US" sz="1600" b="1" dirty="0">
+                <a:solidFill>
+                  <a:srgbClr val="141A22"/>
+                </a:solidFill>
+                <a:latin typeface="Arial" pitchFamily="34" charset="0"/>
+                <a:ea typeface="Arial" pitchFamily="34" charset="-122"/>
+                <a:cs typeface="Arial" pitchFamily="34" charset="-120"/>
+              </a:rPr>
+              <a:t>Данные</a:t>
+            </a:r>
+            <a:endParaRPr lang="en-US" sz="1600" dirty="0"/>
+          </a:p>
+        </p:txBody>
+      </p:sp>
+      <p:sp>
+        <p:nvSpPr>
+          <p:cNvPr id="21" name="Text 19"/>
+          <p:cNvSpPr txBox="1"/>
+          <p:nvPr/>
+        </p:nvSpPr>
+        <p:spPr>
+          <a:xfrm>
+            <a:off x="9313164" y="3108960"/>
+            <a:ext cx="2052828" cy="1463040"/>
+          </a:xfrm>
+          <a:prstGeom prst="rect">
+            <a:avLst/>
+          </a:prstGeom>
+          <a:noFill/>
+          <a:ln/>
+        </p:spPr>
+        <p:txBody>
+          <a:bodyPr wrap="square" lIns="0" tIns="0" rIns="0" bIns="0" rtlCol="0" anchor="t"/>
+          <a:lstStyle/>
+          <a:p>
+            <a:pPr indent="0" marL="0">
+              <a:buNone/>
+            </a:pPr>
+            <a:r>
+              <a:rPr lang="en-US" sz="1250" dirty="0">
+                <a:solidFill>
+                  <a:srgbClr val="5C6067"/>
+                </a:solidFill>
+                <a:latin typeface="Arial" pitchFamily="34" charset="0"/>
+                <a:ea typeface="Arial" pitchFamily="34" charset="-122"/>
+                <a:cs typeface="Arial" pitchFamily="34" charset="-120"/>
+              </a:rPr>
+              <a:t>База данных о подключениях: сотни проектов в год — данные, которых нет ни у кого. Enverus купил Pearl Street именно за такие данные.</a:t>
+            </a:r>
+            <a:endParaRPr lang="en-US" sz="1250" dirty="0"/>
+          </a:p>
+        </p:txBody>
+      </p:sp>
+      <p:sp>
+        <p:nvSpPr>
+          <p:cNvPr id="22" name="Text 20"/>
+          <p:cNvSpPr txBox="1"/>
+          <p:nvPr/>
+        </p:nvSpPr>
+        <p:spPr>
+          <a:xfrm>
+            <a:off x="548640" y="5029200"/>
+            <a:ext cx="9445752" cy="457200"/>
+          </a:xfrm>
+          <a:prstGeom prst="rect">
+            <a:avLst/>
+          </a:prstGeom>
+          <a:noFill/>
+          <a:ln/>
+        </p:spPr>
+        <p:txBody>
+          <a:bodyPr wrap="square" lIns="0" tIns="0" rIns="0" bIns="0" rtlCol="0" anchor="t"/>
+          <a:lstStyle/>
+          <a:p>
+            <a:pPr indent="0" marL="0">
+              <a:buNone/>
+            </a:pPr>
+            <a:r>
+              <a:rPr lang="en-US" sz="1000" dirty="0">
+                <a:solidFill>
+                  <a:srgbClr val="8A8E94"/>
+                </a:solidFill>
+                <a:latin typeface="Arial" pitchFamily="34" charset="0"/>
+                <a:ea typeface="Arial" pitchFamily="34" charset="-122"/>
+                <a:cs typeface="Arial" pitchFamily="34" charset="-120"/>
+              </a:rPr>
+              <a:t>В выручку раунда заложено только проектирование. Остальное вводим по одному и только после измерения.</a:t>
+            </a:r>
+            <a:endParaRPr lang="en-US" sz="1000" dirty="0"/>
+          </a:p>
+        </p:txBody>
+      </p:sp>
+    </p:spTree>
+  </p:cSld>
+  <p:clrMapOvr>
+    <a:masterClrMapping/>
+  </p:clrMapOvr>
+</p:sld>
+</file>
+
+<file path=ppt/slides/slide15.xml><?xml version="1.0" encoding="utf-8"?>
+<p:sld xmlns:a="http://schemas.openxmlformats.org/drawingml/2006/main" xmlns:r="http://schemas.openxmlformats.org/officeDocument/2006/relationships" xmlns:p="http://schemas.openxmlformats.org/presentationml/2006/main">
+  <p:cSld name="Slide 15">
+    <p:bg>
+      <p:bgPr>
+        <a:solidFill>
+          <a:srgbClr val="FFFFFF"/>
+        </a:solidFill>
+      </p:bgPr>
+    </p:bg>
+    <p:spTree>
+      <p:nvGrpSpPr>
+        <p:cNvPr id="1" name=""/>
+        <p:cNvGrpSpPr/>
+        <p:nvPr/>
+      </p:nvGrpSpPr>
+      <p:grpSpPr>
+        <a:xfrm>
+          <a:off x="0" y="0"/>
+          <a:ext cx="0" cy="0"/>
+          <a:chOff x="0" y="0"/>
+          <a:chExt cx="0" cy="0"/>
+        </a:xfrm>
+      </p:grpSpPr>
+      <p:sp>
+        <p:nvSpPr>
+          <p:cNvPr id="2" name="Text 0"/>
+          <p:cNvSpPr txBox="1"/>
+          <p:nvPr/>
+        </p:nvSpPr>
+        <p:spPr>
+          <a:xfrm>
+            <a:off x="9354312" y="320040"/>
+            <a:ext cx="2286000" cy="274320"/>
+          </a:xfrm>
+          <a:prstGeom prst="rect">
+            <a:avLst/>
+          </a:prstGeom>
+          <a:noFill/>
+          <a:ln/>
+        </p:spPr>
+        <p:txBody>
+          <a:bodyPr wrap="square" lIns="0" tIns="0" rIns="0" bIns="0" rtlCol="0" anchor="ctr"/>
+          <a:lstStyle/>
+          <a:p>
+            <a:pPr algn="r" indent="0" marL="0">
+              <a:buNone/>
+            </a:pPr>
+            <a:r>
+              <a:rPr lang="en-US" sz="900" spc="300" kern="0" dirty="0">
+                <a:solidFill>
+                  <a:srgbClr val="8A8E94"/>
+                </a:solidFill>
+                <a:latin typeface="Courier New" pitchFamily="34" charset="0"/>
+                <a:ea typeface="Courier New" pitchFamily="34" charset="-122"/>
+                <a:cs typeface="Courier New" pitchFamily="34" charset="-120"/>
+              </a:rPr>
+              <a:t>ОКЕАН ТЕХ</a:t>
+            </a:r>
+            <a:endParaRPr lang="en-US" sz="900" dirty="0"/>
+          </a:p>
+        </p:txBody>
+      </p:sp>
+      <p:sp>
+        <p:nvSpPr>
+          <p:cNvPr id="3" name="Text 1"/>
+          <p:cNvSpPr txBox="1"/>
+          <p:nvPr/>
+        </p:nvSpPr>
+        <p:spPr>
+          <a:xfrm>
+            <a:off x="548640" y="411480"/>
+            <a:ext cx="7315200" cy="274320"/>
+          </a:xfrm>
+          <a:prstGeom prst="rect">
+            <a:avLst/>
+          </a:prstGeom>
+          <a:noFill/>
+          <a:ln/>
+        </p:spPr>
+        <p:txBody>
+          <a:bodyPr wrap="square" lIns="0" tIns="0" rIns="0" bIns="0" rtlCol="0" anchor="ctr"/>
+          <a:lstStyle/>
+          <a:p>
+            <a:pPr indent="0" marL="0">
+              <a:buNone/>
+            </a:pPr>
+            <a:r>
+              <a:rPr lang="en-US" sz="950" spc="300" kern="0" dirty="0">
+                <a:solidFill>
+                  <a:srgbClr val="0460F5"/>
+                </a:solidFill>
+                <a:latin typeface="Courier New" pitchFamily="34" charset="0"/>
+                <a:ea typeface="Courier New" pitchFamily="34" charset="-122"/>
+                <a:cs typeface="Courier New" pitchFamily="34" charset="-120"/>
+              </a:rPr>
+              <a:t>ПРИЛОЖЕНИЕ · ИСТОЧНИКИ</a:t>
+            </a:r>
+            <a:endParaRPr lang="en-US" sz="950" dirty="0"/>
+          </a:p>
+        </p:txBody>
+      </p:sp>
+      <p:sp>
+        <p:nvSpPr>
+          <p:cNvPr id="4" name="Text 2"/>
+          <p:cNvSpPr txBox="1"/>
+          <p:nvPr/>
+        </p:nvSpPr>
+        <p:spPr>
+          <a:xfrm>
+            <a:off x="548640" y="731520"/>
+            <a:ext cx="11091672" cy="1188720"/>
+          </a:xfrm>
+          <a:prstGeom prst="rect">
+            <a:avLst/>
+          </a:prstGeom>
+          <a:noFill/>
+          <a:ln/>
+        </p:spPr>
+        <p:txBody>
+          <a:bodyPr wrap="square" lIns="0" tIns="0" rIns="0" bIns="0" rtlCol="0" anchor="t"/>
+          <a:lstStyle/>
+          <a:p>
+            <a:pPr indent="0" marL="0">
+              <a:buNone/>
+            </a:pPr>
+            <a:r>
+              <a:rPr lang="en-US" sz="2800" b="1" dirty="0">
+                <a:solidFill>
+                  <a:srgbClr val="141A22"/>
+                </a:solidFill>
+                <a:latin typeface="Arial" pitchFamily="34" charset="0"/>
+                <a:ea typeface="Arial" pitchFamily="34" charset="-122"/>
+                <a:cs typeface="Arial" pitchFamily="34" charset="-120"/>
+              </a:rPr>
+              <a:t>Откуда цифры</a:t>
+            </a:r>
+            <a:endParaRPr lang="en-US" sz="2800" dirty="0"/>
+          </a:p>
+        </p:txBody>
+      </p:sp>
+      <p:sp>
+        <p:nvSpPr>
+          <p:cNvPr id="5" name="Text 3"/>
+          <p:cNvSpPr txBox="1"/>
+          <p:nvPr/>
+        </p:nvSpPr>
+        <p:spPr>
+          <a:xfrm>
+            <a:off x="10268712" y="6400800"/>
+            <a:ext cx="1371600" cy="274320"/>
+          </a:xfrm>
+          <a:prstGeom prst="rect">
+            <a:avLst/>
+          </a:prstGeom>
+          <a:noFill/>
+          <a:ln/>
+        </p:spPr>
+        <p:txBody>
+          <a:bodyPr wrap="square" lIns="0" tIns="0" rIns="0" bIns="0" rtlCol="0" anchor="ctr"/>
+          <a:lstStyle/>
+          <a:p>
+            <a:pPr algn="r" indent="0" marL="0">
+              <a:buNone/>
+            </a:pPr>
+            <a:r>
+              <a:rPr lang="en-US" sz="900" dirty="0">
+                <a:solidFill>
+                  <a:srgbClr val="8A8E94"/>
+                </a:solidFill>
+                <a:latin typeface="Courier New" pitchFamily="34" charset="0"/>
+                <a:ea typeface="Courier New" pitchFamily="34" charset="-122"/>
+                <a:cs typeface="Courier New" pitchFamily="34" charset="-120"/>
+              </a:rPr>
+              <a:t>15 / 15</a:t>
             </a:r>
             <a:endParaRPr lang="en-US" sz="900" dirty="0"/>
           </a:p>
@@ -5904,7 +6655,7 @@
                 <a:ea typeface="Courier New" pitchFamily="34" charset="-122"/>
                 <a:cs typeface="Courier New" pitchFamily="34" charset="-120"/>
               </a:rPr>
-              <a:t>2 / 14</a:t>
+              <a:t>2 / 15</a:t>
             </a:r>
             <a:endParaRPr lang="en-US" sz="900" dirty="0"/>
           </a:p>
@@ -6383,7 +7134,7 @@
                 <a:ea typeface="Courier New" pitchFamily="34" charset="-122"/>
                 <a:cs typeface="Courier New" pitchFamily="34" charset="-120"/>
               </a:rPr>
-              <a:t>3 / 14</a:t>
+              <a:t>3 / 15</a:t>
             </a:r>
             <a:endParaRPr lang="en-US" sz="900" dirty="0"/>
           </a:p>
@@ -7045,7 +7796,7 @@
                 <a:ea typeface="Courier New" pitchFamily="34" charset="-122"/>
                 <a:cs typeface="Courier New" pitchFamily="34" charset="-120"/>
               </a:rPr>
-              <a:t>4 / 14</a:t>
+              <a:t>4 / 15</a:t>
             </a:r>
             <a:endParaRPr lang="en-US" sz="900" dirty="0"/>
           </a:p>
@@ -7597,7 +8348,7 @@
                 <a:ea typeface="Arial" pitchFamily="34" charset="-122"/>
                 <a:cs typeface="Arial" pitchFamily="34" charset="-120"/>
               </a:rPr>
-              <a:t>«Вдвое» — цель первого этапа, проверяем на первых проектах.</a:t>
+              <a:t>Цель — вдвое, проверяем на первых проектах. В деньгах считаем осторожно: в полтора раза.</a:t>
             </a:r>
             <a:endParaRPr lang="en-US" sz="1000" dirty="0"/>
           </a:p>
@@ -7785,7 +8536,7 @@
                 <a:ea typeface="Courier New" pitchFamily="34" charset="-122"/>
                 <a:cs typeface="Courier New" pitchFamily="34" charset="-120"/>
               </a:rPr>
-              <a:t>5 / 14</a:t>
+              <a:t>5 / 15</a:t>
             </a:r>
             <a:endParaRPr lang="en-US" sz="900" dirty="0"/>
           </a:p>
@@ -8231,8 +8982,8 @@
         </p:nvSpPr>
         <p:spPr>
           <a:xfrm>
-            <a:off x="548640" y="4617720"/>
-            <a:ext cx="10725912" cy="914400"/>
+            <a:off x="548640" y="4526280"/>
+            <a:ext cx="10725912" cy="1371600"/>
           </a:xfrm>
           <a:prstGeom prst="rect">
             <a:avLst/>
@@ -8251,7 +9002,7 @@
               <a:buNone/>
             </a:pPr>
             <a:r>
-              <a:rPr lang="en-US" sz="1500" dirty="0">
+              <a:rPr lang="en-US" sz="1400" dirty="0">
                 <a:solidFill>
                   <a:srgbClr val="FFFFFF"/>
                 </a:solidFill>
@@ -8259,9 +9010,9 @@
                 <a:ea typeface="Arial" pitchFamily="34" charset="-122"/>
                 <a:cs typeface="Arial" pitchFamily="34" charset="-120"/>
               </a:rPr>
-              <a:t>Клиент платит за срок: месяц простоя готового дата-центра стоит дороже всего проекта. Поэтому он покупает у того, кто делает быстрее, — а не у того, кто дешевле.</a:t>
-            </a:r>
-            <a:endParaRPr lang="en-US" sz="1500" dirty="0"/>
+              <a:t>Пять лет ожидания — это очередь, проверки сети, оборудование. Из всего этого клиент может ускорить деньгами только один кусок: проект и его согласование — обычно месяцы и два-три круга правок. Мы делаем этот кусок вдвое быстрее и с первого раза. Месяц простоя готового дата-центра стоит дороже всего проекта, поэтому клиент платит за срок.</a:t>
+            </a:r>
+            <a:endParaRPr lang="en-US" sz="1400" dirty="0"/>
           </a:p>
         </p:txBody>
       </p:sp>
@@ -8447,7 +9198,7 @@
                 <a:ea typeface="Courier New" pitchFamily="34" charset="-122"/>
                 <a:cs typeface="Courier New" pitchFamily="34" charset="-120"/>
               </a:rPr>
-              <a:t>6 / 14</a:t>
+              <a:t>6 / 15</a:t>
             </a:r>
             <a:endParaRPr lang="en-US" sz="900" dirty="0"/>
           </a:p>
@@ -8893,8 +9644,8 @@
         </p:nvSpPr>
         <p:spPr>
           <a:xfrm>
-            <a:off x="548640" y="4709160"/>
-            <a:ext cx="10725912" cy="822960"/>
+            <a:off x="548640" y="4617720"/>
+            <a:ext cx="10725912" cy="1280160"/>
           </a:xfrm>
           <a:prstGeom prst="rect">
             <a:avLst/>
@@ -8913,7 +9664,7 @@
               <a:buNone/>
             </a:pPr>
             <a:r>
-              <a:rPr lang="en-US" sz="1500" dirty="0">
+              <a:rPr lang="en-US" sz="1400" dirty="0">
                 <a:solidFill>
                   <a:srgbClr val="141A22"/>
                 </a:solidFill>
@@ -8921,9 +9672,9 @@
                 <a:ea typeface="Arial" pitchFamily="34" charset="-122"/>
                 <a:cs typeface="Arial" pitchFamily="34" charset="-120"/>
               </a:rPr>
-              <a:t>Начинаем с Персидского залива и Индии: там строят больше всего, туда пускают, и там инженеры дешевле. США и Европа — позже и через партнёров.</a:t>
-            </a:r>
-            <a:endParaRPr lang="en-US" sz="1500" dirty="0"/>
+              <a:t>В США проблему лучше всего измерили. Но начинаем мы с Персидского залива и Индии: там строят больше, инженеров не хватает так же, и туда нас пускают. Не хватает инженеров везде, а стоят они по-разному: в Индии в несколько раз дешевле, чем в США. США и Европа — позже и через партнёров.</a:t>
+            </a:r>
+            <a:endParaRPr lang="en-US" sz="1400" dirty="0"/>
           </a:p>
         </p:txBody>
       </p:sp>
@@ -9109,7 +9860,7 @@
                 <a:ea typeface="Courier New" pitchFamily="34" charset="-122"/>
                 <a:cs typeface="Courier New" pitchFamily="34" charset="-120"/>
               </a:rPr>
-              <a:t>7 / 14</a:t>
+              <a:t>7 / 15</a:t>
             </a:r>
             <a:endParaRPr lang="en-US" sz="900" dirty="0"/>
           </a:p>
@@ -9411,8 +10162,8 @@
         </p:nvSpPr>
         <p:spPr>
           <a:xfrm>
-            <a:off x="548640" y="4663440"/>
-            <a:ext cx="10725912" cy="914400"/>
+            <a:off x="548640" y="4572000"/>
+            <a:ext cx="10725912" cy="1188720"/>
           </a:xfrm>
           <a:prstGeom prst="rect">
             <a:avLst/>
@@ -9431,7 +10182,7 @@
               <a:buNone/>
             </a:pPr>
             <a:r>
-              <a:rPr lang="en-US" sz="1500" dirty="0">
+              <a:rPr lang="en-US" sz="1450" dirty="0">
                 <a:solidFill>
                   <a:srgbClr val="FFFFFF"/>
                 </a:solidFill>
@@ -9439,9 +10190,9 @@
                 <a:ea typeface="Arial" pitchFamily="34" charset="-122"/>
                 <a:cs typeface="Arial" pitchFamily="34" charset="-120"/>
               </a:rPr>
-              <a:t>Клиент платит рыночную цену за проект, который получает быстрее. Мы платим тем же инженерам ту же зарплату. Разница между старой и новой выработкой — наша прибыль.</a:t>
-            </a:r>
-            <a:endParaRPr lang="en-US" sz="1500" dirty="0"/>
+              <a:t>Заказов у таких фирм больше, чем рук, — поэтому они и не могут нанять. Клиент платит рыночную цену за проект, который получает быстрее; мы платим тем же инженерам ту же зарплату. Разница между старой и новой выработкой — наша прибыль.</a:t>
+            </a:r>
+            <a:endParaRPr lang="en-US" sz="1450" dirty="0"/>
           </a:p>
         </p:txBody>
       </p:sp>
@@ -9666,7 +10417,7 @@
                 <a:ea typeface="Courier New" pitchFamily="34" charset="-122"/>
                 <a:cs typeface="Courier New" pitchFamily="34" charset="-120"/>
               </a:rPr>
-              <a:t>8 / 14</a:t>
+              <a:t>8 / 15</a:t>
             </a:r>
             <a:endParaRPr lang="en-US" sz="900" dirty="0"/>
           </a:p>
@@ -9891,7 +10642,7 @@
         <p:spPr>
           <a:xfrm>
             <a:off x="548640" y="4434840"/>
-            <a:ext cx="10725912" cy="914400"/>
+            <a:ext cx="10725912" cy="1005840"/>
           </a:xfrm>
           <a:prstGeom prst="rect">
             <a:avLst/>
@@ -9910,7 +10661,7 @@
               <a:buNone/>
             </a:pPr>
             <a:r>
-              <a:rPr lang="en-US" sz="1600" dirty="0">
+              <a:rPr lang="en-US" sz="1500" dirty="0">
                 <a:solidFill>
                   <a:srgbClr val="141A22"/>
                 </a:solidFill>
@@ -9918,9 +10669,9 @@
                 <a:ea typeface="Arial" pitchFamily="34" charset="-122"/>
                 <a:cs typeface="Arial" pitchFamily="34" charset="-120"/>
               </a:rPr>
-              <a:t>Стратег платит за одного инженера 445 тысяч долларов. Мы покупаем небольшую фирму по цене около 70 тысяч за инженера — там, где инженеры есть и дёшевы.</a:t>
-            </a:r>
-            <a:endParaRPr lang="en-US" sz="1600" dirty="0"/>
+              <a:t>Мы собираем группу по цене около 70 тысяч долларов за инженера — покупая небольшие фирмы там, где инженеры есть. Такие группы стратеги покупают по 445 тысяч за инженера: WSP заплатила именно столько.</a:t>
+            </a:r>
+            <a:endParaRPr lang="en-US" sz="1500" dirty="0"/>
           </a:p>
         </p:txBody>
       </p:sp>
@@ -9932,7 +10683,7 @@
         </p:nvSpPr>
         <p:spPr>
           <a:xfrm>
-            <a:off x="548640" y="5486400"/>
+            <a:off x="548640" y="5532120"/>
             <a:ext cx="10725912" cy="457200"/>
           </a:xfrm>
           <a:prstGeom prst="rect">
@@ -9957,7 +10708,7 @@
                 <a:ea typeface="Arial" pitchFamily="34" charset="-122"/>
                 <a:cs typeface="Arial" pitchFamily="34" charset="-120"/>
               </a:rPr>
-              <a:t>Разница в цене — и есть сделка.</a:t>
+              <a:t>Разница между ценой входа и ценой выхода — и есть сделка.</a:t>
             </a:r>
             <a:endParaRPr lang="en-US" sz="1500" dirty="0"/>
           </a:p>
@@ -10145,7 +10896,7 @@
                 <a:ea typeface="Courier New" pitchFamily="34" charset="-122"/>
                 <a:cs typeface="Courier New" pitchFamily="34" charset="-120"/>
               </a:rPr>
-              <a:t>9 / 14</a:t>
+              <a:t>9 / 15</a:t>
             </a:r>
             <a:endParaRPr lang="en-US" sz="900" dirty="0"/>
           </a:p>
@@ -10591,8 +11342,8 @@
         </p:nvSpPr>
         <p:spPr>
           <a:xfrm>
-            <a:off x="548640" y="4709160"/>
-            <a:ext cx="10725912" cy="548640"/>
+            <a:off x="548640" y="4617720"/>
+            <a:ext cx="10725912" cy="914400"/>
           </a:xfrm>
           <a:prstGeom prst="rect">
             <a:avLst/>
@@ -10611,7 +11362,7 @@
               <a:buNone/>
             </a:pPr>
             <a:r>
-              <a:rPr lang="en-US" sz="1600" b="1" dirty="0">
+              <a:rPr lang="en-US" sz="1450" dirty="0">
                 <a:solidFill>
                   <a:srgbClr val="FFFFFF"/>
                 </a:solidFill>
@@ -10619,9 +11370,9 @@
                 <a:ea typeface="Arial" pitchFamily="34" charset="-122"/>
                 <a:cs typeface="Arial" pitchFamily="34" charset="-120"/>
               </a:rPr>
-              <a:t>Первый, кто соберёт такую группу, станет консолидатором отрасли.</a:t>
-            </a:r>
-            <a:endParaRPr lang="en-US" sz="1600" dirty="0"/>
+              <a:t>Почему сейчас: гиганты только начали нанимать менеджеров по ИИ — Black &amp; Veatch открыл такую вакансию в августе 2026. ИИ будет у всех через год-два. Первый, кто соберёт группу с ИИ внутри, станет консолидатором отрасли.</a:t>
+            </a:r>
+            <a:endParaRPr lang="en-US" sz="1450" dirty="0"/>
           </a:p>
         </p:txBody>
       </p:sp>
@@ -10633,7 +11384,7 @@
         </p:nvSpPr>
         <p:spPr>
           <a:xfrm>
-            <a:off x="548640" y="5394960"/>
+            <a:off x="548640" y="5669280"/>
             <a:ext cx="9445752" cy="457200"/>
           </a:xfrm>
           <a:prstGeom prst="rect">

--- a/ai-case-library/research/ventures/grid-plain-deck.pptx
+++ b/ai-case-library/research/ventures/grid-plain-deck.pptx
@@ -2255,7 +2255,7 @@
                 <a:ea typeface="Arial" pitchFamily="34" charset="-122"/>
                 <a:cs typeface="Arial" pitchFamily="34" charset="-120"/>
               </a:rPr>
-              <a:t>Покупаем небольшие инженерные компании, которые проектируют подключение к электросети, и с помощью ИИ делаем их вдвое производительнее.</a:t>
+              <a:t>Покупаем небольшие инженерные компании, которые проектируют подключение к электросети, и с помощью ИИ делаем их в полтора-два раза производительнее.</a:t>
             </a:r>
             <a:endParaRPr lang="en-US" sz="1800" dirty="0"/>
           </a:p>
@@ -2294,7 +2294,7 @@
                 <a:ea typeface="Arial" pitchFamily="34" charset="-122"/>
                 <a:cs typeface="Arial" pitchFamily="34" charset="-120"/>
               </a:rPr>
-              <a:t>Таких инженеров не хватает во всём мире — это главный тормоз для дата-центров и новой энергетики.</a:t>
+              <a:t>Таких инженеров не хватает во всём мире — это один из главных тормозов для дата-центров и новой энергетики.</a:t>
             </a:r>
             <a:endParaRPr lang="en-US" sz="1400" dirty="0"/>
           </a:p>
@@ -2994,8 +2994,8 @@
         </p:nvSpPr>
         <p:spPr>
           <a:xfrm>
-            <a:off x="548640" y="4114800"/>
-            <a:ext cx="10725912" cy="2011680"/>
+            <a:off x="548640" y="4023360"/>
+            <a:ext cx="10725912" cy="2286000"/>
           </a:xfrm>
           <a:prstGeom prst="rect">
             <a:avLst/>
@@ -3012,13 +3012,13 @@
                 <a:spcPct val="110000"/>
               </a:lnSpc>
               <a:spcAft>
-                <a:spcPts val="800"/>
+                <a:spcPts val="700"/>
               </a:spcAft>
               <a:buSzPct val="100000"/>
               <a:buChar char="•"/>
             </a:pPr>
             <a:r>
-              <a:rPr lang="en-US" sz="1300" b="1" dirty="0">
+              <a:rPr lang="en-US" sz="1250" b="1" dirty="0">
                 <a:solidFill>
                   <a:srgbClr val="141A22"/>
                 </a:solidFill>
@@ -3033,12 +3033,12 @@
                 <a:spcPct val="110000"/>
               </a:lnSpc>
               <a:spcAft>
-                <a:spcPts val="800"/>
+                <a:spcPts val="700"/>
               </a:spcAft>
               <a:buNone/>
             </a:pPr>
             <a:r>
-              <a:rPr lang="en-US" sz="1300" dirty="0">
+              <a:rPr lang="en-US" sz="1250" dirty="0">
                 <a:solidFill>
                   <a:srgbClr val="141A22"/>
                 </a:solidFill>
@@ -3048,7 +3048,7 @@
               </a:rPr>
               <a:t>изучает поведение языковых моделей и агентов на реальных задачах бизнеса: 14 исследователей и ML-инженеров, база из 277 верифицированных кейсов ИИ. Прежде чем прийти с этой идеей, мы проверили и отбросили десять других.</a:t>
             </a:r>
-            <a:endParaRPr lang="en-US" sz="1300" dirty="0"/>
+            <a:endParaRPr lang="en-US" sz="1250" dirty="0"/>
           </a:p>
           <a:p>
             <a:pPr indent="0" marL="0">
@@ -3056,12 +3056,12 @@
                 <a:spcPct val="110000"/>
               </a:lnSpc>
               <a:spcAft>
-                <a:spcPts val="800"/>
+                <a:spcPts val="700"/>
               </a:spcAft>
               <a:buNone/>
             </a:pPr>
             <a:r>
-              <a:rPr lang="en-US" sz="1300" b="1" dirty="0">
+              <a:rPr lang="en-US" sz="1250" b="1" dirty="0">
                 <a:solidFill>
                   <a:srgbClr val="141A22"/>
                 </a:solidFill>
@@ -3076,12 +3076,12 @@
                 <a:spcPct val="110000"/>
               </a:lnSpc>
               <a:spcAft>
-                <a:spcPts val="800"/>
+                <a:spcPts val="700"/>
               </a:spcAft>
               <a:buNone/>
             </a:pPr>
             <a:r>
-              <a:rPr lang="en-US" sz="1300" dirty="0">
+              <a:rPr lang="en-US" sz="1250" dirty="0">
                 <a:solidFill>
                   <a:srgbClr val="141A22"/>
                 </a:solidFill>
@@ -3089,9 +3089,9 @@
                 <a:ea typeface="Arial" pitchFamily="34" charset="-122"/>
                 <a:cs typeface="Arial" pitchFamily="34" charset="-120"/>
               </a:rPr>
-              <a:t>строит и внедряет ИИ в сложных системах — от высоконагруженных сервисов до корпоративных внедрений. Собственный фреймворк сокращает сроки создания и интеграции решений на 59%.</a:t>
-            </a:r>
-            <a:endParaRPr lang="en-US" sz="1300" dirty="0"/>
+              <a:t>строит и внедряет ИИ в сложных системах — от высоконагруженных сервисов до корпоративных внедрений. Собственный фреймворк сокращает сроки создания и интеграции решений на 59% (по данным компании).</a:t>
+            </a:r>
+            <a:endParaRPr lang="en-US" sz="1250" dirty="0"/>
           </a:p>
           <a:p>
             <a:pPr indent="0" marL="0">
@@ -3099,12 +3099,12 @@
                 <a:spcPct val="110000"/>
               </a:lnSpc>
               <a:spcAft>
-                <a:spcPts val="800"/>
+                <a:spcPts val="700"/>
               </a:spcAft>
               <a:buNone/>
             </a:pPr>
             <a:r>
-              <a:rPr lang="en-US" sz="1300" b="1" dirty="0">
+              <a:rPr lang="en-US" sz="1250" b="1" dirty="0">
                 <a:solidFill>
                   <a:srgbClr val="141A22"/>
                 </a:solidFill>
@@ -3119,12 +3119,12 @@
                 <a:spcPct val="110000"/>
               </a:lnSpc>
               <a:spcAft>
-                <a:spcPts val="800"/>
+                <a:spcPts val="700"/>
               </a:spcAft>
               <a:buNone/>
             </a:pPr>
             <a:r>
-              <a:rPr lang="en-US" sz="1300" dirty="0">
+              <a:rPr lang="en-US" sz="1250" dirty="0">
                 <a:solidFill>
                   <a:srgbClr val="141A22"/>
                 </a:solidFill>
@@ -3134,7 +3134,50 @@
               </a:rPr>
               <a:t>Inc., RTVI, TAdviser — методы, данные и разбор реальных внедрений.</a:t>
             </a:r>
-            <a:endParaRPr lang="en-US" sz="1300" dirty="0"/>
+            <a:endParaRPr lang="en-US" sz="1250" dirty="0"/>
+          </a:p>
+          <a:p>
+            <a:pPr indent="0" marL="0">
+              <a:lnSpc>
+                <a:spcPct val="110000"/>
+              </a:lnSpc>
+              <a:spcAft>
+                <a:spcPts val="700"/>
+              </a:spcAft>
+              <a:buNone/>
+            </a:pPr>
+            <a:r>
+              <a:rPr lang="en-US" sz="1250" b="1" dirty="0">
+                <a:solidFill>
+                  <a:srgbClr val="141A22"/>
+                </a:solidFill>
+                <a:latin typeface="Arial" pitchFamily="34" charset="0"/>
+                <a:ea typeface="Arial" pitchFamily="34" charset="-122"/>
+                <a:cs typeface="Arial" pitchFamily="34" charset="-120"/>
+              </a:rPr>
+              <a:t>Куда идёт раунд </a:t>
+            </a:r>
+            <a:pPr indent="0" marL="0">
+              <a:lnSpc>
+                <a:spcPct val="110000"/>
+              </a:lnSpc>
+              <a:spcAft>
+                <a:spcPts val="700"/>
+              </a:spcAft>
+              <a:buNone/>
+            </a:pPr>
+            <a:r>
+              <a:rPr lang="en-US" sz="1250" dirty="0">
+                <a:solidFill>
+                  <a:srgbClr val="141A22"/>
+                </a:solidFill>
+                <a:latin typeface="Arial" pitchFamily="34" charset="0"/>
+                <a:ea typeface="Arial" pitchFamily="34" charset="-122"/>
+                <a:cs typeface="Arial" pitchFamily="34" charset="-120"/>
+              </a:rPr>
+              <a:t>в новую международную компанию, которая владеет купленными фирмами. Океан Тех вносит ИИ, метод и команду.</a:t>
+            </a:r>
+            <a:endParaRPr lang="en-US" sz="1250" dirty="0"/>
           </a:p>
         </p:txBody>
       </p:sp>
@@ -4483,7 +4526,7 @@
                 <a:ea typeface="Arial" pitchFamily="34" charset="-122"/>
                 <a:cs typeface="Arial" pitchFamily="34" charset="-120"/>
               </a:rPr>
-              <a:t>США и Европа для нас — позже и через партнёров. Поэтому стартуем там, куда пускают и где строят: Залив, Индия. Международная структура с первого дня.</a:t>
+              <a:t>Команда из России: в США и Европе нас ждут проверки и ограничения. Поэтому стартуем там, где строят и куда пускают: Залив, Индия. Международная структура с первого дня.</a:t>
             </a:r>
             <a:endParaRPr lang="en-US" sz="1250" dirty="0"/>
           </a:p>
@@ -5001,7 +5044,7 @@
                 <a:ea typeface="Arial" pitchFamily="34" charset="-122"/>
                 <a:cs typeface="Arial" pitchFamily="34" charset="-120"/>
               </a:rPr>
-              <a:t>Покупка, интеграция ИИ, выручка фирмы плюс половина при том же штате.</a:t>
+              <a:t>Покупка, интеграция ИИ. Выручка фирмы растёт в полтора раза при том же штате.</a:t>
             </a:r>
             <a:endParaRPr lang="en-US" sz="1250" dirty="0"/>
           </a:p>
@@ -5159,8 +5202,8 @@
         </p:nvSpPr>
         <p:spPr>
           <a:xfrm>
-            <a:off x="548640" y="4526280"/>
-            <a:ext cx="10725912" cy="822960"/>
+            <a:off x="548640" y="4434840"/>
+            <a:ext cx="10725912" cy="1234440"/>
           </a:xfrm>
           <a:prstGeom prst="rect">
             <a:avLst/>
@@ -5179,7 +5222,7 @@
               <a:buNone/>
             </a:pPr>
             <a:r>
-              <a:rPr lang="en-US" sz="1500" dirty="0">
+              <a:rPr lang="en-US" sz="1300" dirty="0">
                 <a:solidFill>
                   <a:srgbClr val="FFFFFF"/>
                 </a:solidFill>
@@ -5187,7 +5230,46 @@
                 <a:ea typeface="Arial" pitchFamily="34" charset="-122"/>
                 <a:cs typeface="Arial" pitchFamily="34" charset="-120"/>
               </a:rPr>
-              <a:t>Первый шаг — 250 тысяч долларов и восемь недель: два пилотных проекта. Порог, ниже которого не идём дальше, — полтора раза; цель — два. Если ИИ не даёт, вы узнаете это первым.</a:t>
+              <a:t>Куда идут деньги: 14 млн — пять фирм по цене годовой выручки; 3,6 млн — ИИ-команда на три года; 2 млн — сделки и юристы; остальное — запас на случай, если фирмы стоят дороже. Первый шаг внутри первого транша — 250 тысяч и восемь недель: два пилотных проекта. Порог, ниже которого не идём дальше, — полтора раза; цель — два. Инвестор получает долю в компании, которая владеет всеми фирмами; условия раунда обсуждаем отдельно.</a:t>
+            </a:r>
+            <a:endParaRPr lang="en-US" sz="1300" dirty="0"/>
+          </a:p>
+        </p:txBody>
+      </p:sp>
+      <p:sp>
+        <p:nvSpPr>
+          <p:cNvPr id="19" name="Text 17"/>
+          <p:cNvSpPr txBox="1"/>
+          <p:nvPr/>
+        </p:nvSpPr>
+        <p:spPr>
+          <a:xfrm>
+            <a:off x="548640" y="5715000"/>
+            <a:ext cx="10725912" cy="457200"/>
+          </a:xfrm>
+          <a:prstGeom prst="rect">
+            <a:avLst/>
+          </a:prstGeom>
+          <a:noFill/>
+          <a:ln/>
+        </p:spPr>
+        <p:txBody>
+          <a:bodyPr wrap="square" lIns="0" tIns="0" rIns="0" bIns="0" rtlCol="0" anchor="t"/>
+          <a:lstStyle/>
+          <a:p>
+            <a:pPr indent="0" marL="0">
+              <a:buNone/>
+            </a:pPr>
+            <a:r>
+              <a:rPr lang="en-US" sz="1500" i="1" dirty="0">
+                <a:solidFill>
+                  <a:srgbClr val="D5F774"/>
+                </a:solidFill>
+                <a:latin typeface="Arial" pitchFamily="34" charset="0"/>
+                <a:ea typeface="Arial" pitchFamily="34" charset="-122"/>
+                <a:cs typeface="Arial" pitchFamily="34" charset="-120"/>
+              </a:rPr>
+              <a:t>Двадцать из тридцати миллионов — не в сжигание, а в покупку готовой выручки.</a:t>
             </a:r>
             <a:endParaRPr lang="en-US" sz="1500" dirty="0"/>
           </a:p>
@@ -5195,53 +5277,14 @@
       </p:sp>
       <p:sp>
         <p:nvSpPr>
-          <p:cNvPr id="19" name="Text 17"/>
-          <p:cNvSpPr txBox="1"/>
-          <p:nvPr/>
-        </p:nvSpPr>
-        <p:spPr>
-          <a:xfrm>
-            <a:off x="548640" y="5394960"/>
-            <a:ext cx="10725912" cy="457200"/>
-          </a:xfrm>
-          <a:prstGeom prst="rect">
-            <a:avLst/>
-          </a:prstGeom>
-          <a:noFill/>
-          <a:ln/>
-        </p:spPr>
-        <p:txBody>
-          <a:bodyPr wrap="square" lIns="0" tIns="0" rIns="0" bIns="0" rtlCol="0" anchor="t"/>
-          <a:lstStyle/>
-          <a:p>
-            <a:pPr indent="0" marL="0">
-              <a:buNone/>
-            </a:pPr>
-            <a:r>
-              <a:rPr lang="en-US" sz="1500" i="1" dirty="0">
-                <a:solidFill>
-                  <a:srgbClr val="D5F774"/>
-                </a:solidFill>
-                <a:latin typeface="Arial" pitchFamily="34" charset="0"/>
-                <a:ea typeface="Arial" pitchFamily="34" charset="-122"/>
-                <a:cs typeface="Arial" pitchFamily="34" charset="-120"/>
-              </a:rPr>
-              <a:t>Двадцать из тридцати миллионов — не в сжигание, а в покупку готовой выручки.</a:t>
-            </a:r>
-            <a:endParaRPr lang="en-US" sz="1500" dirty="0"/>
-          </a:p>
-        </p:txBody>
-      </p:sp>
-      <p:sp>
-        <p:nvSpPr>
           <p:cNvPr id="20" name="Text 18"/>
           <p:cNvSpPr txBox="1"/>
           <p:nvPr/>
         </p:nvSpPr>
         <p:spPr>
           <a:xfrm>
-            <a:off x="548640" y="5943600"/>
-            <a:ext cx="11091672" cy="320040"/>
+            <a:off x="548640" y="6126480"/>
+            <a:ext cx="11091672" cy="274320"/>
           </a:xfrm>
           <a:prstGeom prst="rect">
             <a:avLst/>
@@ -5257,7 +5300,7 @@
               <a:buNone/>
             </a:pPr>
             <a:r>
-              <a:rPr lang="en-US" sz="1300" dirty="0">
+              <a:rPr lang="en-US" sz="1200" dirty="0">
                 <a:solidFill>
                   <a:srgbClr val="B8B8B8"/>
                 </a:solidFill>
@@ -5267,7 +5310,7 @@
               </a:rPr>
               <a:t>Константин Морошин · Океан Тех · sales@okeantech.ru · okeantech.ru</a:t>
             </a:r>
-            <a:endParaRPr lang="en-US" sz="1300" dirty="0"/>
+            <a:endParaRPr lang="en-US" sz="1200" dirty="0"/>
           </a:p>
         </p:txBody>
       </p:sp>
@@ -6467,6 +6510,48 @@
                 <a:ea typeface="Arial" pitchFamily="34" charset="-122"/>
                 <a:cs typeface="Arial" pitchFamily="34" charset="-120"/>
               </a:rPr>
+              <a:t>ИИ-команда 1,2 млн $ в год; раунд: 14 млн (5 × 2,8) + 3,6 млн (ИИ, 3 года) + 2 млн (сделки) ≈ 21 млн, остальное — запас — финмодель, roll-up на 30 млн $.</a:t>
+            </a:r>
+            <a:endParaRPr lang="en-US" sz="1200" dirty="0"/>
+          </a:p>
+          <a:p>
+            <a:pPr marL="342900" indent="-342900">
+              <a:spcAft>
+                <a:spcPts val="600"/>
+              </a:spcAft>
+              <a:buSzPct val="100000"/>
+              <a:buChar char="•"/>
+            </a:pPr>
+            <a:r>
+              <a:rPr lang="en-US" sz="1200" dirty="0">
+                <a:solidFill>
+                  <a:srgbClr val="5C6067"/>
+                </a:solidFill>
+                <a:latin typeface="Arial" pitchFamily="34" charset="0"/>
+                <a:ea typeface="Arial" pitchFamily="34" charset="-122"/>
+                <a:cs typeface="Arial" pitchFamily="34" charset="-120"/>
+              </a:rPr>
+              <a:t>450 млн $ в год — оценка: 3% от 15 млрд $. 30% местных инженеров — постановление HRSD КСА № 103105.</a:t>
+            </a:r>
+            <a:endParaRPr lang="en-US" sz="1200" dirty="0"/>
+          </a:p>
+          <a:p>
+            <a:pPr marL="342900" indent="-342900">
+              <a:spcAft>
+                <a:spcPts val="600"/>
+              </a:spcAft>
+              <a:buSzPct val="100000"/>
+              <a:buChar char="•"/>
+            </a:pPr>
+            <a:r>
+              <a:rPr lang="en-US" sz="1200" dirty="0">
+                <a:solidFill>
+                  <a:srgbClr val="5C6067"/>
+                </a:solidFill>
+                <a:latin typeface="Arial" pitchFamily="34" charset="0"/>
+                <a:ea typeface="Arial" pitchFamily="34" charset="-122"/>
+                <a:cs typeface="Arial" pitchFamily="34" charset="-120"/>
+              </a:rPr>
               <a:t>Годы 2–5, 200 и 500 инженеров, 20 млн $ — цели, не прогноз.</a:t>
             </a:r>
             <a:endParaRPr lang="en-US" sz="1200" dirty="0"/>
@@ -6616,7 +6701,7 @@
                 <a:ea typeface="Arial" pitchFamily="34" charset="-122"/>
                 <a:cs typeface="Arial" pitchFamily="34" charset="-120"/>
               </a:rPr>
-              <a:t>Дата-центры годами ждут подключения к сети</a:t>
+              <a:t>Дата-центры годами ждут подключения — а проекты для них некому подписать</a:t>
             </a:r>
             <a:endParaRPr lang="en-US" sz="2800" dirty="0"/>
           </a:p>
@@ -6879,8 +6964,8 @@
         </p:nvSpPr>
         <p:spPr>
           <a:xfrm>
-            <a:off x="548640" y="4434840"/>
-            <a:ext cx="10725912" cy="914400"/>
+            <a:off x="548640" y="4343400"/>
+            <a:ext cx="10725912" cy="1188720"/>
           </a:xfrm>
           <a:prstGeom prst="rect">
             <a:avLst/>
@@ -6899,7 +6984,7 @@
               <a:buNone/>
             </a:pPr>
             <a:r>
-              <a:rPr lang="en-US" sz="1600" dirty="0">
+              <a:rPr lang="en-US" sz="1500" dirty="0">
                 <a:solidFill>
                   <a:srgbClr val="141A22"/>
                 </a:solidFill>
@@ -6907,9 +6992,9 @@
                 <a:ea typeface="Arial" pitchFamily="34" charset="-122"/>
                 <a:cs typeface="Arial" pitchFamily="34" charset="-120"/>
               </a:rPr>
-              <a:t>Мегаватты ждут не железа. Они ждут людей: пока нет проекта с подписью инженера, ничего не строится — ни в США, ни в Заливе, ни в Индии.</a:t>
-            </a:r>
-            <a:endParaRPr lang="en-US" sz="1600" dirty="0"/>
+              <a:t>Пять лет — это очередь, проверки сети, оборудование. Мы не сокращаем очередь целиком. Мы снимаем один тормоз внутри неё: проект с подписью инженера, без которого ничего не строится, а инженеров на всех не хватает — ни в США, ни в Заливе, ни в Индии.</a:t>
+            </a:r>
+            <a:endParaRPr lang="en-US" sz="1500" dirty="0"/>
           </a:p>
         </p:txBody>
       </p:sp>
@@ -8084,7 +8169,7 @@
                 <a:ea typeface="Arial" pitchFamily="34" charset="-122"/>
                 <a:cs typeface="Arial" pitchFamily="34" charset="-120"/>
               </a:rPr>
-              <a:t>Наш ИИ делает расчёты и чертежи, инженер проверяет и подписывает. Тот же штат делает вдвое больше проектов.</a:t>
+              <a:t>Наш ИИ делает расчёты и чертежи, инженер проверяет и подписывает. Тот же штат делает в полтора-два раза больше проектов.</a:t>
             </a:r>
             <a:endParaRPr lang="en-US" sz="1250" dirty="0"/>
           </a:p>
@@ -8242,8 +8327,8 @@
         </p:nvSpPr>
         <p:spPr>
           <a:xfrm>
-            <a:off x="548640" y="4709160"/>
-            <a:ext cx="10725912" cy="548640"/>
+            <a:off x="548640" y="4572000"/>
+            <a:ext cx="10725912" cy="1005840"/>
           </a:xfrm>
           <a:prstGeom prst="rect">
             <a:avLst/>
@@ -8262,7 +8347,7 @@
               <a:buNone/>
             </a:pPr>
             <a:r>
-              <a:rPr lang="en-US" sz="1600" b="1" dirty="0">
+              <a:rPr lang="en-US" sz="1400" dirty="0">
                 <a:solidFill>
                   <a:srgbClr val="141A22"/>
                 </a:solidFill>
@@ -8270,9 +8355,9 @@
                 <a:ea typeface="Arial" pitchFamily="34" charset="-122"/>
                 <a:cs typeface="Arial" pitchFamily="34" charset="-120"/>
               </a:rPr>
-              <a:t>Мы не заменяем инженеров — мы делаем так, чтобы их хватало.</a:t>
-            </a:r>
-            <a:endParaRPr lang="en-US" sz="1600" dirty="0"/>
+              <a:t>Почему покупаем, а не нанимаем: вместе с фирмой приходят клиенты, лицензии и репутация — этого не наймёшь. Почему это не сделает WSP: гиганты покупают тысячи инженеров разом, фирмы на сорок человек им не видны. Мы не заменяем инженеров — мы делаем так, чтобы их хватало.</a:t>
+            </a:r>
+            <a:endParaRPr lang="en-US" sz="1400" dirty="0"/>
           </a:p>
         </p:txBody>
       </p:sp>
@@ -8284,7 +8369,7 @@
         </p:nvSpPr>
         <p:spPr>
           <a:xfrm>
-            <a:off x="548640" y="5349240"/>
+            <a:off x="548640" y="5623560"/>
             <a:ext cx="10725912" cy="457200"/>
           </a:xfrm>
           <a:prstGeom prst="rect">
@@ -8323,7 +8408,7 @@
         </p:nvSpPr>
         <p:spPr>
           <a:xfrm>
-            <a:off x="548640" y="5897880"/>
+            <a:off x="548640" y="6035040"/>
             <a:ext cx="9445752" cy="457200"/>
           </a:xfrm>
           <a:prstGeom prst="rect">
@@ -8497,7 +8582,7 @@
                 <a:ea typeface="Arial" pitchFamily="34" charset="-122"/>
                 <a:cs typeface="Arial" pitchFamily="34" charset="-120"/>
               </a:rPr>
-              <a:t>Площадка на входе — одобренный проект на выходе, вдвое быстрее</a:t>
+              <a:t>Площадка на входе — одобренный проект на выходе, с первого раза</a:t>
             </a:r>
             <a:endParaRPr lang="en-US" sz="2800" dirty="0"/>
           </a:p>
@@ -8968,7 +9053,7 @@
                 <a:ea typeface="Arial" pitchFamily="34" charset="-122"/>
                 <a:cs typeface="Arial" pitchFamily="34" charset="-120"/>
               </a:rPr>
-              <a:t>Сетевая компания принимает проект — можно строить. Клиент получил месяцы, а не бумагу.</a:t>
+              <a:t>Сетевая компания принимает проект — можно строить. Клиент купил не бумагу, а сэкономленные месяцы.</a:t>
             </a:r>
             <a:endParaRPr lang="en-US" sz="1250" dirty="0"/>
           </a:p>
@@ -9010,7 +9095,7 @@
                 <a:ea typeface="Arial" pitchFamily="34" charset="-122"/>
                 <a:cs typeface="Arial" pitchFamily="34" charset="-120"/>
               </a:rPr>
-              <a:t>Пять лет ожидания — это очередь, проверки сети, оборудование. Из всего этого клиент может ускорить деньгами только один кусок: проект и его согласование — обычно месяцы и два-три круга правок. Мы делаем этот кусок вдвое быстрее и с первого раза. Месяц простоя готового дата-центра стоит дороже всего проекта, поэтому клиент платит за срок.</a:t>
+              <a:t>Пять лет ожидания — это очередь, проверки сети, оборудование. Из всего этого клиент может ускорить деньгами только один кусок: проект и его согласование — обычно месяцы и два-три круга правок. Мы делаем этот кусок в полтора-два раза быстрее и с первого раза. Месяц простоя готового дата-центра стоит дороже всего проекта, поэтому клиент платит за срок.</a:t>
             </a:r>
             <a:endParaRPr lang="en-US" sz="1400" dirty="0"/>
           </a:p>
@@ -9672,7 +9757,7 @@
                 <a:ea typeface="Arial" pitchFamily="34" charset="-122"/>
                 <a:cs typeface="Arial" pitchFamily="34" charset="-120"/>
               </a:rPr>
-              <a:t>В США проблему лучше всего измерили. Но начинаем мы с Персидского залива и Индии: там строят больше, инженеров не хватает так же, и туда нас пускают. Не хватает инженеров везде, а стоят они по-разному: в Индии в несколько раз дешевле, чем в США. США и Европа — позже и через партнёров.</a:t>
+              <a:t>В США проблему лучше всего измерили. Начинаем мы с Персидского залива и Индии: там строят больше, а инженеров не хватает так же — Саудовская Аравия законом требует 30% местных инженеров, и компании не знают, где их взять. Стоят инженеры по-разному: в Индии в несколько раз дешевле, чем в США. Для команды из России США и Европа — позже и через партнёров.</a:t>
             </a:r>
             <a:endParaRPr lang="en-US" sz="1400" dirty="0"/>
           </a:p>
@@ -10004,7 +10089,7 @@
                 <a:ea typeface="Arial" pitchFamily="34" charset="-122"/>
                 <a:cs typeface="Arial" pitchFamily="34" charset="-120"/>
               </a:rPr>
-              <a:t>выручки в год · 40 инженеров · обычная маржа инженерного бюро</a:t>
+              <a:t>выручки в год · 40 инженеров · маржа бюро без ИИ</a:t>
             </a:r>
             <a:endParaRPr lang="en-US" sz="1300" dirty="0"/>
           </a:p>
@@ -10148,7 +10233,7 @@
                 <a:ea typeface="Arial" pitchFamily="34" charset="-122"/>
                 <a:cs typeface="Arial" pitchFamily="34" charset="-120"/>
               </a:rPr>
-              <a:t>выручки в год · те же 40 инженеров · маржа 24%</a:t>
+              <a:t>выручки в год · те же 40 инженеров · маржа 24% после оплаты ИИ-команды</a:t>
             </a:r>
             <a:endParaRPr lang="en-US" sz="1300" dirty="0"/>
           </a:p>
@@ -10162,8 +10247,8 @@
         </p:nvSpPr>
         <p:spPr>
           <a:xfrm>
-            <a:off x="548640" y="4572000"/>
-            <a:ext cx="10725912" cy="1188720"/>
+            <a:off x="548640" y="4526280"/>
+            <a:ext cx="10725912" cy="1371600"/>
           </a:xfrm>
           <a:prstGeom prst="rect">
             <a:avLst/>
@@ -10182,7 +10267,7 @@
               <a:buNone/>
             </a:pPr>
             <a:r>
-              <a:rPr lang="en-US" sz="1450" dirty="0">
+              <a:rPr lang="en-US" sz="1400" dirty="0">
                 <a:solidFill>
                   <a:srgbClr val="FFFFFF"/>
                 </a:solidFill>
@@ -10190,9 +10275,9 @@
                 <a:ea typeface="Arial" pitchFamily="34" charset="-122"/>
                 <a:cs typeface="Arial" pitchFamily="34" charset="-120"/>
               </a:rPr>
-              <a:t>Заказов у таких фирм больше, чем рук, — поэтому они и не могут нанять. Клиент платит рыночную цену за проект, который получает быстрее; мы платим тем же инженерам ту же зарплату. Разница между старой и новой выработкой — наша прибыль.</a:t>
-            </a:r>
-            <a:endParaRPr lang="en-US" sz="1450" dirty="0"/>
+              <a:t>Заказов у таких фирм больше, чем рук, — поэтому они и не могут нанять. Прирост 1,4 млн $ в год с тех же людей. Но ИИ-команда стоит 1,2 млн $ в год на всю группу: при одной фирме она съедает почти весь прирост, при пяти — обходится по 240 тысяч на фирму. Поэтому одна фирма — эксперимент, а бизнес — группа.</a:t>
+            </a:r>
+            <a:endParaRPr lang="en-US" sz="1400" dirty="0"/>
           </a:p>
         </p:txBody>
       </p:sp>
@@ -10204,7 +10289,7 @@
         </p:nvSpPr>
         <p:spPr>
           <a:xfrm>
-            <a:off x="548640" y="5760720"/>
+            <a:off x="548640" y="5943600"/>
             <a:ext cx="9445752" cy="457200"/>
           </a:xfrm>
           <a:prstGeom prst="rect">
@@ -10627,7 +10712,7 @@
                 <a:ea typeface="Arial" pitchFamily="34" charset="-122"/>
                 <a:cs typeface="Arial" pitchFamily="34" charset="-120"/>
               </a:rPr>
-              <a:t>контрактов на сети и подстанции за один год выдала Саудовская Аравия. Там строят, туда пускают, и там не хватает инженеров.</a:t>
+              <a:t>контрактов на сети и подстанции за один год выдала Саудовская Аравия. Около 3% таких контрактов — проектирование: порядка 450 млн $ в год в одной стране.</a:t>
             </a:r>
             <a:endParaRPr lang="en-US" sz="1300" dirty="0"/>
           </a:p>
@@ -11328,7 +11413,7 @@
                 <a:ea typeface="Arial" pitchFamily="34" charset="-122"/>
                 <a:cs typeface="Arial" pitchFamily="34" charset="-120"/>
               </a:rPr>
-              <a:t>Группа на 500 инженеров. Покупатель — те, кто уже платит за инженеров миллиарды: WSP, Stantec, Cyient.</a:t>
+              <a:t>Группа на 500 инженеров: рост с 200 — на выручку группы и долг под неё, не из этого раунда. Покупатель — те, кто уже платит за инженеров миллиарды: WSP, Stantec, Cyient.</a:t>
             </a:r>
             <a:endParaRPr lang="en-US" sz="1250" dirty="0"/>
           </a:p>

--- a/ai-case-library/research/ventures/grid-plain-deck.pptx
+++ b/ai-case-library/research/ventures/grid-plain-deck.pptx
@@ -18,11 +18,9 @@
     <p:sldId id="266" r:id="rId12"/>
     <p:sldId id="267" r:id="rId13"/>
     <p:sldId id="268" r:id="rId14"/>
-    <p:sldId id="269" r:id="rId15"/>
-    <p:sldId id="270" r:id="rId16"/>
   </p:sldIdLst>
   <p:notesMasterIdLst>
-    <p:notesMasterId r:id="rId17"/>
+    <p:notesMasterId r:id="rId15"/>
   </p:notesMasterIdLst>
   <p:sldSz cx="12192000" cy="6858000"/>
   <p:notesSz cx="6858000" cy="12192000"/>
@@ -604,7 +602,7 @@
           <a:p>
             <a:r>
               <a:rPr lang="en-US" dirty="0"/>
-              <a:t>Факты из корпоративной презентации Океан Тех (2026): 48 проектов, 32 клиента, 64 сотрудника, 7 отраслей; Центр исследований основан в 2025, 14 исследователей; фреймворк — 59% сокращения сроков; публикации Inc., RTVI, TAdviser. 277 кейсов — база Центра исследований.</a:t>
+              <a:t>Риски названы до того, как инвестор их спросит. Консервативный сценарий финмодели (×1,2) убыточен — это критерий остановки, и он встроен в первый шаг.</a:t>
             </a:r>
             <a:endParaRPr lang="en-US" dirty="0"/>
           </a:p>
@@ -692,7 +690,7 @@
           <a:p>
             <a:r>
               <a:rPr lang="en-US" dirty="0"/>
-              <a:t>Биографии — из корпоративной презентации Океан Тех. Честный ответ на «вы проектировали подстанции?» — нет, поэтому первая покупка и первый найм — инженер-партнёр с лицензией; ИИ и метод — наши.</a:t>
+              <a:t>Потребность по финмодели ~21 млн $ против 30 — остальное запас на дороже купленные фирмы или третий рынок; сказать самому. Не брать 30 сразу — транши защищают обе стороны.</a:t>
             </a:r>
             <a:endParaRPr lang="en-US" dirty="0"/>
           </a:p>
@@ -780,7 +778,7 @@
           <a:p>
             <a:r>
               <a:rPr lang="en-US" dirty="0"/>
-              <a:t>Риски названы до того, как инвестор их спросит. Консервативный сценарий финмодели (×1,2) убыточен — это критерий остановки, и он встроен в первый шаг.</a:t>
+              <a:t>Раскрывать только по вопросу. Роботы — не Индия и не США; академия — требования аккредитации не проверены; данные — права на данные в контрактах с первого дня.</a:t>
             </a:r>
             <a:endParaRPr lang="en-US" dirty="0"/>
           </a:p>
@@ -868,7 +866,7 @@
           <a:p>
             <a:r>
               <a:rPr lang="en-US" dirty="0"/>
-              <a:t>Потребность по финмодели ~21 млн $ против 30 — остальное запас на дороже купленные фирмы или третий рынок; сказать самому. Не брать 30 сразу — транши защищают обе стороны.</a:t>
+              <a:t/>
             </a:r>
             <a:endParaRPr lang="en-US" dirty="0"/>
           </a:p>
@@ -892,182 +890,6 @@
             <a:fld id="{F7021451-1387-4CA6-816F-3879F97B5CBC}" type="slidenum">
               <a:rPr lang="en-US"/>
               <a:t>13</a:t>
-            </a:fld>
-            <a:endParaRPr lang="en-US"/>
-          </a:p>
-        </p:txBody>
-      </p:sp>
-    </p:spTree>
-    <p:extLst>
-      <p:ext uri="{BB962C8B-B14F-4D97-AF65-F5344CB8AC3E}">
-        <p14:creationId xmlns:p14="http://schemas.microsoft.com/office/powerpoint/2010/main" val="1024086991"/>
-      </p:ext>
-    </p:extLst>
-  </p:cSld>
-  <p:clrMapOvr>
-    <a:masterClrMapping/>
-  </p:clrMapOvr>
-</p:notes>
-</file>
-
-<file path=ppt/notesSlides/notesSlide14.xml><?xml version="1.0" encoding="utf-8"?>
-<p:notes xmlns:a="http://schemas.openxmlformats.org/drawingml/2006/main" xmlns:r="http://schemas.openxmlformats.org/officeDocument/2006/relationships" xmlns:p="http://schemas.openxmlformats.org/presentationml/2006/main">
-  <p:cSld>
-    <p:spTree>
-      <p:nvGrpSpPr>
-        <p:cNvPr id="1" name=""/>
-        <p:cNvGrpSpPr/>
-        <p:nvPr/>
-      </p:nvGrpSpPr>
-      <p:grpSpPr>
-        <a:xfrm>
-          <a:off x="0" y="0"/>
-          <a:ext cx="0" cy="0"/>
-          <a:chOff x="0" y="0"/>
-          <a:chExt cx="0" cy="0"/>
-        </a:xfrm>
-      </p:grpSpPr>
-      <p:sp>
-        <p:nvSpPr>
-          <p:cNvPr id="2" name="Slide Image Placeholder 1"/>
-          <p:cNvSpPr>
-            <a:spLocks noGrp="1" noRot="1" noChangeAspect="1"/>
-          </p:cNvSpPr>
-          <p:nvPr>
-            <p:ph type="sldImg"/>
-          </p:nvPr>
-        </p:nvSpPr>
-        <p:spPr/>
-      </p:sp>
-      <p:sp>
-        <p:nvSpPr>
-          <p:cNvPr id="3" name="Notes Placeholder 2"/>
-          <p:cNvSpPr>
-            <a:spLocks noGrp="1"/>
-          </p:cNvSpPr>
-          <p:nvPr>
-            <p:ph type="body" idx="1"/>
-          </p:nvPr>
-        </p:nvSpPr>
-        <p:spPr/>
-        <p:txBody>
-          <a:bodyPr/>
-          <a:lstStyle/>
-          <a:p>
-            <a:r>
-              <a:rPr lang="en-US" dirty="0"/>
-              <a:t>Раскрывать только по вопросу. Роботы — не Индия и не США; академия — требования аккредитации не проверены; данные — права на данные в контрактах с первого дня.</a:t>
-            </a:r>
-            <a:endParaRPr lang="en-US" dirty="0"/>
-          </a:p>
-        </p:txBody>
-      </p:sp>
-      <p:sp>
-        <p:nvSpPr>
-          <p:cNvPr id="4" name="Slide Number Placeholder 3"/>
-          <p:cNvSpPr>
-            <a:spLocks noGrp="1"/>
-          </p:cNvSpPr>
-          <p:nvPr>
-            <p:ph type="sldNum" sz="quarter" idx="10"/>
-          </p:nvPr>
-        </p:nvSpPr>
-        <p:spPr/>
-        <p:txBody>
-          <a:bodyPr/>
-          <a:lstStyle/>
-          <a:p>
-            <a:fld id="{F7021451-1387-4CA6-816F-3879F97B5CBC}" type="slidenum">
-              <a:rPr lang="en-US"/>
-              <a:t>14</a:t>
-            </a:fld>
-            <a:endParaRPr lang="en-US"/>
-          </a:p>
-        </p:txBody>
-      </p:sp>
-    </p:spTree>
-    <p:extLst>
-      <p:ext uri="{BB962C8B-B14F-4D97-AF65-F5344CB8AC3E}">
-        <p14:creationId xmlns:p14="http://schemas.microsoft.com/office/powerpoint/2010/main" val="1024086991"/>
-      </p:ext>
-    </p:extLst>
-  </p:cSld>
-  <p:clrMapOvr>
-    <a:masterClrMapping/>
-  </p:clrMapOvr>
-</p:notes>
-</file>
-
-<file path=ppt/notesSlides/notesSlide15.xml><?xml version="1.0" encoding="utf-8"?>
-<p:notes xmlns:a="http://schemas.openxmlformats.org/drawingml/2006/main" xmlns:r="http://schemas.openxmlformats.org/officeDocument/2006/relationships" xmlns:p="http://schemas.openxmlformats.org/presentationml/2006/main">
-  <p:cSld>
-    <p:spTree>
-      <p:nvGrpSpPr>
-        <p:cNvPr id="1" name=""/>
-        <p:cNvGrpSpPr/>
-        <p:nvPr/>
-      </p:nvGrpSpPr>
-      <p:grpSpPr>
-        <a:xfrm>
-          <a:off x="0" y="0"/>
-          <a:ext cx="0" cy="0"/>
-          <a:chOff x="0" y="0"/>
-          <a:chExt cx="0" cy="0"/>
-        </a:xfrm>
-      </p:grpSpPr>
-      <p:sp>
-        <p:nvSpPr>
-          <p:cNvPr id="2" name="Slide Image Placeholder 1"/>
-          <p:cNvSpPr>
-            <a:spLocks noGrp="1" noRot="1" noChangeAspect="1"/>
-          </p:cNvSpPr>
-          <p:nvPr>
-            <p:ph type="sldImg"/>
-          </p:nvPr>
-        </p:nvSpPr>
-        <p:spPr/>
-      </p:sp>
-      <p:sp>
-        <p:nvSpPr>
-          <p:cNvPr id="3" name="Notes Placeholder 2"/>
-          <p:cNvSpPr>
-            <a:spLocks noGrp="1"/>
-          </p:cNvSpPr>
-          <p:nvPr>
-            <p:ph type="body" idx="1"/>
-          </p:nvPr>
-        </p:nvSpPr>
-        <p:spPr/>
-        <p:txBody>
-          <a:bodyPr/>
-          <a:lstStyle/>
-          <a:p>
-            <a:r>
-              <a:rPr lang="en-US" dirty="0"/>
-              <a:t/>
-            </a:r>
-            <a:endParaRPr lang="en-US" dirty="0"/>
-          </a:p>
-        </p:txBody>
-      </p:sp>
-      <p:sp>
-        <p:nvSpPr>
-          <p:cNvPr id="4" name="Slide Number Placeholder 3"/>
-          <p:cNvSpPr>
-            <a:spLocks noGrp="1"/>
-          </p:cNvSpPr>
-          <p:nvPr>
-            <p:ph type="sldNum" sz="quarter" idx="10"/>
-          </p:nvPr>
-        </p:nvSpPr>
-        <p:spPr/>
-        <p:txBody>
-          <a:bodyPr/>
-          <a:lstStyle/>
-          <a:p>
-            <a:fld id="{F7021451-1387-4CA6-816F-3879F97B5CBC}" type="slidenum">
-              <a:rPr lang="en-US"/>
-              <a:t>15</a:t>
             </a:fld>
             <a:endParaRPr lang="en-US"/>
           </a:p>
@@ -1220,7 +1042,7 @@
           <a:p>
             <a:r>
               <a:rPr lang="en-US" dirty="0"/>
-              <a:t>Слайд-словарь: снимает три термина один раз, чтобы дальше не объяснять. Если аудитория профильная — пропустить.</a:t>
+              <a:t>Не говорить «уникальная технология». Аналогия, если спросят «почему не софт»: софт в энергетике раздают бесплатно (Tesla, регуляторы), подпись и клиентов бесплатно не раздашь.</a:t>
             </a:r>
             <a:endParaRPr lang="en-US" dirty="0"/>
           </a:p>
@@ -1308,7 +1130,7 @@
           <a:p>
             <a:r>
               <a:rPr lang="en-US" dirty="0"/>
-              <a:t>Не говорить «уникальная технология». Аналогия, если спросят «почему не софт»: софт в энергетике раздают бесплатно (Tesla, регуляторы), подпись и клиентов бесплатно не раздашь.</a:t>
+              <a:t>Стадию строительства, приёмку и роботов не грузить сюда — это в приложении «если спросят».</a:t>
             </a:r>
             <a:endParaRPr lang="en-US" dirty="0"/>
           </a:p>
@@ -1396,7 +1218,7 @@
           <a:p>
             <a:r>
               <a:rPr lang="en-US" dirty="0"/>
-              <a:t>Стадию строительства, приёмку и роботов не грузить сюда — это в приложении «если спросят».</a:t>
+              <a:t>Первые продажи — субподряд у крупных подрядчиков, потом прямые контракты. Гиперскейлеров по имени не называть. Число для справки: в очереди США 2061 ГВт — больше действующей генерации страны.</a:t>
             </a:r>
             <a:endParaRPr lang="en-US" dirty="0"/>
           </a:p>
@@ -1484,7 +1306,7 @@
           <a:p>
             <a:r>
               <a:rPr lang="en-US" dirty="0"/>
-              <a:t>Первые продажи — субподряд у крупных подрядчиков, потом прямые контракты. Гиперскейлеров по имени не называть. Число для справки: в очереди США 2061 ГВт — больше действующей генерации страны.</a:t>
+              <a:t>Финмодель: базовый сценарий ×1,5 к выработке, маржа 24%; при ×1,2 — убыток, это критерий остановки. Цена покупки 0,8–1,2× выручки — допущение. Не обещать «вдвое» как факт.</a:t>
             </a:r>
             <a:endParaRPr lang="en-US" dirty="0"/>
           </a:p>
@@ -1572,7 +1394,7 @@
           <a:p>
             <a:r>
               <a:rPr lang="en-US" dirty="0"/>
-              <a:t>Финмодель: базовый сценарий ×1,5 к выработке, маржа 24%; при ×1,2 — убыток, это критерий остановки. Цена покупки 0,8–1,2× выручки — допущение. Не обещать «вдвое» как факт.</a:t>
+              <a:t>WSP → POWER Engineers 1,78 млрд $ / 4000 сотрудников ≈ 445 тыс. $ за голову — цена по американским ставкам, направление рынка, не наш мультипликатор на выходе. 70 тыс. $ — допущение финмодели (покупка за годовую выручку). Оценка рынка одной страны: ~450 млн $ инжиниринга в год в КСА (3% от 15 млрд $) — говорить как «порядок».</a:t>
             </a:r>
             <a:endParaRPr lang="en-US" dirty="0"/>
           </a:p>
@@ -1660,7 +1482,7 @@
           <a:p>
             <a:r>
               <a:rPr lang="en-US" dirty="0"/>
-              <a:t>WSP → POWER Engineers 1,78 млрд $ / 4000 сотрудников ≈ 445 тыс. $ за голову — цена по американским ставкам, направление рынка, не наш мультипликатор на выходе. 70 тыс. $ — допущение финмодели (покупка за годовую выручку). Оценка рынка одной страны: ~450 млн $ инжиниринга в год в КСА (3% от 15 млрд $) — говорить как «порядок».</a:t>
+              <a:t>Не называть выручку года 5 как «будет». Если спросят «когда тысяча инженеров?» — «после того, как пять фирм покажут одно ядро и одну маржу».</a:t>
             </a:r>
             <a:endParaRPr lang="en-US" dirty="0"/>
           </a:p>
@@ -1748,7 +1570,7 @@
           <a:p>
             <a:r>
               <a:rPr lang="en-US" dirty="0"/>
-              <a:t>Не называть выручку года 5 как «будет». Если спросят «когда тысяча инженеров?» — «после того, как пять фирм покажут одно ядро и одну маржу».</a:t>
+              <a:t>Факты — из корпоративной презентации Океан Тех (2026): 48 проектов, 32 клиента, 64 сотрудника, 7 отраслей; Центр исследований — 14 исследователей; фреймворк сокращает сроки на 59% (по данным компании); публикации Inc., RTVI, TAdviser. Честный ответ на «вы проектировали подстанции?» — нет, поэтому первый найм — инженер-партнёр с лицензией.</a:t>
             </a:r>
             <a:endParaRPr lang="en-US" dirty="0"/>
           </a:p>
@@ -2482,7 +2304,7 @@
                 <a:ea typeface="Courier New" pitchFamily="34" charset="-122"/>
                 <a:cs typeface="Courier New" pitchFamily="34" charset="-120"/>
               </a:rPr>
-              <a:t>8 · КТО МЫ</a:t>
+              <a:t>ПЕРЕД ТЕМ КАК ПРОСИТЬ ДЕНЬГИ</a:t>
             </a:r>
             <a:endParaRPr lang="en-US" sz="950" dirty="0"/>
           </a:p>
@@ -2521,7 +2343,7 @@
                 <a:ea typeface="Arial" pitchFamily="34" charset="-122"/>
                 <a:cs typeface="Arial" pitchFamily="34" charset="-120"/>
               </a:rPr>
-              <a:t>Океан Тех: исследуем ИИ и строим решения для бизнеса</a:t>
+              <a:t>Три риска — и что мы с ними делаем</a:t>
             </a:r>
             <a:endParaRPr lang="en-US" sz="2800" dirty="0"/>
           </a:p>
@@ -2560,7 +2382,7 @@
                 <a:ea typeface="Courier New" pitchFamily="34" charset="-122"/>
                 <a:cs typeface="Courier New" pitchFamily="34" charset="-120"/>
               </a:rPr>
-              <a:t>10 / 15</a:t>
+              <a:t>10 / 13</a:t>
             </a:r>
             <a:endParaRPr lang="en-US" sz="900" dirty="0"/>
           </a:p>
@@ -2575,11 +2397,11 @@
         <p:spPr>
           <a:xfrm>
             <a:off x="548640" y="2103120"/>
-            <a:ext cx="2601468" cy="1737360"/>
+            <a:ext cx="3544824" cy="2468880"/>
           </a:xfrm>
           <a:prstGeom prst="roundRect">
             <a:avLst>
-              <a:gd name="adj" fmla="val 9474"/>
+              <a:gd name="adj" fmla="val 6667"/>
             </a:avLst>
           </a:prstGeom>
           <a:solidFill>
@@ -2601,8 +2423,86 @@
         </p:nvSpPr>
         <p:spPr>
           <a:xfrm>
-            <a:off x="822960" y="2286000"/>
-            <a:ext cx="2052828" cy="731520"/>
+            <a:off x="822960" y="2331720"/>
+            <a:ext cx="2996184" cy="274320"/>
+          </a:xfrm>
+          <a:prstGeom prst="rect">
+            <a:avLst/>
+          </a:prstGeom>
+          <a:noFill/>
+          <a:ln/>
+        </p:spPr>
+        <p:txBody>
+          <a:bodyPr wrap="square" lIns="0" tIns="0" rIns="0" bIns="0" rtlCol="0" anchor="ctr"/>
+          <a:lstStyle/>
+          <a:p>
+            <a:pPr indent="0" marL="0">
+              <a:buNone/>
+            </a:pPr>
+            <a:r>
+              <a:rPr lang="en-US" sz="950" spc="200" kern="0" dirty="0">
+                <a:solidFill>
+                  <a:srgbClr val="0460F5"/>
+                </a:solidFill>
+                <a:latin typeface="Courier New" pitchFamily="34" charset="0"/>
+                <a:ea typeface="Courier New" pitchFamily="34" charset="-122"/>
+                <a:cs typeface="Courier New" pitchFamily="34" charset="-120"/>
+              </a:rPr>
+              <a:t>РИСК 1</a:t>
+            </a:r>
+            <a:endParaRPr lang="en-US" sz="950" dirty="0"/>
+          </a:p>
+        </p:txBody>
+      </p:sp>
+      <p:sp>
+        <p:nvSpPr>
+          <p:cNvPr id="8" name="Text 6"/>
+          <p:cNvSpPr txBox="1"/>
+          <p:nvPr/>
+        </p:nvSpPr>
+        <p:spPr>
+          <a:xfrm>
+            <a:off x="822960" y="2651760"/>
+            <a:ext cx="2996184" cy="411480"/>
+          </a:xfrm>
+          <a:prstGeom prst="rect">
+            <a:avLst/>
+          </a:prstGeom>
+          <a:noFill/>
+          <a:ln/>
+        </p:spPr>
+        <p:txBody>
+          <a:bodyPr wrap="square" lIns="0" tIns="0" rIns="0" bIns="0" rtlCol="0" anchor="ctr"/>
+          <a:lstStyle/>
+          <a:p>
+            <a:pPr indent="0" marL="0">
+              <a:buNone/>
+            </a:pPr>
+            <a:r>
+              <a:rPr lang="en-US" sz="1600" b="1" dirty="0">
+                <a:solidFill>
+                  <a:srgbClr val="141A22"/>
+                </a:solidFill>
+                <a:latin typeface="Arial" pitchFamily="34" charset="0"/>
+                <a:ea typeface="Arial" pitchFamily="34" charset="-122"/>
+                <a:cs typeface="Arial" pitchFamily="34" charset="-120"/>
+              </a:rPr>
+              <a:t>ИИ будет у всех</a:t>
+            </a:r>
+            <a:endParaRPr lang="en-US" sz="1600" dirty="0"/>
+          </a:p>
+        </p:txBody>
+      </p:sp>
+      <p:sp>
+        <p:nvSpPr>
+          <p:cNvPr id="9" name="Text 7"/>
+          <p:cNvSpPr txBox="1"/>
+          <p:nvPr/>
+        </p:nvSpPr>
+        <p:spPr>
+          <a:xfrm>
+            <a:off x="822960" y="3108960"/>
+            <a:ext cx="2996184" cy="1280160"/>
           </a:xfrm>
           <a:prstGeom prst="rect">
             <a:avLst/>
@@ -2618,46 +2518,7 @@
               <a:buNone/>
             </a:pPr>
             <a:r>
-              <a:rPr lang="en-US" sz="4000" b="1" dirty="0">
-                <a:solidFill>
-                  <a:srgbClr val="141A22"/>
-                </a:solidFill>
-                <a:latin typeface="Arial" pitchFamily="34" charset="0"/>
-                <a:ea typeface="Arial" pitchFamily="34" charset="-122"/>
-                <a:cs typeface="Arial" pitchFamily="34" charset="-120"/>
-              </a:rPr>
-              <a:t>48</a:t>
-            </a:r>
-            <a:endParaRPr lang="en-US" sz="4000" dirty="0"/>
-          </a:p>
-        </p:txBody>
-      </p:sp>
-      <p:sp>
-        <p:nvSpPr>
-          <p:cNvPr id="8" name="Text 6"/>
-          <p:cNvSpPr txBox="1"/>
-          <p:nvPr/>
-        </p:nvSpPr>
-        <p:spPr>
-          <a:xfrm>
-            <a:off x="822960" y="3017520"/>
-            <a:ext cx="2052828" cy="731520"/>
-          </a:xfrm>
-          <a:prstGeom prst="rect">
-            <a:avLst/>
-          </a:prstGeom>
-          <a:noFill/>
-          <a:ln/>
-        </p:spPr>
-        <p:txBody>
-          <a:bodyPr wrap="square" lIns="0" tIns="0" rIns="0" bIns="0" rtlCol="0" anchor="t"/>
-          <a:lstStyle/>
-          <a:p>
-            <a:pPr indent="0" marL="0">
-              <a:buNone/>
-            </a:pPr>
-            <a:r>
-              <a:rPr lang="en-US" sz="1150" dirty="0">
+              <a:rPr lang="en-US" sz="1250" dirty="0">
                 <a:solidFill>
                   <a:srgbClr val="5C6067"/>
                 </a:solidFill>
@@ -2665,26 +2526,26 @@
                 <a:ea typeface="Arial" pitchFamily="34" charset="-122"/>
                 <a:cs typeface="Arial" pitchFamily="34" charset="-120"/>
               </a:rPr>
-              <a:t>проектов реализовано</a:t>
-            </a:r>
-            <a:endParaRPr lang="en-US" sz="1150" dirty="0"/>
-          </a:p>
-        </p:txBody>
-      </p:sp>
-      <p:sp>
-        <p:nvSpPr>
-          <p:cNvPr id="9" name="Shape 7"/>
+              <a:t>Через год-два такой ИИ появится у каждого. Поэтому наше преимущество — не в модели, а в купленных фирмах, их лицензиях и клиентах. Их бесплатно не раздашь.</a:t>
+            </a:r>
+            <a:endParaRPr lang="en-US" sz="1250" dirty="0"/>
+          </a:p>
+        </p:txBody>
+      </p:sp>
+      <p:sp>
+        <p:nvSpPr>
+          <p:cNvPr id="10" name="Shape 8"/>
           <p:cNvSpPr/>
           <p:nvPr/>
         </p:nvSpPr>
         <p:spPr>
           <a:xfrm>
-            <a:off x="3378708" y="2103120"/>
-            <a:ext cx="2601468" cy="1737360"/>
+            <a:off x="4322064" y="2103120"/>
+            <a:ext cx="3544824" cy="2468880"/>
           </a:xfrm>
           <a:prstGeom prst="roundRect">
             <a:avLst>
-              <a:gd name="adj" fmla="val 9474"/>
+              <a:gd name="adj" fmla="val 6667"/>
             </a:avLst>
           </a:prstGeom>
           <a:solidFill>
@@ -2700,14 +2561,92 @@
       </p:sp>
       <p:sp>
         <p:nvSpPr>
-          <p:cNvPr id="10" name="Text 8"/>
-          <p:cNvSpPr txBox="1"/>
-          <p:nvPr/>
-        </p:nvSpPr>
-        <p:spPr>
-          <a:xfrm>
-            <a:off x="3653028" y="2286000"/>
-            <a:ext cx="2052828" cy="731520"/>
+          <p:cNvPr id="11" name="Text 9"/>
+          <p:cNvSpPr txBox="1"/>
+          <p:nvPr/>
+        </p:nvSpPr>
+        <p:spPr>
+          <a:xfrm>
+            <a:off x="4596384" y="2331720"/>
+            <a:ext cx="2996184" cy="274320"/>
+          </a:xfrm>
+          <a:prstGeom prst="rect">
+            <a:avLst/>
+          </a:prstGeom>
+          <a:noFill/>
+          <a:ln/>
+        </p:spPr>
+        <p:txBody>
+          <a:bodyPr wrap="square" lIns="0" tIns="0" rIns="0" bIns="0" rtlCol="0" anchor="ctr"/>
+          <a:lstStyle/>
+          <a:p>
+            <a:pPr indent="0" marL="0">
+              <a:buNone/>
+            </a:pPr>
+            <a:r>
+              <a:rPr lang="en-US" sz="950" spc="200" kern="0" dirty="0">
+                <a:solidFill>
+                  <a:srgbClr val="0460F5"/>
+                </a:solidFill>
+                <a:latin typeface="Courier New" pitchFamily="34" charset="0"/>
+                <a:ea typeface="Courier New" pitchFamily="34" charset="-122"/>
+                <a:cs typeface="Courier New" pitchFamily="34" charset="-120"/>
+              </a:rPr>
+              <a:t>РИСК 2</a:t>
+            </a:r>
+            <a:endParaRPr lang="en-US" sz="950" dirty="0"/>
+          </a:p>
+        </p:txBody>
+      </p:sp>
+      <p:sp>
+        <p:nvSpPr>
+          <p:cNvPr id="12" name="Text 10"/>
+          <p:cNvSpPr txBox="1"/>
+          <p:nvPr/>
+        </p:nvSpPr>
+        <p:spPr>
+          <a:xfrm>
+            <a:off x="4596384" y="2651760"/>
+            <a:ext cx="2996184" cy="411480"/>
+          </a:xfrm>
+          <a:prstGeom prst="rect">
+            <a:avLst/>
+          </a:prstGeom>
+          <a:noFill/>
+          <a:ln/>
+        </p:spPr>
+        <p:txBody>
+          <a:bodyPr wrap="square" lIns="0" tIns="0" rIns="0" bIns="0" rtlCol="0" anchor="ctr"/>
+          <a:lstStyle/>
+          <a:p>
+            <a:pPr indent="0" marL="0">
+              <a:buNone/>
+            </a:pPr>
+            <a:r>
+              <a:rPr lang="en-US" sz="1600" b="1" dirty="0">
+                <a:solidFill>
+                  <a:srgbClr val="141A22"/>
+                </a:solidFill>
+                <a:latin typeface="Arial" pitchFamily="34" charset="0"/>
+                <a:ea typeface="Arial" pitchFamily="34" charset="-122"/>
+                <a:cs typeface="Arial" pitchFamily="34" charset="-120"/>
+              </a:rPr>
+              <a:t>Инженеры уйдут</a:t>
+            </a:r>
+            <a:endParaRPr lang="en-US" sz="1600" dirty="0"/>
+          </a:p>
+        </p:txBody>
+      </p:sp>
+      <p:sp>
+        <p:nvSpPr>
+          <p:cNvPr id="13" name="Text 11"/>
+          <p:cNvSpPr txBox="1"/>
+          <p:nvPr/>
+        </p:nvSpPr>
+        <p:spPr>
+          <a:xfrm>
+            <a:off x="4596384" y="3108960"/>
+            <a:ext cx="2996184" cy="1280160"/>
           </a:xfrm>
           <a:prstGeom prst="rect">
             <a:avLst/>
@@ -2723,46 +2662,7 @@
               <a:buNone/>
             </a:pPr>
             <a:r>
-              <a:rPr lang="en-US" sz="4000" b="1" dirty="0">
-                <a:solidFill>
-                  <a:srgbClr val="141A22"/>
-                </a:solidFill>
-                <a:latin typeface="Arial" pitchFamily="34" charset="0"/>
-                <a:ea typeface="Arial" pitchFamily="34" charset="-122"/>
-                <a:cs typeface="Arial" pitchFamily="34" charset="-120"/>
-              </a:rPr>
-              <a:t>32</a:t>
-            </a:r>
-            <a:endParaRPr lang="en-US" sz="4000" dirty="0"/>
-          </a:p>
-        </p:txBody>
-      </p:sp>
-      <p:sp>
-        <p:nvSpPr>
-          <p:cNvPr id="11" name="Text 9"/>
-          <p:cNvSpPr txBox="1"/>
-          <p:nvPr/>
-        </p:nvSpPr>
-        <p:spPr>
-          <a:xfrm>
-            <a:off x="3653028" y="3017520"/>
-            <a:ext cx="2052828" cy="731520"/>
-          </a:xfrm>
-          <a:prstGeom prst="rect">
-            <a:avLst/>
-          </a:prstGeom>
-          <a:noFill/>
-          <a:ln/>
-        </p:spPr>
-        <p:txBody>
-          <a:bodyPr wrap="square" lIns="0" tIns="0" rIns="0" bIns="0" rtlCol="0" anchor="t"/>
-          <a:lstStyle/>
-          <a:p>
-            <a:pPr indent="0" marL="0">
-              <a:buNone/>
-            </a:pPr>
-            <a:r>
-              <a:rPr lang="en-US" sz="1150" dirty="0">
+              <a:rPr lang="en-US" sz="1250" dirty="0">
                 <a:solidFill>
                   <a:srgbClr val="5C6067"/>
                 </a:solidFill>
@@ -2770,26 +2670,26 @@
                 <a:ea typeface="Arial" pitchFamily="34" charset="-122"/>
                 <a:cs typeface="Arial" pitchFamily="34" charset="-120"/>
               </a:rPr>
-              <a:t>клиента из разных отраслей</a:t>
-            </a:r>
-            <a:endParaRPr lang="en-US" sz="1150" dirty="0"/>
-          </a:p>
-        </p:txBody>
-      </p:sp>
-      <p:sp>
-        <p:nvSpPr>
-          <p:cNvPr id="12" name="Shape 10"/>
+              <a:t>Это бизнес на людях. Покупаем фирмы с отложенной выплатой основателям, а ИИ делает работу инженеров легче, а не заменяет их.</a:t>
+            </a:r>
+            <a:endParaRPr lang="en-US" sz="1250" dirty="0"/>
+          </a:p>
+        </p:txBody>
+      </p:sp>
+      <p:sp>
+        <p:nvSpPr>
+          <p:cNvPr id="14" name="Shape 12"/>
           <p:cNvSpPr/>
           <p:nvPr/>
         </p:nvSpPr>
         <p:spPr>
           <a:xfrm>
-            <a:off x="6208776" y="2103120"/>
-            <a:ext cx="2601468" cy="1737360"/>
+            <a:off x="8095488" y="2103120"/>
+            <a:ext cx="3544824" cy="2468880"/>
           </a:xfrm>
           <a:prstGeom prst="roundRect">
             <a:avLst>
-              <a:gd name="adj" fmla="val 9474"/>
+              <a:gd name="adj" fmla="val 6667"/>
             </a:avLst>
           </a:prstGeom>
           <a:solidFill>
@@ -2805,14 +2705,92 @@
       </p:sp>
       <p:sp>
         <p:nvSpPr>
-          <p:cNvPr id="13" name="Text 11"/>
-          <p:cNvSpPr txBox="1"/>
-          <p:nvPr/>
-        </p:nvSpPr>
-        <p:spPr>
-          <a:xfrm>
-            <a:off x="6483096" y="2286000"/>
-            <a:ext cx="2052828" cy="731520"/>
+          <p:cNvPr id="15" name="Text 13"/>
+          <p:cNvSpPr txBox="1"/>
+          <p:nvPr/>
+        </p:nvSpPr>
+        <p:spPr>
+          <a:xfrm>
+            <a:off x="8369808" y="2331720"/>
+            <a:ext cx="2996184" cy="274320"/>
+          </a:xfrm>
+          <a:prstGeom prst="rect">
+            <a:avLst/>
+          </a:prstGeom>
+          <a:noFill/>
+          <a:ln/>
+        </p:spPr>
+        <p:txBody>
+          <a:bodyPr wrap="square" lIns="0" tIns="0" rIns="0" bIns="0" rtlCol="0" anchor="ctr"/>
+          <a:lstStyle/>
+          <a:p>
+            <a:pPr indent="0" marL="0">
+              <a:buNone/>
+            </a:pPr>
+            <a:r>
+              <a:rPr lang="en-US" sz="950" spc="200" kern="0" dirty="0">
+                <a:solidFill>
+                  <a:srgbClr val="0460F5"/>
+                </a:solidFill>
+                <a:latin typeface="Courier New" pitchFamily="34" charset="0"/>
+                <a:ea typeface="Courier New" pitchFamily="34" charset="-122"/>
+                <a:cs typeface="Courier New" pitchFamily="34" charset="-120"/>
+              </a:rPr>
+              <a:t>РИСК 3</a:t>
+            </a:r>
+            <a:endParaRPr lang="en-US" sz="950" dirty="0"/>
+          </a:p>
+        </p:txBody>
+      </p:sp>
+      <p:sp>
+        <p:nvSpPr>
+          <p:cNvPr id="16" name="Text 14"/>
+          <p:cNvSpPr txBox="1"/>
+          <p:nvPr/>
+        </p:nvSpPr>
+        <p:spPr>
+          <a:xfrm>
+            <a:off x="8369808" y="2651760"/>
+            <a:ext cx="2996184" cy="411480"/>
+          </a:xfrm>
+          <a:prstGeom prst="rect">
+            <a:avLst/>
+          </a:prstGeom>
+          <a:noFill/>
+          <a:ln/>
+        </p:spPr>
+        <p:txBody>
+          <a:bodyPr wrap="square" lIns="0" tIns="0" rIns="0" bIns="0" rtlCol="0" anchor="ctr"/>
+          <a:lstStyle/>
+          <a:p>
+            <a:pPr indent="0" marL="0">
+              <a:buNone/>
+            </a:pPr>
+            <a:r>
+              <a:rPr lang="en-US" sz="1600" b="1" dirty="0">
+                <a:solidFill>
+                  <a:srgbClr val="141A22"/>
+                </a:solidFill>
+                <a:latin typeface="Arial" pitchFamily="34" charset="0"/>
+                <a:ea typeface="Arial" pitchFamily="34" charset="-122"/>
+                <a:cs typeface="Arial" pitchFamily="34" charset="-120"/>
+              </a:rPr>
+              <a:t>Происхождение команды</a:t>
+            </a:r>
+            <a:endParaRPr lang="en-US" sz="1600" dirty="0"/>
+          </a:p>
+        </p:txBody>
+      </p:sp>
+      <p:sp>
+        <p:nvSpPr>
+          <p:cNvPr id="17" name="Text 15"/>
+          <p:cNvSpPr txBox="1"/>
+          <p:nvPr/>
+        </p:nvSpPr>
+        <p:spPr>
+          <a:xfrm>
+            <a:off x="8369808" y="3108960"/>
+            <a:ext cx="2996184" cy="1280160"/>
           </a:xfrm>
           <a:prstGeom prst="rect">
             <a:avLst/>
@@ -2828,7 +2806,49 @@
               <a:buNone/>
             </a:pPr>
             <a:r>
-              <a:rPr lang="en-US" sz="4000" b="1" dirty="0">
+              <a:rPr lang="en-US" sz="1250" dirty="0">
+                <a:solidFill>
+                  <a:srgbClr val="5C6067"/>
+                </a:solidFill>
+                <a:latin typeface="Arial" pitchFamily="34" charset="0"/>
+                <a:ea typeface="Arial" pitchFamily="34" charset="-122"/>
+                <a:cs typeface="Arial" pitchFamily="34" charset="-120"/>
+              </a:rPr>
+              <a:t>Команда из России: в США и Европе нас ждут проверки и ограничения. Поэтому стартуем там, где строят и куда пускают: Залив, Индия. Международная структура с первого дня.</a:t>
+            </a:r>
+            <a:endParaRPr lang="en-US" sz="1250" dirty="0"/>
+          </a:p>
+        </p:txBody>
+      </p:sp>
+      <p:sp>
+        <p:nvSpPr>
+          <p:cNvPr id="18" name="Text 16"/>
+          <p:cNvSpPr txBox="1"/>
+          <p:nvPr/>
+        </p:nvSpPr>
+        <p:spPr>
+          <a:xfrm>
+            <a:off x="548640" y="4846320"/>
+            <a:ext cx="10725912" cy="822960"/>
+          </a:xfrm>
+          <a:prstGeom prst="rect">
+            <a:avLst/>
+          </a:prstGeom>
+          <a:noFill/>
+          <a:ln/>
+        </p:spPr>
+        <p:txBody>
+          <a:bodyPr wrap="square" lIns="0" tIns="0" rIns="0" bIns="0" rtlCol="0" anchor="t"/>
+          <a:lstStyle/>
+          <a:p>
+            <a:pPr indent="0" marL="0">
+              <a:lnSpc>
+                <a:spcPct val="115000"/>
+              </a:lnSpc>
+              <a:buNone/>
+            </a:pPr>
+            <a:r>
+              <a:rPr lang="en-US" sz="1450" dirty="0">
                 <a:solidFill>
                   <a:srgbClr val="141A22"/>
                 </a:solidFill>
@@ -2836,348 +2856,9 @@
                 <a:ea typeface="Arial" pitchFamily="34" charset="-122"/>
                 <a:cs typeface="Arial" pitchFamily="34" charset="-120"/>
               </a:rPr>
-              <a:t>64</a:t>
-            </a:r>
-            <a:endParaRPr lang="en-US" sz="4000" dirty="0"/>
-          </a:p>
-        </p:txBody>
-      </p:sp>
-      <p:sp>
-        <p:nvSpPr>
-          <p:cNvPr id="14" name="Text 12"/>
-          <p:cNvSpPr txBox="1"/>
-          <p:nvPr/>
-        </p:nvSpPr>
-        <p:spPr>
-          <a:xfrm>
-            <a:off x="6483096" y="3017520"/>
-            <a:ext cx="2052828" cy="731520"/>
-          </a:xfrm>
-          <a:prstGeom prst="rect">
-            <a:avLst/>
-          </a:prstGeom>
-          <a:noFill/>
-          <a:ln/>
-        </p:spPr>
-        <p:txBody>
-          <a:bodyPr wrap="square" lIns="0" tIns="0" rIns="0" bIns="0" rtlCol="0" anchor="t"/>
-          <a:lstStyle/>
-          <a:p>
-            <a:pPr indent="0" marL="0">
-              <a:buNone/>
-            </a:pPr>
-            <a:r>
-              <a:rPr lang="en-US" sz="1150" dirty="0">
-                <a:solidFill>
-                  <a:srgbClr val="5C6067"/>
-                </a:solidFill>
-                <a:latin typeface="Arial" pitchFamily="34" charset="0"/>
-                <a:ea typeface="Arial" pitchFamily="34" charset="-122"/>
-                <a:cs typeface="Arial" pitchFamily="34" charset="-120"/>
-              </a:rPr>
-              <a:t>человека в штате: исследователи, инженеры, продуктовые дизайнеры</a:t>
-            </a:r>
-            <a:endParaRPr lang="en-US" sz="1150" dirty="0"/>
-          </a:p>
-        </p:txBody>
-      </p:sp>
-      <p:sp>
-        <p:nvSpPr>
-          <p:cNvPr id="15" name="Shape 13"/>
-          <p:cNvSpPr/>
-          <p:nvPr/>
-        </p:nvSpPr>
-        <p:spPr>
-          <a:xfrm>
-            <a:off x="9038844" y="2103120"/>
-            <a:ext cx="2601468" cy="1737360"/>
-          </a:xfrm>
-          <a:prstGeom prst="roundRect">
-            <a:avLst>
-              <a:gd name="adj" fmla="val 9474"/>
-            </a:avLst>
-          </a:prstGeom>
-          <a:solidFill>
-            <a:srgbClr val="F7F7F7"/>
-          </a:solidFill>
-          <a:ln w="12700">
-            <a:solidFill>
-              <a:srgbClr val="F7F7F7"/>
-            </a:solidFill>
-            <a:prstDash val="solid"/>
-          </a:ln>
-        </p:spPr>
-      </p:sp>
-      <p:sp>
-        <p:nvSpPr>
-          <p:cNvPr id="16" name="Text 14"/>
-          <p:cNvSpPr txBox="1"/>
-          <p:nvPr/>
-        </p:nvSpPr>
-        <p:spPr>
-          <a:xfrm>
-            <a:off x="9313164" y="2286000"/>
-            <a:ext cx="2052828" cy="731520"/>
-          </a:xfrm>
-          <a:prstGeom prst="rect">
-            <a:avLst/>
-          </a:prstGeom>
-          <a:noFill/>
-          <a:ln/>
-        </p:spPr>
-        <p:txBody>
-          <a:bodyPr wrap="square" lIns="0" tIns="0" rIns="0" bIns="0" rtlCol="0" anchor="t"/>
-          <a:lstStyle/>
-          <a:p>
-            <a:pPr indent="0" marL="0">
-              <a:buNone/>
-            </a:pPr>
-            <a:r>
-              <a:rPr lang="en-US" sz="4000" b="1" dirty="0">
-                <a:solidFill>
-                  <a:srgbClr val="141A22"/>
-                </a:solidFill>
-                <a:latin typeface="Arial" pitchFamily="34" charset="0"/>
-                <a:ea typeface="Arial" pitchFamily="34" charset="-122"/>
-                <a:cs typeface="Arial" pitchFamily="34" charset="-120"/>
-              </a:rPr>
-              <a:t>7</a:t>
-            </a:r>
-            <a:endParaRPr lang="en-US" sz="4000" dirty="0"/>
-          </a:p>
-        </p:txBody>
-      </p:sp>
-      <p:sp>
-        <p:nvSpPr>
-          <p:cNvPr id="17" name="Text 15"/>
-          <p:cNvSpPr txBox="1"/>
-          <p:nvPr/>
-        </p:nvSpPr>
-        <p:spPr>
-          <a:xfrm>
-            <a:off x="9313164" y="3017520"/>
-            <a:ext cx="2052828" cy="731520"/>
-          </a:xfrm>
-          <a:prstGeom prst="rect">
-            <a:avLst/>
-          </a:prstGeom>
-          <a:noFill/>
-          <a:ln/>
-        </p:spPr>
-        <p:txBody>
-          <a:bodyPr wrap="square" lIns="0" tIns="0" rIns="0" bIns="0" rtlCol="0" anchor="t"/>
-          <a:lstStyle/>
-          <a:p>
-            <a:pPr indent="0" marL="0">
-              <a:buNone/>
-            </a:pPr>
-            <a:r>
-              <a:rPr lang="en-US" sz="1150" dirty="0">
-                <a:solidFill>
-                  <a:srgbClr val="5C6067"/>
-                </a:solidFill>
-                <a:latin typeface="Arial" pitchFamily="34" charset="0"/>
-                <a:ea typeface="Arial" pitchFamily="34" charset="-122"/>
-                <a:cs typeface="Arial" pitchFamily="34" charset="-120"/>
-              </a:rPr>
-              <a:t>отраслей фокуса: финансы, медицина, производство, e-commerce и другие</a:t>
-            </a:r>
-            <a:endParaRPr lang="en-US" sz="1150" dirty="0"/>
-          </a:p>
-        </p:txBody>
-      </p:sp>
-      <p:sp>
-        <p:nvSpPr>
-          <p:cNvPr id="18" name="Text 16"/>
-          <p:cNvSpPr txBox="1"/>
-          <p:nvPr/>
-        </p:nvSpPr>
-        <p:spPr>
-          <a:xfrm>
-            <a:off x="548640" y="4023360"/>
-            <a:ext cx="10725912" cy="2286000"/>
-          </a:xfrm>
-          <a:prstGeom prst="rect">
-            <a:avLst/>
-          </a:prstGeom>
-          <a:noFill/>
-          <a:ln/>
-        </p:spPr>
-        <p:txBody>
-          <a:bodyPr wrap="square" lIns="0" tIns="0" rIns="0" bIns="0" rtlCol="0" anchor="t"/>
-          <a:lstStyle/>
-          <a:p>
-            <a:pPr marL="228600" indent="-228600">
-              <a:lnSpc>
-                <a:spcPct val="110000"/>
-              </a:lnSpc>
-              <a:spcAft>
-                <a:spcPts val="700"/>
-              </a:spcAft>
-              <a:buSzPct val="100000"/>
-              <a:buChar char="•"/>
-            </a:pPr>
-            <a:r>
-              <a:rPr lang="en-US" sz="1250" b="1" dirty="0">
-                <a:solidFill>
-                  <a:srgbClr val="141A22"/>
-                </a:solidFill>
-                <a:latin typeface="Arial" pitchFamily="34" charset="0"/>
-                <a:ea typeface="Arial" pitchFamily="34" charset="-122"/>
-                <a:cs typeface="Arial" pitchFamily="34" charset="-120"/>
-              </a:rPr>
-              <a:t>Центр исследований </a:t>
-            </a:r>
-            <a:pPr indent="0" marL="0">
-              <a:lnSpc>
-                <a:spcPct val="110000"/>
-              </a:lnSpc>
-              <a:spcAft>
-                <a:spcPts val="700"/>
-              </a:spcAft>
-              <a:buNone/>
-            </a:pPr>
-            <a:r>
-              <a:rPr lang="en-US" sz="1250" dirty="0">
-                <a:solidFill>
-                  <a:srgbClr val="141A22"/>
-                </a:solidFill>
-                <a:latin typeface="Arial" pitchFamily="34" charset="0"/>
-                <a:ea typeface="Arial" pitchFamily="34" charset="-122"/>
-                <a:cs typeface="Arial" pitchFamily="34" charset="-120"/>
-              </a:rPr>
-              <a:t>изучает поведение языковых моделей и агентов на реальных задачах бизнеса: 14 исследователей и ML-инженеров, база из 277 верифицированных кейсов ИИ. Прежде чем прийти с этой идеей, мы проверили и отбросили десять других.</a:t>
-            </a:r>
-            <a:endParaRPr lang="en-US" sz="1250" dirty="0"/>
-          </a:p>
-          <a:p>
-            <a:pPr indent="0" marL="0">
-              <a:lnSpc>
-                <a:spcPct val="110000"/>
-              </a:lnSpc>
-              <a:spcAft>
-                <a:spcPts val="700"/>
-              </a:spcAft>
-              <a:buNone/>
-            </a:pPr>
-            <a:r>
-              <a:rPr lang="en-US" sz="1250" b="1" dirty="0">
-                <a:solidFill>
-                  <a:srgbClr val="141A22"/>
-                </a:solidFill>
-                <a:latin typeface="Arial" pitchFamily="34" charset="0"/>
-                <a:ea typeface="Arial" pitchFamily="34" charset="-122"/>
-                <a:cs typeface="Arial" pitchFamily="34" charset="-120"/>
-              </a:rPr>
-              <a:t>Департамент разработки </a:t>
-            </a:r>
-            <a:pPr indent="0" marL="0">
-              <a:lnSpc>
-                <a:spcPct val="110000"/>
-              </a:lnSpc>
-              <a:spcAft>
-                <a:spcPts val="700"/>
-              </a:spcAft>
-              <a:buNone/>
-            </a:pPr>
-            <a:r>
-              <a:rPr lang="en-US" sz="1250" dirty="0">
-                <a:solidFill>
-                  <a:srgbClr val="141A22"/>
-                </a:solidFill>
-                <a:latin typeface="Arial" pitchFamily="34" charset="0"/>
-                <a:ea typeface="Arial" pitchFamily="34" charset="-122"/>
-                <a:cs typeface="Arial" pitchFamily="34" charset="-120"/>
-              </a:rPr>
-              <a:t>строит и внедряет ИИ в сложных системах — от высоконагруженных сервисов до корпоративных внедрений. Собственный фреймворк сокращает сроки создания и интеграции решений на 59% (по данным компании).</a:t>
-            </a:r>
-            <a:endParaRPr lang="en-US" sz="1250" dirty="0"/>
-          </a:p>
-          <a:p>
-            <a:pPr indent="0" marL="0">
-              <a:lnSpc>
-                <a:spcPct val="110000"/>
-              </a:lnSpc>
-              <a:spcAft>
-                <a:spcPts val="700"/>
-              </a:spcAft>
-              <a:buNone/>
-            </a:pPr>
-            <a:r>
-              <a:rPr lang="en-US" sz="1250" b="1" dirty="0">
-                <a:solidFill>
-                  <a:srgbClr val="141A22"/>
-                </a:solidFill>
-                <a:latin typeface="Arial" pitchFamily="34" charset="0"/>
-                <a:ea typeface="Arial" pitchFamily="34" charset="-122"/>
-                <a:cs typeface="Arial" pitchFamily="34" charset="-120"/>
-              </a:rPr>
-              <a:t>О нас пишут </a:t>
-            </a:r>
-            <a:pPr indent="0" marL="0">
-              <a:lnSpc>
-                <a:spcPct val="110000"/>
-              </a:lnSpc>
-              <a:spcAft>
-                <a:spcPts val="700"/>
-              </a:spcAft>
-              <a:buNone/>
-            </a:pPr>
-            <a:r>
-              <a:rPr lang="en-US" sz="1250" dirty="0">
-                <a:solidFill>
-                  <a:srgbClr val="141A22"/>
-                </a:solidFill>
-                <a:latin typeface="Arial" pitchFamily="34" charset="0"/>
-                <a:ea typeface="Arial" pitchFamily="34" charset="-122"/>
-                <a:cs typeface="Arial" pitchFamily="34" charset="-120"/>
-              </a:rPr>
-              <a:t>Inc., RTVI, TAdviser — методы, данные и разбор реальных внедрений.</a:t>
-            </a:r>
-            <a:endParaRPr lang="en-US" sz="1250" dirty="0"/>
-          </a:p>
-          <a:p>
-            <a:pPr indent="0" marL="0">
-              <a:lnSpc>
-                <a:spcPct val="110000"/>
-              </a:lnSpc>
-              <a:spcAft>
-                <a:spcPts val="700"/>
-              </a:spcAft>
-              <a:buNone/>
-            </a:pPr>
-            <a:r>
-              <a:rPr lang="en-US" sz="1250" b="1" dirty="0">
-                <a:solidFill>
-                  <a:srgbClr val="141A22"/>
-                </a:solidFill>
-                <a:latin typeface="Arial" pitchFamily="34" charset="0"/>
-                <a:ea typeface="Arial" pitchFamily="34" charset="-122"/>
-                <a:cs typeface="Arial" pitchFamily="34" charset="-120"/>
-              </a:rPr>
-              <a:t>Куда идёт раунд </a:t>
-            </a:r>
-            <a:pPr indent="0" marL="0">
-              <a:lnSpc>
-                <a:spcPct val="110000"/>
-              </a:lnSpc>
-              <a:spcAft>
-                <a:spcPts val="700"/>
-              </a:spcAft>
-              <a:buNone/>
-            </a:pPr>
-            <a:r>
-              <a:rPr lang="en-US" sz="1250" dirty="0">
-                <a:solidFill>
-                  <a:srgbClr val="141A22"/>
-                </a:solidFill>
-                <a:latin typeface="Arial" pitchFamily="34" charset="0"/>
-                <a:ea typeface="Arial" pitchFamily="34" charset="-122"/>
-                <a:cs typeface="Arial" pitchFamily="34" charset="-120"/>
-              </a:rPr>
-              <a:t>в новую международную компанию, которая владеет купленными фирмами. Океан Тех вносит ИИ, метод и команду.</a:t>
-            </a:r>
-            <a:endParaRPr lang="en-US" sz="1250" dirty="0"/>
+              <a:t>Четвёртый риск — что ИИ не даст даже полтора раза. Его снимает первый шаг: 250 тысяч и восемь недель до любых покупок.</a:t>
+            </a:r>
+            <a:endParaRPr lang="en-US" sz="1450" dirty="0"/>
           </a:p>
         </p:txBody>
       </p:sp>
@@ -3195,7 +2876,7 @@
     <p:bg>
       <p:bgPr>
         <a:solidFill>
-          <a:srgbClr val="FFFFFF"/>
+          <a:srgbClr val="232323"/>
         </a:solidFill>
       </p:bgPr>
     </p:bg>
@@ -3240,7 +2921,7 @@
             <a:r>
               <a:rPr lang="en-US" sz="900" spc="300" kern="0" dirty="0">
                 <a:solidFill>
-                  <a:srgbClr val="8A8E94"/>
+                  <a:srgbClr val="8C8C8C"/>
                 </a:solidFill>
                 <a:latin typeface="Courier New" pitchFamily="34" charset="0"/>
                 <a:ea typeface="Courier New" pitchFamily="34" charset="-122"/>
@@ -3279,13 +2960,13 @@
             <a:r>
               <a:rPr lang="en-US" sz="950" spc="300" kern="0" dirty="0">
                 <a:solidFill>
-                  <a:srgbClr val="0460F5"/>
+                  <a:srgbClr val="D5F774"/>
                 </a:solidFill>
                 <a:latin typeface="Courier New" pitchFamily="34" charset="0"/>
                 <a:ea typeface="Courier New" pitchFamily="34" charset="-122"/>
                 <a:cs typeface="Courier New" pitchFamily="34" charset="-120"/>
               </a:rPr>
-              <a:t>9 · КОМАНДА</a:t>
+              <a:t>ЧТО ПРОСИМ</a:t>
             </a:r>
             <a:endParaRPr lang="en-US" sz="950" dirty="0"/>
           </a:p>
@@ -3318,13 +2999,13 @@
             <a:r>
               <a:rPr lang="en-US" sz="2800" b="1" dirty="0">
                 <a:solidFill>
-                  <a:srgbClr val="141A22"/>
-                </a:solidFill>
-                <a:latin typeface="Arial" pitchFamily="34" charset="0"/>
-                <a:ea typeface="Arial" pitchFamily="34" charset="-122"/>
-                <a:cs typeface="Arial" pitchFamily="34" charset="-120"/>
-              </a:rPr>
-              <a:t>Три основателя и 60+ человек в штате</a:t>
+                  <a:srgbClr val="FFFFFF"/>
+                </a:solidFill>
+                <a:latin typeface="Arial" pitchFamily="34" charset="0"/>
+                <a:ea typeface="Arial" pitchFamily="34" charset="-122"/>
+                <a:cs typeface="Arial" pitchFamily="34" charset="-120"/>
+              </a:rPr>
+              <a:t>30 млн $: десять на ИИ и первую фирму, двадцать на ещё четыре</a:t>
             </a:r>
             <a:endParaRPr lang="en-US" sz="2800" dirty="0"/>
           </a:p>
@@ -3357,13 +3038,13 @@
             <a:r>
               <a:rPr lang="en-US" sz="900" dirty="0">
                 <a:solidFill>
-                  <a:srgbClr val="8A8E94"/>
+                  <a:srgbClr val="8C8C8C"/>
                 </a:solidFill>
                 <a:latin typeface="Courier New" pitchFamily="34" charset="0"/>
                 <a:ea typeface="Courier New" pitchFamily="34" charset="-122"/>
                 <a:cs typeface="Courier New" pitchFamily="34" charset="-120"/>
               </a:rPr>
-              <a:t>11 / 15</a:t>
+              <a:t>11 / 13</a:t>
             </a:r>
             <a:endParaRPr lang="en-US" sz="900" dirty="0"/>
           </a:p>
@@ -3378,58 +3059,34 @@
         <p:spPr>
           <a:xfrm>
             <a:off x="548640" y="2103120"/>
-            <a:ext cx="3544824" cy="3794760"/>
+            <a:ext cx="3544824" cy="2103120"/>
           </a:xfrm>
           <a:prstGeom prst="roundRect">
             <a:avLst>
-              <a:gd name="adj" fmla="val 4643"/>
+              <a:gd name="adj" fmla="val 7826"/>
             </a:avLst>
           </a:prstGeom>
           <a:solidFill>
-            <a:srgbClr val="F7F7F7"/>
+            <a:srgbClr val="343434"/>
           </a:solidFill>
           <a:ln w="12700">
             <a:solidFill>
-              <a:srgbClr val="F7F7F7"/>
+              <a:srgbClr val="343434"/>
             </a:solidFill>
             <a:prstDash val="solid"/>
           </a:ln>
         </p:spPr>
       </p:sp>
-      <p:pic>
-        <p:nvPicPr>
-          <p:cNvPr id="7" name="Image 0" descr="/tmp/claude-0/-home-user/5ac64fc3-708b-5ba2-8575-a96a48f05f03/scratchpad/okean/penkov.png">    </p:cNvPr>
-          <p:cNvPicPr>
-            <a:picLocks noChangeAspect="1"/>
-          </p:cNvPicPr>
-          <p:nvPr/>
-        </p:nvPicPr>
-        <p:blipFill>
-          <a:blip r:embed="rId1"/>
-          <a:stretch>
-            <a:fillRect/>
-          </a:stretch>
-        </p:blipFill>
+      <p:sp>
+        <p:nvSpPr>
+          <p:cNvPr id="7" name="Text 5"/>
+          <p:cNvSpPr txBox="1"/>
+          <p:nvPr/>
+        </p:nvSpPr>
         <p:spPr>
           <a:xfrm>
             <a:off x="822960" y="2331720"/>
-            <a:ext cx="1612087" cy="1874520"/>
-          </a:xfrm>
-          <a:prstGeom prst="rect">
-            <a:avLst/>
-          </a:prstGeom>
-        </p:spPr>
-      </p:pic>
-      <p:sp>
-        <p:nvSpPr>
-          <p:cNvPr id="8" name="Text 5"/>
-          <p:cNvSpPr txBox="1"/>
-          <p:nvPr/>
-        </p:nvSpPr>
-        <p:spPr>
-          <a:xfrm>
-            <a:off x="822960" y="4343400"/>
-            <a:ext cx="2996184" cy="320040"/>
+            <a:ext cx="2996184" cy="274320"/>
           </a:xfrm>
           <a:prstGeom prst="rect">
             <a:avLst/>
@@ -3445,30 +3102,30 @@
               <a:buNone/>
             </a:pPr>
             <a:r>
-              <a:rPr lang="en-US" sz="1500" b="1" dirty="0">
-                <a:solidFill>
-                  <a:srgbClr val="141A22"/>
-                </a:solidFill>
-                <a:latin typeface="Arial" pitchFamily="34" charset="0"/>
-                <a:ea typeface="Arial" pitchFamily="34" charset="-122"/>
-                <a:cs typeface="Arial" pitchFamily="34" charset="-120"/>
-              </a:rPr>
-              <a:t>Дмитрий Пеньков</a:t>
-            </a:r>
-            <a:endParaRPr lang="en-US" sz="1500" dirty="0"/>
-          </a:p>
-        </p:txBody>
-      </p:sp>
-      <p:sp>
-        <p:nvSpPr>
-          <p:cNvPr id="9" name="Text 6"/>
-          <p:cNvSpPr txBox="1"/>
-          <p:nvPr/>
-        </p:nvSpPr>
-        <p:spPr>
-          <a:xfrm>
-            <a:off x="822960" y="4663440"/>
-            <a:ext cx="2996184" cy="274320"/>
+              <a:rPr lang="en-US" sz="950" spc="200" kern="0" dirty="0">
+                <a:solidFill>
+                  <a:srgbClr val="D5F774"/>
+                </a:solidFill>
+                <a:latin typeface="Courier New" pitchFamily="34" charset="0"/>
+                <a:ea typeface="Courier New" pitchFamily="34" charset="-122"/>
+                <a:cs typeface="Courier New" pitchFamily="34" charset="-120"/>
+              </a:rPr>
+              <a:t>ТРАНШ 1 · 3 МЛН $</a:t>
+            </a:r>
+            <a:endParaRPr lang="en-US" sz="950" dirty="0"/>
+          </a:p>
+        </p:txBody>
+      </p:sp>
+      <p:sp>
+        <p:nvSpPr>
+          <p:cNvPr id="8" name="Text 6"/>
+          <p:cNvSpPr txBox="1"/>
+          <p:nvPr/>
+        </p:nvSpPr>
+        <p:spPr>
+          <a:xfrm>
+            <a:off x="822960" y="2651760"/>
+            <a:ext cx="2996184" cy="411480"/>
           </a:xfrm>
           <a:prstGeom prst="rect">
             <a:avLst/>
@@ -3484,30 +3141,30 @@
               <a:buNone/>
             </a:pPr>
             <a:r>
-              <a:rPr lang="en-US" sz="1150" dirty="0">
-                <a:solidFill>
-                  <a:srgbClr val="0460F5"/>
-                </a:solidFill>
-                <a:latin typeface="Arial" pitchFamily="34" charset="0"/>
-                <a:ea typeface="Arial" pitchFamily="34" charset="-122"/>
-                <a:cs typeface="Arial" pitchFamily="34" charset="-120"/>
-              </a:rPr>
-              <a:t>Генеральный директор, основатель</a:t>
-            </a:r>
-            <a:endParaRPr lang="en-US" sz="1150" dirty="0"/>
-          </a:p>
-        </p:txBody>
-      </p:sp>
-      <p:sp>
-        <p:nvSpPr>
-          <p:cNvPr id="10" name="Text 7"/>
-          <p:cNvSpPr txBox="1"/>
-          <p:nvPr/>
-        </p:nvSpPr>
-        <p:spPr>
-          <a:xfrm>
-            <a:off x="822960" y="4983480"/>
-            <a:ext cx="2996184" cy="822960"/>
+              <a:rPr lang="en-US" sz="1600" b="1" dirty="0">
+                <a:solidFill>
+                  <a:srgbClr val="FFFFFF"/>
+                </a:solidFill>
+                <a:latin typeface="Arial" pitchFamily="34" charset="0"/>
+                <a:ea typeface="Arial" pitchFamily="34" charset="-122"/>
+                <a:cs typeface="Arial" pitchFamily="34" charset="-120"/>
+              </a:rPr>
+              <a:t>Полгода</a:t>
+            </a:r>
+            <a:endParaRPr lang="en-US" sz="1600" dirty="0"/>
+          </a:p>
+        </p:txBody>
+      </p:sp>
+      <p:sp>
+        <p:nvSpPr>
+          <p:cNvPr id="9" name="Text 7"/>
+          <p:cNvSpPr txBox="1"/>
+          <p:nvPr/>
+        </p:nvSpPr>
+        <p:spPr>
+          <a:xfrm>
+            <a:off x="822960" y="3108960"/>
+            <a:ext cx="2996184" cy="914400"/>
           </a:xfrm>
           <a:prstGeom prst="rect">
             <a:avLst/>
@@ -3523,81 +3180,57 @@
               <a:buNone/>
             </a:pPr>
             <a:r>
-              <a:rPr lang="en-US" sz="1050" dirty="0">
-                <a:solidFill>
-                  <a:srgbClr val="5C6067"/>
-                </a:solidFill>
-                <a:latin typeface="Arial" pitchFamily="34" charset="0"/>
-                <a:ea typeface="Arial" pitchFamily="34" charset="-122"/>
-                <a:cs typeface="Arial" pitchFamily="34" charset="-120"/>
-              </a:rPr>
-              <a:t>Предприниматель с опытом в технологиях. Buckswood School (Англия), МИРБИС, экономический лицей МБИ им. А. Собчака, MBA при МГИМО.</a:t>
-            </a:r>
-            <a:endParaRPr lang="en-US" sz="1050" dirty="0"/>
-          </a:p>
-        </p:txBody>
-      </p:sp>
-      <p:sp>
-        <p:nvSpPr>
-          <p:cNvPr id="11" name="Shape 8"/>
+              <a:rPr lang="en-US" sz="1250" dirty="0">
+                <a:solidFill>
+                  <a:srgbClr val="B8B8B8"/>
+                </a:solidFill>
+                <a:latin typeface="Arial" pitchFamily="34" charset="0"/>
+                <a:ea typeface="Arial" pitchFamily="34" charset="-122"/>
+                <a:cs typeface="Arial" pitchFamily="34" charset="-120"/>
+              </a:rPr>
+              <a:t>ИИ на реальных проектах, первые оплаченные работы, выбрана фирма для покупки.</a:t>
+            </a:r>
+            <a:endParaRPr lang="en-US" sz="1250" dirty="0"/>
+          </a:p>
+        </p:txBody>
+      </p:sp>
+      <p:sp>
+        <p:nvSpPr>
+          <p:cNvPr id="10" name="Shape 8"/>
           <p:cNvSpPr/>
           <p:nvPr/>
         </p:nvSpPr>
         <p:spPr>
           <a:xfrm>
             <a:off x="4322064" y="2103120"/>
-            <a:ext cx="3544824" cy="3794760"/>
+            <a:ext cx="3544824" cy="2103120"/>
           </a:xfrm>
           <a:prstGeom prst="roundRect">
             <a:avLst>
-              <a:gd name="adj" fmla="val 4643"/>
+              <a:gd name="adj" fmla="val 7826"/>
             </a:avLst>
           </a:prstGeom>
           <a:solidFill>
-            <a:srgbClr val="F7F7F7"/>
+            <a:srgbClr val="343434"/>
           </a:solidFill>
           <a:ln w="12700">
             <a:solidFill>
-              <a:srgbClr val="F7F7F7"/>
+              <a:srgbClr val="343434"/>
             </a:solidFill>
             <a:prstDash val="solid"/>
           </a:ln>
         </p:spPr>
       </p:sp>
-      <p:pic>
-        <p:nvPicPr>
-          <p:cNvPr id="12" name="Image 1" descr="/tmp/claude-0/-home-user/5ac64fc3-708b-5ba2-8575-a96a48f05f03/scratchpad/okean/moroshin.png">    </p:cNvPr>
-          <p:cNvPicPr>
-            <a:picLocks noChangeAspect="1"/>
-          </p:cNvPicPr>
-          <p:nvPr/>
-        </p:nvPicPr>
-        <p:blipFill>
-          <a:blip r:embed="rId2"/>
-          <a:stretch>
-            <a:fillRect/>
-          </a:stretch>
-        </p:blipFill>
+      <p:sp>
+        <p:nvSpPr>
+          <p:cNvPr id="11" name="Text 9"/>
+          <p:cNvSpPr txBox="1"/>
+          <p:nvPr/>
+        </p:nvSpPr>
         <p:spPr>
           <a:xfrm>
             <a:off x="4596384" y="2331720"/>
-            <a:ext cx="1612087" cy="1874520"/>
-          </a:xfrm>
-          <a:prstGeom prst="rect">
-            <a:avLst/>
-          </a:prstGeom>
-        </p:spPr>
-      </p:pic>
-      <p:sp>
-        <p:nvSpPr>
-          <p:cNvPr id="13" name="Text 9"/>
-          <p:cNvSpPr txBox="1"/>
-          <p:nvPr/>
-        </p:nvSpPr>
-        <p:spPr>
-          <a:xfrm>
-            <a:off x="4596384" y="4343400"/>
-            <a:ext cx="2996184" cy="320040"/>
+            <a:ext cx="2996184" cy="274320"/>
           </a:xfrm>
           <a:prstGeom prst="rect">
             <a:avLst/>
@@ -3613,30 +3246,30 @@
               <a:buNone/>
             </a:pPr>
             <a:r>
-              <a:rPr lang="en-US" sz="1500" b="1" dirty="0">
-                <a:solidFill>
-                  <a:srgbClr val="141A22"/>
-                </a:solidFill>
-                <a:latin typeface="Arial" pitchFamily="34" charset="0"/>
-                <a:ea typeface="Arial" pitchFamily="34" charset="-122"/>
-                <a:cs typeface="Arial" pitchFamily="34" charset="-120"/>
-              </a:rPr>
-              <a:t>Константин Морошин</a:t>
-            </a:r>
-            <a:endParaRPr lang="en-US" sz="1500" dirty="0"/>
-          </a:p>
-        </p:txBody>
-      </p:sp>
-      <p:sp>
-        <p:nvSpPr>
-          <p:cNvPr id="14" name="Text 10"/>
-          <p:cNvSpPr txBox="1"/>
-          <p:nvPr/>
-        </p:nvSpPr>
-        <p:spPr>
-          <a:xfrm>
-            <a:off x="4596384" y="4663440"/>
-            <a:ext cx="2996184" cy="274320"/>
+              <a:rPr lang="en-US" sz="950" spc="200" kern="0" dirty="0">
+                <a:solidFill>
+                  <a:srgbClr val="D5F774"/>
+                </a:solidFill>
+                <a:latin typeface="Courier New" pitchFamily="34" charset="0"/>
+                <a:ea typeface="Courier New" pitchFamily="34" charset="-122"/>
+                <a:cs typeface="Courier New" pitchFamily="34" charset="-120"/>
+              </a:rPr>
+              <a:t>ТРАНШ 2 · 7 МЛН $</a:t>
+            </a:r>
+            <a:endParaRPr lang="en-US" sz="950" dirty="0"/>
+          </a:p>
+        </p:txBody>
+      </p:sp>
+      <p:sp>
+        <p:nvSpPr>
+          <p:cNvPr id="12" name="Text 10"/>
+          <p:cNvSpPr txBox="1"/>
+          <p:nvPr/>
+        </p:nvSpPr>
+        <p:spPr>
+          <a:xfrm>
+            <a:off x="4596384" y="2651760"/>
+            <a:ext cx="2996184" cy="411480"/>
           </a:xfrm>
           <a:prstGeom prst="rect">
             <a:avLst/>
@@ -3652,30 +3285,30 @@
               <a:buNone/>
             </a:pPr>
             <a:r>
-              <a:rPr lang="en-US" sz="1150" dirty="0">
-                <a:solidFill>
-                  <a:srgbClr val="0460F5"/>
-                </a:solidFill>
-                <a:latin typeface="Arial" pitchFamily="34" charset="0"/>
-                <a:ea typeface="Arial" pitchFamily="34" charset="-122"/>
-                <a:cs typeface="Arial" pitchFamily="34" charset="-120"/>
-              </a:rPr>
-              <a:t>Глава Центра исследований</a:t>
-            </a:r>
-            <a:endParaRPr lang="en-US" sz="1150" dirty="0"/>
-          </a:p>
-        </p:txBody>
-      </p:sp>
-      <p:sp>
-        <p:nvSpPr>
-          <p:cNvPr id="15" name="Text 11"/>
-          <p:cNvSpPr txBox="1"/>
-          <p:nvPr/>
-        </p:nvSpPr>
-        <p:spPr>
-          <a:xfrm>
-            <a:off x="4596384" y="4983480"/>
-            <a:ext cx="2996184" cy="822960"/>
+              <a:rPr lang="en-US" sz="1600" b="1" dirty="0">
+                <a:solidFill>
+                  <a:srgbClr val="FFFFFF"/>
+                </a:solidFill>
+                <a:latin typeface="Arial" pitchFamily="34" charset="0"/>
+                <a:ea typeface="Arial" pitchFamily="34" charset="-122"/>
+                <a:cs typeface="Arial" pitchFamily="34" charset="-120"/>
+              </a:rPr>
+              <a:t>Первая фирма</a:t>
+            </a:r>
+            <a:endParaRPr lang="en-US" sz="1600" dirty="0"/>
+          </a:p>
+        </p:txBody>
+      </p:sp>
+      <p:sp>
+        <p:nvSpPr>
+          <p:cNvPr id="13" name="Text 11"/>
+          <p:cNvSpPr txBox="1"/>
+          <p:nvPr/>
+        </p:nvSpPr>
+        <p:spPr>
+          <a:xfrm>
+            <a:off x="4596384" y="3108960"/>
+            <a:ext cx="2996184" cy="914400"/>
           </a:xfrm>
           <a:prstGeom prst="rect">
             <a:avLst/>
@@ -3691,81 +3324,57 @@
               <a:buNone/>
             </a:pPr>
             <a:r>
-              <a:rPr lang="en-US" sz="1050" dirty="0">
-                <a:solidFill>
-                  <a:srgbClr val="5C6067"/>
-                </a:solidFill>
-                <a:latin typeface="Arial" pitchFamily="34" charset="0"/>
-                <a:ea typeface="Arial" pitchFamily="34" charset="-122"/>
-                <a:cs typeface="Arial" pitchFamily="34" charset="-120"/>
-              </a:rPr>
-              <a:t>Исследователь UX в B2B ИТ. Проекты для МТС Ред, КРОК, Инностейдж, Сбера. Более 10 лет продаж ИТ в энтерпрайзе.</a:t>
-            </a:r>
-            <a:endParaRPr lang="en-US" sz="1050" dirty="0"/>
-          </a:p>
-        </p:txBody>
-      </p:sp>
-      <p:sp>
-        <p:nvSpPr>
-          <p:cNvPr id="16" name="Shape 12"/>
+              <a:rPr lang="en-US" sz="1250" dirty="0">
+                <a:solidFill>
+                  <a:srgbClr val="B8B8B8"/>
+                </a:solidFill>
+                <a:latin typeface="Arial" pitchFamily="34" charset="0"/>
+                <a:ea typeface="Arial" pitchFamily="34" charset="-122"/>
+                <a:cs typeface="Arial" pitchFamily="34" charset="-120"/>
+              </a:rPr>
+              <a:t>Покупка, интеграция ИИ. Выручка фирмы растёт в полтора раза при том же штате.</a:t>
+            </a:r>
+            <a:endParaRPr lang="en-US" sz="1250" dirty="0"/>
+          </a:p>
+        </p:txBody>
+      </p:sp>
+      <p:sp>
+        <p:nvSpPr>
+          <p:cNvPr id="14" name="Shape 12"/>
           <p:cNvSpPr/>
           <p:nvPr/>
         </p:nvSpPr>
         <p:spPr>
           <a:xfrm>
             <a:off x="8095488" y="2103120"/>
-            <a:ext cx="3544824" cy="3794760"/>
+            <a:ext cx="3544824" cy="2103120"/>
           </a:xfrm>
           <a:prstGeom prst="roundRect">
             <a:avLst>
-              <a:gd name="adj" fmla="val 4643"/>
+              <a:gd name="adj" fmla="val 7826"/>
             </a:avLst>
           </a:prstGeom>
           <a:solidFill>
-            <a:srgbClr val="F7F7F7"/>
+            <a:srgbClr val="343434"/>
           </a:solidFill>
           <a:ln w="12700">
             <a:solidFill>
-              <a:srgbClr val="F7F7F7"/>
+              <a:srgbClr val="343434"/>
             </a:solidFill>
             <a:prstDash val="solid"/>
           </a:ln>
         </p:spPr>
       </p:sp>
-      <p:pic>
-        <p:nvPicPr>
-          <p:cNvPr id="17" name="Image 2" descr="/tmp/claude-0/-home-user/5ac64fc3-708b-5ba2-8575-a96a48f05f03/scratchpad/okean/kovalev.png">    </p:cNvPr>
-          <p:cNvPicPr>
-            <a:picLocks noChangeAspect="1"/>
-          </p:cNvPicPr>
-          <p:nvPr/>
-        </p:nvPicPr>
-        <p:blipFill>
-          <a:blip r:embed="rId3"/>
-          <a:stretch>
-            <a:fillRect/>
-          </a:stretch>
-        </p:blipFill>
+      <p:sp>
+        <p:nvSpPr>
+          <p:cNvPr id="15" name="Text 13"/>
+          <p:cNvSpPr txBox="1"/>
+          <p:nvPr/>
+        </p:nvSpPr>
         <p:spPr>
           <a:xfrm>
             <a:off x="8369808" y="2331720"/>
-            <a:ext cx="1612087" cy="1874520"/>
-          </a:xfrm>
-          <a:prstGeom prst="rect">
-            <a:avLst/>
-          </a:prstGeom>
-        </p:spPr>
-      </p:pic>
-      <p:sp>
-        <p:nvSpPr>
-          <p:cNvPr id="18" name="Text 13"/>
-          <p:cNvSpPr txBox="1"/>
-          <p:nvPr/>
-        </p:nvSpPr>
-        <p:spPr>
-          <a:xfrm>
-            <a:off x="8369808" y="4343400"/>
-            <a:ext cx="2996184" cy="320040"/>
+            <a:ext cx="2996184" cy="274320"/>
           </a:xfrm>
           <a:prstGeom prst="rect">
             <a:avLst/>
@@ -3781,15 +3390,174 @@
               <a:buNone/>
             </a:pPr>
             <a:r>
-              <a:rPr lang="en-US" sz="1500" b="1" dirty="0">
-                <a:solidFill>
-                  <a:srgbClr val="141A22"/>
-                </a:solidFill>
-                <a:latin typeface="Arial" pitchFamily="34" charset="0"/>
-                <a:ea typeface="Arial" pitchFamily="34" charset="-122"/>
-                <a:cs typeface="Arial" pitchFamily="34" charset="-120"/>
-              </a:rPr>
-              <a:t>Сергей Ковалёв</a:t>
+              <a:rPr lang="en-US" sz="950" spc="200" kern="0" dirty="0">
+                <a:solidFill>
+                  <a:srgbClr val="D5F774"/>
+                </a:solidFill>
+                <a:latin typeface="Courier New" pitchFamily="34" charset="0"/>
+                <a:ea typeface="Courier New" pitchFamily="34" charset="-122"/>
+                <a:cs typeface="Courier New" pitchFamily="34" charset="-120"/>
+              </a:rPr>
+              <a:t>ТРАНШ 3 · 20 МЛН $</a:t>
+            </a:r>
+            <a:endParaRPr lang="en-US" sz="950" dirty="0"/>
+          </a:p>
+        </p:txBody>
+      </p:sp>
+      <p:sp>
+        <p:nvSpPr>
+          <p:cNvPr id="16" name="Text 14"/>
+          <p:cNvSpPr txBox="1"/>
+          <p:nvPr/>
+        </p:nvSpPr>
+        <p:spPr>
+          <a:xfrm>
+            <a:off x="8369808" y="2651760"/>
+            <a:ext cx="2996184" cy="411480"/>
+          </a:xfrm>
+          <a:prstGeom prst="rect">
+            <a:avLst/>
+          </a:prstGeom>
+          <a:noFill/>
+          <a:ln/>
+        </p:spPr>
+        <p:txBody>
+          <a:bodyPr wrap="square" lIns="0" tIns="0" rIns="0" bIns="0" rtlCol="0" anchor="ctr"/>
+          <a:lstStyle/>
+          <a:p>
+            <a:pPr indent="0" marL="0">
+              <a:buNone/>
+            </a:pPr>
+            <a:r>
+              <a:rPr lang="en-US" sz="1600" b="1" dirty="0">
+                <a:solidFill>
+                  <a:srgbClr val="FFFFFF"/>
+                </a:solidFill>
+                <a:latin typeface="Arial" pitchFamily="34" charset="0"/>
+                <a:ea typeface="Arial" pitchFamily="34" charset="-122"/>
+                <a:cs typeface="Arial" pitchFamily="34" charset="-120"/>
+              </a:rPr>
+              <a:t>Ещё четыре фирмы</a:t>
+            </a:r>
+            <a:endParaRPr lang="en-US" sz="1600" dirty="0"/>
+          </a:p>
+        </p:txBody>
+      </p:sp>
+      <p:sp>
+        <p:nvSpPr>
+          <p:cNvPr id="17" name="Text 15"/>
+          <p:cNvSpPr txBox="1"/>
+          <p:nvPr/>
+        </p:nvSpPr>
+        <p:spPr>
+          <a:xfrm>
+            <a:off x="8369808" y="3108960"/>
+            <a:ext cx="2996184" cy="914400"/>
+          </a:xfrm>
+          <a:prstGeom prst="rect">
+            <a:avLst/>
+          </a:prstGeom>
+          <a:noFill/>
+          <a:ln/>
+        </p:spPr>
+        <p:txBody>
+          <a:bodyPr wrap="square" lIns="0" tIns="0" rIns="0" bIns="0" rtlCol="0" anchor="t"/>
+          <a:lstStyle/>
+          <a:p>
+            <a:pPr indent="0" marL="0">
+              <a:buNone/>
+            </a:pPr>
+            <a:r>
+              <a:rPr lang="en-US" sz="1250" dirty="0">
+                <a:solidFill>
+                  <a:srgbClr val="B8B8B8"/>
+                </a:solidFill>
+                <a:latin typeface="Arial" pitchFamily="34" charset="0"/>
+                <a:ea typeface="Arial" pitchFamily="34" charset="-122"/>
+                <a:cs typeface="Arial" pitchFamily="34" charset="-120"/>
+              </a:rPr>
+              <a:t>Каждая приходит с клиентами и выручкой. 200 инженеров и 20 млн $ в год к концу третьего года.</a:t>
+            </a:r>
+            <a:endParaRPr lang="en-US" sz="1250" dirty="0"/>
+          </a:p>
+        </p:txBody>
+      </p:sp>
+      <p:sp>
+        <p:nvSpPr>
+          <p:cNvPr id="18" name="Text 16"/>
+          <p:cNvSpPr txBox="1"/>
+          <p:nvPr/>
+        </p:nvSpPr>
+        <p:spPr>
+          <a:xfrm>
+            <a:off x="548640" y="4434840"/>
+            <a:ext cx="10725912" cy="1234440"/>
+          </a:xfrm>
+          <a:prstGeom prst="rect">
+            <a:avLst/>
+          </a:prstGeom>
+          <a:noFill/>
+          <a:ln/>
+        </p:spPr>
+        <p:txBody>
+          <a:bodyPr wrap="square" lIns="0" tIns="0" rIns="0" bIns="0" rtlCol="0" anchor="t"/>
+          <a:lstStyle/>
+          <a:p>
+            <a:pPr indent="0" marL="0">
+              <a:lnSpc>
+                <a:spcPct val="115000"/>
+              </a:lnSpc>
+              <a:buNone/>
+            </a:pPr>
+            <a:r>
+              <a:rPr lang="en-US" sz="1300" dirty="0">
+                <a:solidFill>
+                  <a:srgbClr val="FFFFFF"/>
+                </a:solidFill>
+                <a:latin typeface="Arial" pitchFamily="34" charset="0"/>
+                <a:ea typeface="Arial" pitchFamily="34" charset="-122"/>
+                <a:cs typeface="Arial" pitchFamily="34" charset="-120"/>
+              </a:rPr>
+              <a:t>Куда идут деньги: 14 млн — пять фирм по цене годовой выручки; 3,6 млн — ИИ-команда на три года; 2 млн — сделки и юристы; остальное — запас на случай, если фирмы стоят дороже. Первый шаг внутри первого транша — 250 тысяч и восемь недель: два пилотных проекта. Порог, ниже которого не идём дальше, — полтора раза; цель — два. Инвестор получает долю в компании, которая владеет всеми фирмами; условия раунда обсуждаем отдельно.</a:t>
+            </a:r>
+            <a:endParaRPr lang="en-US" sz="1300" dirty="0"/>
+          </a:p>
+        </p:txBody>
+      </p:sp>
+      <p:sp>
+        <p:nvSpPr>
+          <p:cNvPr id="19" name="Text 17"/>
+          <p:cNvSpPr txBox="1"/>
+          <p:nvPr/>
+        </p:nvSpPr>
+        <p:spPr>
+          <a:xfrm>
+            <a:off x="548640" y="5715000"/>
+            <a:ext cx="10725912" cy="457200"/>
+          </a:xfrm>
+          <a:prstGeom prst="rect">
+            <a:avLst/>
+          </a:prstGeom>
+          <a:noFill/>
+          <a:ln/>
+        </p:spPr>
+        <p:txBody>
+          <a:bodyPr wrap="square" lIns="0" tIns="0" rIns="0" bIns="0" rtlCol="0" anchor="t"/>
+          <a:lstStyle/>
+          <a:p>
+            <a:pPr indent="0" marL="0">
+              <a:buNone/>
+            </a:pPr>
+            <a:r>
+              <a:rPr lang="en-US" sz="1500" i="1" dirty="0">
+                <a:solidFill>
+                  <a:srgbClr val="D5F774"/>
+                </a:solidFill>
+                <a:latin typeface="Arial" pitchFamily="34" charset="0"/>
+                <a:ea typeface="Arial" pitchFamily="34" charset="-122"/>
+                <a:cs typeface="Arial" pitchFamily="34" charset="-120"/>
+              </a:rPr>
+              <a:t>Двадцать из тридцати миллионов — не в сжигание, а в покупку готовой выручки.</a:t>
             </a:r>
             <a:endParaRPr lang="en-US" sz="1500" dirty="0"/>
           </a:p>
@@ -3797,14 +3565,14 @@
       </p:sp>
       <p:sp>
         <p:nvSpPr>
-          <p:cNvPr id="19" name="Text 14"/>
-          <p:cNvSpPr txBox="1"/>
-          <p:nvPr/>
-        </p:nvSpPr>
-        <p:spPr>
-          <a:xfrm>
-            <a:off x="8369808" y="4663440"/>
-            <a:ext cx="2996184" cy="274320"/>
+          <p:cNvPr id="20" name="Text 18"/>
+          <p:cNvSpPr txBox="1"/>
+          <p:nvPr/>
+        </p:nvSpPr>
+        <p:spPr>
+          <a:xfrm>
+            <a:off x="548640" y="6126480"/>
+            <a:ext cx="11091672" cy="274320"/>
           </a:xfrm>
           <a:prstGeom prst="rect">
             <a:avLst/>
@@ -3820,95 +3588,17 @@
               <a:buNone/>
             </a:pPr>
             <a:r>
-              <a:rPr lang="en-US" sz="1150" dirty="0">
-                <a:solidFill>
-                  <a:srgbClr val="0460F5"/>
-                </a:solidFill>
-                <a:latin typeface="Arial" pitchFamily="34" charset="0"/>
-                <a:ea typeface="Arial" pitchFamily="34" charset="-122"/>
-                <a:cs typeface="Arial" pitchFamily="34" charset="-120"/>
-              </a:rPr>
-              <a:t>Управляющий партнёр</a:t>
-            </a:r>
-            <a:endParaRPr lang="en-US" sz="1150" dirty="0"/>
-          </a:p>
-        </p:txBody>
-      </p:sp>
-      <p:sp>
-        <p:nvSpPr>
-          <p:cNvPr id="20" name="Text 15"/>
-          <p:cNvSpPr txBox="1"/>
-          <p:nvPr/>
-        </p:nvSpPr>
-        <p:spPr>
-          <a:xfrm>
-            <a:off x="8369808" y="4983480"/>
-            <a:ext cx="2996184" cy="822960"/>
-          </a:xfrm>
-          <a:prstGeom prst="rect">
-            <a:avLst/>
-          </a:prstGeom>
-          <a:noFill/>
-          <a:ln/>
-        </p:spPr>
-        <p:txBody>
-          <a:bodyPr wrap="square" lIns="0" tIns="0" rIns="0" bIns="0" rtlCol="0" anchor="t"/>
-          <a:lstStyle/>
-          <a:p>
-            <a:pPr indent="0" marL="0">
-              <a:buNone/>
-            </a:pPr>
-            <a:r>
-              <a:rPr lang="en-US" sz="1050" dirty="0">
-                <a:solidFill>
-                  <a:srgbClr val="5C6067"/>
-                </a:solidFill>
-                <a:latin typeface="Arial" pitchFamily="34" charset="0"/>
-                <a:ea typeface="Arial" pitchFamily="34" charset="-122"/>
-                <a:cs typeface="Arial" pitchFamily="34" charset="-120"/>
-              </a:rPr>
-              <a:t>Предприниматель и стратег с обширным опытом в области искусственного интеллекта и Web3.</a:t>
-            </a:r>
-            <a:endParaRPr lang="en-US" sz="1050" dirty="0"/>
-          </a:p>
-        </p:txBody>
-      </p:sp>
-      <p:sp>
-        <p:nvSpPr>
-          <p:cNvPr id="21" name="Text 16"/>
-          <p:cNvSpPr txBox="1"/>
-          <p:nvPr/>
-        </p:nvSpPr>
-        <p:spPr>
-          <a:xfrm>
-            <a:off x="548640" y="6035040"/>
-            <a:ext cx="9445752" cy="457200"/>
-          </a:xfrm>
-          <a:prstGeom prst="rect">
-            <a:avLst/>
-          </a:prstGeom>
-          <a:noFill/>
-          <a:ln/>
-        </p:spPr>
-        <p:txBody>
-          <a:bodyPr wrap="square" lIns="0" tIns="0" rIns="0" bIns="0" rtlCol="0" anchor="t"/>
-          <a:lstStyle/>
-          <a:p>
-            <a:pPr indent="0" marL="0">
-              <a:buNone/>
-            </a:pPr>
-            <a:r>
-              <a:rPr lang="en-US" sz="1000" dirty="0">
-                <a:solidFill>
-                  <a:srgbClr val="8A8E94"/>
-                </a:solidFill>
-                <a:latin typeface="Arial" pitchFamily="34" charset="0"/>
-                <a:ea typeface="Arial" pitchFamily="34" charset="-122"/>
-                <a:cs typeface="Arial" pitchFamily="34" charset="-120"/>
-              </a:rPr>
-              <a:t>60+ человек в штате: исследователи, инженеры, продуктовые дизайнеры. Чего в команде пока нет и кого добавляем первым — инженер-партнёр с лицензией на целевом рынке.</a:t>
-            </a:r>
-            <a:endParaRPr lang="en-US" sz="1000" dirty="0"/>
+              <a:rPr lang="en-US" sz="1200" dirty="0">
+                <a:solidFill>
+                  <a:srgbClr val="B8B8B8"/>
+                </a:solidFill>
+                <a:latin typeface="Arial" pitchFamily="34" charset="0"/>
+                <a:ea typeface="Arial" pitchFamily="34" charset="-122"/>
+                <a:cs typeface="Arial" pitchFamily="34" charset="-120"/>
+              </a:rPr>
+              <a:t>Константин Морошин · Океан Тех · sales@okeantech.ru · okeantech.ru</a:t>
+            </a:r>
+            <a:endParaRPr lang="en-US" sz="1200" dirty="0"/>
           </a:p>
         </p:txBody>
       </p:sp>
@@ -4016,7 +3706,7 @@
                 <a:ea typeface="Courier New" pitchFamily="34" charset="-122"/>
                 <a:cs typeface="Courier New" pitchFamily="34" charset="-120"/>
               </a:rPr>
-              <a:t>10 · ЧТО МОЖЕТ ПОЙТИ НЕ ТАК</a:t>
+              <a:t>ПРИЛОЖЕНИЕ · ЕСЛИ СПРОСЯТ</a:t>
             </a:r>
             <a:endParaRPr lang="en-US" sz="950" dirty="0"/>
           </a:p>
@@ -4055,7 +3745,7 @@
                 <a:ea typeface="Arial" pitchFamily="34" charset="-122"/>
                 <a:cs typeface="Arial" pitchFamily="34" charset="-120"/>
               </a:rPr>
-              <a:t>Три риска — и что мы с ними делаем</a:t>
+              <a:t>Что ещё умеет та же компания</a:t>
             </a:r>
             <a:endParaRPr lang="en-US" sz="2800" dirty="0"/>
           </a:p>
@@ -4094,7 +3784,7 @@
                 <a:ea typeface="Courier New" pitchFamily="34" charset="-122"/>
                 <a:cs typeface="Courier New" pitchFamily="34" charset="-120"/>
               </a:rPr>
-              <a:t>12 / 15</a:t>
+              <a:t>12 / 13</a:t>
             </a:r>
             <a:endParaRPr lang="en-US" sz="900" dirty="0"/>
           </a:p>
@@ -4109,11 +3799,11 @@
         <p:spPr>
           <a:xfrm>
             <a:off x="548640" y="2103120"/>
-            <a:ext cx="3544824" cy="2468880"/>
+            <a:ext cx="2601468" cy="2651760"/>
           </a:xfrm>
           <a:prstGeom prst="roundRect">
             <a:avLst>
-              <a:gd name="adj" fmla="val 6667"/>
+              <a:gd name="adj" fmla="val 6327"/>
             </a:avLst>
           </a:prstGeom>
           <a:solidFill>
@@ -4136,7 +3826,7 @@
         <p:spPr>
           <a:xfrm>
             <a:off x="822960" y="2331720"/>
-            <a:ext cx="2996184" cy="274320"/>
+            <a:ext cx="2052828" cy="274320"/>
           </a:xfrm>
           <a:prstGeom prst="rect">
             <a:avLst/>
@@ -4160,7 +3850,7 @@
                 <a:ea typeface="Courier New" pitchFamily="34" charset="-122"/>
                 <a:cs typeface="Courier New" pitchFamily="34" charset="-120"/>
               </a:rPr>
-              <a:t>РИСК 1</a:t>
+              <a:t>ОПЦИОН 1</a:t>
             </a:r>
             <a:endParaRPr lang="en-US" sz="950" dirty="0"/>
           </a:p>
@@ -4175,7 +3865,7 @@
         <p:spPr>
           <a:xfrm>
             <a:off x="822960" y="2651760"/>
-            <a:ext cx="2996184" cy="411480"/>
+            <a:ext cx="2052828" cy="411480"/>
           </a:xfrm>
           <a:prstGeom prst="rect">
             <a:avLst/>
@@ -4199,7 +3889,7 @@
                 <a:ea typeface="Arial" pitchFamily="34" charset="-122"/>
                 <a:cs typeface="Arial" pitchFamily="34" charset="-120"/>
               </a:rPr>
-              <a:t>ИИ будет у всех</a:t>
+              <a:t>Роботы</a:t>
             </a:r>
             <a:endParaRPr lang="en-US" sz="1600" dirty="0"/>
           </a:p>
@@ -4214,7 +3904,7 @@
         <p:spPr>
           <a:xfrm>
             <a:off x="822960" y="3108960"/>
-            <a:ext cx="2996184" cy="1280160"/>
+            <a:ext cx="2052828" cy="1463040"/>
           </a:xfrm>
           <a:prstGeom prst="rect">
             <a:avLst/>
@@ -4238,7 +3928,7 @@
                 <a:ea typeface="Arial" pitchFamily="34" charset="-122"/>
                 <a:cs typeface="Arial" pitchFamily="34" charset="-120"/>
               </a:rPr>
-              <a:t>Через год-два такой ИИ появится у каждого. Поэтому наше преимущество — не в модели, а в купленных фирмах, их лицензиях и клиентах. Их бесплатно не раздашь.</a:t>
+              <a:t>Роботы-инспекторы на подстанциях, которые мы спроектировали. Китайская сетевая компания State Grid покупает 8500 роботов в год; поставщик — DEEP Robotics. Годы 3–5.</a:t>
             </a:r>
             <a:endParaRPr lang="en-US" sz="1250" dirty="0"/>
           </a:p>
@@ -4252,12 +3942,12 @@
         </p:nvSpPr>
         <p:spPr>
           <a:xfrm>
-            <a:off x="4322064" y="2103120"/>
-            <a:ext cx="3544824" cy="2468880"/>
+            <a:off x="3378708" y="2103120"/>
+            <a:ext cx="2601468" cy="2651760"/>
           </a:xfrm>
           <a:prstGeom prst="roundRect">
             <a:avLst>
-              <a:gd name="adj" fmla="val 6667"/>
+              <a:gd name="adj" fmla="val 6327"/>
             </a:avLst>
           </a:prstGeom>
           <a:solidFill>
@@ -4279,8 +3969,8 @@
         </p:nvSpPr>
         <p:spPr>
           <a:xfrm>
-            <a:off x="4596384" y="2331720"/>
-            <a:ext cx="2996184" cy="274320"/>
+            <a:off x="3653028" y="2331720"/>
+            <a:ext cx="2052828" cy="274320"/>
           </a:xfrm>
           <a:prstGeom prst="rect">
             <a:avLst/>
@@ -4304,7 +3994,7 @@
                 <a:ea typeface="Courier New" pitchFamily="34" charset="-122"/>
                 <a:cs typeface="Courier New" pitchFamily="34" charset="-120"/>
               </a:rPr>
-              <a:t>РИСК 2</a:t>
+              <a:t>ОПЦИОН 2</a:t>
             </a:r>
             <a:endParaRPr lang="en-US" sz="950" dirty="0"/>
           </a:p>
@@ -4318,8 +4008,8 @@
         </p:nvSpPr>
         <p:spPr>
           <a:xfrm>
-            <a:off x="4596384" y="2651760"/>
-            <a:ext cx="2996184" cy="411480"/>
+            <a:off x="3653028" y="2651760"/>
+            <a:ext cx="2052828" cy="411480"/>
           </a:xfrm>
           <a:prstGeom prst="rect">
             <a:avLst/>
@@ -4343,7 +4033,7 @@
                 <a:ea typeface="Arial" pitchFamily="34" charset="-122"/>
                 <a:cs typeface="Arial" pitchFamily="34" charset="-120"/>
               </a:rPr>
-              <a:t>Инженеры уйдут</a:t>
+              <a:t>Стройка</a:t>
             </a:r>
             <a:endParaRPr lang="en-US" sz="1600" dirty="0"/>
           </a:p>
@@ -4357,8 +4047,8 @@
         </p:nvSpPr>
         <p:spPr>
           <a:xfrm>
-            <a:off x="4596384" y="3108960"/>
-            <a:ext cx="2996184" cy="1280160"/>
+            <a:off x="3653028" y="3108960"/>
+            <a:ext cx="2052828" cy="1463040"/>
           </a:xfrm>
           <a:prstGeom prst="rect">
             <a:avLst/>
@@ -4382,7 +4072,7 @@
                 <a:ea typeface="Arial" pitchFamily="34" charset="-122"/>
                 <a:cs typeface="Arial" pitchFamily="34" charset="-120"/>
               </a:rPr>
-              <a:t>Это бизнес на людях. Покупаем фирмы с отложенной выплатой основателям, а ИИ делает работу инженеров легче, а не заменяет их.</a:t>
+              <a:t>Инженер, который проектировал, сопровождает стройку и приёмку: ещё 15–35% к гонорару с того же проекта.</a:t>
             </a:r>
             <a:endParaRPr lang="en-US" sz="1250" dirty="0"/>
           </a:p>
@@ -4396,12 +4086,12 @@
         </p:nvSpPr>
         <p:spPr>
           <a:xfrm>
-            <a:off x="8095488" y="2103120"/>
-            <a:ext cx="3544824" cy="2468880"/>
+            <a:off x="6208776" y="2103120"/>
+            <a:ext cx="2601468" cy="2651760"/>
           </a:xfrm>
           <a:prstGeom prst="roundRect">
             <a:avLst>
-              <a:gd name="adj" fmla="val 6667"/>
+              <a:gd name="adj" fmla="val 6327"/>
             </a:avLst>
           </a:prstGeom>
           <a:solidFill>
@@ -4423,8 +4113,8 @@
         </p:nvSpPr>
         <p:spPr>
           <a:xfrm>
-            <a:off x="8369808" y="2331720"/>
-            <a:ext cx="2996184" cy="274320"/>
+            <a:off x="6483096" y="2331720"/>
+            <a:ext cx="2052828" cy="274320"/>
           </a:xfrm>
           <a:prstGeom prst="rect">
             <a:avLst/>
@@ -4448,7 +4138,7 @@
                 <a:ea typeface="Courier New" pitchFamily="34" charset="-122"/>
                 <a:cs typeface="Courier New" pitchFamily="34" charset="-120"/>
               </a:rPr>
-              <a:t>РИСК 3</a:t>
+              <a:t>ОПЦИОН 3</a:t>
             </a:r>
             <a:endParaRPr lang="en-US" sz="950" dirty="0"/>
           </a:p>
@@ -4462,8 +4152,8 @@
         </p:nvSpPr>
         <p:spPr>
           <a:xfrm>
-            <a:off x="8369808" y="2651760"/>
-            <a:ext cx="2996184" cy="411480"/>
+            <a:off x="6483096" y="2651760"/>
+            <a:ext cx="2052828" cy="411480"/>
           </a:xfrm>
           <a:prstGeom prst="rect">
             <a:avLst/>
@@ -4487,7 +4177,7 @@
                 <a:ea typeface="Arial" pitchFamily="34" charset="-122"/>
                 <a:cs typeface="Arial" pitchFamily="34" charset="-120"/>
               </a:rPr>
-              <a:t>Происхождение команды</a:t>
+              <a:t>Обучение</a:t>
             </a:r>
             <a:endParaRPr lang="en-US" sz="1600" dirty="0"/>
           </a:p>
@@ -4501,8 +4191,8 @@
         </p:nvSpPr>
         <p:spPr>
           <a:xfrm>
-            <a:off x="8369808" y="3108960"/>
-            <a:ext cx="2996184" cy="1280160"/>
+            <a:off x="6483096" y="3108960"/>
+            <a:ext cx="2052828" cy="1463040"/>
           </a:xfrm>
           <a:prstGeom prst="rect">
             <a:avLst/>
@@ -4526,7 +4216,7 @@
                 <a:ea typeface="Arial" pitchFamily="34" charset="-122"/>
                 <a:cs typeface="Arial" pitchFamily="34" charset="-120"/>
               </a:rPr>
-              <a:t>Команда из России: в США и Европе нас ждут проверки и ограничения. Поэтому стартуем там, где строят и куда пускают: Залив, Индия. Международная структура с первого дня.</a:t>
+              <a:t>Обучение инженеров под квоты: Саудовская Аравия требует 30% граждан на инженерных позициях. Наш ИИ быстро доводит выпускника до рабочего инженера.</a:t>
             </a:r>
             <a:endParaRPr lang="en-US" sz="1250" dirty="0"/>
           </a:p>
@@ -4534,14 +4224,119 @@
       </p:sp>
       <p:sp>
         <p:nvSpPr>
-          <p:cNvPr id="18" name="Text 16"/>
-          <p:cNvSpPr txBox="1"/>
-          <p:nvPr/>
-        </p:nvSpPr>
-        <p:spPr>
-          <a:xfrm>
-            <a:off x="548640" y="4846320"/>
-            <a:ext cx="10725912" cy="822960"/>
+          <p:cNvPr id="18" name="Shape 16"/>
+          <p:cNvSpPr/>
+          <p:nvPr/>
+        </p:nvSpPr>
+        <p:spPr>
+          <a:xfrm>
+            <a:off x="9038844" y="2103120"/>
+            <a:ext cx="2601468" cy="2651760"/>
+          </a:xfrm>
+          <a:prstGeom prst="roundRect">
+            <a:avLst>
+              <a:gd name="adj" fmla="val 6327"/>
+            </a:avLst>
+          </a:prstGeom>
+          <a:solidFill>
+            <a:srgbClr val="F7F7F7"/>
+          </a:solidFill>
+          <a:ln w="12700">
+            <a:solidFill>
+              <a:srgbClr val="F7F7F7"/>
+            </a:solidFill>
+            <a:prstDash val="solid"/>
+          </a:ln>
+        </p:spPr>
+      </p:sp>
+      <p:sp>
+        <p:nvSpPr>
+          <p:cNvPr id="19" name="Text 17"/>
+          <p:cNvSpPr txBox="1"/>
+          <p:nvPr/>
+        </p:nvSpPr>
+        <p:spPr>
+          <a:xfrm>
+            <a:off x="9313164" y="2331720"/>
+            <a:ext cx="2052828" cy="274320"/>
+          </a:xfrm>
+          <a:prstGeom prst="rect">
+            <a:avLst/>
+          </a:prstGeom>
+          <a:noFill/>
+          <a:ln/>
+        </p:spPr>
+        <p:txBody>
+          <a:bodyPr wrap="square" lIns="0" tIns="0" rIns="0" bIns="0" rtlCol="0" anchor="ctr"/>
+          <a:lstStyle/>
+          <a:p>
+            <a:pPr indent="0" marL="0">
+              <a:buNone/>
+            </a:pPr>
+            <a:r>
+              <a:rPr lang="en-US" sz="950" spc="200" kern="0" dirty="0">
+                <a:solidFill>
+                  <a:srgbClr val="0460F5"/>
+                </a:solidFill>
+                <a:latin typeface="Courier New" pitchFamily="34" charset="0"/>
+                <a:ea typeface="Courier New" pitchFamily="34" charset="-122"/>
+                <a:cs typeface="Courier New" pitchFamily="34" charset="-120"/>
+              </a:rPr>
+              <a:t>ОПЦИОН 4</a:t>
+            </a:r>
+            <a:endParaRPr lang="en-US" sz="950" dirty="0"/>
+          </a:p>
+        </p:txBody>
+      </p:sp>
+      <p:sp>
+        <p:nvSpPr>
+          <p:cNvPr id="20" name="Text 18"/>
+          <p:cNvSpPr txBox="1"/>
+          <p:nvPr/>
+        </p:nvSpPr>
+        <p:spPr>
+          <a:xfrm>
+            <a:off x="9313164" y="2651760"/>
+            <a:ext cx="2052828" cy="411480"/>
+          </a:xfrm>
+          <a:prstGeom prst="rect">
+            <a:avLst/>
+          </a:prstGeom>
+          <a:noFill/>
+          <a:ln/>
+        </p:spPr>
+        <p:txBody>
+          <a:bodyPr wrap="square" lIns="0" tIns="0" rIns="0" bIns="0" rtlCol="0" anchor="ctr"/>
+          <a:lstStyle/>
+          <a:p>
+            <a:pPr indent="0" marL="0">
+              <a:buNone/>
+            </a:pPr>
+            <a:r>
+              <a:rPr lang="en-US" sz="1600" b="1" dirty="0">
+                <a:solidFill>
+                  <a:srgbClr val="141A22"/>
+                </a:solidFill>
+                <a:latin typeface="Arial" pitchFamily="34" charset="0"/>
+                <a:ea typeface="Arial" pitchFamily="34" charset="-122"/>
+                <a:cs typeface="Arial" pitchFamily="34" charset="-120"/>
+              </a:rPr>
+              <a:t>Данные</a:t>
+            </a:r>
+            <a:endParaRPr lang="en-US" sz="1600" dirty="0"/>
+          </a:p>
+        </p:txBody>
+      </p:sp>
+      <p:sp>
+        <p:nvSpPr>
+          <p:cNvPr id="21" name="Text 19"/>
+          <p:cNvSpPr txBox="1"/>
+          <p:nvPr/>
+        </p:nvSpPr>
+        <p:spPr>
+          <a:xfrm>
+            <a:off x="9313164" y="3108960"/>
+            <a:ext cx="2052828" cy="1463040"/>
           </a:xfrm>
           <a:prstGeom prst="rect">
             <a:avLst/>
@@ -4554,23 +4349,59 @@
           <a:lstStyle/>
           <a:p>
             <a:pPr indent="0" marL="0">
-              <a:lnSpc>
-                <a:spcPct val="115000"/>
-              </a:lnSpc>
-              <a:buNone/>
-            </a:pPr>
-            <a:r>
-              <a:rPr lang="en-US" sz="1450" dirty="0">
-                <a:solidFill>
-                  <a:srgbClr val="141A22"/>
-                </a:solidFill>
-                <a:latin typeface="Arial" pitchFamily="34" charset="0"/>
-                <a:ea typeface="Arial" pitchFamily="34" charset="-122"/>
-                <a:cs typeface="Arial" pitchFamily="34" charset="-120"/>
-              </a:rPr>
-              <a:t>Четвёртый риск — что ИИ не даст даже полтора раза. Его снимает первый шаг: 250 тысяч и восемь недель до любых покупок.</a:t>
-            </a:r>
-            <a:endParaRPr lang="en-US" sz="1450" dirty="0"/>
+              <a:buNone/>
+            </a:pPr>
+            <a:r>
+              <a:rPr lang="en-US" sz="1250" dirty="0">
+                <a:solidFill>
+                  <a:srgbClr val="5C6067"/>
+                </a:solidFill>
+                <a:latin typeface="Arial" pitchFamily="34" charset="0"/>
+                <a:ea typeface="Arial" pitchFamily="34" charset="-122"/>
+                <a:cs typeface="Arial" pitchFamily="34" charset="-120"/>
+              </a:rPr>
+              <a:t>База данных о подключениях: сотни проектов в год — данные, которых нет ни у кого. Enverus купил Pearl Street именно за такие данные.</a:t>
+            </a:r>
+            <a:endParaRPr lang="en-US" sz="1250" dirty="0"/>
+          </a:p>
+        </p:txBody>
+      </p:sp>
+      <p:sp>
+        <p:nvSpPr>
+          <p:cNvPr id="22" name="Text 20"/>
+          <p:cNvSpPr txBox="1"/>
+          <p:nvPr/>
+        </p:nvSpPr>
+        <p:spPr>
+          <a:xfrm>
+            <a:off x="548640" y="5029200"/>
+            <a:ext cx="9445752" cy="457200"/>
+          </a:xfrm>
+          <a:prstGeom prst="rect">
+            <a:avLst/>
+          </a:prstGeom>
+          <a:noFill/>
+          <a:ln/>
+        </p:spPr>
+        <p:txBody>
+          <a:bodyPr wrap="square" lIns="0" tIns="0" rIns="0" bIns="0" rtlCol="0" anchor="t"/>
+          <a:lstStyle/>
+          <a:p>
+            <a:pPr indent="0" marL="0">
+              <a:buNone/>
+            </a:pPr>
+            <a:r>
+              <a:rPr lang="en-US" sz="1000" dirty="0">
+                <a:solidFill>
+                  <a:srgbClr val="8A8E94"/>
+                </a:solidFill>
+                <a:latin typeface="Arial" pitchFamily="34" charset="0"/>
+                <a:ea typeface="Arial" pitchFamily="34" charset="-122"/>
+                <a:cs typeface="Arial" pitchFamily="34" charset="-120"/>
+              </a:rPr>
+              <a:t>В выручку раунда заложено только проектирование. Остальное вводим по одному и только после измерения.</a:t>
+            </a:r>
+            <a:endParaRPr lang="en-US" sz="1000" dirty="0"/>
           </a:p>
         </p:txBody>
       </p:sp>
@@ -4585,746 +4416,6 @@
 <file path=ppt/slides/slide13.xml><?xml version="1.0" encoding="utf-8"?>
 <p:sld xmlns:a="http://schemas.openxmlformats.org/drawingml/2006/main" xmlns:r="http://schemas.openxmlformats.org/officeDocument/2006/relationships" xmlns:p="http://schemas.openxmlformats.org/presentationml/2006/main">
   <p:cSld name="Slide 13">
-    <p:bg>
-      <p:bgPr>
-        <a:solidFill>
-          <a:srgbClr val="232323"/>
-        </a:solidFill>
-      </p:bgPr>
-    </p:bg>
-    <p:spTree>
-      <p:nvGrpSpPr>
-        <p:cNvPr id="1" name=""/>
-        <p:cNvGrpSpPr/>
-        <p:nvPr/>
-      </p:nvGrpSpPr>
-      <p:grpSpPr>
-        <a:xfrm>
-          <a:off x="0" y="0"/>
-          <a:ext cx="0" cy="0"/>
-          <a:chOff x="0" y="0"/>
-          <a:chExt cx="0" cy="0"/>
-        </a:xfrm>
-      </p:grpSpPr>
-      <p:sp>
-        <p:nvSpPr>
-          <p:cNvPr id="2" name="Text 0"/>
-          <p:cNvSpPr txBox="1"/>
-          <p:nvPr/>
-        </p:nvSpPr>
-        <p:spPr>
-          <a:xfrm>
-            <a:off x="9354312" y="320040"/>
-            <a:ext cx="2286000" cy="274320"/>
-          </a:xfrm>
-          <a:prstGeom prst="rect">
-            <a:avLst/>
-          </a:prstGeom>
-          <a:noFill/>
-          <a:ln/>
-        </p:spPr>
-        <p:txBody>
-          <a:bodyPr wrap="square" lIns="0" tIns="0" rIns="0" bIns="0" rtlCol="0" anchor="ctr"/>
-          <a:lstStyle/>
-          <a:p>
-            <a:pPr algn="r" indent="0" marL="0">
-              <a:buNone/>
-            </a:pPr>
-            <a:r>
-              <a:rPr lang="en-US" sz="900" spc="300" kern="0" dirty="0">
-                <a:solidFill>
-                  <a:srgbClr val="8C8C8C"/>
-                </a:solidFill>
-                <a:latin typeface="Courier New" pitchFamily="34" charset="0"/>
-                <a:ea typeface="Courier New" pitchFamily="34" charset="-122"/>
-                <a:cs typeface="Courier New" pitchFamily="34" charset="-120"/>
-              </a:rPr>
-              <a:t>ОКЕАН ТЕХ</a:t>
-            </a:r>
-            <a:endParaRPr lang="en-US" sz="900" dirty="0"/>
-          </a:p>
-        </p:txBody>
-      </p:sp>
-      <p:sp>
-        <p:nvSpPr>
-          <p:cNvPr id="3" name="Text 1"/>
-          <p:cNvSpPr txBox="1"/>
-          <p:nvPr/>
-        </p:nvSpPr>
-        <p:spPr>
-          <a:xfrm>
-            <a:off x="548640" y="411480"/>
-            <a:ext cx="7315200" cy="274320"/>
-          </a:xfrm>
-          <a:prstGeom prst="rect">
-            <a:avLst/>
-          </a:prstGeom>
-          <a:noFill/>
-          <a:ln/>
-        </p:spPr>
-        <p:txBody>
-          <a:bodyPr wrap="square" lIns="0" tIns="0" rIns="0" bIns="0" rtlCol="0" anchor="ctr"/>
-          <a:lstStyle/>
-          <a:p>
-            <a:pPr indent="0" marL="0">
-              <a:buNone/>
-            </a:pPr>
-            <a:r>
-              <a:rPr lang="en-US" sz="950" spc="300" kern="0" dirty="0">
-                <a:solidFill>
-                  <a:srgbClr val="D5F774"/>
-                </a:solidFill>
-                <a:latin typeface="Courier New" pitchFamily="34" charset="0"/>
-                <a:ea typeface="Courier New" pitchFamily="34" charset="-122"/>
-                <a:cs typeface="Courier New" pitchFamily="34" charset="-120"/>
-              </a:rPr>
-              <a:t>ЧТО ПРОСИМ</a:t>
-            </a:r>
-            <a:endParaRPr lang="en-US" sz="950" dirty="0"/>
-          </a:p>
-        </p:txBody>
-      </p:sp>
-      <p:sp>
-        <p:nvSpPr>
-          <p:cNvPr id="4" name="Text 2"/>
-          <p:cNvSpPr txBox="1"/>
-          <p:nvPr/>
-        </p:nvSpPr>
-        <p:spPr>
-          <a:xfrm>
-            <a:off x="548640" y="731520"/>
-            <a:ext cx="11091672" cy="1188720"/>
-          </a:xfrm>
-          <a:prstGeom prst="rect">
-            <a:avLst/>
-          </a:prstGeom>
-          <a:noFill/>
-          <a:ln/>
-        </p:spPr>
-        <p:txBody>
-          <a:bodyPr wrap="square" lIns="0" tIns="0" rIns="0" bIns="0" rtlCol="0" anchor="t"/>
-          <a:lstStyle/>
-          <a:p>
-            <a:pPr indent="0" marL="0">
-              <a:buNone/>
-            </a:pPr>
-            <a:r>
-              <a:rPr lang="en-US" sz="2800" b="1" dirty="0">
-                <a:solidFill>
-                  <a:srgbClr val="FFFFFF"/>
-                </a:solidFill>
-                <a:latin typeface="Arial" pitchFamily="34" charset="0"/>
-                <a:ea typeface="Arial" pitchFamily="34" charset="-122"/>
-                <a:cs typeface="Arial" pitchFamily="34" charset="-120"/>
-              </a:rPr>
-              <a:t>30 млн $: десять на ИИ и первую фирму, двадцать на ещё четыре</a:t>
-            </a:r>
-            <a:endParaRPr lang="en-US" sz="2800" dirty="0"/>
-          </a:p>
-        </p:txBody>
-      </p:sp>
-      <p:sp>
-        <p:nvSpPr>
-          <p:cNvPr id="5" name="Text 3"/>
-          <p:cNvSpPr txBox="1"/>
-          <p:nvPr/>
-        </p:nvSpPr>
-        <p:spPr>
-          <a:xfrm>
-            <a:off x="10268712" y="6400800"/>
-            <a:ext cx="1371600" cy="274320"/>
-          </a:xfrm>
-          <a:prstGeom prst="rect">
-            <a:avLst/>
-          </a:prstGeom>
-          <a:noFill/>
-          <a:ln/>
-        </p:spPr>
-        <p:txBody>
-          <a:bodyPr wrap="square" lIns="0" tIns="0" rIns="0" bIns="0" rtlCol="0" anchor="ctr"/>
-          <a:lstStyle/>
-          <a:p>
-            <a:pPr algn="r" indent="0" marL="0">
-              <a:buNone/>
-            </a:pPr>
-            <a:r>
-              <a:rPr lang="en-US" sz="900" dirty="0">
-                <a:solidFill>
-                  <a:srgbClr val="8C8C8C"/>
-                </a:solidFill>
-                <a:latin typeface="Courier New" pitchFamily="34" charset="0"/>
-                <a:ea typeface="Courier New" pitchFamily="34" charset="-122"/>
-                <a:cs typeface="Courier New" pitchFamily="34" charset="-120"/>
-              </a:rPr>
-              <a:t>13 / 15</a:t>
-            </a:r>
-            <a:endParaRPr lang="en-US" sz="900" dirty="0"/>
-          </a:p>
-        </p:txBody>
-      </p:sp>
-      <p:sp>
-        <p:nvSpPr>
-          <p:cNvPr id="6" name="Shape 4"/>
-          <p:cNvSpPr/>
-          <p:nvPr/>
-        </p:nvSpPr>
-        <p:spPr>
-          <a:xfrm>
-            <a:off x="548640" y="2103120"/>
-            <a:ext cx="3544824" cy="2103120"/>
-          </a:xfrm>
-          <a:prstGeom prst="roundRect">
-            <a:avLst>
-              <a:gd name="adj" fmla="val 7826"/>
-            </a:avLst>
-          </a:prstGeom>
-          <a:solidFill>
-            <a:srgbClr val="343434"/>
-          </a:solidFill>
-          <a:ln w="12700">
-            <a:solidFill>
-              <a:srgbClr val="343434"/>
-            </a:solidFill>
-            <a:prstDash val="solid"/>
-          </a:ln>
-        </p:spPr>
-      </p:sp>
-      <p:sp>
-        <p:nvSpPr>
-          <p:cNvPr id="7" name="Text 5"/>
-          <p:cNvSpPr txBox="1"/>
-          <p:nvPr/>
-        </p:nvSpPr>
-        <p:spPr>
-          <a:xfrm>
-            <a:off x="822960" y="2331720"/>
-            <a:ext cx="2996184" cy="274320"/>
-          </a:xfrm>
-          <a:prstGeom prst="rect">
-            <a:avLst/>
-          </a:prstGeom>
-          <a:noFill/>
-          <a:ln/>
-        </p:spPr>
-        <p:txBody>
-          <a:bodyPr wrap="square" lIns="0" tIns="0" rIns="0" bIns="0" rtlCol="0" anchor="ctr"/>
-          <a:lstStyle/>
-          <a:p>
-            <a:pPr indent="0" marL="0">
-              <a:buNone/>
-            </a:pPr>
-            <a:r>
-              <a:rPr lang="en-US" sz="950" spc="200" kern="0" dirty="0">
-                <a:solidFill>
-                  <a:srgbClr val="D5F774"/>
-                </a:solidFill>
-                <a:latin typeface="Courier New" pitchFamily="34" charset="0"/>
-                <a:ea typeface="Courier New" pitchFamily="34" charset="-122"/>
-                <a:cs typeface="Courier New" pitchFamily="34" charset="-120"/>
-              </a:rPr>
-              <a:t>ТРАНШ 1 · 3 МЛН $</a:t>
-            </a:r>
-            <a:endParaRPr lang="en-US" sz="950" dirty="0"/>
-          </a:p>
-        </p:txBody>
-      </p:sp>
-      <p:sp>
-        <p:nvSpPr>
-          <p:cNvPr id="8" name="Text 6"/>
-          <p:cNvSpPr txBox="1"/>
-          <p:nvPr/>
-        </p:nvSpPr>
-        <p:spPr>
-          <a:xfrm>
-            <a:off x="822960" y="2651760"/>
-            <a:ext cx="2996184" cy="411480"/>
-          </a:xfrm>
-          <a:prstGeom prst="rect">
-            <a:avLst/>
-          </a:prstGeom>
-          <a:noFill/>
-          <a:ln/>
-        </p:spPr>
-        <p:txBody>
-          <a:bodyPr wrap="square" lIns="0" tIns="0" rIns="0" bIns="0" rtlCol="0" anchor="ctr"/>
-          <a:lstStyle/>
-          <a:p>
-            <a:pPr indent="0" marL="0">
-              <a:buNone/>
-            </a:pPr>
-            <a:r>
-              <a:rPr lang="en-US" sz="1600" b="1" dirty="0">
-                <a:solidFill>
-                  <a:srgbClr val="FFFFFF"/>
-                </a:solidFill>
-                <a:latin typeface="Arial" pitchFamily="34" charset="0"/>
-                <a:ea typeface="Arial" pitchFamily="34" charset="-122"/>
-                <a:cs typeface="Arial" pitchFamily="34" charset="-120"/>
-              </a:rPr>
-              <a:t>Полгода</a:t>
-            </a:r>
-            <a:endParaRPr lang="en-US" sz="1600" dirty="0"/>
-          </a:p>
-        </p:txBody>
-      </p:sp>
-      <p:sp>
-        <p:nvSpPr>
-          <p:cNvPr id="9" name="Text 7"/>
-          <p:cNvSpPr txBox="1"/>
-          <p:nvPr/>
-        </p:nvSpPr>
-        <p:spPr>
-          <a:xfrm>
-            <a:off x="822960" y="3108960"/>
-            <a:ext cx="2996184" cy="914400"/>
-          </a:xfrm>
-          <a:prstGeom prst="rect">
-            <a:avLst/>
-          </a:prstGeom>
-          <a:noFill/>
-          <a:ln/>
-        </p:spPr>
-        <p:txBody>
-          <a:bodyPr wrap="square" lIns="0" tIns="0" rIns="0" bIns="0" rtlCol="0" anchor="t"/>
-          <a:lstStyle/>
-          <a:p>
-            <a:pPr indent="0" marL="0">
-              <a:buNone/>
-            </a:pPr>
-            <a:r>
-              <a:rPr lang="en-US" sz="1250" dirty="0">
-                <a:solidFill>
-                  <a:srgbClr val="B8B8B8"/>
-                </a:solidFill>
-                <a:latin typeface="Arial" pitchFamily="34" charset="0"/>
-                <a:ea typeface="Arial" pitchFamily="34" charset="-122"/>
-                <a:cs typeface="Arial" pitchFamily="34" charset="-120"/>
-              </a:rPr>
-              <a:t>ИИ на реальных проектах, первые оплаченные работы, выбрана фирма для покупки.</a:t>
-            </a:r>
-            <a:endParaRPr lang="en-US" sz="1250" dirty="0"/>
-          </a:p>
-        </p:txBody>
-      </p:sp>
-      <p:sp>
-        <p:nvSpPr>
-          <p:cNvPr id="10" name="Shape 8"/>
-          <p:cNvSpPr/>
-          <p:nvPr/>
-        </p:nvSpPr>
-        <p:spPr>
-          <a:xfrm>
-            <a:off x="4322064" y="2103120"/>
-            <a:ext cx="3544824" cy="2103120"/>
-          </a:xfrm>
-          <a:prstGeom prst="roundRect">
-            <a:avLst>
-              <a:gd name="adj" fmla="val 7826"/>
-            </a:avLst>
-          </a:prstGeom>
-          <a:solidFill>
-            <a:srgbClr val="343434"/>
-          </a:solidFill>
-          <a:ln w="12700">
-            <a:solidFill>
-              <a:srgbClr val="343434"/>
-            </a:solidFill>
-            <a:prstDash val="solid"/>
-          </a:ln>
-        </p:spPr>
-      </p:sp>
-      <p:sp>
-        <p:nvSpPr>
-          <p:cNvPr id="11" name="Text 9"/>
-          <p:cNvSpPr txBox="1"/>
-          <p:nvPr/>
-        </p:nvSpPr>
-        <p:spPr>
-          <a:xfrm>
-            <a:off x="4596384" y="2331720"/>
-            <a:ext cx="2996184" cy="274320"/>
-          </a:xfrm>
-          <a:prstGeom prst="rect">
-            <a:avLst/>
-          </a:prstGeom>
-          <a:noFill/>
-          <a:ln/>
-        </p:spPr>
-        <p:txBody>
-          <a:bodyPr wrap="square" lIns="0" tIns="0" rIns="0" bIns="0" rtlCol="0" anchor="ctr"/>
-          <a:lstStyle/>
-          <a:p>
-            <a:pPr indent="0" marL="0">
-              <a:buNone/>
-            </a:pPr>
-            <a:r>
-              <a:rPr lang="en-US" sz="950" spc="200" kern="0" dirty="0">
-                <a:solidFill>
-                  <a:srgbClr val="D5F774"/>
-                </a:solidFill>
-                <a:latin typeface="Courier New" pitchFamily="34" charset="0"/>
-                <a:ea typeface="Courier New" pitchFamily="34" charset="-122"/>
-                <a:cs typeface="Courier New" pitchFamily="34" charset="-120"/>
-              </a:rPr>
-              <a:t>ТРАНШ 2 · 7 МЛН $</a:t>
-            </a:r>
-            <a:endParaRPr lang="en-US" sz="950" dirty="0"/>
-          </a:p>
-        </p:txBody>
-      </p:sp>
-      <p:sp>
-        <p:nvSpPr>
-          <p:cNvPr id="12" name="Text 10"/>
-          <p:cNvSpPr txBox="1"/>
-          <p:nvPr/>
-        </p:nvSpPr>
-        <p:spPr>
-          <a:xfrm>
-            <a:off x="4596384" y="2651760"/>
-            <a:ext cx="2996184" cy="411480"/>
-          </a:xfrm>
-          <a:prstGeom prst="rect">
-            <a:avLst/>
-          </a:prstGeom>
-          <a:noFill/>
-          <a:ln/>
-        </p:spPr>
-        <p:txBody>
-          <a:bodyPr wrap="square" lIns="0" tIns="0" rIns="0" bIns="0" rtlCol="0" anchor="ctr"/>
-          <a:lstStyle/>
-          <a:p>
-            <a:pPr indent="0" marL="0">
-              <a:buNone/>
-            </a:pPr>
-            <a:r>
-              <a:rPr lang="en-US" sz="1600" b="1" dirty="0">
-                <a:solidFill>
-                  <a:srgbClr val="FFFFFF"/>
-                </a:solidFill>
-                <a:latin typeface="Arial" pitchFamily="34" charset="0"/>
-                <a:ea typeface="Arial" pitchFamily="34" charset="-122"/>
-                <a:cs typeface="Arial" pitchFamily="34" charset="-120"/>
-              </a:rPr>
-              <a:t>Первая фирма</a:t>
-            </a:r>
-            <a:endParaRPr lang="en-US" sz="1600" dirty="0"/>
-          </a:p>
-        </p:txBody>
-      </p:sp>
-      <p:sp>
-        <p:nvSpPr>
-          <p:cNvPr id="13" name="Text 11"/>
-          <p:cNvSpPr txBox="1"/>
-          <p:nvPr/>
-        </p:nvSpPr>
-        <p:spPr>
-          <a:xfrm>
-            <a:off x="4596384" y="3108960"/>
-            <a:ext cx="2996184" cy="914400"/>
-          </a:xfrm>
-          <a:prstGeom prst="rect">
-            <a:avLst/>
-          </a:prstGeom>
-          <a:noFill/>
-          <a:ln/>
-        </p:spPr>
-        <p:txBody>
-          <a:bodyPr wrap="square" lIns="0" tIns="0" rIns="0" bIns="0" rtlCol="0" anchor="t"/>
-          <a:lstStyle/>
-          <a:p>
-            <a:pPr indent="0" marL="0">
-              <a:buNone/>
-            </a:pPr>
-            <a:r>
-              <a:rPr lang="en-US" sz="1250" dirty="0">
-                <a:solidFill>
-                  <a:srgbClr val="B8B8B8"/>
-                </a:solidFill>
-                <a:latin typeface="Arial" pitchFamily="34" charset="0"/>
-                <a:ea typeface="Arial" pitchFamily="34" charset="-122"/>
-                <a:cs typeface="Arial" pitchFamily="34" charset="-120"/>
-              </a:rPr>
-              <a:t>Покупка, интеграция ИИ. Выручка фирмы растёт в полтора раза при том же штате.</a:t>
-            </a:r>
-            <a:endParaRPr lang="en-US" sz="1250" dirty="0"/>
-          </a:p>
-        </p:txBody>
-      </p:sp>
-      <p:sp>
-        <p:nvSpPr>
-          <p:cNvPr id="14" name="Shape 12"/>
-          <p:cNvSpPr/>
-          <p:nvPr/>
-        </p:nvSpPr>
-        <p:spPr>
-          <a:xfrm>
-            <a:off x="8095488" y="2103120"/>
-            <a:ext cx="3544824" cy="2103120"/>
-          </a:xfrm>
-          <a:prstGeom prst="roundRect">
-            <a:avLst>
-              <a:gd name="adj" fmla="val 7826"/>
-            </a:avLst>
-          </a:prstGeom>
-          <a:solidFill>
-            <a:srgbClr val="343434"/>
-          </a:solidFill>
-          <a:ln w="12700">
-            <a:solidFill>
-              <a:srgbClr val="343434"/>
-            </a:solidFill>
-            <a:prstDash val="solid"/>
-          </a:ln>
-        </p:spPr>
-      </p:sp>
-      <p:sp>
-        <p:nvSpPr>
-          <p:cNvPr id="15" name="Text 13"/>
-          <p:cNvSpPr txBox="1"/>
-          <p:nvPr/>
-        </p:nvSpPr>
-        <p:spPr>
-          <a:xfrm>
-            <a:off x="8369808" y="2331720"/>
-            <a:ext cx="2996184" cy="274320"/>
-          </a:xfrm>
-          <a:prstGeom prst="rect">
-            <a:avLst/>
-          </a:prstGeom>
-          <a:noFill/>
-          <a:ln/>
-        </p:spPr>
-        <p:txBody>
-          <a:bodyPr wrap="square" lIns="0" tIns="0" rIns="0" bIns="0" rtlCol="0" anchor="ctr"/>
-          <a:lstStyle/>
-          <a:p>
-            <a:pPr indent="0" marL="0">
-              <a:buNone/>
-            </a:pPr>
-            <a:r>
-              <a:rPr lang="en-US" sz="950" spc="200" kern="0" dirty="0">
-                <a:solidFill>
-                  <a:srgbClr val="D5F774"/>
-                </a:solidFill>
-                <a:latin typeface="Courier New" pitchFamily="34" charset="0"/>
-                <a:ea typeface="Courier New" pitchFamily="34" charset="-122"/>
-                <a:cs typeface="Courier New" pitchFamily="34" charset="-120"/>
-              </a:rPr>
-              <a:t>ТРАНШ 3 · 20 МЛН $</a:t>
-            </a:r>
-            <a:endParaRPr lang="en-US" sz="950" dirty="0"/>
-          </a:p>
-        </p:txBody>
-      </p:sp>
-      <p:sp>
-        <p:nvSpPr>
-          <p:cNvPr id="16" name="Text 14"/>
-          <p:cNvSpPr txBox="1"/>
-          <p:nvPr/>
-        </p:nvSpPr>
-        <p:spPr>
-          <a:xfrm>
-            <a:off x="8369808" y="2651760"/>
-            <a:ext cx="2996184" cy="411480"/>
-          </a:xfrm>
-          <a:prstGeom prst="rect">
-            <a:avLst/>
-          </a:prstGeom>
-          <a:noFill/>
-          <a:ln/>
-        </p:spPr>
-        <p:txBody>
-          <a:bodyPr wrap="square" lIns="0" tIns="0" rIns="0" bIns="0" rtlCol="0" anchor="ctr"/>
-          <a:lstStyle/>
-          <a:p>
-            <a:pPr indent="0" marL="0">
-              <a:buNone/>
-            </a:pPr>
-            <a:r>
-              <a:rPr lang="en-US" sz="1600" b="1" dirty="0">
-                <a:solidFill>
-                  <a:srgbClr val="FFFFFF"/>
-                </a:solidFill>
-                <a:latin typeface="Arial" pitchFamily="34" charset="0"/>
-                <a:ea typeface="Arial" pitchFamily="34" charset="-122"/>
-                <a:cs typeface="Arial" pitchFamily="34" charset="-120"/>
-              </a:rPr>
-              <a:t>Ещё четыре фирмы</a:t>
-            </a:r>
-            <a:endParaRPr lang="en-US" sz="1600" dirty="0"/>
-          </a:p>
-        </p:txBody>
-      </p:sp>
-      <p:sp>
-        <p:nvSpPr>
-          <p:cNvPr id="17" name="Text 15"/>
-          <p:cNvSpPr txBox="1"/>
-          <p:nvPr/>
-        </p:nvSpPr>
-        <p:spPr>
-          <a:xfrm>
-            <a:off x="8369808" y="3108960"/>
-            <a:ext cx="2996184" cy="914400"/>
-          </a:xfrm>
-          <a:prstGeom prst="rect">
-            <a:avLst/>
-          </a:prstGeom>
-          <a:noFill/>
-          <a:ln/>
-        </p:spPr>
-        <p:txBody>
-          <a:bodyPr wrap="square" lIns="0" tIns="0" rIns="0" bIns="0" rtlCol="0" anchor="t"/>
-          <a:lstStyle/>
-          <a:p>
-            <a:pPr indent="0" marL="0">
-              <a:buNone/>
-            </a:pPr>
-            <a:r>
-              <a:rPr lang="en-US" sz="1250" dirty="0">
-                <a:solidFill>
-                  <a:srgbClr val="B8B8B8"/>
-                </a:solidFill>
-                <a:latin typeface="Arial" pitchFamily="34" charset="0"/>
-                <a:ea typeface="Arial" pitchFamily="34" charset="-122"/>
-                <a:cs typeface="Arial" pitchFamily="34" charset="-120"/>
-              </a:rPr>
-              <a:t>Каждая приходит с клиентами и выручкой. 200 инженеров и 20 млн $ в год к концу третьего года.</a:t>
-            </a:r>
-            <a:endParaRPr lang="en-US" sz="1250" dirty="0"/>
-          </a:p>
-        </p:txBody>
-      </p:sp>
-      <p:sp>
-        <p:nvSpPr>
-          <p:cNvPr id="18" name="Text 16"/>
-          <p:cNvSpPr txBox="1"/>
-          <p:nvPr/>
-        </p:nvSpPr>
-        <p:spPr>
-          <a:xfrm>
-            <a:off x="548640" y="4434840"/>
-            <a:ext cx="10725912" cy="1234440"/>
-          </a:xfrm>
-          <a:prstGeom prst="rect">
-            <a:avLst/>
-          </a:prstGeom>
-          <a:noFill/>
-          <a:ln/>
-        </p:spPr>
-        <p:txBody>
-          <a:bodyPr wrap="square" lIns="0" tIns="0" rIns="0" bIns="0" rtlCol="0" anchor="t"/>
-          <a:lstStyle/>
-          <a:p>
-            <a:pPr indent="0" marL="0">
-              <a:lnSpc>
-                <a:spcPct val="115000"/>
-              </a:lnSpc>
-              <a:buNone/>
-            </a:pPr>
-            <a:r>
-              <a:rPr lang="en-US" sz="1300" dirty="0">
-                <a:solidFill>
-                  <a:srgbClr val="FFFFFF"/>
-                </a:solidFill>
-                <a:latin typeface="Arial" pitchFamily="34" charset="0"/>
-                <a:ea typeface="Arial" pitchFamily="34" charset="-122"/>
-                <a:cs typeface="Arial" pitchFamily="34" charset="-120"/>
-              </a:rPr>
-              <a:t>Куда идут деньги: 14 млн — пять фирм по цене годовой выручки; 3,6 млн — ИИ-команда на три года; 2 млн — сделки и юристы; остальное — запас на случай, если фирмы стоят дороже. Первый шаг внутри первого транша — 250 тысяч и восемь недель: два пилотных проекта. Порог, ниже которого не идём дальше, — полтора раза; цель — два. Инвестор получает долю в компании, которая владеет всеми фирмами; условия раунда обсуждаем отдельно.</a:t>
-            </a:r>
-            <a:endParaRPr lang="en-US" sz="1300" dirty="0"/>
-          </a:p>
-        </p:txBody>
-      </p:sp>
-      <p:sp>
-        <p:nvSpPr>
-          <p:cNvPr id="19" name="Text 17"/>
-          <p:cNvSpPr txBox="1"/>
-          <p:nvPr/>
-        </p:nvSpPr>
-        <p:spPr>
-          <a:xfrm>
-            <a:off x="548640" y="5715000"/>
-            <a:ext cx="10725912" cy="457200"/>
-          </a:xfrm>
-          <a:prstGeom prst="rect">
-            <a:avLst/>
-          </a:prstGeom>
-          <a:noFill/>
-          <a:ln/>
-        </p:spPr>
-        <p:txBody>
-          <a:bodyPr wrap="square" lIns="0" tIns="0" rIns="0" bIns="0" rtlCol="0" anchor="t"/>
-          <a:lstStyle/>
-          <a:p>
-            <a:pPr indent="0" marL="0">
-              <a:buNone/>
-            </a:pPr>
-            <a:r>
-              <a:rPr lang="en-US" sz="1500" i="1" dirty="0">
-                <a:solidFill>
-                  <a:srgbClr val="D5F774"/>
-                </a:solidFill>
-                <a:latin typeface="Arial" pitchFamily="34" charset="0"/>
-                <a:ea typeface="Arial" pitchFamily="34" charset="-122"/>
-                <a:cs typeface="Arial" pitchFamily="34" charset="-120"/>
-              </a:rPr>
-              <a:t>Двадцать из тридцати миллионов — не в сжигание, а в покупку готовой выручки.</a:t>
-            </a:r>
-            <a:endParaRPr lang="en-US" sz="1500" dirty="0"/>
-          </a:p>
-        </p:txBody>
-      </p:sp>
-      <p:sp>
-        <p:nvSpPr>
-          <p:cNvPr id="20" name="Text 18"/>
-          <p:cNvSpPr txBox="1"/>
-          <p:nvPr/>
-        </p:nvSpPr>
-        <p:spPr>
-          <a:xfrm>
-            <a:off x="548640" y="6126480"/>
-            <a:ext cx="11091672" cy="274320"/>
-          </a:xfrm>
-          <a:prstGeom prst="rect">
-            <a:avLst/>
-          </a:prstGeom>
-          <a:noFill/>
-          <a:ln/>
-        </p:spPr>
-        <p:txBody>
-          <a:bodyPr wrap="square" lIns="0" tIns="0" rIns="0" bIns="0" rtlCol="0" anchor="ctr"/>
-          <a:lstStyle/>
-          <a:p>
-            <a:pPr indent="0" marL="0">
-              <a:buNone/>
-            </a:pPr>
-            <a:r>
-              <a:rPr lang="en-US" sz="1200" dirty="0">
-                <a:solidFill>
-                  <a:srgbClr val="B8B8B8"/>
-                </a:solidFill>
-                <a:latin typeface="Arial" pitchFamily="34" charset="0"/>
-                <a:ea typeface="Arial" pitchFamily="34" charset="-122"/>
-                <a:cs typeface="Arial" pitchFamily="34" charset="-120"/>
-              </a:rPr>
-              <a:t>Константин Морошин · Океан Тех · sales@okeantech.ru · okeantech.ru</a:t>
-            </a:r>
-            <a:endParaRPr lang="en-US" sz="1200" dirty="0"/>
-          </a:p>
-        </p:txBody>
-      </p:sp>
-    </p:spTree>
-  </p:cSld>
-  <p:clrMapOvr>
-    <a:masterClrMapping/>
-  </p:clrMapOvr>
-</p:sld>
-</file>
-
-<file path=ppt/slides/slide14.xml><?xml version="1.0" encoding="utf-8"?>
-<p:sld xmlns:a="http://schemas.openxmlformats.org/drawingml/2006/main" xmlns:r="http://schemas.openxmlformats.org/officeDocument/2006/relationships" xmlns:p="http://schemas.openxmlformats.org/presentationml/2006/main">
-  <p:cSld name="Slide 14">
     <p:bg>
       <p:bgPr>
         <a:solidFill>
@@ -5418,7 +4509,7 @@
                 <a:ea typeface="Courier New" pitchFamily="34" charset="-122"/>
                 <a:cs typeface="Courier New" pitchFamily="34" charset="-120"/>
               </a:rPr>
-              <a:t>ПРИЛОЖЕНИЕ · ЕСЛИ СПРОСЯТ</a:t>
+              <a:t>ПРИЛОЖЕНИЕ · ИСТОЧНИКИ</a:t>
             </a:r>
             <a:endParaRPr lang="en-US" sz="950" dirty="0"/>
           </a:p>
@@ -5457,7 +4548,7 @@
                 <a:ea typeface="Arial" pitchFamily="34" charset="-122"/>
                 <a:cs typeface="Arial" pitchFamily="34" charset="-120"/>
               </a:rPr>
-              <a:t>Что ещё умеет та же компания</a:t>
+              <a:t>Откуда цифры</a:t>
             </a:r>
             <a:endParaRPr lang="en-US" sz="2800" dirty="0"/>
           </a:p>
@@ -5496,810 +4587,7 @@
                 <a:ea typeface="Courier New" pitchFamily="34" charset="-122"/>
                 <a:cs typeface="Courier New" pitchFamily="34" charset="-120"/>
               </a:rPr>
-              <a:t>14 / 15</a:t>
-            </a:r>
-            <a:endParaRPr lang="en-US" sz="900" dirty="0"/>
-          </a:p>
-        </p:txBody>
-      </p:sp>
-      <p:sp>
-        <p:nvSpPr>
-          <p:cNvPr id="6" name="Shape 4"/>
-          <p:cNvSpPr/>
-          <p:nvPr/>
-        </p:nvSpPr>
-        <p:spPr>
-          <a:xfrm>
-            <a:off x="548640" y="2103120"/>
-            <a:ext cx="2601468" cy="2651760"/>
-          </a:xfrm>
-          <a:prstGeom prst="roundRect">
-            <a:avLst>
-              <a:gd name="adj" fmla="val 6327"/>
-            </a:avLst>
-          </a:prstGeom>
-          <a:solidFill>
-            <a:srgbClr val="F7F7F7"/>
-          </a:solidFill>
-          <a:ln w="12700">
-            <a:solidFill>
-              <a:srgbClr val="F7F7F7"/>
-            </a:solidFill>
-            <a:prstDash val="solid"/>
-          </a:ln>
-        </p:spPr>
-      </p:sp>
-      <p:sp>
-        <p:nvSpPr>
-          <p:cNvPr id="7" name="Text 5"/>
-          <p:cNvSpPr txBox="1"/>
-          <p:nvPr/>
-        </p:nvSpPr>
-        <p:spPr>
-          <a:xfrm>
-            <a:off x="822960" y="2331720"/>
-            <a:ext cx="2052828" cy="274320"/>
-          </a:xfrm>
-          <a:prstGeom prst="rect">
-            <a:avLst/>
-          </a:prstGeom>
-          <a:noFill/>
-          <a:ln/>
-        </p:spPr>
-        <p:txBody>
-          <a:bodyPr wrap="square" lIns="0" tIns="0" rIns="0" bIns="0" rtlCol="0" anchor="ctr"/>
-          <a:lstStyle/>
-          <a:p>
-            <a:pPr indent="0" marL="0">
-              <a:buNone/>
-            </a:pPr>
-            <a:r>
-              <a:rPr lang="en-US" sz="950" spc="200" kern="0" dirty="0">
-                <a:solidFill>
-                  <a:srgbClr val="0460F5"/>
-                </a:solidFill>
-                <a:latin typeface="Courier New" pitchFamily="34" charset="0"/>
-                <a:ea typeface="Courier New" pitchFamily="34" charset="-122"/>
-                <a:cs typeface="Courier New" pitchFamily="34" charset="-120"/>
-              </a:rPr>
-              <a:t>ОПЦИОН 1</a:t>
-            </a:r>
-            <a:endParaRPr lang="en-US" sz="950" dirty="0"/>
-          </a:p>
-        </p:txBody>
-      </p:sp>
-      <p:sp>
-        <p:nvSpPr>
-          <p:cNvPr id="8" name="Text 6"/>
-          <p:cNvSpPr txBox="1"/>
-          <p:nvPr/>
-        </p:nvSpPr>
-        <p:spPr>
-          <a:xfrm>
-            <a:off x="822960" y="2651760"/>
-            <a:ext cx="2052828" cy="411480"/>
-          </a:xfrm>
-          <a:prstGeom prst="rect">
-            <a:avLst/>
-          </a:prstGeom>
-          <a:noFill/>
-          <a:ln/>
-        </p:spPr>
-        <p:txBody>
-          <a:bodyPr wrap="square" lIns="0" tIns="0" rIns="0" bIns="0" rtlCol="0" anchor="ctr"/>
-          <a:lstStyle/>
-          <a:p>
-            <a:pPr indent="0" marL="0">
-              <a:buNone/>
-            </a:pPr>
-            <a:r>
-              <a:rPr lang="en-US" sz="1600" b="1" dirty="0">
-                <a:solidFill>
-                  <a:srgbClr val="141A22"/>
-                </a:solidFill>
-                <a:latin typeface="Arial" pitchFamily="34" charset="0"/>
-                <a:ea typeface="Arial" pitchFamily="34" charset="-122"/>
-                <a:cs typeface="Arial" pitchFamily="34" charset="-120"/>
-              </a:rPr>
-              <a:t>Роботы</a:t>
-            </a:r>
-            <a:endParaRPr lang="en-US" sz="1600" dirty="0"/>
-          </a:p>
-        </p:txBody>
-      </p:sp>
-      <p:sp>
-        <p:nvSpPr>
-          <p:cNvPr id="9" name="Text 7"/>
-          <p:cNvSpPr txBox="1"/>
-          <p:nvPr/>
-        </p:nvSpPr>
-        <p:spPr>
-          <a:xfrm>
-            <a:off x="822960" y="3108960"/>
-            <a:ext cx="2052828" cy="1463040"/>
-          </a:xfrm>
-          <a:prstGeom prst="rect">
-            <a:avLst/>
-          </a:prstGeom>
-          <a:noFill/>
-          <a:ln/>
-        </p:spPr>
-        <p:txBody>
-          <a:bodyPr wrap="square" lIns="0" tIns="0" rIns="0" bIns="0" rtlCol="0" anchor="t"/>
-          <a:lstStyle/>
-          <a:p>
-            <a:pPr indent="0" marL="0">
-              <a:buNone/>
-            </a:pPr>
-            <a:r>
-              <a:rPr lang="en-US" sz="1250" dirty="0">
-                <a:solidFill>
-                  <a:srgbClr val="5C6067"/>
-                </a:solidFill>
-                <a:latin typeface="Arial" pitchFamily="34" charset="0"/>
-                <a:ea typeface="Arial" pitchFamily="34" charset="-122"/>
-                <a:cs typeface="Arial" pitchFamily="34" charset="-120"/>
-              </a:rPr>
-              <a:t>Роботы-инспекторы на подстанциях, которые мы спроектировали. Китайская сетевая компания State Grid покупает 8500 роботов в год; поставщик — DEEP Robotics. Годы 3–5.</a:t>
-            </a:r>
-            <a:endParaRPr lang="en-US" sz="1250" dirty="0"/>
-          </a:p>
-        </p:txBody>
-      </p:sp>
-      <p:sp>
-        <p:nvSpPr>
-          <p:cNvPr id="10" name="Shape 8"/>
-          <p:cNvSpPr/>
-          <p:nvPr/>
-        </p:nvSpPr>
-        <p:spPr>
-          <a:xfrm>
-            <a:off x="3378708" y="2103120"/>
-            <a:ext cx="2601468" cy="2651760"/>
-          </a:xfrm>
-          <a:prstGeom prst="roundRect">
-            <a:avLst>
-              <a:gd name="adj" fmla="val 6327"/>
-            </a:avLst>
-          </a:prstGeom>
-          <a:solidFill>
-            <a:srgbClr val="F7F7F7"/>
-          </a:solidFill>
-          <a:ln w="12700">
-            <a:solidFill>
-              <a:srgbClr val="F7F7F7"/>
-            </a:solidFill>
-            <a:prstDash val="solid"/>
-          </a:ln>
-        </p:spPr>
-      </p:sp>
-      <p:sp>
-        <p:nvSpPr>
-          <p:cNvPr id="11" name="Text 9"/>
-          <p:cNvSpPr txBox="1"/>
-          <p:nvPr/>
-        </p:nvSpPr>
-        <p:spPr>
-          <a:xfrm>
-            <a:off x="3653028" y="2331720"/>
-            <a:ext cx="2052828" cy="274320"/>
-          </a:xfrm>
-          <a:prstGeom prst="rect">
-            <a:avLst/>
-          </a:prstGeom>
-          <a:noFill/>
-          <a:ln/>
-        </p:spPr>
-        <p:txBody>
-          <a:bodyPr wrap="square" lIns="0" tIns="0" rIns="0" bIns="0" rtlCol="0" anchor="ctr"/>
-          <a:lstStyle/>
-          <a:p>
-            <a:pPr indent="0" marL="0">
-              <a:buNone/>
-            </a:pPr>
-            <a:r>
-              <a:rPr lang="en-US" sz="950" spc="200" kern="0" dirty="0">
-                <a:solidFill>
-                  <a:srgbClr val="0460F5"/>
-                </a:solidFill>
-                <a:latin typeface="Courier New" pitchFamily="34" charset="0"/>
-                <a:ea typeface="Courier New" pitchFamily="34" charset="-122"/>
-                <a:cs typeface="Courier New" pitchFamily="34" charset="-120"/>
-              </a:rPr>
-              <a:t>ОПЦИОН 2</a:t>
-            </a:r>
-            <a:endParaRPr lang="en-US" sz="950" dirty="0"/>
-          </a:p>
-        </p:txBody>
-      </p:sp>
-      <p:sp>
-        <p:nvSpPr>
-          <p:cNvPr id="12" name="Text 10"/>
-          <p:cNvSpPr txBox="1"/>
-          <p:nvPr/>
-        </p:nvSpPr>
-        <p:spPr>
-          <a:xfrm>
-            <a:off x="3653028" y="2651760"/>
-            <a:ext cx="2052828" cy="411480"/>
-          </a:xfrm>
-          <a:prstGeom prst="rect">
-            <a:avLst/>
-          </a:prstGeom>
-          <a:noFill/>
-          <a:ln/>
-        </p:spPr>
-        <p:txBody>
-          <a:bodyPr wrap="square" lIns="0" tIns="0" rIns="0" bIns="0" rtlCol="0" anchor="ctr"/>
-          <a:lstStyle/>
-          <a:p>
-            <a:pPr indent="0" marL="0">
-              <a:buNone/>
-            </a:pPr>
-            <a:r>
-              <a:rPr lang="en-US" sz="1600" b="1" dirty="0">
-                <a:solidFill>
-                  <a:srgbClr val="141A22"/>
-                </a:solidFill>
-                <a:latin typeface="Arial" pitchFamily="34" charset="0"/>
-                <a:ea typeface="Arial" pitchFamily="34" charset="-122"/>
-                <a:cs typeface="Arial" pitchFamily="34" charset="-120"/>
-              </a:rPr>
-              <a:t>Стройка</a:t>
-            </a:r>
-            <a:endParaRPr lang="en-US" sz="1600" dirty="0"/>
-          </a:p>
-        </p:txBody>
-      </p:sp>
-      <p:sp>
-        <p:nvSpPr>
-          <p:cNvPr id="13" name="Text 11"/>
-          <p:cNvSpPr txBox="1"/>
-          <p:nvPr/>
-        </p:nvSpPr>
-        <p:spPr>
-          <a:xfrm>
-            <a:off x="3653028" y="3108960"/>
-            <a:ext cx="2052828" cy="1463040"/>
-          </a:xfrm>
-          <a:prstGeom prst="rect">
-            <a:avLst/>
-          </a:prstGeom>
-          <a:noFill/>
-          <a:ln/>
-        </p:spPr>
-        <p:txBody>
-          <a:bodyPr wrap="square" lIns="0" tIns="0" rIns="0" bIns="0" rtlCol="0" anchor="t"/>
-          <a:lstStyle/>
-          <a:p>
-            <a:pPr indent="0" marL="0">
-              <a:buNone/>
-            </a:pPr>
-            <a:r>
-              <a:rPr lang="en-US" sz="1250" dirty="0">
-                <a:solidFill>
-                  <a:srgbClr val="5C6067"/>
-                </a:solidFill>
-                <a:latin typeface="Arial" pitchFamily="34" charset="0"/>
-                <a:ea typeface="Arial" pitchFamily="34" charset="-122"/>
-                <a:cs typeface="Arial" pitchFamily="34" charset="-120"/>
-              </a:rPr>
-              <a:t>Инженер, который проектировал, сопровождает стройку и приёмку: ещё 15–35% к гонорару с того же проекта.</a:t>
-            </a:r>
-            <a:endParaRPr lang="en-US" sz="1250" dirty="0"/>
-          </a:p>
-        </p:txBody>
-      </p:sp>
-      <p:sp>
-        <p:nvSpPr>
-          <p:cNvPr id="14" name="Shape 12"/>
-          <p:cNvSpPr/>
-          <p:nvPr/>
-        </p:nvSpPr>
-        <p:spPr>
-          <a:xfrm>
-            <a:off x="6208776" y="2103120"/>
-            <a:ext cx="2601468" cy="2651760"/>
-          </a:xfrm>
-          <a:prstGeom prst="roundRect">
-            <a:avLst>
-              <a:gd name="adj" fmla="val 6327"/>
-            </a:avLst>
-          </a:prstGeom>
-          <a:solidFill>
-            <a:srgbClr val="F7F7F7"/>
-          </a:solidFill>
-          <a:ln w="12700">
-            <a:solidFill>
-              <a:srgbClr val="F7F7F7"/>
-            </a:solidFill>
-            <a:prstDash val="solid"/>
-          </a:ln>
-        </p:spPr>
-      </p:sp>
-      <p:sp>
-        <p:nvSpPr>
-          <p:cNvPr id="15" name="Text 13"/>
-          <p:cNvSpPr txBox="1"/>
-          <p:nvPr/>
-        </p:nvSpPr>
-        <p:spPr>
-          <a:xfrm>
-            <a:off x="6483096" y="2331720"/>
-            <a:ext cx="2052828" cy="274320"/>
-          </a:xfrm>
-          <a:prstGeom prst="rect">
-            <a:avLst/>
-          </a:prstGeom>
-          <a:noFill/>
-          <a:ln/>
-        </p:spPr>
-        <p:txBody>
-          <a:bodyPr wrap="square" lIns="0" tIns="0" rIns="0" bIns="0" rtlCol="0" anchor="ctr"/>
-          <a:lstStyle/>
-          <a:p>
-            <a:pPr indent="0" marL="0">
-              <a:buNone/>
-            </a:pPr>
-            <a:r>
-              <a:rPr lang="en-US" sz="950" spc="200" kern="0" dirty="0">
-                <a:solidFill>
-                  <a:srgbClr val="0460F5"/>
-                </a:solidFill>
-                <a:latin typeface="Courier New" pitchFamily="34" charset="0"/>
-                <a:ea typeface="Courier New" pitchFamily="34" charset="-122"/>
-                <a:cs typeface="Courier New" pitchFamily="34" charset="-120"/>
-              </a:rPr>
-              <a:t>ОПЦИОН 3</a:t>
-            </a:r>
-            <a:endParaRPr lang="en-US" sz="950" dirty="0"/>
-          </a:p>
-        </p:txBody>
-      </p:sp>
-      <p:sp>
-        <p:nvSpPr>
-          <p:cNvPr id="16" name="Text 14"/>
-          <p:cNvSpPr txBox="1"/>
-          <p:nvPr/>
-        </p:nvSpPr>
-        <p:spPr>
-          <a:xfrm>
-            <a:off x="6483096" y="2651760"/>
-            <a:ext cx="2052828" cy="411480"/>
-          </a:xfrm>
-          <a:prstGeom prst="rect">
-            <a:avLst/>
-          </a:prstGeom>
-          <a:noFill/>
-          <a:ln/>
-        </p:spPr>
-        <p:txBody>
-          <a:bodyPr wrap="square" lIns="0" tIns="0" rIns="0" bIns="0" rtlCol="0" anchor="ctr"/>
-          <a:lstStyle/>
-          <a:p>
-            <a:pPr indent="0" marL="0">
-              <a:buNone/>
-            </a:pPr>
-            <a:r>
-              <a:rPr lang="en-US" sz="1600" b="1" dirty="0">
-                <a:solidFill>
-                  <a:srgbClr val="141A22"/>
-                </a:solidFill>
-                <a:latin typeface="Arial" pitchFamily="34" charset="0"/>
-                <a:ea typeface="Arial" pitchFamily="34" charset="-122"/>
-                <a:cs typeface="Arial" pitchFamily="34" charset="-120"/>
-              </a:rPr>
-              <a:t>Обучение</a:t>
-            </a:r>
-            <a:endParaRPr lang="en-US" sz="1600" dirty="0"/>
-          </a:p>
-        </p:txBody>
-      </p:sp>
-      <p:sp>
-        <p:nvSpPr>
-          <p:cNvPr id="17" name="Text 15"/>
-          <p:cNvSpPr txBox="1"/>
-          <p:nvPr/>
-        </p:nvSpPr>
-        <p:spPr>
-          <a:xfrm>
-            <a:off x="6483096" y="3108960"/>
-            <a:ext cx="2052828" cy="1463040"/>
-          </a:xfrm>
-          <a:prstGeom prst="rect">
-            <a:avLst/>
-          </a:prstGeom>
-          <a:noFill/>
-          <a:ln/>
-        </p:spPr>
-        <p:txBody>
-          <a:bodyPr wrap="square" lIns="0" tIns="0" rIns="0" bIns="0" rtlCol="0" anchor="t"/>
-          <a:lstStyle/>
-          <a:p>
-            <a:pPr indent="0" marL="0">
-              <a:buNone/>
-            </a:pPr>
-            <a:r>
-              <a:rPr lang="en-US" sz="1250" dirty="0">
-                <a:solidFill>
-                  <a:srgbClr val="5C6067"/>
-                </a:solidFill>
-                <a:latin typeface="Arial" pitchFamily="34" charset="0"/>
-                <a:ea typeface="Arial" pitchFamily="34" charset="-122"/>
-                <a:cs typeface="Arial" pitchFamily="34" charset="-120"/>
-              </a:rPr>
-              <a:t>Обучение инженеров под квоты: Саудовская Аравия требует 30% граждан на инженерных позициях. Наш ИИ быстро доводит выпускника до рабочего инженера.</a:t>
-            </a:r>
-            <a:endParaRPr lang="en-US" sz="1250" dirty="0"/>
-          </a:p>
-        </p:txBody>
-      </p:sp>
-      <p:sp>
-        <p:nvSpPr>
-          <p:cNvPr id="18" name="Shape 16"/>
-          <p:cNvSpPr/>
-          <p:nvPr/>
-        </p:nvSpPr>
-        <p:spPr>
-          <a:xfrm>
-            <a:off x="9038844" y="2103120"/>
-            <a:ext cx="2601468" cy="2651760"/>
-          </a:xfrm>
-          <a:prstGeom prst="roundRect">
-            <a:avLst>
-              <a:gd name="adj" fmla="val 6327"/>
-            </a:avLst>
-          </a:prstGeom>
-          <a:solidFill>
-            <a:srgbClr val="F7F7F7"/>
-          </a:solidFill>
-          <a:ln w="12700">
-            <a:solidFill>
-              <a:srgbClr val="F7F7F7"/>
-            </a:solidFill>
-            <a:prstDash val="solid"/>
-          </a:ln>
-        </p:spPr>
-      </p:sp>
-      <p:sp>
-        <p:nvSpPr>
-          <p:cNvPr id="19" name="Text 17"/>
-          <p:cNvSpPr txBox="1"/>
-          <p:nvPr/>
-        </p:nvSpPr>
-        <p:spPr>
-          <a:xfrm>
-            <a:off x="9313164" y="2331720"/>
-            <a:ext cx="2052828" cy="274320"/>
-          </a:xfrm>
-          <a:prstGeom prst="rect">
-            <a:avLst/>
-          </a:prstGeom>
-          <a:noFill/>
-          <a:ln/>
-        </p:spPr>
-        <p:txBody>
-          <a:bodyPr wrap="square" lIns="0" tIns="0" rIns="0" bIns="0" rtlCol="0" anchor="ctr"/>
-          <a:lstStyle/>
-          <a:p>
-            <a:pPr indent="0" marL="0">
-              <a:buNone/>
-            </a:pPr>
-            <a:r>
-              <a:rPr lang="en-US" sz="950" spc="200" kern="0" dirty="0">
-                <a:solidFill>
-                  <a:srgbClr val="0460F5"/>
-                </a:solidFill>
-                <a:latin typeface="Courier New" pitchFamily="34" charset="0"/>
-                <a:ea typeface="Courier New" pitchFamily="34" charset="-122"/>
-                <a:cs typeface="Courier New" pitchFamily="34" charset="-120"/>
-              </a:rPr>
-              <a:t>ОПЦИОН 4</a:t>
-            </a:r>
-            <a:endParaRPr lang="en-US" sz="950" dirty="0"/>
-          </a:p>
-        </p:txBody>
-      </p:sp>
-      <p:sp>
-        <p:nvSpPr>
-          <p:cNvPr id="20" name="Text 18"/>
-          <p:cNvSpPr txBox="1"/>
-          <p:nvPr/>
-        </p:nvSpPr>
-        <p:spPr>
-          <a:xfrm>
-            <a:off x="9313164" y="2651760"/>
-            <a:ext cx="2052828" cy="411480"/>
-          </a:xfrm>
-          <a:prstGeom prst="rect">
-            <a:avLst/>
-          </a:prstGeom>
-          <a:noFill/>
-          <a:ln/>
-        </p:spPr>
-        <p:txBody>
-          <a:bodyPr wrap="square" lIns="0" tIns="0" rIns="0" bIns="0" rtlCol="0" anchor="ctr"/>
-          <a:lstStyle/>
-          <a:p>
-            <a:pPr indent="0" marL="0">
-              <a:buNone/>
-            </a:pPr>
-            <a:r>
-              <a:rPr lang="en-US" sz="1600" b="1" dirty="0">
-                <a:solidFill>
-                  <a:srgbClr val="141A22"/>
-                </a:solidFill>
-                <a:latin typeface="Arial" pitchFamily="34" charset="0"/>
-                <a:ea typeface="Arial" pitchFamily="34" charset="-122"/>
-                <a:cs typeface="Arial" pitchFamily="34" charset="-120"/>
-              </a:rPr>
-              <a:t>Данные</a:t>
-            </a:r>
-            <a:endParaRPr lang="en-US" sz="1600" dirty="0"/>
-          </a:p>
-        </p:txBody>
-      </p:sp>
-      <p:sp>
-        <p:nvSpPr>
-          <p:cNvPr id="21" name="Text 19"/>
-          <p:cNvSpPr txBox="1"/>
-          <p:nvPr/>
-        </p:nvSpPr>
-        <p:spPr>
-          <a:xfrm>
-            <a:off x="9313164" y="3108960"/>
-            <a:ext cx="2052828" cy="1463040"/>
-          </a:xfrm>
-          <a:prstGeom prst="rect">
-            <a:avLst/>
-          </a:prstGeom>
-          <a:noFill/>
-          <a:ln/>
-        </p:spPr>
-        <p:txBody>
-          <a:bodyPr wrap="square" lIns="0" tIns="0" rIns="0" bIns="0" rtlCol="0" anchor="t"/>
-          <a:lstStyle/>
-          <a:p>
-            <a:pPr indent="0" marL="0">
-              <a:buNone/>
-            </a:pPr>
-            <a:r>
-              <a:rPr lang="en-US" sz="1250" dirty="0">
-                <a:solidFill>
-                  <a:srgbClr val="5C6067"/>
-                </a:solidFill>
-                <a:latin typeface="Arial" pitchFamily="34" charset="0"/>
-                <a:ea typeface="Arial" pitchFamily="34" charset="-122"/>
-                <a:cs typeface="Arial" pitchFamily="34" charset="-120"/>
-              </a:rPr>
-              <a:t>База данных о подключениях: сотни проектов в год — данные, которых нет ни у кого. Enverus купил Pearl Street именно за такие данные.</a:t>
-            </a:r>
-            <a:endParaRPr lang="en-US" sz="1250" dirty="0"/>
-          </a:p>
-        </p:txBody>
-      </p:sp>
-      <p:sp>
-        <p:nvSpPr>
-          <p:cNvPr id="22" name="Text 20"/>
-          <p:cNvSpPr txBox="1"/>
-          <p:nvPr/>
-        </p:nvSpPr>
-        <p:spPr>
-          <a:xfrm>
-            <a:off x="548640" y="5029200"/>
-            <a:ext cx="9445752" cy="457200"/>
-          </a:xfrm>
-          <a:prstGeom prst="rect">
-            <a:avLst/>
-          </a:prstGeom>
-          <a:noFill/>
-          <a:ln/>
-        </p:spPr>
-        <p:txBody>
-          <a:bodyPr wrap="square" lIns="0" tIns="0" rIns="0" bIns="0" rtlCol="0" anchor="t"/>
-          <a:lstStyle/>
-          <a:p>
-            <a:pPr indent="0" marL="0">
-              <a:buNone/>
-            </a:pPr>
-            <a:r>
-              <a:rPr lang="en-US" sz="1000" dirty="0">
-                <a:solidFill>
-                  <a:srgbClr val="8A8E94"/>
-                </a:solidFill>
-                <a:latin typeface="Arial" pitchFamily="34" charset="0"/>
-                <a:ea typeface="Arial" pitchFamily="34" charset="-122"/>
-                <a:cs typeface="Arial" pitchFamily="34" charset="-120"/>
-              </a:rPr>
-              <a:t>В выручку раунда заложено только проектирование. Остальное вводим по одному и только после измерения.</a:t>
-            </a:r>
-            <a:endParaRPr lang="en-US" sz="1000" dirty="0"/>
-          </a:p>
-        </p:txBody>
-      </p:sp>
-    </p:spTree>
-  </p:cSld>
-  <p:clrMapOvr>
-    <a:masterClrMapping/>
-  </p:clrMapOvr>
-</p:sld>
-</file>
-
-<file path=ppt/slides/slide15.xml><?xml version="1.0" encoding="utf-8"?>
-<p:sld xmlns:a="http://schemas.openxmlformats.org/drawingml/2006/main" xmlns:r="http://schemas.openxmlformats.org/officeDocument/2006/relationships" xmlns:p="http://schemas.openxmlformats.org/presentationml/2006/main">
-  <p:cSld name="Slide 15">
-    <p:bg>
-      <p:bgPr>
-        <a:solidFill>
-          <a:srgbClr val="FFFFFF"/>
-        </a:solidFill>
-      </p:bgPr>
-    </p:bg>
-    <p:spTree>
-      <p:nvGrpSpPr>
-        <p:cNvPr id="1" name=""/>
-        <p:cNvGrpSpPr/>
-        <p:nvPr/>
-      </p:nvGrpSpPr>
-      <p:grpSpPr>
-        <a:xfrm>
-          <a:off x="0" y="0"/>
-          <a:ext cx="0" cy="0"/>
-          <a:chOff x="0" y="0"/>
-          <a:chExt cx="0" cy="0"/>
-        </a:xfrm>
-      </p:grpSpPr>
-      <p:sp>
-        <p:nvSpPr>
-          <p:cNvPr id="2" name="Text 0"/>
-          <p:cNvSpPr txBox="1"/>
-          <p:nvPr/>
-        </p:nvSpPr>
-        <p:spPr>
-          <a:xfrm>
-            <a:off x="9354312" y="320040"/>
-            <a:ext cx="2286000" cy="274320"/>
-          </a:xfrm>
-          <a:prstGeom prst="rect">
-            <a:avLst/>
-          </a:prstGeom>
-          <a:noFill/>
-          <a:ln/>
-        </p:spPr>
-        <p:txBody>
-          <a:bodyPr wrap="square" lIns="0" tIns="0" rIns="0" bIns="0" rtlCol="0" anchor="ctr"/>
-          <a:lstStyle/>
-          <a:p>
-            <a:pPr algn="r" indent="0" marL="0">
-              <a:buNone/>
-            </a:pPr>
-            <a:r>
-              <a:rPr lang="en-US" sz="900" spc="300" kern="0" dirty="0">
-                <a:solidFill>
-                  <a:srgbClr val="8A8E94"/>
-                </a:solidFill>
-                <a:latin typeface="Courier New" pitchFamily="34" charset="0"/>
-                <a:ea typeface="Courier New" pitchFamily="34" charset="-122"/>
-                <a:cs typeface="Courier New" pitchFamily="34" charset="-120"/>
-              </a:rPr>
-              <a:t>ОКЕАН ТЕХ</a:t>
-            </a:r>
-            <a:endParaRPr lang="en-US" sz="900" dirty="0"/>
-          </a:p>
-        </p:txBody>
-      </p:sp>
-      <p:sp>
-        <p:nvSpPr>
-          <p:cNvPr id="3" name="Text 1"/>
-          <p:cNvSpPr txBox="1"/>
-          <p:nvPr/>
-        </p:nvSpPr>
-        <p:spPr>
-          <a:xfrm>
-            <a:off x="548640" y="411480"/>
-            <a:ext cx="7315200" cy="274320"/>
-          </a:xfrm>
-          <a:prstGeom prst="rect">
-            <a:avLst/>
-          </a:prstGeom>
-          <a:noFill/>
-          <a:ln/>
-        </p:spPr>
-        <p:txBody>
-          <a:bodyPr wrap="square" lIns="0" tIns="0" rIns="0" bIns="0" rtlCol="0" anchor="ctr"/>
-          <a:lstStyle/>
-          <a:p>
-            <a:pPr indent="0" marL="0">
-              <a:buNone/>
-            </a:pPr>
-            <a:r>
-              <a:rPr lang="en-US" sz="950" spc="300" kern="0" dirty="0">
-                <a:solidFill>
-                  <a:srgbClr val="0460F5"/>
-                </a:solidFill>
-                <a:latin typeface="Courier New" pitchFamily="34" charset="0"/>
-                <a:ea typeface="Courier New" pitchFamily="34" charset="-122"/>
-                <a:cs typeface="Courier New" pitchFamily="34" charset="-120"/>
-              </a:rPr>
-              <a:t>ПРИЛОЖЕНИЕ · ИСТОЧНИКИ</a:t>
-            </a:r>
-            <a:endParaRPr lang="en-US" sz="950" dirty="0"/>
-          </a:p>
-        </p:txBody>
-      </p:sp>
-      <p:sp>
-        <p:nvSpPr>
-          <p:cNvPr id="4" name="Text 2"/>
-          <p:cNvSpPr txBox="1"/>
-          <p:nvPr/>
-        </p:nvSpPr>
-        <p:spPr>
-          <a:xfrm>
-            <a:off x="548640" y="731520"/>
-            <a:ext cx="11091672" cy="1188720"/>
-          </a:xfrm>
-          <a:prstGeom prst="rect">
-            <a:avLst/>
-          </a:prstGeom>
-          <a:noFill/>
-          <a:ln/>
-        </p:spPr>
-        <p:txBody>
-          <a:bodyPr wrap="square" lIns="0" tIns="0" rIns="0" bIns="0" rtlCol="0" anchor="t"/>
-          <a:lstStyle/>
-          <a:p>
-            <a:pPr indent="0" marL="0">
-              <a:buNone/>
-            </a:pPr>
-            <a:r>
-              <a:rPr lang="en-US" sz="2800" b="1" dirty="0">
-                <a:solidFill>
-                  <a:srgbClr val="141A22"/>
-                </a:solidFill>
-                <a:latin typeface="Arial" pitchFamily="34" charset="0"/>
-                <a:ea typeface="Arial" pitchFamily="34" charset="-122"/>
-                <a:cs typeface="Arial" pitchFamily="34" charset="-120"/>
-              </a:rPr>
-              <a:t>Откуда цифры</a:t>
-            </a:r>
-            <a:endParaRPr lang="en-US" sz="2800" dirty="0"/>
-          </a:p>
-        </p:txBody>
-      </p:sp>
-      <p:sp>
-        <p:nvSpPr>
-          <p:cNvPr id="5" name="Text 3"/>
-          <p:cNvSpPr txBox="1"/>
-          <p:nvPr/>
-        </p:nvSpPr>
-        <p:spPr>
-          <a:xfrm>
-            <a:off x="10268712" y="6400800"/>
-            <a:ext cx="1371600" cy="274320"/>
-          </a:xfrm>
-          <a:prstGeom prst="rect">
-            <a:avLst/>
-          </a:prstGeom>
-          <a:noFill/>
-          <a:ln/>
-        </p:spPr>
-        <p:txBody>
-          <a:bodyPr wrap="square" lIns="0" tIns="0" rIns="0" bIns="0" rtlCol="0" anchor="ctr"/>
-          <a:lstStyle/>
-          <a:p>
-            <a:pPr algn="r" indent="0" marL="0">
-              <a:buNone/>
-            </a:pPr>
-            <a:r>
-              <a:rPr lang="en-US" sz="900" dirty="0">
-                <a:solidFill>
-                  <a:srgbClr val="8A8E94"/>
-                </a:solidFill>
-                <a:latin typeface="Courier New" pitchFamily="34" charset="0"/>
-                <a:ea typeface="Courier New" pitchFamily="34" charset="-122"/>
-                <a:cs typeface="Courier New" pitchFamily="34" charset="-120"/>
-              </a:rPr>
-              <a:t>15 / 15</a:t>
+              <a:t>13 / 13</a:t>
             </a:r>
             <a:endParaRPr lang="en-US" sz="900" dirty="0"/>
           </a:p>
@@ -6740,7 +5028,7 @@
                 <a:ea typeface="Courier New" pitchFamily="34" charset="-122"/>
                 <a:cs typeface="Courier New" pitchFamily="34" charset="-120"/>
               </a:rPr>
-              <a:t>2 / 15</a:t>
+              <a:t>2 / 13</a:t>
             </a:r>
             <a:endParaRPr lang="en-US" sz="900" dirty="0"/>
           </a:p>
@@ -6754,12 +5042,12 @@
         </p:nvSpPr>
         <p:spPr>
           <a:xfrm>
-            <a:off x="548640" y="2103120"/>
-            <a:ext cx="5431536" cy="2011680"/>
+            <a:off x="548640" y="2011680"/>
+            <a:ext cx="5431536" cy="1737360"/>
           </a:xfrm>
           <a:prstGeom prst="roundRect">
             <a:avLst>
-              <a:gd name="adj" fmla="val 8182"/>
+              <a:gd name="adj" fmla="val 9474"/>
             </a:avLst>
           </a:prstGeom>
           <a:solidFill>
@@ -6781,7 +5069,7 @@
         </p:nvSpPr>
         <p:spPr>
           <a:xfrm>
-            <a:off x="868680" y="2377440"/>
+            <a:off x="868680" y="2286000"/>
             <a:ext cx="4791456" cy="822960"/>
           </a:xfrm>
           <a:prstGeom prst="rect">
@@ -6820,8 +5108,8 @@
         </p:nvSpPr>
         <p:spPr>
           <a:xfrm>
-            <a:off x="868680" y="3246120"/>
-            <a:ext cx="4791456" cy="685800"/>
+            <a:off x="868680" y="3154680"/>
+            <a:ext cx="4791456" cy="411480"/>
           </a:xfrm>
           <a:prstGeom prst="rect">
             <a:avLst/>
@@ -6859,12 +5147,12 @@
         </p:nvSpPr>
         <p:spPr>
           <a:xfrm>
-            <a:off x="6208776" y="2103120"/>
-            <a:ext cx="5431536" cy="2011680"/>
+            <a:off x="6208776" y="2011680"/>
+            <a:ext cx="5431536" cy="1737360"/>
           </a:xfrm>
           <a:prstGeom prst="roundRect">
             <a:avLst>
-              <a:gd name="adj" fmla="val 8182"/>
+              <a:gd name="adj" fmla="val 9474"/>
             </a:avLst>
           </a:prstGeom>
           <a:solidFill>
@@ -6886,7 +5174,7 @@
         </p:nvSpPr>
         <p:spPr>
           <a:xfrm>
-            <a:off x="6528816" y="2377440"/>
+            <a:off x="6528816" y="2286000"/>
             <a:ext cx="4791456" cy="822960"/>
           </a:xfrm>
           <a:prstGeom prst="rect">
@@ -6925,8 +5213,8 @@
         </p:nvSpPr>
         <p:spPr>
           <a:xfrm>
-            <a:off x="6528816" y="3246120"/>
-            <a:ext cx="4791456" cy="685800"/>
+            <a:off x="6528816" y="3154680"/>
+            <a:ext cx="4791456" cy="411480"/>
           </a:xfrm>
           <a:prstGeom prst="rect">
             <a:avLst/>
@@ -6964,8 +5252,8 @@
         </p:nvSpPr>
         <p:spPr>
           <a:xfrm>
-            <a:off x="548640" y="4343400"/>
-            <a:ext cx="10725912" cy="1188720"/>
+            <a:off x="548640" y="3931920"/>
+            <a:ext cx="10725912" cy="914400"/>
           </a:xfrm>
           <a:prstGeom prst="rect">
             <a:avLst/>
@@ -6984,7 +5272,7 @@
               <a:buNone/>
             </a:pPr>
             <a:r>
-              <a:rPr lang="en-US" sz="1500" dirty="0">
+              <a:rPr lang="en-US" sz="1350" dirty="0">
                 <a:solidFill>
                   <a:srgbClr val="141A22"/>
                 </a:solidFill>
@@ -6994,7 +5282,7 @@
               </a:rPr>
               <a:t>Пять лет — это очередь, проверки сети, оборудование. Мы не сокращаем очередь целиком. Мы снимаем один тормоз внутри неё: проект с подписью инженера, без которого ничего не строится, а инженеров на всех не хватает — ни в США, ни в Заливе, ни в Индии.</a:t>
             </a:r>
-            <a:endParaRPr lang="en-US" sz="1500" dirty="0"/>
+            <a:endParaRPr lang="en-US" sz="1350" dirty="0"/>
           </a:p>
         </p:txBody>
       </p:sp>
@@ -7006,8 +5294,47 @@
         </p:nvSpPr>
         <p:spPr>
           <a:xfrm>
-            <a:off x="548640" y="5486400"/>
-            <a:ext cx="10725912" cy="457200"/>
+            <a:off x="548640" y="4983480"/>
+            <a:ext cx="7315200" cy="228600"/>
+          </a:xfrm>
+          <a:prstGeom prst="rect">
+            <a:avLst/>
+          </a:prstGeom>
+          <a:noFill/>
+          <a:ln/>
+        </p:spPr>
+        <p:txBody>
+          <a:bodyPr wrap="square" lIns="0" tIns="0" rIns="0" bIns="0" rtlCol="0" anchor="ctr"/>
+          <a:lstStyle/>
+          <a:p>
+            <a:pPr indent="0" marL="0">
+              <a:buNone/>
+            </a:pPr>
+            <a:r>
+              <a:rPr lang="en-US" sz="900" spc="200" kern="0" dirty="0">
+                <a:solidFill>
+                  <a:srgbClr val="8A8E94"/>
+                </a:solidFill>
+                <a:latin typeface="Courier New" pitchFamily="34" charset="0"/>
+                <a:ea typeface="Courier New" pitchFamily="34" charset="-122"/>
+                <a:cs typeface="Courier New" pitchFamily="34" charset="-120"/>
+              </a:rPr>
+              <a:t>ТРИ СЛОВА, КОТОРЫЕ ДАЛЬШЕ ВСТРЕТЯТСЯ</a:t>
+            </a:r>
+            <a:endParaRPr lang="en-US" sz="900" dirty="0"/>
+          </a:p>
+        </p:txBody>
+      </p:sp>
+      <p:sp>
+        <p:nvSpPr>
+          <p:cNvPr id="14" name="Text 12"/>
+          <p:cNvSpPr txBox="1"/>
+          <p:nvPr/>
+        </p:nvSpPr>
+        <p:spPr>
+          <a:xfrm>
+            <a:off x="548640" y="5257800"/>
+            <a:ext cx="3544824" cy="822960"/>
           </a:xfrm>
           <a:prstGeom prst="rect">
             <a:avLst/>
@@ -7023,17 +5350,137 @@
               <a:buNone/>
             </a:pPr>
             <a:r>
-              <a:rPr lang="en-US" sz="1500" i="1" dirty="0">
-                <a:solidFill>
-                  <a:srgbClr val="0460F5"/>
-                </a:solidFill>
-                <a:latin typeface="Arial" pitchFamily="34" charset="0"/>
-                <a:ea typeface="Arial" pitchFamily="34" charset="-122"/>
-                <a:cs typeface="Arial" pitchFamily="34" charset="-120"/>
-              </a:rPr>
-              <a:t>Мир строит искусственный интеллект — и упирается в розетку.</a:t>
-            </a:r>
-            <a:endParaRPr lang="en-US" sz="1500" dirty="0"/>
+              <a:rPr lang="en-US" sz="1100" b="1" dirty="0">
+                <a:solidFill>
+                  <a:srgbClr val="141A22"/>
+                </a:solidFill>
+                <a:latin typeface="Arial" pitchFamily="34" charset="0"/>
+                <a:ea typeface="Arial" pitchFamily="34" charset="-122"/>
+                <a:cs typeface="Arial" pitchFamily="34" charset="-120"/>
+              </a:rPr>
+              <a:t>Подключение к сети — </a:t>
+            </a:r>
+            <a:pPr indent="0" marL="0">
+              <a:buNone/>
+            </a:pPr>
+            <a:r>
+              <a:rPr lang="en-US" sz="1100" dirty="0">
+                <a:solidFill>
+                  <a:srgbClr val="5C6067"/>
+                </a:solidFill>
+                <a:latin typeface="Arial" pitchFamily="34" charset="0"/>
+                <a:ea typeface="Arial" pitchFamily="34" charset="-122"/>
+                <a:cs typeface="Arial" pitchFamily="34" charset="-120"/>
+              </a:rPr>
+              <a:t>линия от объекта до общей сети; пока её нет, объект стоит.</a:t>
+            </a:r>
+            <a:endParaRPr lang="en-US" sz="1100" dirty="0"/>
+          </a:p>
+        </p:txBody>
+      </p:sp>
+      <p:sp>
+        <p:nvSpPr>
+          <p:cNvPr id="15" name="Text 13"/>
+          <p:cNvSpPr txBox="1"/>
+          <p:nvPr/>
+        </p:nvSpPr>
+        <p:spPr>
+          <a:xfrm>
+            <a:off x="4322064" y="5257800"/>
+            <a:ext cx="3544824" cy="822960"/>
+          </a:xfrm>
+          <a:prstGeom prst="rect">
+            <a:avLst/>
+          </a:prstGeom>
+          <a:noFill/>
+          <a:ln/>
+        </p:spPr>
+        <p:txBody>
+          <a:bodyPr wrap="square" lIns="0" tIns="0" rIns="0" bIns="0" rtlCol="0" anchor="t"/>
+          <a:lstStyle/>
+          <a:p>
+            <a:pPr indent="0" marL="0">
+              <a:buNone/>
+            </a:pPr>
+            <a:r>
+              <a:rPr lang="en-US" sz="1100" b="1" dirty="0">
+                <a:solidFill>
+                  <a:srgbClr val="141A22"/>
+                </a:solidFill>
+                <a:latin typeface="Arial" pitchFamily="34" charset="0"/>
+                <a:ea typeface="Arial" pitchFamily="34" charset="-122"/>
+                <a:cs typeface="Arial" pitchFamily="34" charset="-120"/>
+              </a:rPr>
+              <a:t>Подстанция — </a:t>
+            </a:r>
+            <a:pPr indent="0" marL="0">
+              <a:buNone/>
+            </a:pPr>
+            <a:r>
+              <a:rPr lang="en-US" sz="1100" dirty="0">
+                <a:solidFill>
+                  <a:srgbClr val="5C6067"/>
+                </a:solidFill>
+                <a:latin typeface="Arial" pitchFamily="34" charset="0"/>
+                <a:ea typeface="Arial" pitchFamily="34" charset="-122"/>
+                <a:cs typeface="Arial" pitchFamily="34" charset="-120"/>
+              </a:rPr>
+              <a:t>узел, через который объект подключают; каждую надо спроектировать.</a:t>
+            </a:r>
+            <a:endParaRPr lang="en-US" sz="1100" dirty="0"/>
+          </a:p>
+        </p:txBody>
+      </p:sp>
+      <p:sp>
+        <p:nvSpPr>
+          <p:cNvPr id="16" name="Text 14"/>
+          <p:cNvSpPr txBox="1"/>
+          <p:nvPr/>
+        </p:nvSpPr>
+        <p:spPr>
+          <a:xfrm>
+            <a:off x="8095488" y="5257800"/>
+            <a:ext cx="3544824" cy="822960"/>
+          </a:xfrm>
+          <a:prstGeom prst="rect">
+            <a:avLst/>
+          </a:prstGeom>
+          <a:noFill/>
+          <a:ln/>
+        </p:spPr>
+        <p:txBody>
+          <a:bodyPr wrap="square" lIns="0" tIns="0" rIns="0" bIns="0" rtlCol="0" anchor="t"/>
+          <a:lstStyle/>
+          <a:p>
+            <a:pPr indent="0" marL="0">
+              <a:buNone/>
+            </a:pPr>
+            <a:r>
+              <a:rPr lang="en-US" sz="1100" b="1" dirty="0">
+                <a:solidFill>
+                  <a:srgbClr val="141A22"/>
+                </a:solidFill>
+                <a:latin typeface="Arial" pitchFamily="34" charset="0"/>
+                <a:ea typeface="Arial" pitchFamily="34" charset="-122"/>
+                <a:cs typeface="Arial" pitchFamily="34" charset="-120"/>
+              </a:rPr>
+              <a:t>Подпись инженера — </a:t>
+            </a:r>
+            <a:pPr indent="0" marL="0">
+              <a:buNone/>
+            </a:pPr>
+            <a:r>
+              <a:rPr lang="en-US" sz="1100" dirty="0">
+                <a:solidFill>
+                  <a:srgbClr val="5C6067"/>
+                </a:solidFill>
+                <a:latin typeface="Arial" pitchFamily="34" charset="0"/>
+                <a:ea typeface="Arial" pitchFamily="34" charset="-122"/>
+                <a:cs typeface="Arial" pitchFamily="34" charset="-120"/>
+              </a:rPr>
+              <a:t>по закону проект подписывает лицензированный инженер; без неё сеть проект не примет.</a:t>
+            </a:r>
+            <a:endParaRPr lang="en-US" sz="1100" dirty="0"/>
           </a:p>
         </p:txBody>
       </p:sp>
@@ -7048,6 +5495,746 @@
 <file path=ppt/slides/slide3.xml><?xml version="1.0" encoding="utf-8"?>
 <p:sld xmlns:a="http://schemas.openxmlformats.org/drawingml/2006/main" xmlns:r="http://schemas.openxmlformats.org/officeDocument/2006/relationships" xmlns:p="http://schemas.openxmlformats.org/presentationml/2006/main">
   <p:cSld name="Slide 3">
+    <p:bg>
+      <p:bgPr>
+        <a:solidFill>
+          <a:srgbClr val="FFFFFF"/>
+        </a:solidFill>
+      </p:bgPr>
+    </p:bg>
+    <p:spTree>
+      <p:nvGrpSpPr>
+        <p:cNvPr id="1" name=""/>
+        <p:cNvGrpSpPr/>
+        <p:nvPr/>
+      </p:nvGrpSpPr>
+      <p:grpSpPr>
+        <a:xfrm>
+          <a:off x="0" y="0"/>
+          <a:ext cx="0" cy="0"/>
+          <a:chOff x="0" y="0"/>
+          <a:chExt cx="0" cy="0"/>
+        </a:xfrm>
+      </p:grpSpPr>
+      <p:sp>
+        <p:nvSpPr>
+          <p:cNvPr id="2" name="Text 0"/>
+          <p:cNvSpPr txBox="1"/>
+          <p:nvPr/>
+        </p:nvSpPr>
+        <p:spPr>
+          <a:xfrm>
+            <a:off x="9354312" y="320040"/>
+            <a:ext cx="2286000" cy="274320"/>
+          </a:xfrm>
+          <a:prstGeom prst="rect">
+            <a:avLst/>
+          </a:prstGeom>
+          <a:noFill/>
+          <a:ln/>
+        </p:spPr>
+        <p:txBody>
+          <a:bodyPr wrap="square" lIns="0" tIns="0" rIns="0" bIns="0" rtlCol="0" anchor="ctr"/>
+          <a:lstStyle/>
+          <a:p>
+            <a:pPr algn="r" indent="0" marL="0">
+              <a:buNone/>
+            </a:pPr>
+            <a:r>
+              <a:rPr lang="en-US" sz="900" spc="300" kern="0" dirty="0">
+                <a:solidFill>
+                  <a:srgbClr val="8A8E94"/>
+                </a:solidFill>
+                <a:latin typeface="Courier New" pitchFamily="34" charset="0"/>
+                <a:ea typeface="Courier New" pitchFamily="34" charset="-122"/>
+                <a:cs typeface="Courier New" pitchFamily="34" charset="-120"/>
+              </a:rPr>
+              <a:t>ОКЕАН ТЕХ</a:t>
+            </a:r>
+            <a:endParaRPr lang="en-US" sz="900" dirty="0"/>
+          </a:p>
+        </p:txBody>
+      </p:sp>
+      <p:sp>
+        <p:nvSpPr>
+          <p:cNvPr id="3" name="Text 1"/>
+          <p:cNvSpPr txBox="1"/>
+          <p:nvPr/>
+        </p:nvSpPr>
+        <p:spPr>
+          <a:xfrm>
+            <a:off x="548640" y="411480"/>
+            <a:ext cx="7315200" cy="274320"/>
+          </a:xfrm>
+          <a:prstGeom prst="rect">
+            <a:avLst/>
+          </a:prstGeom>
+          <a:noFill/>
+          <a:ln/>
+        </p:spPr>
+        <p:txBody>
+          <a:bodyPr wrap="square" lIns="0" tIns="0" rIns="0" bIns="0" rtlCol="0" anchor="ctr"/>
+          <a:lstStyle/>
+          <a:p>
+            <a:pPr indent="0" marL="0">
+              <a:buNone/>
+            </a:pPr>
+            <a:r>
+              <a:rPr lang="en-US" sz="950" spc="300" kern="0" dirty="0">
+                <a:solidFill>
+                  <a:srgbClr val="0460F5"/>
+                </a:solidFill>
+                <a:latin typeface="Courier New" pitchFamily="34" charset="0"/>
+                <a:ea typeface="Courier New" pitchFamily="34" charset="-122"/>
+                <a:cs typeface="Courier New" pitchFamily="34" charset="-120"/>
+              </a:rPr>
+              <a:t>2 · РЕШЕНИЕ</a:t>
+            </a:r>
+            <a:endParaRPr lang="en-US" sz="950" dirty="0"/>
+          </a:p>
+        </p:txBody>
+      </p:sp>
+      <p:sp>
+        <p:nvSpPr>
+          <p:cNvPr id="4" name="Text 2"/>
+          <p:cNvSpPr txBox="1"/>
+          <p:nvPr/>
+        </p:nvSpPr>
+        <p:spPr>
+          <a:xfrm>
+            <a:off x="548640" y="731520"/>
+            <a:ext cx="11091672" cy="1188720"/>
+          </a:xfrm>
+          <a:prstGeom prst="rect">
+            <a:avLst/>
+          </a:prstGeom>
+          <a:noFill/>
+          <a:ln/>
+        </p:spPr>
+        <p:txBody>
+          <a:bodyPr wrap="square" lIns="0" tIns="0" rIns="0" bIns="0" rtlCol="0" anchor="t"/>
+          <a:lstStyle/>
+          <a:p>
+            <a:pPr indent="0" marL="0">
+              <a:buNone/>
+            </a:pPr>
+            <a:r>
+              <a:rPr lang="en-US" sz="2800" b="1" dirty="0">
+                <a:solidFill>
+                  <a:srgbClr val="141A22"/>
+                </a:solidFill>
+                <a:latin typeface="Arial" pitchFamily="34" charset="0"/>
+                <a:ea typeface="Arial" pitchFamily="34" charset="-122"/>
+                <a:cs typeface="Arial" pitchFamily="34" charset="-120"/>
+              </a:rPr>
+              <a:t>Покупаем инженерную компанию — и даём её инженерам ИИ</a:t>
+            </a:r>
+            <a:endParaRPr lang="en-US" sz="2800" dirty="0"/>
+          </a:p>
+        </p:txBody>
+      </p:sp>
+      <p:sp>
+        <p:nvSpPr>
+          <p:cNvPr id="5" name="Text 3"/>
+          <p:cNvSpPr txBox="1"/>
+          <p:nvPr/>
+        </p:nvSpPr>
+        <p:spPr>
+          <a:xfrm>
+            <a:off x="10268712" y="6400800"/>
+            <a:ext cx="1371600" cy="274320"/>
+          </a:xfrm>
+          <a:prstGeom prst="rect">
+            <a:avLst/>
+          </a:prstGeom>
+          <a:noFill/>
+          <a:ln/>
+        </p:spPr>
+        <p:txBody>
+          <a:bodyPr wrap="square" lIns="0" tIns="0" rIns="0" bIns="0" rtlCol="0" anchor="ctr"/>
+          <a:lstStyle/>
+          <a:p>
+            <a:pPr algn="r" indent="0" marL="0">
+              <a:buNone/>
+            </a:pPr>
+            <a:r>
+              <a:rPr lang="en-US" sz="900" dirty="0">
+                <a:solidFill>
+                  <a:srgbClr val="8A8E94"/>
+                </a:solidFill>
+                <a:latin typeface="Courier New" pitchFamily="34" charset="0"/>
+                <a:ea typeface="Courier New" pitchFamily="34" charset="-122"/>
+                <a:cs typeface="Courier New" pitchFamily="34" charset="-120"/>
+              </a:rPr>
+              <a:t>3 / 13</a:t>
+            </a:r>
+            <a:endParaRPr lang="en-US" sz="900" dirty="0"/>
+          </a:p>
+        </p:txBody>
+      </p:sp>
+      <p:sp>
+        <p:nvSpPr>
+          <p:cNvPr id="6" name="Shape 4"/>
+          <p:cNvSpPr/>
+          <p:nvPr/>
+        </p:nvSpPr>
+        <p:spPr>
+          <a:xfrm>
+            <a:off x="548640" y="2103120"/>
+            <a:ext cx="3544824" cy="2286000"/>
+          </a:xfrm>
+          <a:prstGeom prst="roundRect">
+            <a:avLst>
+              <a:gd name="adj" fmla="val 7200"/>
+            </a:avLst>
+          </a:prstGeom>
+          <a:solidFill>
+            <a:srgbClr val="F7F7F7"/>
+          </a:solidFill>
+          <a:ln w="12700">
+            <a:solidFill>
+              <a:srgbClr val="F7F7F7"/>
+            </a:solidFill>
+            <a:prstDash val="solid"/>
+          </a:ln>
+        </p:spPr>
+      </p:sp>
+      <p:sp>
+        <p:nvSpPr>
+          <p:cNvPr id="7" name="Text 5"/>
+          <p:cNvSpPr txBox="1"/>
+          <p:nvPr/>
+        </p:nvSpPr>
+        <p:spPr>
+          <a:xfrm>
+            <a:off x="822960" y="2331720"/>
+            <a:ext cx="2996184" cy="274320"/>
+          </a:xfrm>
+          <a:prstGeom prst="rect">
+            <a:avLst/>
+          </a:prstGeom>
+          <a:noFill/>
+          <a:ln/>
+        </p:spPr>
+        <p:txBody>
+          <a:bodyPr wrap="square" lIns="0" tIns="0" rIns="0" bIns="0" rtlCol="0" anchor="ctr"/>
+          <a:lstStyle/>
+          <a:p>
+            <a:pPr indent="0" marL="0">
+              <a:buNone/>
+            </a:pPr>
+            <a:r>
+              <a:rPr lang="en-US" sz="950" spc="200" kern="0" dirty="0">
+                <a:solidFill>
+                  <a:srgbClr val="0460F5"/>
+                </a:solidFill>
+                <a:latin typeface="Courier New" pitchFamily="34" charset="0"/>
+                <a:ea typeface="Courier New" pitchFamily="34" charset="-122"/>
+                <a:cs typeface="Courier New" pitchFamily="34" charset="-120"/>
+              </a:rPr>
+              <a:t>ШАГ 1</a:t>
+            </a:r>
+            <a:endParaRPr lang="en-US" sz="950" dirty="0"/>
+          </a:p>
+        </p:txBody>
+      </p:sp>
+      <p:sp>
+        <p:nvSpPr>
+          <p:cNvPr id="8" name="Text 6"/>
+          <p:cNvSpPr txBox="1"/>
+          <p:nvPr/>
+        </p:nvSpPr>
+        <p:spPr>
+          <a:xfrm>
+            <a:off x="822960" y="2651760"/>
+            <a:ext cx="2996184" cy="411480"/>
+          </a:xfrm>
+          <a:prstGeom prst="rect">
+            <a:avLst/>
+          </a:prstGeom>
+          <a:noFill/>
+          <a:ln/>
+        </p:spPr>
+        <p:txBody>
+          <a:bodyPr wrap="square" lIns="0" tIns="0" rIns="0" bIns="0" rtlCol="0" anchor="ctr"/>
+          <a:lstStyle/>
+          <a:p>
+            <a:pPr indent="0" marL="0">
+              <a:buNone/>
+            </a:pPr>
+            <a:r>
+              <a:rPr lang="en-US" sz="1600" b="1" dirty="0">
+                <a:solidFill>
+                  <a:srgbClr val="141A22"/>
+                </a:solidFill>
+                <a:latin typeface="Arial" pitchFamily="34" charset="0"/>
+                <a:ea typeface="Arial" pitchFamily="34" charset="-122"/>
+                <a:cs typeface="Arial" pitchFamily="34" charset="-120"/>
+              </a:rPr>
+              <a:t>Покупаем</a:t>
+            </a:r>
+            <a:endParaRPr lang="en-US" sz="1600" dirty="0"/>
+          </a:p>
+        </p:txBody>
+      </p:sp>
+      <p:sp>
+        <p:nvSpPr>
+          <p:cNvPr id="9" name="Text 7"/>
+          <p:cNvSpPr txBox="1"/>
+          <p:nvPr/>
+        </p:nvSpPr>
+        <p:spPr>
+          <a:xfrm>
+            <a:off x="822960" y="3108960"/>
+            <a:ext cx="2996184" cy="1097280"/>
+          </a:xfrm>
+          <a:prstGeom prst="rect">
+            <a:avLst/>
+          </a:prstGeom>
+          <a:noFill/>
+          <a:ln/>
+        </p:spPr>
+        <p:txBody>
+          <a:bodyPr wrap="square" lIns="0" tIns="0" rIns="0" bIns="0" rtlCol="0" anchor="t"/>
+          <a:lstStyle/>
+          <a:p>
+            <a:pPr indent="0" marL="0">
+              <a:buNone/>
+            </a:pPr>
+            <a:r>
+              <a:rPr lang="en-US" sz="1250" dirty="0">
+                <a:solidFill>
+                  <a:srgbClr val="5C6067"/>
+                </a:solidFill>
+                <a:latin typeface="Arial" pitchFamily="34" charset="0"/>
+                <a:ea typeface="Arial" pitchFamily="34" charset="-122"/>
+                <a:cs typeface="Arial" pitchFamily="34" charset="-120"/>
+              </a:rPr>
+              <a:t>Небольшую инженерную фирму с лицензией и клиентами — там, где строят больше всего: Персидский залив, Индия.</a:t>
+            </a:r>
+            <a:endParaRPr lang="en-US" sz="1250" dirty="0"/>
+          </a:p>
+        </p:txBody>
+      </p:sp>
+      <p:sp>
+        <p:nvSpPr>
+          <p:cNvPr id="10" name="Shape 8"/>
+          <p:cNvSpPr/>
+          <p:nvPr/>
+        </p:nvSpPr>
+        <p:spPr>
+          <a:xfrm>
+            <a:off x="4322064" y="2103120"/>
+            <a:ext cx="3544824" cy="2286000"/>
+          </a:xfrm>
+          <a:prstGeom prst="roundRect">
+            <a:avLst>
+              <a:gd name="adj" fmla="val 7200"/>
+            </a:avLst>
+          </a:prstGeom>
+          <a:solidFill>
+            <a:srgbClr val="F7F7F7"/>
+          </a:solidFill>
+          <a:ln w="12700">
+            <a:solidFill>
+              <a:srgbClr val="F7F7F7"/>
+            </a:solidFill>
+            <a:prstDash val="solid"/>
+          </a:ln>
+        </p:spPr>
+      </p:sp>
+      <p:sp>
+        <p:nvSpPr>
+          <p:cNvPr id="11" name="Text 9"/>
+          <p:cNvSpPr txBox="1"/>
+          <p:nvPr/>
+        </p:nvSpPr>
+        <p:spPr>
+          <a:xfrm>
+            <a:off x="4596384" y="2331720"/>
+            <a:ext cx="2996184" cy="274320"/>
+          </a:xfrm>
+          <a:prstGeom prst="rect">
+            <a:avLst/>
+          </a:prstGeom>
+          <a:noFill/>
+          <a:ln/>
+        </p:spPr>
+        <p:txBody>
+          <a:bodyPr wrap="square" lIns="0" tIns="0" rIns="0" bIns="0" rtlCol="0" anchor="ctr"/>
+          <a:lstStyle/>
+          <a:p>
+            <a:pPr indent="0" marL="0">
+              <a:buNone/>
+            </a:pPr>
+            <a:r>
+              <a:rPr lang="en-US" sz="950" spc="200" kern="0" dirty="0">
+                <a:solidFill>
+                  <a:srgbClr val="0460F5"/>
+                </a:solidFill>
+                <a:latin typeface="Courier New" pitchFamily="34" charset="0"/>
+                <a:ea typeface="Courier New" pitchFamily="34" charset="-122"/>
+                <a:cs typeface="Courier New" pitchFamily="34" charset="-120"/>
+              </a:rPr>
+              <a:t>ШАГ 2</a:t>
+            </a:r>
+            <a:endParaRPr lang="en-US" sz="950" dirty="0"/>
+          </a:p>
+        </p:txBody>
+      </p:sp>
+      <p:sp>
+        <p:nvSpPr>
+          <p:cNvPr id="12" name="Text 10"/>
+          <p:cNvSpPr txBox="1"/>
+          <p:nvPr/>
+        </p:nvSpPr>
+        <p:spPr>
+          <a:xfrm>
+            <a:off x="4596384" y="2651760"/>
+            <a:ext cx="2996184" cy="411480"/>
+          </a:xfrm>
+          <a:prstGeom prst="rect">
+            <a:avLst/>
+          </a:prstGeom>
+          <a:noFill/>
+          <a:ln/>
+        </p:spPr>
+        <p:txBody>
+          <a:bodyPr wrap="square" lIns="0" tIns="0" rIns="0" bIns="0" rtlCol="0" anchor="ctr"/>
+          <a:lstStyle/>
+          <a:p>
+            <a:pPr indent="0" marL="0">
+              <a:buNone/>
+            </a:pPr>
+            <a:r>
+              <a:rPr lang="en-US" sz="1600" b="1" dirty="0">
+                <a:solidFill>
+                  <a:srgbClr val="141A22"/>
+                </a:solidFill>
+                <a:latin typeface="Arial" pitchFamily="34" charset="0"/>
+                <a:ea typeface="Arial" pitchFamily="34" charset="-122"/>
+                <a:cs typeface="Arial" pitchFamily="34" charset="-120"/>
+              </a:rPr>
+              <a:t>Ускоряем</a:t>
+            </a:r>
+            <a:endParaRPr lang="en-US" sz="1600" dirty="0"/>
+          </a:p>
+        </p:txBody>
+      </p:sp>
+      <p:sp>
+        <p:nvSpPr>
+          <p:cNvPr id="13" name="Text 11"/>
+          <p:cNvSpPr txBox="1"/>
+          <p:nvPr/>
+        </p:nvSpPr>
+        <p:spPr>
+          <a:xfrm>
+            <a:off x="4596384" y="3108960"/>
+            <a:ext cx="2996184" cy="1097280"/>
+          </a:xfrm>
+          <a:prstGeom prst="rect">
+            <a:avLst/>
+          </a:prstGeom>
+          <a:noFill/>
+          <a:ln/>
+        </p:spPr>
+        <p:txBody>
+          <a:bodyPr wrap="square" lIns="0" tIns="0" rIns="0" bIns="0" rtlCol="0" anchor="t"/>
+          <a:lstStyle/>
+          <a:p>
+            <a:pPr indent="0" marL="0">
+              <a:buNone/>
+            </a:pPr>
+            <a:r>
+              <a:rPr lang="en-US" sz="1250" dirty="0">
+                <a:solidFill>
+                  <a:srgbClr val="5C6067"/>
+                </a:solidFill>
+                <a:latin typeface="Arial" pitchFamily="34" charset="0"/>
+                <a:ea typeface="Arial" pitchFamily="34" charset="-122"/>
+                <a:cs typeface="Arial" pitchFamily="34" charset="-120"/>
+              </a:rPr>
+              <a:t>Наш ИИ делает расчёты и чертежи, инженер проверяет и подписывает. Тот же штат делает в полтора-два раза больше проектов.</a:t>
+            </a:r>
+            <a:endParaRPr lang="en-US" sz="1250" dirty="0"/>
+          </a:p>
+        </p:txBody>
+      </p:sp>
+      <p:sp>
+        <p:nvSpPr>
+          <p:cNvPr id="14" name="Shape 12"/>
+          <p:cNvSpPr/>
+          <p:nvPr/>
+        </p:nvSpPr>
+        <p:spPr>
+          <a:xfrm>
+            <a:off x="8095488" y="2103120"/>
+            <a:ext cx="3544824" cy="2286000"/>
+          </a:xfrm>
+          <a:prstGeom prst="roundRect">
+            <a:avLst>
+              <a:gd name="adj" fmla="val 7200"/>
+            </a:avLst>
+          </a:prstGeom>
+          <a:solidFill>
+            <a:srgbClr val="F7F7F7"/>
+          </a:solidFill>
+          <a:ln w="12700">
+            <a:solidFill>
+              <a:srgbClr val="F7F7F7"/>
+            </a:solidFill>
+            <a:prstDash val="solid"/>
+          </a:ln>
+        </p:spPr>
+      </p:sp>
+      <p:sp>
+        <p:nvSpPr>
+          <p:cNvPr id="15" name="Text 13"/>
+          <p:cNvSpPr txBox="1"/>
+          <p:nvPr/>
+        </p:nvSpPr>
+        <p:spPr>
+          <a:xfrm>
+            <a:off x="8369808" y="2331720"/>
+            <a:ext cx="2996184" cy="274320"/>
+          </a:xfrm>
+          <a:prstGeom prst="rect">
+            <a:avLst/>
+          </a:prstGeom>
+          <a:noFill/>
+          <a:ln/>
+        </p:spPr>
+        <p:txBody>
+          <a:bodyPr wrap="square" lIns="0" tIns="0" rIns="0" bIns="0" rtlCol="0" anchor="ctr"/>
+          <a:lstStyle/>
+          <a:p>
+            <a:pPr indent="0" marL="0">
+              <a:buNone/>
+            </a:pPr>
+            <a:r>
+              <a:rPr lang="en-US" sz="950" spc="200" kern="0" dirty="0">
+                <a:solidFill>
+                  <a:srgbClr val="0460F5"/>
+                </a:solidFill>
+                <a:latin typeface="Courier New" pitchFamily="34" charset="0"/>
+                <a:ea typeface="Courier New" pitchFamily="34" charset="-122"/>
+                <a:cs typeface="Courier New" pitchFamily="34" charset="-120"/>
+              </a:rPr>
+              <a:t>ШАГ 3</a:t>
+            </a:r>
+            <a:endParaRPr lang="en-US" sz="950" dirty="0"/>
+          </a:p>
+        </p:txBody>
+      </p:sp>
+      <p:sp>
+        <p:nvSpPr>
+          <p:cNvPr id="16" name="Text 14"/>
+          <p:cNvSpPr txBox="1"/>
+          <p:nvPr/>
+        </p:nvSpPr>
+        <p:spPr>
+          <a:xfrm>
+            <a:off x="8369808" y="2651760"/>
+            <a:ext cx="2996184" cy="411480"/>
+          </a:xfrm>
+          <a:prstGeom prst="rect">
+            <a:avLst/>
+          </a:prstGeom>
+          <a:noFill/>
+          <a:ln/>
+        </p:spPr>
+        <p:txBody>
+          <a:bodyPr wrap="square" lIns="0" tIns="0" rIns="0" bIns="0" rtlCol="0" anchor="ctr"/>
+          <a:lstStyle/>
+          <a:p>
+            <a:pPr indent="0" marL="0">
+              <a:buNone/>
+            </a:pPr>
+            <a:r>
+              <a:rPr lang="en-US" sz="1600" b="1" dirty="0">
+                <a:solidFill>
+                  <a:srgbClr val="141A22"/>
+                </a:solidFill>
+                <a:latin typeface="Arial" pitchFamily="34" charset="0"/>
+                <a:ea typeface="Arial" pitchFamily="34" charset="-122"/>
+                <a:cs typeface="Arial" pitchFamily="34" charset="-120"/>
+              </a:rPr>
+              <a:t>Повторяем</a:t>
+            </a:r>
+            <a:endParaRPr lang="en-US" sz="1600" dirty="0"/>
+          </a:p>
+        </p:txBody>
+      </p:sp>
+      <p:sp>
+        <p:nvSpPr>
+          <p:cNvPr id="17" name="Text 15"/>
+          <p:cNvSpPr txBox="1"/>
+          <p:nvPr/>
+        </p:nvSpPr>
+        <p:spPr>
+          <a:xfrm>
+            <a:off x="8369808" y="3108960"/>
+            <a:ext cx="2996184" cy="1097280"/>
+          </a:xfrm>
+          <a:prstGeom prst="rect">
+            <a:avLst/>
+          </a:prstGeom>
+          <a:noFill/>
+          <a:ln/>
+        </p:spPr>
+        <p:txBody>
+          <a:bodyPr wrap="square" lIns="0" tIns="0" rIns="0" bIns="0" rtlCol="0" anchor="t"/>
+          <a:lstStyle/>
+          <a:p>
+            <a:pPr indent="0" marL="0">
+              <a:buNone/>
+            </a:pPr>
+            <a:r>
+              <a:rPr lang="en-US" sz="1250" dirty="0">
+                <a:solidFill>
+                  <a:srgbClr val="5C6067"/>
+                </a:solidFill>
+                <a:latin typeface="Arial" pitchFamily="34" charset="0"/>
+                <a:ea typeface="Arial" pitchFamily="34" charset="-122"/>
+                <a:cs typeface="Arial" pitchFamily="34" charset="-120"/>
+              </a:rPr>
+              <a:t>Вторая фирма, третья, пятая. Один ИИ на всех — и с каждым проектом он становится лучше.</a:t>
+            </a:r>
+            <a:endParaRPr lang="en-US" sz="1250" dirty="0"/>
+          </a:p>
+        </p:txBody>
+      </p:sp>
+      <p:sp>
+        <p:nvSpPr>
+          <p:cNvPr id="18" name="Text 16"/>
+          <p:cNvSpPr txBox="1"/>
+          <p:nvPr/>
+        </p:nvSpPr>
+        <p:spPr>
+          <a:xfrm>
+            <a:off x="548640" y="4572000"/>
+            <a:ext cx="10725912" cy="1005840"/>
+          </a:xfrm>
+          <a:prstGeom prst="rect">
+            <a:avLst/>
+          </a:prstGeom>
+          <a:noFill/>
+          <a:ln/>
+        </p:spPr>
+        <p:txBody>
+          <a:bodyPr wrap="square" lIns="0" tIns="0" rIns="0" bIns="0" rtlCol="0" anchor="t"/>
+          <a:lstStyle/>
+          <a:p>
+            <a:pPr indent="0" marL="0">
+              <a:lnSpc>
+                <a:spcPct val="115000"/>
+              </a:lnSpc>
+              <a:buNone/>
+            </a:pPr>
+            <a:r>
+              <a:rPr lang="en-US" sz="1400" dirty="0">
+                <a:solidFill>
+                  <a:srgbClr val="141A22"/>
+                </a:solidFill>
+                <a:latin typeface="Arial" pitchFamily="34" charset="0"/>
+                <a:ea typeface="Arial" pitchFamily="34" charset="-122"/>
+                <a:cs typeface="Arial" pitchFamily="34" charset="-120"/>
+              </a:rPr>
+              <a:t>Почему покупаем, а не нанимаем: вместе с фирмой приходят клиенты, лицензии и репутация — этого не наймёшь. Почему это не сделает WSP: гиганты покупают тысячи инженеров разом, фирмы на сорок человек им не видны. Мы не заменяем инженеров — мы делаем так, чтобы их хватало.</a:t>
+            </a:r>
+            <a:endParaRPr lang="en-US" sz="1400" dirty="0"/>
+          </a:p>
+        </p:txBody>
+      </p:sp>
+      <p:sp>
+        <p:nvSpPr>
+          <p:cNvPr id="19" name="Text 17"/>
+          <p:cNvSpPr txBox="1"/>
+          <p:nvPr/>
+        </p:nvSpPr>
+        <p:spPr>
+          <a:xfrm>
+            <a:off x="548640" y="5623560"/>
+            <a:ext cx="10725912" cy="457200"/>
+          </a:xfrm>
+          <a:prstGeom prst="rect">
+            <a:avLst/>
+          </a:prstGeom>
+          <a:noFill/>
+          <a:ln/>
+        </p:spPr>
+        <p:txBody>
+          <a:bodyPr wrap="square" lIns="0" tIns="0" rIns="0" bIns="0" rtlCol="0" anchor="t"/>
+          <a:lstStyle/>
+          <a:p>
+            <a:pPr indent="0" marL="0">
+              <a:buNone/>
+            </a:pPr>
+            <a:r>
+              <a:rPr lang="en-US" sz="1500" i="1" dirty="0">
+                <a:solidFill>
+                  <a:srgbClr val="0460F5"/>
+                </a:solidFill>
+                <a:latin typeface="Arial" pitchFamily="34" charset="0"/>
+                <a:ea typeface="Arial" pitchFamily="34" charset="-122"/>
+                <a:cs typeface="Arial" pitchFamily="34" charset="-120"/>
+              </a:rPr>
+              <a:t>Покупаем подпись. Ставим ИИ. Повторяем.</a:t>
+            </a:r>
+            <a:endParaRPr lang="en-US" sz="1500" dirty="0"/>
+          </a:p>
+        </p:txBody>
+      </p:sp>
+      <p:sp>
+        <p:nvSpPr>
+          <p:cNvPr id="20" name="Text 18"/>
+          <p:cNvSpPr txBox="1"/>
+          <p:nvPr/>
+        </p:nvSpPr>
+        <p:spPr>
+          <a:xfrm>
+            <a:off x="548640" y="6035040"/>
+            <a:ext cx="9445752" cy="457200"/>
+          </a:xfrm>
+          <a:prstGeom prst="rect">
+            <a:avLst/>
+          </a:prstGeom>
+          <a:noFill/>
+          <a:ln/>
+        </p:spPr>
+        <p:txBody>
+          <a:bodyPr wrap="square" lIns="0" tIns="0" rIns="0" bIns="0" rtlCol="0" anchor="t"/>
+          <a:lstStyle/>
+          <a:p>
+            <a:pPr indent="0" marL="0">
+              <a:buNone/>
+            </a:pPr>
+            <a:r>
+              <a:rPr lang="en-US" sz="1000" dirty="0">
+                <a:solidFill>
+                  <a:srgbClr val="8A8E94"/>
+                </a:solidFill>
+                <a:latin typeface="Arial" pitchFamily="34" charset="0"/>
+                <a:ea typeface="Arial" pitchFamily="34" charset="-122"/>
+                <a:cs typeface="Arial" pitchFamily="34" charset="-120"/>
+              </a:rPr>
+              <a:t>Цель — вдвое, проверяем на первых проектах. В деньгах считаем осторожно: в полтора раза.</a:t>
+            </a:r>
+            <a:endParaRPr lang="en-US" sz="1000" dirty="0"/>
+          </a:p>
+        </p:txBody>
+      </p:sp>
+    </p:spTree>
+  </p:cSld>
+  <p:clrMapOvr>
+    <a:masterClrMapping/>
+  </p:clrMapOvr>
+</p:sld>
+</file>
+
+<file path=ppt/slides/slide4.xml><?xml version="1.0" encoding="utf-8"?>
+<p:sld xmlns:a="http://schemas.openxmlformats.org/drawingml/2006/main" xmlns:r="http://schemas.openxmlformats.org/officeDocument/2006/relationships" xmlns:p="http://schemas.openxmlformats.org/presentationml/2006/main">
+  <p:cSld name="Slide 4">
     <p:bg>
       <p:bgPr>
         <a:solidFill>
@@ -7141,7 +6328,7 @@
                 <a:ea typeface="Courier New" pitchFamily="34" charset="-122"/>
                 <a:cs typeface="Courier New" pitchFamily="34" charset="-120"/>
               </a:rPr>
-              <a:t>ТРИ СЛОВА, КОТОРЫЕ НУЖНО ЗНАТЬ</a:t>
+              <a:t>3 · КАК ЭТО РАБОТАЕТ</a:t>
             </a:r>
             <a:endParaRPr lang="en-US" sz="950" dirty="0"/>
           </a:p>
@@ -7180,7 +6367,7 @@
                 <a:ea typeface="Arial" pitchFamily="34" charset="-122"/>
                 <a:cs typeface="Arial" pitchFamily="34" charset="-120"/>
               </a:rPr>
-              <a:t>Дальше будет всего три специальных слова — вот что они значат</a:t>
+              <a:t>Площадка на входе — одобренный проект на выходе, с первого раза</a:t>
             </a:r>
             <a:endParaRPr lang="en-US" sz="2800" dirty="0"/>
           </a:p>
@@ -7219,7 +6406,7 @@
                 <a:ea typeface="Courier New" pitchFamily="34" charset="-122"/>
                 <a:cs typeface="Courier New" pitchFamily="34" charset="-120"/>
               </a:rPr>
-              <a:t>3 / 15</a:t>
+              <a:t>4 / 13</a:t>
             </a:r>
             <a:endParaRPr lang="en-US" sz="900" dirty="0"/>
           </a:p>
@@ -7234,11 +6421,11 @@
         <p:spPr>
           <a:xfrm>
             <a:off x="548640" y="2103120"/>
-            <a:ext cx="3544824" cy="2377440"/>
+            <a:ext cx="3544824" cy="2194560"/>
           </a:xfrm>
           <a:prstGeom prst="roundRect">
             <a:avLst>
-              <a:gd name="adj" fmla="val 6923"/>
+              <a:gd name="adj" fmla="val 7500"/>
             </a:avLst>
           </a:prstGeom>
           <a:solidFill>
@@ -7324,7 +6511,7 @@
                 <a:ea typeface="Arial" pitchFamily="34" charset="-122"/>
                 <a:cs typeface="Arial" pitchFamily="34" charset="-120"/>
               </a:rPr>
-              <a:t>Подключение к сети</a:t>
+              <a:t>Заявка</a:t>
             </a:r>
             <a:endParaRPr lang="en-US" sz="1600" dirty="0"/>
           </a:p>
@@ -7339,7 +6526,7 @@
         <p:spPr>
           <a:xfrm>
             <a:off x="822960" y="3108960"/>
-            <a:ext cx="2996184" cy="1188720"/>
+            <a:ext cx="2996184" cy="1005840"/>
           </a:xfrm>
           <a:prstGeom prst="rect">
             <a:avLst/>
@@ -7363,7 +6550,7 @@
                 <a:ea typeface="Arial" pitchFamily="34" charset="-122"/>
                 <a:cs typeface="Arial" pitchFamily="34" charset="-120"/>
               </a:rPr>
-              <a:t>Линия от дата-центра или электростанции до общей сети. Пока её нет, объект стоит — какие бы серверы внутри ни были.</a:t>
+              <a:t>Девелопер дата-центра или электростанции приходит с площадкой и нужной мощностью.</a:t>
             </a:r>
             <a:endParaRPr lang="en-US" sz="1250" dirty="0"/>
           </a:p>
@@ -7378,11 +6565,11 @@
         <p:spPr>
           <a:xfrm>
             <a:off x="4322064" y="2103120"/>
-            <a:ext cx="3544824" cy="2377440"/>
+            <a:ext cx="3544824" cy="2194560"/>
           </a:xfrm>
           <a:prstGeom prst="roundRect">
             <a:avLst>
-              <a:gd name="adj" fmla="val 6923"/>
+              <a:gd name="adj" fmla="val 7500"/>
             </a:avLst>
           </a:prstGeom>
           <a:solidFill>
@@ -7468,7 +6655,7 @@
                 <a:ea typeface="Arial" pitchFamily="34" charset="-122"/>
                 <a:cs typeface="Arial" pitchFamily="34" charset="-120"/>
               </a:rPr>
-              <a:t>Подстанция</a:t>
+              <a:t>Проект</a:t>
             </a:r>
             <a:endParaRPr lang="en-US" sz="1600" dirty="0"/>
           </a:p>
@@ -7483,7 +6670,7 @@
         <p:spPr>
           <a:xfrm>
             <a:off x="4596384" y="3108960"/>
-            <a:ext cx="2996184" cy="1188720"/>
+            <a:ext cx="2996184" cy="1005840"/>
           </a:xfrm>
           <a:prstGeom prst="rect">
             <a:avLst/>
@@ -7507,7 +6694,7 @@
                 <a:ea typeface="Arial" pitchFamily="34" charset="-122"/>
                 <a:cs typeface="Arial" pitchFamily="34" charset="-120"/>
               </a:rPr>
-              <a:t>Узел, через который объект подключают к сети. Каждую подстанцию надо спроектировать, построить и принять.</a:t>
+              <a:t>ИИ считает схему и чертит подстанцию, инженер проверяет и подписывает.</a:t>
             </a:r>
             <a:endParaRPr lang="en-US" sz="1250" dirty="0"/>
           </a:p>
@@ -7522,11 +6709,11 @@
         <p:spPr>
           <a:xfrm>
             <a:off x="8095488" y="2103120"/>
-            <a:ext cx="3544824" cy="2377440"/>
+            <a:ext cx="3544824" cy="2194560"/>
           </a:xfrm>
           <a:prstGeom prst="roundRect">
             <a:avLst>
-              <a:gd name="adj" fmla="val 6923"/>
+              <a:gd name="adj" fmla="val 7500"/>
             </a:avLst>
           </a:prstGeom>
           <a:solidFill>
@@ -7612,7 +6799,7 @@
                 <a:ea typeface="Arial" pitchFamily="34" charset="-122"/>
                 <a:cs typeface="Arial" pitchFamily="34" charset="-120"/>
               </a:rPr>
-              <a:t>Подпись инженера</a:t>
+              <a:t>Одобрение</a:t>
             </a:r>
             <a:endParaRPr lang="en-US" sz="1600" dirty="0"/>
           </a:p>
@@ -7627,7 +6814,7 @@
         <p:spPr>
           <a:xfrm>
             <a:off x="8369808" y="3108960"/>
-            <a:ext cx="2996184" cy="1188720"/>
+            <a:ext cx="2996184" cy="1005840"/>
           </a:xfrm>
           <a:prstGeom prst="rect">
             <a:avLst/>
@@ -7651,7 +6838,7 @@
                 <a:ea typeface="Arial" pitchFamily="34" charset="-122"/>
                 <a:cs typeface="Arial" pitchFamily="34" charset="-120"/>
               </a:rPr>
-              <a:t>По закону проект подстанции подписывает лицензированный инженер. Без подписи сетевая компания проект не примет.</a:t>
+              <a:t>Сетевая компания принимает проект — можно строить. Клиент купил не бумагу, а сэкономленные месяцы.</a:t>
             </a:r>
             <a:endParaRPr lang="en-US" sz="1250" dirty="0"/>
           </a:p>
@@ -7665,8 +6852,8 @@
         </p:nvSpPr>
         <p:spPr>
           <a:xfrm>
-            <a:off x="548640" y="4846320"/>
-            <a:ext cx="10725912" cy="731520"/>
+            <a:off x="548640" y="4526280"/>
+            <a:ext cx="10725912" cy="1371600"/>
           </a:xfrm>
           <a:prstGeom prst="rect">
             <a:avLst/>
@@ -7685,17 +6872,17 @@
               <a:buNone/>
             </a:pPr>
             <a:r>
-              <a:rPr lang="en-US" sz="1500" dirty="0">
-                <a:solidFill>
-                  <a:srgbClr val="B8B8B8"/>
-                </a:solidFill>
-                <a:latin typeface="Arial" pitchFamily="34" charset="0"/>
-                <a:ea typeface="Arial" pitchFamily="34" charset="-122"/>
-                <a:cs typeface="Arial" pitchFamily="34" charset="-120"/>
-              </a:rPr>
-              <a:t>Всё остальное — обычные слова: компания, клиент, проект, выручка.</a:t>
-            </a:r>
-            <a:endParaRPr lang="en-US" sz="1500" dirty="0"/>
+              <a:rPr lang="en-US" sz="1400" dirty="0">
+                <a:solidFill>
+                  <a:srgbClr val="FFFFFF"/>
+                </a:solidFill>
+                <a:latin typeface="Arial" pitchFamily="34" charset="0"/>
+                <a:ea typeface="Arial" pitchFamily="34" charset="-122"/>
+                <a:cs typeface="Arial" pitchFamily="34" charset="-120"/>
+              </a:rPr>
+              <a:t>Пять лет ожидания — это очередь, проверки сети, оборудование. Из всего этого клиент может ускорить деньгами только один кусок: проект и его согласование — обычно месяцы и два-три круга правок. Мы делаем этот кусок в полтора-два раза быстрее и с первого раза. Месяц простоя готового дата-центра стоит дороже всего проекта, поэтому клиент платит за срок.</a:t>
+            </a:r>
+            <a:endParaRPr lang="en-US" sz="1400" dirty="0"/>
           </a:p>
         </p:txBody>
       </p:sp>
@@ -7707,9 +6894,9 @@
 </p:sld>
 </file>
 
-<file path=ppt/slides/slide4.xml><?xml version="1.0" encoding="utf-8"?>
+<file path=ppt/slides/slide5.xml><?xml version="1.0" encoding="utf-8"?>
 <p:sld xmlns:a="http://schemas.openxmlformats.org/drawingml/2006/main" xmlns:r="http://schemas.openxmlformats.org/officeDocument/2006/relationships" xmlns:p="http://schemas.openxmlformats.org/presentationml/2006/main">
-  <p:cSld name="Slide 4">
+  <p:cSld name="Slide 5">
     <p:bg>
       <p:bgPr>
         <a:solidFill>
@@ -7803,7 +6990,7 @@
                 <a:ea typeface="Courier New" pitchFamily="34" charset="-122"/>
                 <a:cs typeface="Courier New" pitchFamily="34" charset="-120"/>
               </a:rPr>
-              <a:t>2 · РЕШЕНИЕ</a:t>
+              <a:t>4 · ЦЕЛЕВАЯ АУДИТОРИЯ</a:t>
             </a:r>
             <a:endParaRPr lang="en-US" sz="950" dirty="0"/>
           </a:p>
@@ -7842,7 +7029,7 @@
                 <a:ea typeface="Arial" pitchFamily="34" charset="-122"/>
                 <a:cs typeface="Arial" pitchFamily="34" charset="-120"/>
               </a:rPr>
-              <a:t>Покупаем инженерную компанию — и даём её инженерам ИИ</a:t>
+              <a:t>Наш клиент — каждый, кто стоит в очереди на подключение</a:t>
             </a:r>
             <a:endParaRPr lang="en-US" sz="2800" dirty="0"/>
           </a:p>
@@ -7881,7 +7068,7 @@
                 <a:ea typeface="Courier New" pitchFamily="34" charset="-122"/>
                 <a:cs typeface="Courier New" pitchFamily="34" charset="-120"/>
               </a:rPr>
-              <a:t>4 / 15</a:t>
+              <a:t>5 / 13</a:t>
             </a:r>
             <a:endParaRPr lang="en-US" sz="900" dirty="0"/>
           </a:p>
@@ -7947,7 +7134,7 @@
                 <a:ea typeface="Courier New" pitchFamily="34" charset="-122"/>
                 <a:cs typeface="Courier New" pitchFamily="34" charset="-120"/>
               </a:rPr>
-              <a:t>ШАГ 1</a:t>
+              <a:t>КЛИЕНТ 1</a:t>
             </a:r>
             <a:endParaRPr lang="en-US" sz="950" dirty="0"/>
           </a:p>
@@ -7986,7 +7173,7 @@
                 <a:ea typeface="Arial" pitchFamily="34" charset="-122"/>
                 <a:cs typeface="Arial" pitchFamily="34" charset="-120"/>
               </a:rPr>
-              <a:t>Покупаем</a:t>
+              <a:t>Дата-центры</a:t>
             </a:r>
             <a:endParaRPr lang="en-US" sz="1600" dirty="0"/>
           </a:p>
@@ -8025,7 +7212,7 @@
                 <a:ea typeface="Arial" pitchFamily="34" charset="-122"/>
                 <a:cs typeface="Arial" pitchFamily="34" charset="-120"/>
               </a:rPr>
-              <a:t>Небольшую инженерную фирму с лицензией и клиентами — там, где строят больше всего: Персидский залив, Индия.</a:t>
+              <a:t>Самые нетерпеливые: у них уже куплены серверы. Покупают срок.</a:t>
             </a:r>
             <a:endParaRPr lang="en-US" sz="1250" dirty="0"/>
           </a:p>
@@ -8091,7 +7278,7 @@
                 <a:ea typeface="Courier New" pitchFamily="34" charset="-122"/>
                 <a:cs typeface="Courier New" pitchFamily="34" charset="-120"/>
               </a:rPr>
-              <a:t>ШАГ 2</a:t>
+              <a:t>КЛИЕНТ 2</a:t>
             </a:r>
             <a:endParaRPr lang="en-US" sz="950" dirty="0"/>
           </a:p>
@@ -8130,7 +7317,7 @@
                 <a:ea typeface="Arial" pitchFamily="34" charset="-122"/>
                 <a:cs typeface="Arial" pitchFamily="34" charset="-120"/>
               </a:rPr>
-              <a:t>Ускоряем</a:t>
+              <a:t>Станции и накопители</a:t>
             </a:r>
             <a:endParaRPr lang="en-US" sz="1600" dirty="0"/>
           </a:p>
@@ -8169,7 +7356,7 @@
                 <a:ea typeface="Arial" pitchFamily="34" charset="-122"/>
                 <a:cs typeface="Arial" pitchFamily="34" charset="-120"/>
               </a:rPr>
-              <a:t>Наш ИИ делает расчёты и чертежи, инженер проверяет и подписывает. Тот же штат делает в полтора-два раза больше проектов.</a:t>
+              <a:t>Солнце, ветер, батареи — основная масса очереди. Десятки проектов у одного девелопера.</a:t>
             </a:r>
             <a:endParaRPr lang="en-US" sz="1250" dirty="0"/>
           </a:p>
@@ -8235,7 +7422,7 @@
                 <a:ea typeface="Courier New" pitchFamily="34" charset="-122"/>
                 <a:cs typeface="Courier New" pitchFamily="34" charset="-120"/>
               </a:rPr>
-              <a:t>ШАГ 3</a:t>
+              <a:t>КЛИЕНТ 3</a:t>
             </a:r>
             <a:endParaRPr lang="en-US" sz="950" dirty="0"/>
           </a:p>
@@ -8274,7 +7461,7 @@
                 <a:ea typeface="Arial" pitchFamily="34" charset="-122"/>
                 <a:cs typeface="Arial" pitchFamily="34" charset="-120"/>
               </a:rPr>
-              <a:t>Повторяем</a:t>
+              <a:t>Крупные подрядчики и сети</a:t>
             </a:r>
             <a:endParaRPr lang="en-US" sz="1600" dirty="0"/>
           </a:p>
@@ -8313,7 +7500,7 @@
                 <a:ea typeface="Arial" pitchFamily="34" charset="-122"/>
                 <a:cs typeface="Arial" pitchFamily="34" charset="-120"/>
               </a:rPr>
-              <a:t>Вторая фирма, третья, пятая. Один ИИ на всех — и с каждым проектом он становится лучше.</a:t>
+              <a:t>Им не хватает инженеров под собственные программы. Покупают наши часы оптом.</a:t>
             </a:r>
             <a:endParaRPr lang="en-US" sz="1250" dirty="0"/>
           </a:p>
@@ -8327,8 +7514,8 @@
         </p:nvSpPr>
         <p:spPr>
           <a:xfrm>
-            <a:off x="548640" y="4572000"/>
-            <a:ext cx="10725912" cy="1005840"/>
+            <a:off x="548640" y="4617720"/>
+            <a:ext cx="10725912" cy="1280160"/>
           </a:xfrm>
           <a:prstGeom prst="rect">
             <a:avLst/>
@@ -8355,87 +7542,9 @@
                 <a:ea typeface="Arial" pitchFamily="34" charset="-122"/>
                 <a:cs typeface="Arial" pitchFamily="34" charset="-120"/>
               </a:rPr>
-              <a:t>Почему покупаем, а не нанимаем: вместе с фирмой приходят клиенты, лицензии и репутация — этого не наймёшь. Почему это не сделает WSP: гиганты покупают тысячи инженеров разом, фирмы на сорок человек им не видны. Мы не заменяем инженеров — мы делаем так, чтобы их хватало.</a:t>
+              <a:t>В США проблему лучше всего измерили. Начинаем мы с Персидского залива и Индии: там строят больше, а инженеров не хватает так же — Саудовская Аравия законом требует 30% местных инженеров, и компании не знают, где их взять. Стоят инженеры по-разному: в Индии в несколько раз дешевле, чем в США. Для команды из России США и Европа — позже и через партнёров.</a:t>
             </a:r>
             <a:endParaRPr lang="en-US" sz="1400" dirty="0"/>
-          </a:p>
-        </p:txBody>
-      </p:sp>
-      <p:sp>
-        <p:nvSpPr>
-          <p:cNvPr id="19" name="Text 17"/>
-          <p:cNvSpPr txBox="1"/>
-          <p:nvPr/>
-        </p:nvSpPr>
-        <p:spPr>
-          <a:xfrm>
-            <a:off x="548640" y="5623560"/>
-            <a:ext cx="10725912" cy="457200"/>
-          </a:xfrm>
-          <a:prstGeom prst="rect">
-            <a:avLst/>
-          </a:prstGeom>
-          <a:noFill/>
-          <a:ln/>
-        </p:spPr>
-        <p:txBody>
-          <a:bodyPr wrap="square" lIns="0" tIns="0" rIns="0" bIns="0" rtlCol="0" anchor="t"/>
-          <a:lstStyle/>
-          <a:p>
-            <a:pPr indent="0" marL="0">
-              <a:buNone/>
-            </a:pPr>
-            <a:r>
-              <a:rPr lang="en-US" sz="1500" i="1" dirty="0">
-                <a:solidFill>
-                  <a:srgbClr val="0460F5"/>
-                </a:solidFill>
-                <a:latin typeface="Arial" pitchFamily="34" charset="0"/>
-                <a:ea typeface="Arial" pitchFamily="34" charset="-122"/>
-                <a:cs typeface="Arial" pitchFamily="34" charset="-120"/>
-              </a:rPr>
-              <a:t>Покупаем подпись. Ставим ИИ. Повторяем.</a:t>
-            </a:r>
-            <a:endParaRPr lang="en-US" sz="1500" dirty="0"/>
-          </a:p>
-        </p:txBody>
-      </p:sp>
-      <p:sp>
-        <p:nvSpPr>
-          <p:cNvPr id="20" name="Text 18"/>
-          <p:cNvSpPr txBox="1"/>
-          <p:nvPr/>
-        </p:nvSpPr>
-        <p:spPr>
-          <a:xfrm>
-            <a:off x="548640" y="6035040"/>
-            <a:ext cx="9445752" cy="457200"/>
-          </a:xfrm>
-          <a:prstGeom prst="rect">
-            <a:avLst/>
-          </a:prstGeom>
-          <a:noFill/>
-          <a:ln/>
-        </p:spPr>
-        <p:txBody>
-          <a:bodyPr wrap="square" lIns="0" tIns="0" rIns="0" bIns="0" rtlCol="0" anchor="t"/>
-          <a:lstStyle/>
-          <a:p>
-            <a:pPr indent="0" marL="0">
-              <a:buNone/>
-            </a:pPr>
-            <a:r>
-              <a:rPr lang="en-US" sz="1000" dirty="0">
-                <a:solidFill>
-                  <a:srgbClr val="8A8E94"/>
-                </a:solidFill>
-                <a:latin typeface="Arial" pitchFamily="34" charset="0"/>
-                <a:ea typeface="Arial" pitchFamily="34" charset="-122"/>
-                <a:cs typeface="Arial" pitchFamily="34" charset="-120"/>
-              </a:rPr>
-              <a:t>Цель — вдвое, проверяем на первых проектах. В деньгах считаем осторожно: в полтора раза.</a:t>
-            </a:r>
-            <a:endParaRPr lang="en-US" sz="1000" dirty="0"/>
           </a:p>
         </p:txBody>
       </p:sp>
@@ -8447,9 +7556,9 @@
 </p:sld>
 </file>
 
-<file path=ppt/slides/slide5.xml><?xml version="1.0" encoding="utf-8"?>
+<file path=ppt/slides/slide6.xml><?xml version="1.0" encoding="utf-8"?>
 <p:sld xmlns:a="http://schemas.openxmlformats.org/drawingml/2006/main" xmlns:r="http://schemas.openxmlformats.org/officeDocument/2006/relationships" xmlns:p="http://schemas.openxmlformats.org/presentationml/2006/main">
-  <p:cSld name="Slide 5">
+  <p:cSld name="Slide 6">
     <p:bg>
       <p:bgPr>
         <a:solidFill>
@@ -8543,7 +7652,7 @@
                 <a:ea typeface="Courier New" pitchFamily="34" charset="-122"/>
                 <a:cs typeface="Courier New" pitchFamily="34" charset="-120"/>
               </a:rPr>
-              <a:t>3 · КАК ЭТО РАБОТАЕТ</a:t>
+              <a:t>5 · БИЗНЕС-МОДЕЛЬ</a:t>
             </a:r>
             <a:endParaRPr lang="en-US" sz="950" dirty="0"/>
           </a:p>
@@ -8582,7 +7691,7 @@
                 <a:ea typeface="Arial" pitchFamily="34" charset="-122"/>
                 <a:cs typeface="Arial" pitchFamily="34" charset="-120"/>
               </a:rPr>
-              <a:t>Площадка на входе — одобренный проект на выходе, с первого раза</a:t>
+              <a:t>Та же фирма, те же люди — в полтора раза больше выручки</a:t>
             </a:r>
             <a:endParaRPr lang="en-US" sz="2800" dirty="0"/>
           </a:p>
@@ -8621,7 +7730,7 @@
                 <a:ea typeface="Courier New" pitchFamily="34" charset="-122"/>
                 <a:cs typeface="Courier New" pitchFamily="34" charset="-120"/>
               </a:rPr>
-              <a:t>5 / 15</a:t>
+              <a:t>6 / 13</a:t>
             </a:r>
             <a:endParaRPr lang="en-US" sz="900" dirty="0"/>
           </a:p>
@@ -8636,11 +7745,11 @@
         <p:spPr>
           <a:xfrm>
             <a:off x="548640" y="2103120"/>
-            <a:ext cx="3544824" cy="2194560"/>
+            <a:ext cx="5431536" cy="2286000"/>
           </a:xfrm>
           <a:prstGeom prst="roundRect">
             <a:avLst>
-              <a:gd name="adj" fmla="val 7500"/>
+              <a:gd name="adj" fmla="val 7200"/>
             </a:avLst>
           </a:prstGeom>
           <a:solidFill>
@@ -8662,8 +7771,8 @@
         </p:nvSpPr>
         <p:spPr>
           <a:xfrm>
-            <a:off x="822960" y="2331720"/>
-            <a:ext cx="2996184" cy="274320"/>
+            <a:off x="868680" y="2331720"/>
+            <a:ext cx="4791456" cy="274320"/>
           </a:xfrm>
           <a:prstGeom prst="rect">
             <a:avLst/>
@@ -8681,13 +7790,13 @@
             <a:r>
               <a:rPr lang="en-US" sz="950" spc="200" kern="0" dirty="0">
                 <a:solidFill>
-                  <a:srgbClr val="D5F774"/>
+                  <a:srgbClr val="FFFFFF"/>
                 </a:solidFill>
                 <a:latin typeface="Courier New" pitchFamily="34" charset="0"/>
                 <a:ea typeface="Courier New" pitchFamily="34" charset="-122"/>
                 <a:cs typeface="Courier New" pitchFamily="34" charset="-120"/>
               </a:rPr>
-              <a:t>1</a:t>
+              <a:t>ФИРМА ДО ПОКУПКИ</a:t>
             </a:r>
             <a:endParaRPr lang="en-US" sz="950" dirty="0"/>
           </a:p>
@@ -8701,24 +7810,24 @@
         </p:nvSpPr>
         <p:spPr>
           <a:xfrm>
-            <a:off x="822960" y="2651760"/>
-            <a:ext cx="2996184" cy="411480"/>
-          </a:xfrm>
-          <a:prstGeom prst="rect">
-            <a:avLst/>
-          </a:prstGeom>
-          <a:noFill/>
-          <a:ln/>
-        </p:spPr>
-        <p:txBody>
-          <a:bodyPr wrap="square" lIns="0" tIns="0" rIns="0" bIns="0" rtlCol="0" anchor="ctr"/>
-          <a:lstStyle/>
-          <a:p>
-            <a:pPr indent="0" marL="0">
-              <a:buNone/>
-            </a:pPr>
-            <a:r>
-              <a:rPr lang="en-US" sz="1600" b="1" dirty="0">
+            <a:off x="868680" y="2697480"/>
+            <a:ext cx="4791456" cy="822960"/>
+          </a:xfrm>
+          <a:prstGeom prst="rect">
+            <a:avLst/>
+          </a:prstGeom>
+          <a:noFill/>
+          <a:ln/>
+        </p:spPr>
+        <p:txBody>
+          <a:bodyPr wrap="square" lIns="0" tIns="0" rIns="0" bIns="0" rtlCol="0" anchor="t"/>
+          <a:lstStyle/>
+          <a:p>
+            <a:pPr indent="0" marL="0">
+              <a:buNone/>
+            </a:pPr>
+            <a:r>
+              <a:rPr lang="en-US" sz="4400" b="1" dirty="0">
                 <a:solidFill>
                   <a:srgbClr val="FFFFFF"/>
                 </a:solidFill>
@@ -8726,9 +7835,9 @@
                 <a:ea typeface="Arial" pitchFamily="34" charset="-122"/>
                 <a:cs typeface="Arial" pitchFamily="34" charset="-120"/>
               </a:rPr>
-              <a:t>Заявка</a:t>
-            </a:r>
-            <a:endParaRPr lang="en-US" sz="1600" dirty="0"/>
+              <a:t>2,8 млн $</a:t>
+            </a:r>
+            <a:endParaRPr lang="en-US" sz="4400" dirty="0"/>
           </a:p>
         </p:txBody>
       </p:sp>
@@ -8740,8 +7849,8 @@
         </p:nvSpPr>
         <p:spPr>
           <a:xfrm>
-            <a:off x="822960" y="3108960"/>
-            <a:ext cx="2996184" cy="1005840"/>
+            <a:off x="868680" y="3566160"/>
+            <a:ext cx="4791456" cy="640080"/>
           </a:xfrm>
           <a:prstGeom prst="rect">
             <a:avLst/>
@@ -8757,7 +7866,7 @@
               <a:buNone/>
             </a:pPr>
             <a:r>
-              <a:rPr lang="en-US" sz="1250" dirty="0">
+              <a:rPr lang="en-US" sz="1300" dirty="0">
                 <a:solidFill>
                   <a:srgbClr val="B8B8B8"/>
                 </a:solidFill>
@@ -8765,9 +7874,9 @@
                 <a:ea typeface="Arial" pitchFamily="34" charset="-122"/>
                 <a:cs typeface="Arial" pitchFamily="34" charset="-120"/>
               </a:rPr>
-              <a:t>Девелопер дата-центра или электростанции приходит с площадкой и нужной мощностью.</a:t>
-            </a:r>
-            <a:endParaRPr lang="en-US" sz="1250" dirty="0"/>
+              <a:t>выручки в год · 40 инженеров · маржа бюро без ИИ</a:t>
+            </a:r>
+            <a:endParaRPr lang="en-US" sz="1300" dirty="0"/>
           </a:p>
         </p:txBody>
       </p:sp>
@@ -8779,20 +7888,20 @@
         </p:nvSpPr>
         <p:spPr>
           <a:xfrm>
-            <a:off x="4322064" y="2103120"/>
-            <a:ext cx="3544824" cy="2194560"/>
+            <a:off x="6208776" y="2103120"/>
+            <a:ext cx="5431536" cy="2286000"/>
           </a:xfrm>
           <a:prstGeom prst="roundRect">
             <a:avLst>
-              <a:gd name="adj" fmla="val 7500"/>
+              <a:gd name="adj" fmla="val 7200"/>
             </a:avLst>
           </a:prstGeom>
           <a:solidFill>
-            <a:srgbClr val="343434"/>
+            <a:srgbClr val="2C3A1C"/>
           </a:solidFill>
           <a:ln w="12700">
             <a:solidFill>
-              <a:srgbClr val="343434"/>
+              <a:srgbClr val="2C3A1C"/>
             </a:solidFill>
             <a:prstDash val="solid"/>
           </a:ln>
@@ -8806,8 +7915,8 @@
         </p:nvSpPr>
         <p:spPr>
           <a:xfrm>
-            <a:off x="4596384" y="2331720"/>
-            <a:ext cx="2996184" cy="274320"/>
+            <a:off x="6528816" y="2331720"/>
+            <a:ext cx="4791456" cy="274320"/>
           </a:xfrm>
           <a:prstGeom prst="rect">
             <a:avLst/>
@@ -8831,7 +7940,7 @@
                 <a:ea typeface="Courier New" pitchFamily="34" charset="-122"/>
                 <a:cs typeface="Courier New" pitchFamily="34" charset="-120"/>
               </a:rPr>
-              <a:t>2</a:t>
+              <a:t>ТА ЖЕ ФИРМА С НАШИМ ИИ</a:t>
             </a:r>
             <a:endParaRPr lang="en-US" sz="950" dirty="0"/>
           </a:p>
@@ -8845,34 +7954,34 @@
         </p:nvSpPr>
         <p:spPr>
           <a:xfrm>
-            <a:off x="4596384" y="2651760"/>
-            <a:ext cx="2996184" cy="411480"/>
-          </a:xfrm>
-          <a:prstGeom prst="rect">
-            <a:avLst/>
-          </a:prstGeom>
-          <a:noFill/>
-          <a:ln/>
-        </p:spPr>
-        <p:txBody>
-          <a:bodyPr wrap="square" lIns="0" tIns="0" rIns="0" bIns="0" rtlCol="0" anchor="ctr"/>
-          <a:lstStyle/>
-          <a:p>
-            <a:pPr indent="0" marL="0">
-              <a:buNone/>
-            </a:pPr>
-            <a:r>
-              <a:rPr lang="en-US" sz="1600" b="1" dirty="0">
-                <a:solidFill>
-                  <a:srgbClr val="FFFFFF"/>
-                </a:solidFill>
-                <a:latin typeface="Arial" pitchFamily="34" charset="0"/>
-                <a:ea typeface="Arial" pitchFamily="34" charset="-122"/>
-                <a:cs typeface="Arial" pitchFamily="34" charset="-120"/>
-              </a:rPr>
-              <a:t>Проект</a:t>
-            </a:r>
-            <a:endParaRPr lang="en-US" sz="1600" dirty="0"/>
+            <a:off x="6528816" y="2697480"/>
+            <a:ext cx="4791456" cy="822960"/>
+          </a:xfrm>
+          <a:prstGeom prst="rect">
+            <a:avLst/>
+          </a:prstGeom>
+          <a:noFill/>
+          <a:ln/>
+        </p:spPr>
+        <p:txBody>
+          <a:bodyPr wrap="square" lIns="0" tIns="0" rIns="0" bIns="0" rtlCol="0" anchor="t"/>
+          <a:lstStyle/>
+          <a:p>
+            <a:pPr indent="0" marL="0">
+              <a:buNone/>
+            </a:pPr>
+            <a:r>
+              <a:rPr lang="en-US" sz="4400" b="1" dirty="0">
+                <a:solidFill>
+                  <a:srgbClr val="D5F774"/>
+                </a:solidFill>
+                <a:latin typeface="Arial" pitchFamily="34" charset="0"/>
+                <a:ea typeface="Arial" pitchFamily="34" charset="-122"/>
+                <a:cs typeface="Arial" pitchFamily="34" charset="-120"/>
+              </a:rPr>
+              <a:t>4,2 млн $</a:t>
+            </a:r>
+            <a:endParaRPr lang="en-US" sz="4400" dirty="0"/>
           </a:p>
         </p:txBody>
       </p:sp>
@@ -8884,8 +7993,8 @@
         </p:nvSpPr>
         <p:spPr>
           <a:xfrm>
-            <a:off x="4596384" y="3108960"/>
-            <a:ext cx="2996184" cy="1005840"/>
+            <a:off x="6528816" y="3566160"/>
+            <a:ext cx="4791456" cy="640080"/>
           </a:xfrm>
           <a:prstGeom prst="rect">
             <a:avLst/>
@@ -8901,7 +8010,7 @@
               <a:buNone/>
             </a:pPr>
             <a:r>
-              <a:rPr lang="en-US" sz="1250" dirty="0">
+              <a:rPr lang="en-US" sz="1300" dirty="0">
                 <a:solidFill>
                   <a:srgbClr val="B8B8B8"/>
                 </a:solidFill>
@@ -8909,159 +8018,15 @@
                 <a:ea typeface="Arial" pitchFamily="34" charset="-122"/>
                 <a:cs typeface="Arial" pitchFamily="34" charset="-120"/>
               </a:rPr>
-              <a:t>ИИ считает схему и чертит подстанцию, инженер проверяет и подписывает.</a:t>
-            </a:r>
-            <a:endParaRPr lang="en-US" sz="1250" dirty="0"/>
-          </a:p>
-        </p:txBody>
-      </p:sp>
-      <p:sp>
-        <p:nvSpPr>
-          <p:cNvPr id="14" name="Shape 12"/>
-          <p:cNvSpPr/>
-          <p:nvPr/>
-        </p:nvSpPr>
-        <p:spPr>
-          <a:xfrm>
-            <a:off x="8095488" y="2103120"/>
-            <a:ext cx="3544824" cy="2194560"/>
-          </a:xfrm>
-          <a:prstGeom prst="roundRect">
-            <a:avLst>
-              <a:gd name="adj" fmla="val 7500"/>
-            </a:avLst>
-          </a:prstGeom>
-          <a:solidFill>
-            <a:srgbClr val="343434"/>
-          </a:solidFill>
-          <a:ln w="12700">
-            <a:solidFill>
-              <a:srgbClr val="343434"/>
-            </a:solidFill>
-            <a:prstDash val="solid"/>
-          </a:ln>
-        </p:spPr>
-      </p:sp>
-      <p:sp>
-        <p:nvSpPr>
-          <p:cNvPr id="15" name="Text 13"/>
-          <p:cNvSpPr txBox="1"/>
-          <p:nvPr/>
-        </p:nvSpPr>
-        <p:spPr>
-          <a:xfrm>
-            <a:off x="8369808" y="2331720"/>
-            <a:ext cx="2996184" cy="274320"/>
-          </a:xfrm>
-          <a:prstGeom prst="rect">
-            <a:avLst/>
-          </a:prstGeom>
-          <a:noFill/>
-          <a:ln/>
-        </p:spPr>
-        <p:txBody>
-          <a:bodyPr wrap="square" lIns="0" tIns="0" rIns="0" bIns="0" rtlCol="0" anchor="ctr"/>
-          <a:lstStyle/>
-          <a:p>
-            <a:pPr indent="0" marL="0">
-              <a:buNone/>
-            </a:pPr>
-            <a:r>
-              <a:rPr lang="en-US" sz="950" spc="200" kern="0" dirty="0">
-                <a:solidFill>
-                  <a:srgbClr val="D5F774"/>
-                </a:solidFill>
-                <a:latin typeface="Courier New" pitchFamily="34" charset="0"/>
-                <a:ea typeface="Courier New" pitchFamily="34" charset="-122"/>
-                <a:cs typeface="Courier New" pitchFamily="34" charset="-120"/>
-              </a:rPr>
-              <a:t>3</a:t>
-            </a:r>
-            <a:endParaRPr lang="en-US" sz="950" dirty="0"/>
-          </a:p>
-        </p:txBody>
-      </p:sp>
-      <p:sp>
-        <p:nvSpPr>
-          <p:cNvPr id="16" name="Text 14"/>
-          <p:cNvSpPr txBox="1"/>
-          <p:nvPr/>
-        </p:nvSpPr>
-        <p:spPr>
-          <a:xfrm>
-            <a:off x="8369808" y="2651760"/>
-            <a:ext cx="2996184" cy="411480"/>
-          </a:xfrm>
-          <a:prstGeom prst="rect">
-            <a:avLst/>
-          </a:prstGeom>
-          <a:noFill/>
-          <a:ln/>
-        </p:spPr>
-        <p:txBody>
-          <a:bodyPr wrap="square" lIns="0" tIns="0" rIns="0" bIns="0" rtlCol="0" anchor="ctr"/>
-          <a:lstStyle/>
-          <a:p>
-            <a:pPr indent="0" marL="0">
-              <a:buNone/>
-            </a:pPr>
-            <a:r>
-              <a:rPr lang="en-US" sz="1600" b="1" dirty="0">
-                <a:solidFill>
-                  <a:srgbClr val="FFFFFF"/>
-                </a:solidFill>
-                <a:latin typeface="Arial" pitchFamily="34" charset="0"/>
-                <a:ea typeface="Arial" pitchFamily="34" charset="-122"/>
-                <a:cs typeface="Arial" pitchFamily="34" charset="-120"/>
-              </a:rPr>
-              <a:t>Одобрение</a:t>
-            </a:r>
-            <a:endParaRPr lang="en-US" sz="1600" dirty="0"/>
-          </a:p>
-        </p:txBody>
-      </p:sp>
-      <p:sp>
-        <p:nvSpPr>
-          <p:cNvPr id="17" name="Text 15"/>
-          <p:cNvSpPr txBox="1"/>
-          <p:nvPr/>
-        </p:nvSpPr>
-        <p:spPr>
-          <a:xfrm>
-            <a:off x="8369808" y="3108960"/>
-            <a:ext cx="2996184" cy="1005840"/>
-          </a:xfrm>
-          <a:prstGeom prst="rect">
-            <a:avLst/>
-          </a:prstGeom>
-          <a:noFill/>
-          <a:ln/>
-        </p:spPr>
-        <p:txBody>
-          <a:bodyPr wrap="square" lIns="0" tIns="0" rIns="0" bIns="0" rtlCol="0" anchor="t"/>
-          <a:lstStyle/>
-          <a:p>
-            <a:pPr indent="0" marL="0">
-              <a:buNone/>
-            </a:pPr>
-            <a:r>
-              <a:rPr lang="en-US" sz="1250" dirty="0">
-                <a:solidFill>
-                  <a:srgbClr val="B8B8B8"/>
-                </a:solidFill>
-                <a:latin typeface="Arial" pitchFamily="34" charset="0"/>
-                <a:ea typeface="Arial" pitchFamily="34" charset="-122"/>
-                <a:cs typeface="Arial" pitchFamily="34" charset="-120"/>
-              </a:rPr>
-              <a:t>Сетевая компания принимает проект — можно строить. Клиент купил не бумагу, а сэкономленные месяцы.</a:t>
-            </a:r>
-            <a:endParaRPr lang="en-US" sz="1250" dirty="0"/>
-          </a:p>
-        </p:txBody>
-      </p:sp>
-      <p:sp>
-        <p:nvSpPr>
-          <p:cNvPr id="18" name="Text 16"/>
+              <a:t>выручки в год · те же 40 инженеров · маржа 24% после оплаты ИИ-команды</a:t>
+            </a:r>
+            <a:endParaRPr lang="en-US" sz="1300" dirty="0"/>
+          </a:p>
+        </p:txBody>
+      </p:sp>
+      <p:sp>
+        <p:nvSpPr>
+          <p:cNvPr id="14" name="Text 12"/>
           <p:cNvSpPr txBox="1"/>
           <p:nvPr/>
         </p:nvSpPr>
@@ -9095,9 +8060,48 @@
                 <a:ea typeface="Arial" pitchFamily="34" charset="-122"/>
                 <a:cs typeface="Arial" pitchFamily="34" charset="-120"/>
               </a:rPr>
-              <a:t>Пять лет ожидания — это очередь, проверки сети, оборудование. Из всего этого клиент может ускорить деньгами только один кусок: проект и его согласование — обычно месяцы и два-три круга правок. Мы делаем этот кусок в полтора-два раза быстрее и с первого раза. Месяц простоя готового дата-центра стоит дороже всего проекта, поэтому клиент платит за срок.</a:t>
+              <a:t>Заказов у таких фирм больше, чем рук, — поэтому они и не могут нанять. Прирост 1,4 млн $ в год с тех же людей. Но ИИ-команда стоит 1,2 млн $ в год на всю группу: при одной фирме она съедает почти весь прирост, при пяти — обходится по 240 тысяч на фирму. Поэтому одна фирма — эксперимент, а бизнес — группа.</a:t>
             </a:r>
             <a:endParaRPr lang="en-US" sz="1400" dirty="0"/>
+          </a:p>
+        </p:txBody>
+      </p:sp>
+      <p:sp>
+        <p:nvSpPr>
+          <p:cNvPr id="15" name="Text 13"/>
+          <p:cNvSpPr txBox="1"/>
+          <p:nvPr/>
+        </p:nvSpPr>
+        <p:spPr>
+          <a:xfrm>
+            <a:off x="548640" y="5943600"/>
+            <a:ext cx="9445752" cy="457200"/>
+          </a:xfrm>
+          <a:prstGeom prst="rect">
+            <a:avLst/>
+          </a:prstGeom>
+          <a:noFill/>
+          <a:ln/>
+        </p:spPr>
+        <p:txBody>
+          <a:bodyPr wrap="square" lIns="0" tIns="0" rIns="0" bIns="0" rtlCol="0" anchor="t"/>
+          <a:lstStyle/>
+          <a:p>
+            <a:pPr indent="0" marL="0">
+              <a:buNone/>
+            </a:pPr>
+            <a:r>
+              <a:rPr lang="en-US" sz="1000" dirty="0">
+                <a:solidFill>
+                  <a:srgbClr val="8C8C8C"/>
+                </a:solidFill>
+                <a:latin typeface="Arial" pitchFamily="34" charset="0"/>
+                <a:ea typeface="Arial" pitchFamily="34" charset="-122"/>
+                <a:cs typeface="Arial" pitchFamily="34" charset="-120"/>
+              </a:rPr>
+              <a:t>Базовый сценарий финмодели: рост выработки в полтора раза, цель — вдвое; покупка фирмы за годовую выручку. Финмодель с тремя сценариями прилагается.</a:t>
+            </a:r>
+            <a:endParaRPr lang="en-US" sz="1000" dirty="0"/>
           </a:p>
         </p:txBody>
       </p:sp>
@@ -9109,9 +8113,9 @@
 </p:sld>
 </file>
 
-<file path=ppt/slides/slide6.xml><?xml version="1.0" encoding="utf-8"?>
+<file path=ppt/slides/slide7.xml><?xml version="1.0" encoding="utf-8"?>
 <p:sld xmlns:a="http://schemas.openxmlformats.org/drawingml/2006/main" xmlns:r="http://schemas.openxmlformats.org/officeDocument/2006/relationships" xmlns:p="http://schemas.openxmlformats.org/presentationml/2006/main">
-  <p:cSld name="Slide 6">
+  <p:cSld name="Slide 7">
     <p:bg>
       <p:bgPr>
         <a:solidFill>
@@ -9205,7 +8209,7 @@
                 <a:ea typeface="Courier New" pitchFamily="34" charset="-122"/>
                 <a:cs typeface="Courier New" pitchFamily="34" charset="-120"/>
               </a:rPr>
-              <a:t>4 · КТО ПЛАТИТ</a:t>
+              <a:t>6 · РЫНОК</a:t>
             </a:r>
             <a:endParaRPr lang="en-US" sz="950" dirty="0"/>
           </a:p>
@@ -9244,7 +8248,7 @@
                 <a:ea typeface="Arial" pitchFamily="34" charset="-122"/>
                 <a:cs typeface="Arial" pitchFamily="34" charset="-120"/>
               </a:rPr>
-              <a:t>Наш клиент — каждый, кто стоит в очереди на подключение</a:t>
+              <a:t>За инженеров, которые проектируют сети, уже платят миллиарды</a:t>
             </a:r>
             <a:endParaRPr lang="en-US" sz="2800" dirty="0"/>
           </a:p>
@@ -9283,7 +8287,7 @@
                 <a:ea typeface="Courier New" pitchFamily="34" charset="-122"/>
                 <a:cs typeface="Courier New" pitchFamily="34" charset="-120"/>
               </a:rPr>
-              <a:t>6 / 15</a:t>
+              <a:t>7 / 13</a:t>
             </a:r>
             <a:endParaRPr lang="en-US" sz="900" dirty="0"/>
           </a:p>
@@ -9298,11 +8302,11 @@
         <p:spPr>
           <a:xfrm>
             <a:off x="548640" y="2103120"/>
-            <a:ext cx="3544824" cy="2286000"/>
+            <a:ext cx="5431536" cy="2011680"/>
           </a:xfrm>
           <a:prstGeom prst="roundRect">
             <a:avLst>
-              <a:gd name="adj" fmla="val 7200"/>
+              <a:gd name="adj" fmla="val 8182"/>
             </a:avLst>
           </a:prstGeom>
           <a:solidFill>
@@ -9324,34 +8328,34 @@
         </p:nvSpPr>
         <p:spPr>
           <a:xfrm>
-            <a:off x="822960" y="2331720"/>
-            <a:ext cx="2996184" cy="274320"/>
-          </a:xfrm>
-          <a:prstGeom prst="rect">
-            <a:avLst/>
-          </a:prstGeom>
-          <a:noFill/>
-          <a:ln/>
-        </p:spPr>
-        <p:txBody>
-          <a:bodyPr wrap="square" lIns="0" tIns="0" rIns="0" bIns="0" rtlCol="0" anchor="ctr"/>
-          <a:lstStyle/>
-          <a:p>
-            <a:pPr indent="0" marL="0">
-              <a:buNone/>
-            </a:pPr>
-            <a:r>
-              <a:rPr lang="en-US" sz="950" spc="200" kern="0" dirty="0">
-                <a:solidFill>
-                  <a:srgbClr val="0460F5"/>
-                </a:solidFill>
-                <a:latin typeface="Courier New" pitchFamily="34" charset="0"/>
-                <a:ea typeface="Courier New" pitchFamily="34" charset="-122"/>
-                <a:cs typeface="Courier New" pitchFamily="34" charset="-120"/>
-              </a:rPr>
-              <a:t>КЛИЕНТ 1</a:t>
-            </a:r>
-            <a:endParaRPr lang="en-US" sz="950" dirty="0"/>
+            <a:off x="868680" y="2377440"/>
+            <a:ext cx="4791456" cy="822960"/>
+          </a:xfrm>
+          <a:prstGeom prst="rect">
+            <a:avLst/>
+          </a:prstGeom>
+          <a:noFill/>
+          <a:ln/>
+        </p:spPr>
+        <p:txBody>
+          <a:bodyPr wrap="square" lIns="0" tIns="0" rIns="0" bIns="0" rtlCol="0" anchor="t"/>
+          <a:lstStyle/>
+          <a:p>
+            <a:pPr indent="0" marL="0">
+              <a:buNone/>
+            </a:pPr>
+            <a:r>
+              <a:rPr lang="en-US" sz="4400" b="1" dirty="0">
+                <a:solidFill>
+                  <a:srgbClr val="141A22"/>
+                </a:solidFill>
+                <a:latin typeface="Arial" pitchFamily="34" charset="0"/>
+                <a:ea typeface="Arial" pitchFamily="34" charset="-122"/>
+                <a:cs typeface="Arial" pitchFamily="34" charset="-120"/>
+              </a:rPr>
+              <a:t>1,78 млрд $</a:t>
+            </a:r>
+            <a:endParaRPr lang="en-US" sz="4400" dirty="0"/>
           </a:p>
         </p:txBody>
       </p:sp>
@@ -9363,47 +8367,8 @@
         </p:nvSpPr>
         <p:spPr>
           <a:xfrm>
-            <a:off x="822960" y="2651760"/>
-            <a:ext cx="2996184" cy="411480"/>
-          </a:xfrm>
-          <a:prstGeom prst="rect">
-            <a:avLst/>
-          </a:prstGeom>
-          <a:noFill/>
-          <a:ln/>
-        </p:spPr>
-        <p:txBody>
-          <a:bodyPr wrap="square" lIns="0" tIns="0" rIns="0" bIns="0" rtlCol="0" anchor="ctr"/>
-          <a:lstStyle/>
-          <a:p>
-            <a:pPr indent="0" marL="0">
-              <a:buNone/>
-            </a:pPr>
-            <a:r>
-              <a:rPr lang="en-US" sz="1600" b="1" dirty="0">
-                <a:solidFill>
-                  <a:srgbClr val="141A22"/>
-                </a:solidFill>
-                <a:latin typeface="Arial" pitchFamily="34" charset="0"/>
-                <a:ea typeface="Arial" pitchFamily="34" charset="-122"/>
-                <a:cs typeface="Arial" pitchFamily="34" charset="-120"/>
-              </a:rPr>
-              <a:t>Дата-центры</a:t>
-            </a:r>
-            <a:endParaRPr lang="en-US" sz="1600" dirty="0"/>
-          </a:p>
-        </p:txBody>
-      </p:sp>
-      <p:sp>
-        <p:nvSpPr>
-          <p:cNvPr id="9" name="Text 7"/>
-          <p:cNvSpPr txBox="1"/>
-          <p:nvPr/>
-        </p:nvSpPr>
-        <p:spPr>
-          <a:xfrm>
-            <a:off x="822960" y="3108960"/>
-            <a:ext cx="2996184" cy="1097280"/>
+            <a:off x="868680" y="3246120"/>
+            <a:ext cx="4791456" cy="685800"/>
           </a:xfrm>
           <a:prstGeom prst="rect">
             <a:avLst/>
@@ -9419,7 +8384,7 @@
               <a:buNone/>
             </a:pPr>
             <a:r>
-              <a:rPr lang="en-US" sz="1250" dirty="0">
+              <a:rPr lang="en-US" sz="1300" dirty="0">
                 <a:solidFill>
                   <a:srgbClr val="5C6067"/>
                 </a:solidFill>
@@ -9427,26 +8392,26 @@
                 <a:ea typeface="Arial" pitchFamily="34" charset="-122"/>
                 <a:cs typeface="Arial" pitchFamily="34" charset="-120"/>
               </a:rPr>
-              <a:t>Самые нетерпеливые: у них уже куплены серверы. Покупают срок.</a:t>
-            </a:r>
-            <a:endParaRPr lang="en-US" sz="1250" dirty="0"/>
-          </a:p>
-        </p:txBody>
-      </p:sp>
-      <p:sp>
-        <p:nvSpPr>
-          <p:cNvPr id="10" name="Shape 8"/>
+              <a:t>заплатила WSP, мировой инженерный гигант, за компанию из 4000 таких инженеров в 2024 году. Через год — ещё 3,3 млрд $ за следующую.</a:t>
+            </a:r>
+            <a:endParaRPr lang="en-US" sz="1300" dirty="0"/>
+          </a:p>
+        </p:txBody>
+      </p:sp>
+      <p:sp>
+        <p:nvSpPr>
+          <p:cNvPr id="9" name="Shape 7"/>
           <p:cNvSpPr/>
           <p:nvPr/>
         </p:nvSpPr>
         <p:spPr>
           <a:xfrm>
-            <a:off x="4322064" y="2103120"/>
-            <a:ext cx="3544824" cy="2286000"/>
+            <a:off x="6208776" y="2103120"/>
+            <a:ext cx="5431536" cy="2011680"/>
           </a:xfrm>
           <a:prstGeom prst="roundRect">
             <a:avLst>
-              <a:gd name="adj" fmla="val 7200"/>
+              <a:gd name="adj" fmla="val 8182"/>
             </a:avLst>
           </a:prstGeom>
           <a:solidFill>
@@ -9462,40 +8427,79 @@
       </p:sp>
       <p:sp>
         <p:nvSpPr>
+          <p:cNvPr id="10" name="Text 8"/>
+          <p:cNvSpPr txBox="1"/>
+          <p:nvPr/>
+        </p:nvSpPr>
+        <p:spPr>
+          <a:xfrm>
+            <a:off x="6528816" y="2377440"/>
+            <a:ext cx="4791456" cy="822960"/>
+          </a:xfrm>
+          <a:prstGeom prst="rect">
+            <a:avLst/>
+          </a:prstGeom>
+          <a:noFill/>
+          <a:ln/>
+        </p:spPr>
+        <p:txBody>
+          <a:bodyPr wrap="square" lIns="0" tIns="0" rIns="0" bIns="0" rtlCol="0" anchor="t"/>
+          <a:lstStyle/>
+          <a:p>
+            <a:pPr indent="0" marL="0">
+              <a:buNone/>
+            </a:pPr>
+            <a:r>
+              <a:rPr lang="en-US" sz="4400" b="1" dirty="0">
+                <a:solidFill>
+                  <a:srgbClr val="141A22"/>
+                </a:solidFill>
+                <a:latin typeface="Arial" pitchFamily="34" charset="0"/>
+                <a:ea typeface="Arial" pitchFamily="34" charset="-122"/>
+                <a:cs typeface="Arial" pitchFamily="34" charset="-120"/>
+              </a:rPr>
+              <a:t>15 млрд $</a:t>
+            </a:r>
+            <a:endParaRPr lang="en-US" sz="4400" dirty="0"/>
+          </a:p>
+        </p:txBody>
+      </p:sp>
+      <p:sp>
+        <p:nvSpPr>
           <p:cNvPr id="11" name="Text 9"/>
           <p:cNvSpPr txBox="1"/>
           <p:nvPr/>
         </p:nvSpPr>
         <p:spPr>
           <a:xfrm>
-            <a:off x="4596384" y="2331720"/>
-            <a:ext cx="2996184" cy="274320"/>
-          </a:xfrm>
-          <a:prstGeom prst="rect">
-            <a:avLst/>
-          </a:prstGeom>
-          <a:noFill/>
-          <a:ln/>
-        </p:spPr>
-        <p:txBody>
-          <a:bodyPr wrap="square" lIns="0" tIns="0" rIns="0" bIns="0" rtlCol="0" anchor="ctr"/>
-          <a:lstStyle/>
-          <a:p>
-            <a:pPr indent="0" marL="0">
-              <a:buNone/>
-            </a:pPr>
-            <a:r>
-              <a:rPr lang="en-US" sz="950" spc="200" kern="0" dirty="0">
-                <a:solidFill>
-                  <a:srgbClr val="0460F5"/>
-                </a:solidFill>
-                <a:latin typeface="Courier New" pitchFamily="34" charset="0"/>
-                <a:ea typeface="Courier New" pitchFamily="34" charset="-122"/>
-                <a:cs typeface="Courier New" pitchFamily="34" charset="-120"/>
-              </a:rPr>
-              <a:t>КЛИЕНТ 2</a:t>
-            </a:r>
-            <a:endParaRPr lang="en-US" sz="950" dirty="0"/>
+            <a:off x="6528816" y="3246120"/>
+            <a:ext cx="4791456" cy="685800"/>
+          </a:xfrm>
+          <a:prstGeom prst="rect">
+            <a:avLst/>
+          </a:prstGeom>
+          <a:noFill/>
+          <a:ln/>
+        </p:spPr>
+        <p:txBody>
+          <a:bodyPr wrap="square" lIns="0" tIns="0" rIns="0" bIns="0" rtlCol="0" anchor="t"/>
+          <a:lstStyle/>
+          <a:p>
+            <a:pPr indent="0" marL="0">
+              <a:buNone/>
+            </a:pPr>
+            <a:r>
+              <a:rPr lang="en-US" sz="1300" dirty="0">
+                <a:solidFill>
+                  <a:srgbClr val="5C6067"/>
+                </a:solidFill>
+                <a:latin typeface="Arial" pitchFamily="34" charset="0"/>
+                <a:ea typeface="Arial" pitchFamily="34" charset="-122"/>
+                <a:cs typeface="Arial" pitchFamily="34" charset="-120"/>
+              </a:rPr>
+              <a:t>контрактов на сети и подстанции за один год выдала Саудовская Аравия. Около 3% таких контрактов — проектирование: порядка 450 млн $ в год в одной стране.</a:t>
+            </a:r>
+            <a:endParaRPr lang="en-US" sz="1300" dirty="0"/>
           </a:p>
         </p:txBody>
       </p:sp>
@@ -9507,230 +8511,8 @@
         </p:nvSpPr>
         <p:spPr>
           <a:xfrm>
-            <a:off x="4596384" y="2651760"/>
-            <a:ext cx="2996184" cy="411480"/>
-          </a:xfrm>
-          <a:prstGeom prst="rect">
-            <a:avLst/>
-          </a:prstGeom>
-          <a:noFill/>
-          <a:ln/>
-        </p:spPr>
-        <p:txBody>
-          <a:bodyPr wrap="square" lIns="0" tIns="0" rIns="0" bIns="0" rtlCol="0" anchor="ctr"/>
-          <a:lstStyle/>
-          <a:p>
-            <a:pPr indent="0" marL="0">
-              <a:buNone/>
-            </a:pPr>
-            <a:r>
-              <a:rPr lang="en-US" sz="1600" b="1" dirty="0">
-                <a:solidFill>
-                  <a:srgbClr val="141A22"/>
-                </a:solidFill>
-                <a:latin typeface="Arial" pitchFamily="34" charset="0"/>
-                <a:ea typeface="Arial" pitchFamily="34" charset="-122"/>
-                <a:cs typeface="Arial" pitchFamily="34" charset="-120"/>
-              </a:rPr>
-              <a:t>Станции и накопители</a:t>
-            </a:r>
-            <a:endParaRPr lang="en-US" sz="1600" dirty="0"/>
-          </a:p>
-        </p:txBody>
-      </p:sp>
-      <p:sp>
-        <p:nvSpPr>
-          <p:cNvPr id="13" name="Text 11"/>
-          <p:cNvSpPr txBox="1"/>
-          <p:nvPr/>
-        </p:nvSpPr>
-        <p:spPr>
-          <a:xfrm>
-            <a:off x="4596384" y="3108960"/>
-            <a:ext cx="2996184" cy="1097280"/>
-          </a:xfrm>
-          <a:prstGeom prst="rect">
-            <a:avLst/>
-          </a:prstGeom>
-          <a:noFill/>
-          <a:ln/>
-        </p:spPr>
-        <p:txBody>
-          <a:bodyPr wrap="square" lIns="0" tIns="0" rIns="0" bIns="0" rtlCol="0" anchor="t"/>
-          <a:lstStyle/>
-          <a:p>
-            <a:pPr indent="0" marL="0">
-              <a:buNone/>
-            </a:pPr>
-            <a:r>
-              <a:rPr lang="en-US" sz="1250" dirty="0">
-                <a:solidFill>
-                  <a:srgbClr val="5C6067"/>
-                </a:solidFill>
-                <a:latin typeface="Arial" pitchFamily="34" charset="0"/>
-                <a:ea typeface="Arial" pitchFamily="34" charset="-122"/>
-                <a:cs typeface="Arial" pitchFamily="34" charset="-120"/>
-              </a:rPr>
-              <a:t>Солнце, ветер, батареи — основная масса очереди. Десятки проектов у одного девелопера.</a:t>
-            </a:r>
-            <a:endParaRPr lang="en-US" sz="1250" dirty="0"/>
-          </a:p>
-        </p:txBody>
-      </p:sp>
-      <p:sp>
-        <p:nvSpPr>
-          <p:cNvPr id="14" name="Shape 12"/>
-          <p:cNvSpPr/>
-          <p:nvPr/>
-        </p:nvSpPr>
-        <p:spPr>
-          <a:xfrm>
-            <a:off x="8095488" y="2103120"/>
-            <a:ext cx="3544824" cy="2286000"/>
-          </a:xfrm>
-          <a:prstGeom prst="roundRect">
-            <a:avLst>
-              <a:gd name="adj" fmla="val 7200"/>
-            </a:avLst>
-          </a:prstGeom>
-          <a:solidFill>
-            <a:srgbClr val="F7F7F7"/>
-          </a:solidFill>
-          <a:ln w="12700">
-            <a:solidFill>
-              <a:srgbClr val="F7F7F7"/>
-            </a:solidFill>
-            <a:prstDash val="solid"/>
-          </a:ln>
-        </p:spPr>
-      </p:sp>
-      <p:sp>
-        <p:nvSpPr>
-          <p:cNvPr id="15" name="Text 13"/>
-          <p:cNvSpPr txBox="1"/>
-          <p:nvPr/>
-        </p:nvSpPr>
-        <p:spPr>
-          <a:xfrm>
-            <a:off x="8369808" y="2331720"/>
-            <a:ext cx="2996184" cy="274320"/>
-          </a:xfrm>
-          <a:prstGeom prst="rect">
-            <a:avLst/>
-          </a:prstGeom>
-          <a:noFill/>
-          <a:ln/>
-        </p:spPr>
-        <p:txBody>
-          <a:bodyPr wrap="square" lIns="0" tIns="0" rIns="0" bIns="0" rtlCol="0" anchor="ctr"/>
-          <a:lstStyle/>
-          <a:p>
-            <a:pPr indent="0" marL="0">
-              <a:buNone/>
-            </a:pPr>
-            <a:r>
-              <a:rPr lang="en-US" sz="950" spc="200" kern="0" dirty="0">
-                <a:solidFill>
-                  <a:srgbClr val="0460F5"/>
-                </a:solidFill>
-                <a:latin typeface="Courier New" pitchFamily="34" charset="0"/>
-                <a:ea typeface="Courier New" pitchFamily="34" charset="-122"/>
-                <a:cs typeface="Courier New" pitchFamily="34" charset="-120"/>
-              </a:rPr>
-              <a:t>КЛИЕНТ 3</a:t>
-            </a:r>
-            <a:endParaRPr lang="en-US" sz="950" dirty="0"/>
-          </a:p>
-        </p:txBody>
-      </p:sp>
-      <p:sp>
-        <p:nvSpPr>
-          <p:cNvPr id="16" name="Text 14"/>
-          <p:cNvSpPr txBox="1"/>
-          <p:nvPr/>
-        </p:nvSpPr>
-        <p:spPr>
-          <a:xfrm>
-            <a:off x="8369808" y="2651760"/>
-            <a:ext cx="2996184" cy="411480"/>
-          </a:xfrm>
-          <a:prstGeom prst="rect">
-            <a:avLst/>
-          </a:prstGeom>
-          <a:noFill/>
-          <a:ln/>
-        </p:spPr>
-        <p:txBody>
-          <a:bodyPr wrap="square" lIns="0" tIns="0" rIns="0" bIns="0" rtlCol="0" anchor="ctr"/>
-          <a:lstStyle/>
-          <a:p>
-            <a:pPr indent="0" marL="0">
-              <a:buNone/>
-            </a:pPr>
-            <a:r>
-              <a:rPr lang="en-US" sz="1600" b="1" dirty="0">
-                <a:solidFill>
-                  <a:srgbClr val="141A22"/>
-                </a:solidFill>
-                <a:latin typeface="Arial" pitchFamily="34" charset="0"/>
-                <a:ea typeface="Arial" pitchFamily="34" charset="-122"/>
-                <a:cs typeface="Arial" pitchFamily="34" charset="-120"/>
-              </a:rPr>
-              <a:t>Крупные подрядчики и сети</a:t>
-            </a:r>
-            <a:endParaRPr lang="en-US" sz="1600" dirty="0"/>
-          </a:p>
-        </p:txBody>
-      </p:sp>
-      <p:sp>
-        <p:nvSpPr>
-          <p:cNvPr id="17" name="Text 15"/>
-          <p:cNvSpPr txBox="1"/>
-          <p:nvPr/>
-        </p:nvSpPr>
-        <p:spPr>
-          <a:xfrm>
-            <a:off x="8369808" y="3108960"/>
-            <a:ext cx="2996184" cy="1097280"/>
-          </a:xfrm>
-          <a:prstGeom prst="rect">
-            <a:avLst/>
-          </a:prstGeom>
-          <a:noFill/>
-          <a:ln/>
-        </p:spPr>
-        <p:txBody>
-          <a:bodyPr wrap="square" lIns="0" tIns="0" rIns="0" bIns="0" rtlCol="0" anchor="t"/>
-          <a:lstStyle/>
-          <a:p>
-            <a:pPr indent="0" marL="0">
-              <a:buNone/>
-            </a:pPr>
-            <a:r>
-              <a:rPr lang="en-US" sz="1250" dirty="0">
-                <a:solidFill>
-                  <a:srgbClr val="5C6067"/>
-                </a:solidFill>
-                <a:latin typeface="Arial" pitchFamily="34" charset="0"/>
-                <a:ea typeface="Arial" pitchFamily="34" charset="-122"/>
-                <a:cs typeface="Arial" pitchFamily="34" charset="-120"/>
-              </a:rPr>
-              <a:t>Им не хватает инженеров под собственные программы. Покупают наши часы оптом.</a:t>
-            </a:r>
-            <a:endParaRPr lang="en-US" sz="1250" dirty="0"/>
-          </a:p>
-        </p:txBody>
-      </p:sp>
-      <p:sp>
-        <p:nvSpPr>
-          <p:cNvPr id="18" name="Text 16"/>
-          <p:cNvSpPr txBox="1"/>
-          <p:nvPr/>
-        </p:nvSpPr>
-        <p:spPr>
-          <a:xfrm>
-            <a:off x="548640" y="4617720"/>
-            <a:ext cx="10725912" cy="1280160"/>
+            <a:off x="548640" y="4434840"/>
+            <a:ext cx="10725912" cy="1005840"/>
           </a:xfrm>
           <a:prstGeom prst="rect">
             <a:avLst/>
@@ -9749,7 +8531,7 @@
               <a:buNone/>
             </a:pPr>
             <a:r>
-              <a:rPr lang="en-US" sz="1400" dirty="0">
+              <a:rPr lang="en-US" sz="1500" dirty="0">
                 <a:solidFill>
                   <a:srgbClr val="141A22"/>
                 </a:solidFill>
@@ -9757,9 +8539,48 @@
                 <a:ea typeface="Arial" pitchFamily="34" charset="-122"/>
                 <a:cs typeface="Arial" pitchFamily="34" charset="-120"/>
               </a:rPr>
-              <a:t>В США проблему лучше всего измерили. Начинаем мы с Персидского залива и Индии: там строят больше, а инженеров не хватает так же — Саудовская Аравия законом требует 30% местных инженеров, и компании не знают, где их взять. Стоят инженеры по-разному: в Индии в несколько раз дешевле, чем в США. Для команды из России США и Европа — позже и через партнёров.</a:t>
-            </a:r>
-            <a:endParaRPr lang="en-US" sz="1400" dirty="0"/>
+              <a:t>Мы собираем группу по цене около 70 тысяч долларов за инженера — покупая небольшие фирмы там, где инженеры есть. Такие группы стратеги покупают по 445 тысяч за инженера: WSP заплатила именно столько.</a:t>
+            </a:r>
+            <a:endParaRPr lang="en-US" sz="1500" dirty="0"/>
+          </a:p>
+        </p:txBody>
+      </p:sp>
+      <p:sp>
+        <p:nvSpPr>
+          <p:cNvPr id="13" name="Text 11"/>
+          <p:cNvSpPr txBox="1"/>
+          <p:nvPr/>
+        </p:nvSpPr>
+        <p:spPr>
+          <a:xfrm>
+            <a:off x="548640" y="5532120"/>
+            <a:ext cx="10725912" cy="457200"/>
+          </a:xfrm>
+          <a:prstGeom prst="rect">
+            <a:avLst/>
+          </a:prstGeom>
+          <a:noFill/>
+          <a:ln/>
+        </p:spPr>
+        <p:txBody>
+          <a:bodyPr wrap="square" lIns="0" tIns="0" rIns="0" bIns="0" rtlCol="0" anchor="t"/>
+          <a:lstStyle/>
+          <a:p>
+            <a:pPr indent="0" marL="0">
+              <a:buNone/>
+            </a:pPr>
+            <a:r>
+              <a:rPr lang="en-US" sz="1500" i="1" dirty="0">
+                <a:solidFill>
+                  <a:srgbClr val="0460F5"/>
+                </a:solidFill>
+                <a:latin typeface="Arial" pitchFamily="34" charset="0"/>
+                <a:ea typeface="Arial" pitchFamily="34" charset="-122"/>
+                <a:cs typeface="Arial" pitchFamily="34" charset="-120"/>
+              </a:rPr>
+              <a:t>Разница между ценой входа и ценой выхода — и есть сделка.</a:t>
+            </a:r>
+            <a:endParaRPr lang="en-US" sz="1500" dirty="0"/>
           </a:p>
         </p:txBody>
       </p:sp>
@@ -9771,9 +8592,9 @@
 </p:sld>
 </file>
 
-<file path=ppt/slides/slide7.xml><?xml version="1.0" encoding="utf-8"?>
+<file path=ppt/slides/slide8.xml><?xml version="1.0" encoding="utf-8"?>
 <p:sld xmlns:a="http://schemas.openxmlformats.org/drawingml/2006/main" xmlns:r="http://schemas.openxmlformats.org/officeDocument/2006/relationships" xmlns:p="http://schemas.openxmlformats.org/presentationml/2006/main">
-  <p:cSld name="Slide 7">
+  <p:cSld name="Slide 8">
     <p:bg>
       <p:bgPr>
         <a:solidFill>
@@ -9867,7 +8688,7 @@
                 <a:ea typeface="Courier New" pitchFamily="34" charset="-122"/>
                 <a:cs typeface="Courier New" pitchFamily="34" charset="-120"/>
               </a:rPr>
-              <a:t>5 · БИЗНЕС-МОДЕЛЬ</a:t>
+              <a:t>7 · ПЛАН РАЗВИТИЯ</a:t>
             </a:r>
             <a:endParaRPr lang="en-US" sz="950" dirty="0"/>
           </a:p>
@@ -9906,7 +8727,7 @@
                 <a:ea typeface="Arial" pitchFamily="34" charset="-122"/>
                 <a:cs typeface="Arial" pitchFamily="34" charset="-120"/>
               </a:rPr>
-              <a:t>Та же фирма, те же люди — в полтора раза больше выручки</a:t>
+              <a:t>Год 1 — первая фирма. Год 3 — пять фирм. Потом — продажа</a:t>
             </a:r>
             <a:endParaRPr lang="en-US" sz="2800" dirty="0"/>
           </a:p>
@@ -9945,7 +8766,7 @@
                 <a:ea typeface="Courier New" pitchFamily="34" charset="-122"/>
                 <a:cs typeface="Courier New" pitchFamily="34" charset="-120"/>
               </a:rPr>
-              <a:t>7 / 15</a:t>
+              <a:t>8 / 13</a:t>
             </a:r>
             <a:endParaRPr lang="en-US" sz="900" dirty="0"/>
           </a:p>
@@ -9960,7 +8781,7 @@
         <p:spPr>
           <a:xfrm>
             <a:off x="548640" y="2103120"/>
-            <a:ext cx="5431536" cy="2286000"/>
+            <a:ext cx="3544824" cy="2286000"/>
           </a:xfrm>
           <a:prstGeom prst="roundRect">
             <a:avLst>
@@ -9986,8 +8807,8 @@
         </p:nvSpPr>
         <p:spPr>
           <a:xfrm>
-            <a:off x="868680" y="2331720"/>
-            <a:ext cx="4791456" cy="274320"/>
+            <a:off x="822960" y="2331720"/>
+            <a:ext cx="2996184" cy="274320"/>
           </a:xfrm>
           <a:prstGeom prst="rect">
             <a:avLst/>
@@ -10005,13 +8826,13 @@
             <a:r>
               <a:rPr lang="en-US" sz="950" spc="200" kern="0" dirty="0">
                 <a:solidFill>
-                  <a:srgbClr val="FFFFFF"/>
+                  <a:srgbClr val="D5F774"/>
                 </a:solidFill>
                 <a:latin typeface="Courier New" pitchFamily="34" charset="0"/>
                 <a:ea typeface="Courier New" pitchFamily="34" charset="-122"/>
                 <a:cs typeface="Courier New" pitchFamily="34" charset="-120"/>
               </a:rPr>
-              <a:t>ФИРМА ДО ПОКУПКИ</a:t>
+              <a:t>ГОД 1</a:t>
             </a:r>
             <a:endParaRPr lang="en-US" sz="950" dirty="0"/>
           </a:p>
@@ -10025,8 +8846,47 @@
         </p:nvSpPr>
         <p:spPr>
           <a:xfrm>
-            <a:off x="868680" y="2697480"/>
-            <a:ext cx="4791456" cy="822960"/>
+            <a:off x="822960" y="2651760"/>
+            <a:ext cx="2996184" cy="411480"/>
+          </a:xfrm>
+          <a:prstGeom prst="rect">
+            <a:avLst/>
+          </a:prstGeom>
+          <a:noFill/>
+          <a:ln/>
+        </p:spPr>
+        <p:txBody>
+          <a:bodyPr wrap="square" lIns="0" tIns="0" rIns="0" bIns="0" rtlCol="0" anchor="ctr"/>
+          <a:lstStyle/>
+          <a:p>
+            <a:pPr indent="0" marL="0">
+              <a:buNone/>
+            </a:pPr>
+            <a:r>
+              <a:rPr lang="en-US" sz="1600" b="1" dirty="0">
+                <a:solidFill>
+                  <a:srgbClr val="FFFFFF"/>
+                </a:solidFill>
+                <a:latin typeface="Arial" pitchFamily="34" charset="0"/>
+                <a:ea typeface="Arial" pitchFamily="34" charset="-122"/>
+                <a:cs typeface="Arial" pitchFamily="34" charset="-120"/>
+              </a:rPr>
+              <a:t>Первая фирма</a:t>
+            </a:r>
+            <a:endParaRPr lang="en-US" sz="1600" dirty="0"/>
+          </a:p>
+        </p:txBody>
+      </p:sp>
+      <p:sp>
+        <p:nvSpPr>
+          <p:cNvPr id="9" name="Text 7"/>
+          <p:cNvSpPr txBox="1"/>
+          <p:nvPr/>
+        </p:nvSpPr>
+        <p:spPr>
+          <a:xfrm>
+            <a:off x="822960" y="3108960"/>
+            <a:ext cx="2996184" cy="1097280"/>
           </a:xfrm>
           <a:prstGeom prst="rect">
             <a:avLst/>
@@ -10042,46 +8902,7 @@
               <a:buNone/>
             </a:pPr>
             <a:r>
-              <a:rPr lang="en-US" sz="4400" b="1" dirty="0">
-                <a:solidFill>
-                  <a:srgbClr val="FFFFFF"/>
-                </a:solidFill>
-                <a:latin typeface="Arial" pitchFamily="34" charset="0"/>
-                <a:ea typeface="Arial" pitchFamily="34" charset="-122"/>
-                <a:cs typeface="Arial" pitchFamily="34" charset="-120"/>
-              </a:rPr>
-              <a:t>2,8 млн $</a:t>
-            </a:r>
-            <a:endParaRPr lang="en-US" sz="4400" dirty="0"/>
-          </a:p>
-        </p:txBody>
-      </p:sp>
-      <p:sp>
-        <p:nvSpPr>
-          <p:cNvPr id="9" name="Text 7"/>
-          <p:cNvSpPr txBox="1"/>
-          <p:nvPr/>
-        </p:nvSpPr>
-        <p:spPr>
-          <a:xfrm>
-            <a:off x="868680" y="3566160"/>
-            <a:ext cx="4791456" cy="640080"/>
-          </a:xfrm>
-          <a:prstGeom prst="rect">
-            <a:avLst/>
-          </a:prstGeom>
-          <a:noFill/>
-          <a:ln/>
-        </p:spPr>
-        <p:txBody>
-          <a:bodyPr wrap="square" lIns="0" tIns="0" rIns="0" bIns="0" rtlCol="0" anchor="t"/>
-          <a:lstStyle/>
-          <a:p>
-            <a:pPr indent="0" marL="0">
-              <a:buNone/>
-            </a:pPr>
-            <a:r>
-              <a:rPr lang="en-US" sz="1300" dirty="0">
+              <a:rPr lang="en-US" sz="1250" dirty="0">
                 <a:solidFill>
                   <a:srgbClr val="B8B8B8"/>
                 </a:solidFill>
@@ -10089,9 +8910,9 @@
                 <a:ea typeface="Arial" pitchFamily="34" charset="-122"/>
                 <a:cs typeface="Arial" pitchFamily="34" charset="-120"/>
               </a:rPr>
-              <a:t>выручки в год · 40 инженеров · маржа бюро без ИИ</a:t>
-            </a:r>
-            <a:endParaRPr lang="en-US" sz="1300" dirty="0"/>
+              <a:t>ИИ работает на реальных проектах. Куплена первая компания на 20–50 инженеров. Проекты — вдвое быстрее.</a:t>
+            </a:r>
+            <a:endParaRPr lang="en-US" sz="1250" dirty="0"/>
           </a:p>
         </p:txBody>
       </p:sp>
@@ -10103,8 +8924,8 @@
         </p:nvSpPr>
         <p:spPr>
           <a:xfrm>
-            <a:off x="6208776" y="2103120"/>
-            <a:ext cx="5431536" cy="2286000"/>
+            <a:off x="4322064" y="2103120"/>
+            <a:ext cx="3544824" cy="2286000"/>
           </a:xfrm>
           <a:prstGeom prst="roundRect">
             <a:avLst>
@@ -10112,11 +8933,11 @@
             </a:avLst>
           </a:prstGeom>
           <a:solidFill>
-            <a:srgbClr val="2C3A1C"/>
+            <a:srgbClr val="343434"/>
           </a:solidFill>
           <a:ln w="12700">
             <a:solidFill>
-              <a:srgbClr val="2C3A1C"/>
+              <a:srgbClr val="343434"/>
             </a:solidFill>
             <a:prstDash val="solid"/>
           </a:ln>
@@ -10130,8 +8951,8 @@
         </p:nvSpPr>
         <p:spPr>
           <a:xfrm>
-            <a:off x="6528816" y="2331720"/>
-            <a:ext cx="4791456" cy="274320"/>
+            <a:off x="4596384" y="2331720"/>
+            <a:ext cx="2996184" cy="274320"/>
           </a:xfrm>
           <a:prstGeom prst="rect">
             <a:avLst/>
@@ -10155,7 +8976,7 @@
                 <a:ea typeface="Courier New" pitchFamily="34" charset="-122"/>
                 <a:cs typeface="Courier New" pitchFamily="34" charset="-120"/>
               </a:rPr>
-              <a:t>ТА ЖЕ ФИРМА С НАШИМ ИИ</a:t>
+              <a:t>ГОДЫ 2–3</a:t>
             </a:r>
             <a:endParaRPr lang="en-US" sz="950" dirty="0"/>
           </a:p>
@@ -10169,8 +8990,47 @@
         </p:nvSpPr>
         <p:spPr>
           <a:xfrm>
-            <a:off x="6528816" y="2697480"/>
-            <a:ext cx="4791456" cy="822960"/>
+            <a:off x="4596384" y="2651760"/>
+            <a:ext cx="2996184" cy="411480"/>
+          </a:xfrm>
+          <a:prstGeom prst="rect">
+            <a:avLst/>
+          </a:prstGeom>
+          <a:noFill/>
+          <a:ln/>
+        </p:spPr>
+        <p:txBody>
+          <a:bodyPr wrap="square" lIns="0" tIns="0" rIns="0" bIns="0" rtlCol="0" anchor="ctr"/>
+          <a:lstStyle/>
+          <a:p>
+            <a:pPr indent="0" marL="0">
+              <a:buNone/>
+            </a:pPr>
+            <a:r>
+              <a:rPr lang="en-US" sz="1600" b="1" dirty="0">
+                <a:solidFill>
+                  <a:srgbClr val="FFFFFF"/>
+                </a:solidFill>
+                <a:latin typeface="Arial" pitchFamily="34" charset="0"/>
+                <a:ea typeface="Arial" pitchFamily="34" charset="-122"/>
+                <a:cs typeface="Arial" pitchFamily="34" charset="-120"/>
+              </a:rPr>
+              <a:t>Пять фирм</a:t>
+            </a:r>
+            <a:endParaRPr lang="en-US" sz="1600" dirty="0"/>
+          </a:p>
+        </p:txBody>
+      </p:sp>
+      <p:sp>
+        <p:nvSpPr>
+          <p:cNvPr id="13" name="Text 11"/>
+          <p:cNvSpPr txBox="1"/>
+          <p:nvPr/>
+        </p:nvSpPr>
+        <p:spPr>
+          <a:xfrm>
+            <a:off x="4596384" y="3108960"/>
+            <a:ext cx="2996184" cy="1097280"/>
           </a:xfrm>
           <a:prstGeom prst="rect">
             <a:avLst/>
@@ -10186,30 +9046,135 @@
               <a:buNone/>
             </a:pPr>
             <a:r>
-              <a:rPr lang="en-US" sz="4400" b="1" dirty="0">
+              <a:rPr lang="en-US" sz="1250" dirty="0">
+                <a:solidFill>
+                  <a:srgbClr val="B8B8B8"/>
+                </a:solidFill>
+                <a:latin typeface="Arial" pitchFamily="34" charset="0"/>
+                <a:ea typeface="Arial" pitchFamily="34" charset="-122"/>
+                <a:cs typeface="Arial" pitchFamily="34" charset="-120"/>
+              </a:rPr>
+              <a:t>200 инженеров, один ИИ на всех, 20 млн $ выручки в год.</a:t>
+            </a:r>
+            <a:endParaRPr lang="en-US" sz="1250" dirty="0"/>
+          </a:p>
+        </p:txBody>
+      </p:sp>
+      <p:sp>
+        <p:nvSpPr>
+          <p:cNvPr id="14" name="Shape 12"/>
+          <p:cNvSpPr/>
+          <p:nvPr/>
+        </p:nvSpPr>
+        <p:spPr>
+          <a:xfrm>
+            <a:off x="8095488" y="2103120"/>
+            <a:ext cx="3544824" cy="2286000"/>
+          </a:xfrm>
+          <a:prstGeom prst="roundRect">
+            <a:avLst>
+              <a:gd name="adj" fmla="val 7200"/>
+            </a:avLst>
+          </a:prstGeom>
+          <a:solidFill>
+            <a:srgbClr val="343434"/>
+          </a:solidFill>
+          <a:ln w="12700">
+            <a:solidFill>
+              <a:srgbClr val="343434"/>
+            </a:solidFill>
+            <a:prstDash val="solid"/>
+          </a:ln>
+        </p:spPr>
+      </p:sp>
+      <p:sp>
+        <p:nvSpPr>
+          <p:cNvPr id="15" name="Text 13"/>
+          <p:cNvSpPr txBox="1"/>
+          <p:nvPr/>
+        </p:nvSpPr>
+        <p:spPr>
+          <a:xfrm>
+            <a:off x="8369808" y="2331720"/>
+            <a:ext cx="2996184" cy="274320"/>
+          </a:xfrm>
+          <a:prstGeom prst="rect">
+            <a:avLst/>
+          </a:prstGeom>
+          <a:noFill/>
+          <a:ln/>
+        </p:spPr>
+        <p:txBody>
+          <a:bodyPr wrap="square" lIns="0" tIns="0" rIns="0" bIns="0" rtlCol="0" anchor="ctr"/>
+          <a:lstStyle/>
+          <a:p>
+            <a:pPr indent="0" marL="0">
+              <a:buNone/>
+            </a:pPr>
+            <a:r>
+              <a:rPr lang="en-US" sz="950" spc="200" kern="0" dirty="0">
                 <a:solidFill>
                   <a:srgbClr val="D5F774"/>
                 </a:solidFill>
-                <a:latin typeface="Arial" pitchFamily="34" charset="0"/>
-                <a:ea typeface="Arial" pitchFamily="34" charset="-122"/>
-                <a:cs typeface="Arial" pitchFamily="34" charset="-120"/>
-              </a:rPr>
-              <a:t>4,2 млн $</a:t>
-            </a:r>
-            <a:endParaRPr lang="en-US" sz="4400" dirty="0"/>
-          </a:p>
-        </p:txBody>
-      </p:sp>
-      <p:sp>
-        <p:nvSpPr>
-          <p:cNvPr id="13" name="Text 11"/>
-          <p:cNvSpPr txBox="1"/>
-          <p:nvPr/>
-        </p:nvSpPr>
-        <p:spPr>
-          <a:xfrm>
-            <a:off x="6528816" y="3566160"/>
-            <a:ext cx="4791456" cy="640080"/>
+                <a:latin typeface="Courier New" pitchFamily="34" charset="0"/>
+                <a:ea typeface="Courier New" pitchFamily="34" charset="-122"/>
+                <a:cs typeface="Courier New" pitchFamily="34" charset="-120"/>
+              </a:rPr>
+              <a:t>ГОДЫ 4–5</a:t>
+            </a:r>
+            <a:endParaRPr lang="en-US" sz="950" dirty="0"/>
+          </a:p>
+        </p:txBody>
+      </p:sp>
+      <p:sp>
+        <p:nvSpPr>
+          <p:cNvPr id="16" name="Text 14"/>
+          <p:cNvSpPr txBox="1"/>
+          <p:nvPr/>
+        </p:nvSpPr>
+        <p:spPr>
+          <a:xfrm>
+            <a:off x="8369808" y="2651760"/>
+            <a:ext cx="2996184" cy="411480"/>
+          </a:xfrm>
+          <a:prstGeom prst="rect">
+            <a:avLst/>
+          </a:prstGeom>
+          <a:noFill/>
+          <a:ln/>
+        </p:spPr>
+        <p:txBody>
+          <a:bodyPr wrap="square" lIns="0" tIns="0" rIns="0" bIns="0" rtlCol="0" anchor="ctr"/>
+          <a:lstStyle/>
+          <a:p>
+            <a:pPr indent="0" marL="0">
+              <a:buNone/>
+            </a:pPr>
+            <a:r>
+              <a:rPr lang="en-US" sz="1600" b="1" dirty="0">
+                <a:solidFill>
+                  <a:srgbClr val="FFFFFF"/>
+                </a:solidFill>
+                <a:latin typeface="Arial" pitchFamily="34" charset="0"/>
+                <a:ea typeface="Arial" pitchFamily="34" charset="-122"/>
+                <a:cs typeface="Arial" pitchFamily="34" charset="-120"/>
+              </a:rPr>
+              <a:t>Продажа</a:t>
+            </a:r>
+            <a:endParaRPr lang="en-US" sz="1600" dirty="0"/>
+          </a:p>
+        </p:txBody>
+      </p:sp>
+      <p:sp>
+        <p:nvSpPr>
+          <p:cNvPr id="17" name="Text 15"/>
+          <p:cNvSpPr txBox="1"/>
+          <p:nvPr/>
+        </p:nvSpPr>
+        <p:spPr>
+          <a:xfrm>
+            <a:off x="8369808" y="3108960"/>
+            <a:ext cx="2996184" cy="1097280"/>
           </a:xfrm>
           <a:prstGeom prst="rect">
             <a:avLst/>
@@ -10225,7 +9190,7 @@
               <a:buNone/>
             </a:pPr>
             <a:r>
-              <a:rPr lang="en-US" sz="1300" dirty="0">
+              <a:rPr lang="en-US" sz="1250" dirty="0">
                 <a:solidFill>
                   <a:srgbClr val="B8B8B8"/>
                 </a:solidFill>
@@ -10233,22 +9198,22 @@
                 <a:ea typeface="Arial" pitchFamily="34" charset="-122"/>
                 <a:cs typeface="Arial" pitchFamily="34" charset="-120"/>
               </a:rPr>
-              <a:t>выручки в год · те же 40 инженеров · маржа 24% после оплаты ИИ-команды</a:t>
-            </a:r>
-            <a:endParaRPr lang="en-US" sz="1300" dirty="0"/>
-          </a:p>
-        </p:txBody>
-      </p:sp>
-      <p:sp>
-        <p:nvSpPr>
-          <p:cNvPr id="14" name="Text 12"/>
-          <p:cNvSpPr txBox="1"/>
-          <p:nvPr/>
-        </p:nvSpPr>
-        <p:spPr>
-          <a:xfrm>
-            <a:off x="548640" y="4526280"/>
-            <a:ext cx="10725912" cy="1371600"/>
+              <a:t>Группа на 500 инженеров: рост с 200 — на выручку группы и долг под неё, не из этого раунда. Покупатель — те, кто уже платит за инженеров миллиарды: WSP, Stantec, Cyient.</a:t>
+            </a:r>
+            <a:endParaRPr lang="en-US" sz="1250" dirty="0"/>
+          </a:p>
+        </p:txBody>
+      </p:sp>
+      <p:sp>
+        <p:nvSpPr>
+          <p:cNvPr id="18" name="Text 16"/>
+          <p:cNvSpPr txBox="1"/>
+          <p:nvPr/>
+        </p:nvSpPr>
+        <p:spPr>
+          <a:xfrm>
+            <a:off x="548640" y="4617720"/>
+            <a:ext cx="10725912" cy="914400"/>
           </a:xfrm>
           <a:prstGeom prst="rect">
             <a:avLst/>
@@ -10267,7 +9232,7 @@
               <a:buNone/>
             </a:pPr>
             <a:r>
-              <a:rPr lang="en-US" sz="1400" dirty="0">
+              <a:rPr lang="en-US" sz="1450" dirty="0">
                 <a:solidFill>
                   <a:srgbClr val="FFFFFF"/>
                 </a:solidFill>
@@ -10275,21 +9240,21 @@
                 <a:ea typeface="Arial" pitchFamily="34" charset="-122"/>
                 <a:cs typeface="Arial" pitchFamily="34" charset="-120"/>
               </a:rPr>
-              <a:t>Заказов у таких фирм больше, чем рук, — поэтому они и не могут нанять. Прирост 1,4 млн $ в год с тех же людей. Но ИИ-команда стоит 1,2 млн $ в год на всю группу: при одной фирме она съедает почти весь прирост, при пяти — обходится по 240 тысяч на фирму. Поэтому одна фирма — эксперимент, а бизнес — группа.</a:t>
-            </a:r>
-            <a:endParaRPr lang="en-US" sz="1400" dirty="0"/>
-          </a:p>
-        </p:txBody>
-      </p:sp>
-      <p:sp>
-        <p:nvSpPr>
-          <p:cNvPr id="15" name="Text 13"/>
-          <p:cNvSpPr txBox="1"/>
-          <p:nvPr/>
-        </p:nvSpPr>
-        <p:spPr>
-          <a:xfrm>
-            <a:off x="548640" y="5943600"/>
+              <a:t>Почему сейчас: гиганты только начали нанимать менеджеров по ИИ — Black &amp; Veatch открыл такую вакансию в августе 2026. ИИ будет у всех через год-два. Первый, кто соберёт группу с ИИ внутри, станет консолидатором отрасли.</a:t>
+            </a:r>
+            <a:endParaRPr lang="en-US" sz="1450" dirty="0"/>
+          </a:p>
+        </p:txBody>
+      </p:sp>
+      <p:sp>
+        <p:nvSpPr>
+          <p:cNvPr id="19" name="Text 17"/>
+          <p:cNvSpPr txBox="1"/>
+          <p:nvPr/>
+        </p:nvSpPr>
+        <p:spPr>
+          <a:xfrm>
+            <a:off x="548640" y="5669280"/>
             <a:ext cx="9445752" cy="457200"/>
           </a:xfrm>
           <a:prstGeom prst="rect">
@@ -10314,7 +9279,7 @@
                 <a:ea typeface="Arial" pitchFamily="34" charset="-122"/>
                 <a:cs typeface="Arial" pitchFamily="34" charset="-120"/>
               </a:rPr>
-              <a:t>Базовый сценарий финмодели: рост выработки в полтора раза, цель — вдвое; покупка фирмы за годовую выручку. Финмодель с тремя сценариями прилагается.</a:t>
+              <a:t>Годы 2–5 — цели, не прогноз. Ориентиры масштаба — сделки-аналоги.</a:t>
             </a:r>
             <a:endParaRPr lang="en-US" sz="1000" dirty="0"/>
           </a:p>
@@ -10328,9 +9293,9 @@
 </p:sld>
 </file>
 
-<file path=ppt/slides/slide8.xml><?xml version="1.0" encoding="utf-8"?>
+<file path=ppt/slides/slide9.xml><?xml version="1.0" encoding="utf-8"?>
 <p:sld xmlns:a="http://schemas.openxmlformats.org/drawingml/2006/main" xmlns:r="http://schemas.openxmlformats.org/officeDocument/2006/relationships" xmlns:p="http://schemas.openxmlformats.org/presentationml/2006/main">
-  <p:cSld name="Slide 8">
+  <p:cSld name="Slide 9">
     <p:bg>
       <p:bgPr>
         <a:solidFill>
@@ -10424,7 +9389,7 @@
                 <a:ea typeface="Courier New" pitchFamily="34" charset="-122"/>
                 <a:cs typeface="Courier New" pitchFamily="34" charset="-120"/>
               </a:rPr>
-              <a:t>6 · РЫНОК</a:t>
+              <a:t>8 · КОМАНДА</a:t>
             </a:r>
             <a:endParaRPr lang="en-US" sz="950" dirty="0"/>
           </a:p>
@@ -10463,7 +9428,7 @@
                 <a:ea typeface="Arial" pitchFamily="34" charset="-122"/>
                 <a:cs typeface="Arial" pitchFamily="34" charset="-120"/>
               </a:rPr>
-              <a:t>За инженеров, которые проектируют сети, уже платят миллиарды</a:t>
+              <a:t>Океан Тех: 64 человека, 48 проектов — и три основателя</a:t>
             </a:r>
             <a:endParaRPr lang="en-US" sz="2800" dirty="0"/>
           </a:p>
@@ -10502,7 +9467,7 @@
                 <a:ea typeface="Courier New" pitchFamily="34" charset="-122"/>
                 <a:cs typeface="Courier New" pitchFamily="34" charset="-120"/>
               </a:rPr>
-              <a:t>8 / 15</a:t>
+              <a:t>9 / 13</a:t>
             </a:r>
             <a:endParaRPr lang="en-US" sz="900" dirty="0"/>
           </a:p>
@@ -10516,12 +9481,12 @@
         </p:nvSpPr>
         <p:spPr>
           <a:xfrm>
-            <a:off x="548640" y="2103120"/>
-            <a:ext cx="5431536" cy="2011680"/>
+            <a:off x="548640" y="2011680"/>
+            <a:ext cx="3544824" cy="1965960"/>
           </a:xfrm>
           <a:prstGeom prst="roundRect">
             <a:avLst>
-              <a:gd name="adj" fmla="val 8182"/>
+              <a:gd name="adj" fmla="val 8372"/>
             </a:avLst>
           </a:prstGeom>
           <a:solidFill>
@@ -10535,16 +9500,81 @@
           </a:ln>
         </p:spPr>
       </p:sp>
-      <p:sp>
-        <p:nvSpPr>
-          <p:cNvPr id="7" name="Text 5"/>
-          <p:cNvSpPr txBox="1"/>
-          <p:nvPr/>
-        </p:nvSpPr>
-        <p:spPr>
-          <a:xfrm>
-            <a:off x="868680" y="2377440"/>
-            <a:ext cx="4791456" cy="822960"/>
+      <p:pic>
+        <p:nvPicPr>
+          <p:cNvPr id="7" name="Image 0" descr="/tmp/claude-0/-home-user/5ac64fc3-708b-5ba2-8575-a96a48f05f03/scratchpad/okean/penkov.png">    </p:cNvPr>
+          <p:cNvPicPr>
+            <a:picLocks noChangeAspect="1"/>
+          </p:cNvPicPr>
+          <p:nvPr/>
+        </p:nvPicPr>
+        <p:blipFill>
+          <a:blip r:embed="rId1"/>
+          <a:stretch>
+            <a:fillRect/>
+          </a:stretch>
+        </p:blipFill>
+        <p:spPr>
+          <a:xfrm>
+            <a:off x="777240" y="2212848"/>
+            <a:ext cx="1218895" cy="1417320"/>
+          </a:xfrm>
+          <a:prstGeom prst="rect">
+            <a:avLst/>
+          </a:prstGeom>
+        </p:spPr>
+      </p:pic>
+      <p:sp>
+        <p:nvSpPr>
+          <p:cNvPr id="8" name="Text 5"/>
+          <p:cNvSpPr txBox="1"/>
+          <p:nvPr/>
+        </p:nvSpPr>
+        <p:spPr>
+          <a:xfrm>
+            <a:off x="2179015" y="2212848"/>
+            <a:ext cx="1685849" cy="274320"/>
+          </a:xfrm>
+          <a:prstGeom prst="rect">
+            <a:avLst/>
+          </a:prstGeom>
+          <a:noFill/>
+          <a:ln/>
+        </p:spPr>
+        <p:txBody>
+          <a:bodyPr wrap="square" lIns="0" tIns="0" rIns="0" bIns="0" rtlCol="0" anchor="ctr">
+            <a:normAutofit/>
+          </a:bodyPr>
+          <a:lstStyle/>
+          <a:p>
+            <a:pPr indent="0" marL="0">
+              <a:buNone/>
+            </a:pPr>
+            <a:r>
+              <a:rPr lang="en-US" sz="1250" b="1" dirty="0">
+                <a:solidFill>
+                  <a:srgbClr val="141A22"/>
+                </a:solidFill>
+                <a:latin typeface="Arial" pitchFamily="34" charset="0"/>
+                <a:ea typeface="Arial" pitchFamily="34" charset="-122"/>
+                <a:cs typeface="Arial" pitchFamily="34" charset="-120"/>
+              </a:rPr>
+              <a:t>Дмитрий Пеньков</a:t>
+            </a:r>
+            <a:endParaRPr lang="en-US" sz="1250" dirty="0"/>
+          </a:p>
+        </p:txBody>
+      </p:sp>
+      <p:sp>
+        <p:nvSpPr>
+          <p:cNvPr id="9" name="Text 6"/>
+          <p:cNvSpPr txBox="1"/>
+          <p:nvPr/>
+        </p:nvSpPr>
+        <p:spPr>
+          <a:xfrm>
+            <a:off x="2179015" y="2505456"/>
+            <a:ext cx="1685849" cy="411480"/>
           </a:xfrm>
           <a:prstGeom prst="rect">
             <a:avLst/>
@@ -10560,30 +9590,30 @@
               <a:buNone/>
             </a:pPr>
             <a:r>
-              <a:rPr lang="en-US" sz="4400" b="1" dirty="0">
-                <a:solidFill>
-                  <a:srgbClr val="141A22"/>
-                </a:solidFill>
-                <a:latin typeface="Arial" pitchFamily="34" charset="0"/>
-                <a:ea typeface="Arial" pitchFamily="34" charset="-122"/>
-                <a:cs typeface="Arial" pitchFamily="34" charset="-120"/>
-              </a:rPr>
-              <a:t>1,78 млрд $</a:t>
-            </a:r>
-            <a:endParaRPr lang="en-US" sz="4400" dirty="0"/>
-          </a:p>
-        </p:txBody>
-      </p:sp>
-      <p:sp>
-        <p:nvSpPr>
-          <p:cNvPr id="8" name="Text 6"/>
-          <p:cNvSpPr txBox="1"/>
-          <p:nvPr/>
-        </p:nvSpPr>
-        <p:spPr>
-          <a:xfrm>
-            <a:off x="868680" y="3246120"/>
-            <a:ext cx="4791456" cy="685800"/>
+              <a:rPr lang="en-US" sz="1000" dirty="0">
+                <a:solidFill>
+                  <a:srgbClr val="0460F5"/>
+                </a:solidFill>
+                <a:latin typeface="Arial" pitchFamily="34" charset="0"/>
+                <a:ea typeface="Arial" pitchFamily="34" charset="-122"/>
+                <a:cs typeface="Arial" pitchFamily="34" charset="-120"/>
+              </a:rPr>
+              <a:t>Генеральный директор, основатель</a:t>
+            </a:r>
+            <a:endParaRPr lang="en-US" sz="1000" dirty="0"/>
+          </a:p>
+        </p:txBody>
+      </p:sp>
+      <p:sp>
+        <p:nvSpPr>
+          <p:cNvPr id="10" name="Text 7"/>
+          <p:cNvSpPr txBox="1"/>
+          <p:nvPr/>
+        </p:nvSpPr>
+        <p:spPr>
+          <a:xfrm>
+            <a:off x="2179015" y="2926080"/>
+            <a:ext cx="1685849" cy="1005840"/>
           </a:xfrm>
           <a:prstGeom prst="rect">
             <a:avLst/>
@@ -10599,7 +9629,7 @@
               <a:buNone/>
             </a:pPr>
             <a:r>
-              <a:rPr lang="en-US" sz="1300" dirty="0">
+              <a:rPr lang="en-US" sz="950" dirty="0">
                 <a:solidFill>
                   <a:srgbClr val="5C6067"/>
                 </a:solidFill>
@@ -10607,26 +9637,26 @@
                 <a:ea typeface="Arial" pitchFamily="34" charset="-122"/>
                 <a:cs typeface="Arial" pitchFamily="34" charset="-120"/>
               </a:rPr>
-              <a:t>заплатила WSP, мировой инженерный гигант, за компанию из 4000 таких инженеров в 2024 году. Через год — ещё 3,3 млрд $ за следующую.</a:t>
-            </a:r>
-            <a:endParaRPr lang="en-US" sz="1300" dirty="0"/>
-          </a:p>
-        </p:txBody>
-      </p:sp>
-      <p:sp>
-        <p:nvSpPr>
-          <p:cNvPr id="9" name="Shape 7"/>
+              <a:t>Предприниматель с опытом в технологиях. Buckswood School (Англия), МИРБИС, MBA при МГИМО.</a:t>
+            </a:r>
+            <a:endParaRPr lang="en-US" sz="950" dirty="0"/>
+          </a:p>
+        </p:txBody>
+      </p:sp>
+      <p:sp>
+        <p:nvSpPr>
+          <p:cNvPr id="11" name="Shape 8"/>
           <p:cNvSpPr/>
           <p:nvPr/>
         </p:nvSpPr>
         <p:spPr>
           <a:xfrm>
-            <a:off x="6208776" y="2103120"/>
-            <a:ext cx="5431536" cy="2011680"/>
+            <a:off x="4322064" y="2011680"/>
+            <a:ext cx="3544824" cy="1965960"/>
           </a:xfrm>
           <a:prstGeom prst="roundRect">
             <a:avLst>
-              <a:gd name="adj" fmla="val 8182"/>
+              <a:gd name="adj" fmla="val 8372"/>
             </a:avLst>
           </a:prstGeom>
           <a:solidFill>
@@ -10640,16 +9670,81 @@
           </a:ln>
         </p:spPr>
       </p:sp>
-      <p:sp>
-        <p:nvSpPr>
-          <p:cNvPr id="10" name="Text 8"/>
-          <p:cNvSpPr txBox="1"/>
-          <p:nvPr/>
-        </p:nvSpPr>
-        <p:spPr>
-          <a:xfrm>
-            <a:off x="6528816" y="2377440"/>
-            <a:ext cx="4791456" cy="822960"/>
+      <p:pic>
+        <p:nvPicPr>
+          <p:cNvPr id="12" name="Image 1" descr="/tmp/claude-0/-home-user/5ac64fc3-708b-5ba2-8575-a96a48f05f03/scratchpad/okean/moroshin.png">    </p:cNvPr>
+          <p:cNvPicPr>
+            <a:picLocks noChangeAspect="1"/>
+          </p:cNvPicPr>
+          <p:nvPr/>
+        </p:nvPicPr>
+        <p:blipFill>
+          <a:blip r:embed="rId2"/>
+          <a:stretch>
+            <a:fillRect/>
+          </a:stretch>
+        </p:blipFill>
+        <p:spPr>
+          <a:xfrm>
+            <a:off x="4550664" y="2212848"/>
+            <a:ext cx="1218895" cy="1417320"/>
+          </a:xfrm>
+          <a:prstGeom prst="rect">
+            <a:avLst/>
+          </a:prstGeom>
+        </p:spPr>
+      </p:pic>
+      <p:sp>
+        <p:nvSpPr>
+          <p:cNvPr id="13" name="Text 9"/>
+          <p:cNvSpPr txBox="1"/>
+          <p:nvPr/>
+        </p:nvSpPr>
+        <p:spPr>
+          <a:xfrm>
+            <a:off x="5952439" y="2212848"/>
+            <a:ext cx="1685849" cy="274320"/>
+          </a:xfrm>
+          <a:prstGeom prst="rect">
+            <a:avLst/>
+          </a:prstGeom>
+          <a:noFill/>
+          <a:ln/>
+        </p:spPr>
+        <p:txBody>
+          <a:bodyPr wrap="square" lIns="0" tIns="0" rIns="0" bIns="0" rtlCol="0" anchor="ctr">
+            <a:normAutofit/>
+          </a:bodyPr>
+          <a:lstStyle/>
+          <a:p>
+            <a:pPr indent="0" marL="0">
+              <a:buNone/>
+            </a:pPr>
+            <a:r>
+              <a:rPr lang="en-US" sz="1250" b="1" dirty="0">
+                <a:solidFill>
+                  <a:srgbClr val="141A22"/>
+                </a:solidFill>
+                <a:latin typeface="Arial" pitchFamily="34" charset="0"/>
+                <a:ea typeface="Arial" pitchFamily="34" charset="-122"/>
+                <a:cs typeface="Arial" pitchFamily="34" charset="-120"/>
+              </a:rPr>
+              <a:t>Константин Морошин</a:t>
+            </a:r>
+            <a:endParaRPr lang="en-US" sz="1250" dirty="0"/>
+          </a:p>
+        </p:txBody>
+      </p:sp>
+      <p:sp>
+        <p:nvSpPr>
+          <p:cNvPr id="14" name="Text 10"/>
+          <p:cNvSpPr txBox="1"/>
+          <p:nvPr/>
+        </p:nvSpPr>
+        <p:spPr>
+          <a:xfrm>
+            <a:off x="5952439" y="2505456"/>
+            <a:ext cx="1685849" cy="411480"/>
           </a:xfrm>
           <a:prstGeom prst="rect">
             <a:avLst/>
@@ -10665,7 +9760,138 @@
               <a:buNone/>
             </a:pPr>
             <a:r>
-              <a:rPr lang="en-US" sz="4400" b="1" dirty="0">
+              <a:rPr lang="en-US" sz="1000" dirty="0">
+                <a:solidFill>
+                  <a:srgbClr val="0460F5"/>
+                </a:solidFill>
+                <a:latin typeface="Arial" pitchFamily="34" charset="0"/>
+                <a:ea typeface="Arial" pitchFamily="34" charset="-122"/>
+                <a:cs typeface="Arial" pitchFamily="34" charset="-120"/>
+              </a:rPr>
+              <a:t>Глава Центра исследований</a:t>
+            </a:r>
+            <a:endParaRPr lang="en-US" sz="1000" dirty="0"/>
+          </a:p>
+        </p:txBody>
+      </p:sp>
+      <p:sp>
+        <p:nvSpPr>
+          <p:cNvPr id="15" name="Text 11"/>
+          <p:cNvSpPr txBox="1"/>
+          <p:nvPr/>
+        </p:nvSpPr>
+        <p:spPr>
+          <a:xfrm>
+            <a:off x="5952439" y="2926080"/>
+            <a:ext cx="1685849" cy="1005840"/>
+          </a:xfrm>
+          <a:prstGeom prst="rect">
+            <a:avLst/>
+          </a:prstGeom>
+          <a:noFill/>
+          <a:ln/>
+        </p:spPr>
+        <p:txBody>
+          <a:bodyPr wrap="square" lIns="0" tIns="0" rIns="0" bIns="0" rtlCol="0" anchor="t"/>
+          <a:lstStyle/>
+          <a:p>
+            <a:pPr indent="0" marL="0">
+              <a:buNone/>
+            </a:pPr>
+            <a:r>
+              <a:rPr lang="en-US" sz="950" dirty="0">
+                <a:solidFill>
+                  <a:srgbClr val="5C6067"/>
+                </a:solidFill>
+                <a:latin typeface="Arial" pitchFamily="34" charset="0"/>
+                <a:ea typeface="Arial" pitchFamily="34" charset="-122"/>
+                <a:cs typeface="Arial" pitchFamily="34" charset="-120"/>
+              </a:rPr>
+              <a:t>Исследователь UX в B2B ИТ: МТС Ред, КРОК, Инностейдж, Сбер. Более 10 лет продаж ИТ в энтерпрайзе.</a:t>
+            </a:r>
+            <a:endParaRPr lang="en-US" sz="950" dirty="0"/>
+          </a:p>
+        </p:txBody>
+      </p:sp>
+      <p:sp>
+        <p:nvSpPr>
+          <p:cNvPr id="16" name="Shape 12"/>
+          <p:cNvSpPr/>
+          <p:nvPr/>
+        </p:nvSpPr>
+        <p:spPr>
+          <a:xfrm>
+            <a:off x="8095488" y="2011680"/>
+            <a:ext cx="3544824" cy="1965960"/>
+          </a:xfrm>
+          <a:prstGeom prst="roundRect">
+            <a:avLst>
+              <a:gd name="adj" fmla="val 8372"/>
+            </a:avLst>
+          </a:prstGeom>
+          <a:solidFill>
+            <a:srgbClr val="F7F7F7"/>
+          </a:solidFill>
+          <a:ln w="12700">
+            <a:solidFill>
+              <a:srgbClr val="F7F7F7"/>
+            </a:solidFill>
+            <a:prstDash val="solid"/>
+          </a:ln>
+        </p:spPr>
+      </p:sp>
+      <p:pic>
+        <p:nvPicPr>
+          <p:cNvPr id="17" name="Image 2" descr="/tmp/claude-0/-home-user/5ac64fc3-708b-5ba2-8575-a96a48f05f03/scratchpad/okean/kovalev.png">    </p:cNvPr>
+          <p:cNvPicPr>
+            <a:picLocks noChangeAspect="1"/>
+          </p:cNvPicPr>
+          <p:nvPr/>
+        </p:nvPicPr>
+        <p:blipFill>
+          <a:blip r:embed="rId3"/>
+          <a:stretch>
+            <a:fillRect/>
+          </a:stretch>
+        </p:blipFill>
+        <p:spPr>
+          <a:xfrm>
+            <a:off x="8324088" y="2212848"/>
+            <a:ext cx="1218895" cy="1417320"/>
+          </a:xfrm>
+          <a:prstGeom prst="rect">
+            <a:avLst/>
+          </a:prstGeom>
+        </p:spPr>
+      </p:pic>
+      <p:sp>
+        <p:nvSpPr>
+          <p:cNvPr id="18" name="Text 13"/>
+          <p:cNvSpPr txBox="1"/>
+          <p:nvPr/>
+        </p:nvSpPr>
+        <p:spPr>
+          <a:xfrm>
+            <a:off x="9725863" y="2212848"/>
+            <a:ext cx="1685849" cy="274320"/>
+          </a:xfrm>
+          <a:prstGeom prst="rect">
+            <a:avLst/>
+          </a:prstGeom>
+          <a:noFill/>
+          <a:ln/>
+        </p:spPr>
+        <p:txBody>
+          <a:bodyPr wrap="square" lIns="0" tIns="0" rIns="0" bIns="0" rtlCol="0" anchor="ctr">
+            <a:normAutofit/>
+          </a:bodyPr>
+          <a:lstStyle/>
+          <a:p>
+            <a:pPr indent="0" marL="0">
+              <a:buNone/>
+            </a:pPr>
+            <a:r>
+              <a:rPr lang="en-US" sz="1250" b="1" dirty="0">
                 <a:solidFill>
                   <a:srgbClr val="141A22"/>
                 </a:solidFill>
@@ -10673,22 +9899,22 @@
                 <a:ea typeface="Arial" pitchFamily="34" charset="-122"/>
                 <a:cs typeface="Arial" pitchFamily="34" charset="-120"/>
               </a:rPr>
-              <a:t>15 млрд $</a:t>
-            </a:r>
-            <a:endParaRPr lang="en-US" sz="4400" dirty="0"/>
-          </a:p>
-        </p:txBody>
-      </p:sp>
-      <p:sp>
-        <p:nvSpPr>
-          <p:cNvPr id="11" name="Text 9"/>
-          <p:cNvSpPr txBox="1"/>
-          <p:nvPr/>
-        </p:nvSpPr>
-        <p:spPr>
-          <a:xfrm>
-            <a:off x="6528816" y="3246120"/>
-            <a:ext cx="4791456" cy="685800"/>
+              <a:t>Сергей Ковалёв</a:t>
+            </a:r>
+            <a:endParaRPr lang="en-US" sz="1250" dirty="0"/>
+          </a:p>
+        </p:txBody>
+      </p:sp>
+      <p:sp>
+        <p:nvSpPr>
+          <p:cNvPr id="19" name="Text 14"/>
+          <p:cNvSpPr txBox="1"/>
+          <p:nvPr/>
+        </p:nvSpPr>
+        <p:spPr>
+          <a:xfrm>
+            <a:off x="9725863" y="2505456"/>
+            <a:ext cx="1685849" cy="411480"/>
           </a:xfrm>
           <a:prstGeom prst="rect">
             <a:avLst/>
@@ -10704,7 +9930,46 @@
               <a:buNone/>
             </a:pPr>
             <a:r>
-              <a:rPr lang="en-US" sz="1300" dirty="0">
+              <a:rPr lang="en-US" sz="1000" dirty="0">
+                <a:solidFill>
+                  <a:srgbClr val="0460F5"/>
+                </a:solidFill>
+                <a:latin typeface="Arial" pitchFamily="34" charset="0"/>
+                <a:ea typeface="Arial" pitchFamily="34" charset="-122"/>
+                <a:cs typeface="Arial" pitchFamily="34" charset="-120"/>
+              </a:rPr>
+              <a:t>Управляющий партнёр</a:t>
+            </a:r>
+            <a:endParaRPr lang="en-US" sz="1000" dirty="0"/>
+          </a:p>
+        </p:txBody>
+      </p:sp>
+      <p:sp>
+        <p:nvSpPr>
+          <p:cNvPr id="20" name="Text 15"/>
+          <p:cNvSpPr txBox="1"/>
+          <p:nvPr/>
+        </p:nvSpPr>
+        <p:spPr>
+          <a:xfrm>
+            <a:off x="9725863" y="2926080"/>
+            <a:ext cx="1685849" cy="1005840"/>
+          </a:xfrm>
+          <a:prstGeom prst="rect">
+            <a:avLst/>
+          </a:prstGeom>
+          <a:noFill/>
+          <a:ln/>
+        </p:spPr>
+        <p:txBody>
+          <a:bodyPr wrap="square" lIns="0" tIns="0" rIns="0" bIns="0" rtlCol="0" anchor="t"/>
+          <a:lstStyle/>
+          <a:p>
+            <a:pPr indent="0" marL="0">
+              <a:buNone/>
+            </a:pPr>
+            <a:r>
+              <a:rPr lang="en-US" sz="950" dirty="0">
                 <a:solidFill>
                   <a:srgbClr val="5C6067"/>
                 </a:solidFill>
@@ -10712,22 +9977,442 @@
                 <a:ea typeface="Arial" pitchFamily="34" charset="-122"/>
                 <a:cs typeface="Arial" pitchFamily="34" charset="-120"/>
               </a:rPr>
-              <a:t>контрактов на сети и подстанции за один год выдала Саудовская Аравия. Около 3% таких контрактов — проектирование: порядка 450 млн $ в год в одной стране.</a:t>
-            </a:r>
-            <a:endParaRPr lang="en-US" sz="1300" dirty="0"/>
-          </a:p>
-        </p:txBody>
-      </p:sp>
-      <p:sp>
-        <p:nvSpPr>
-          <p:cNvPr id="12" name="Text 10"/>
-          <p:cNvSpPr txBox="1"/>
-          <p:nvPr/>
-        </p:nvSpPr>
-        <p:spPr>
-          <a:xfrm>
-            <a:off x="548640" y="4434840"/>
-            <a:ext cx="10725912" cy="1005840"/>
+              <a:t>Предприниматель и стратег с опытом в области искусственного интеллекта и Web3.</a:t>
+            </a:r>
+            <a:endParaRPr lang="en-US" sz="950" dirty="0"/>
+          </a:p>
+        </p:txBody>
+      </p:sp>
+      <p:sp>
+        <p:nvSpPr>
+          <p:cNvPr id="21" name="Shape 16"/>
+          <p:cNvSpPr/>
+          <p:nvPr/>
+        </p:nvSpPr>
+        <p:spPr>
+          <a:xfrm>
+            <a:off x="548640" y="4206240"/>
+            <a:ext cx="2601468" cy="1051560"/>
+          </a:xfrm>
+          <a:prstGeom prst="roundRect">
+            <a:avLst>
+              <a:gd name="adj" fmla="val 12174"/>
+            </a:avLst>
+          </a:prstGeom>
+          <a:solidFill>
+            <a:srgbClr val="FFFFFF"/>
+          </a:solidFill>
+          <a:ln w="9525">
+            <a:solidFill>
+              <a:srgbClr val="DDDFE3"/>
+            </a:solidFill>
+            <a:prstDash val="solid"/>
+          </a:ln>
+        </p:spPr>
+      </p:sp>
+      <p:sp>
+        <p:nvSpPr>
+          <p:cNvPr id="22" name="Text 17"/>
+          <p:cNvSpPr txBox="1"/>
+          <p:nvPr/>
+        </p:nvSpPr>
+        <p:spPr>
+          <a:xfrm>
+            <a:off x="777240" y="4279392"/>
+            <a:ext cx="868680" cy="457200"/>
+          </a:xfrm>
+          <a:prstGeom prst="rect">
+            <a:avLst/>
+          </a:prstGeom>
+          <a:noFill/>
+          <a:ln/>
+        </p:spPr>
+        <p:txBody>
+          <a:bodyPr wrap="square" lIns="0" tIns="0" rIns="0" bIns="0" rtlCol="0" anchor="ctr"/>
+          <a:lstStyle/>
+          <a:p>
+            <a:pPr indent="0" marL="0">
+              <a:buNone/>
+            </a:pPr>
+            <a:r>
+              <a:rPr lang="en-US" sz="2400" b="1" dirty="0">
+                <a:solidFill>
+                  <a:srgbClr val="141A22"/>
+                </a:solidFill>
+                <a:latin typeface="Arial" pitchFamily="34" charset="0"/>
+                <a:ea typeface="Arial" pitchFamily="34" charset="-122"/>
+                <a:cs typeface="Arial" pitchFamily="34" charset="-120"/>
+              </a:rPr>
+              <a:t>48</a:t>
+            </a:r>
+            <a:endParaRPr lang="en-US" sz="2400" dirty="0"/>
+          </a:p>
+        </p:txBody>
+      </p:sp>
+      <p:sp>
+        <p:nvSpPr>
+          <p:cNvPr id="23" name="Text 18"/>
+          <p:cNvSpPr txBox="1"/>
+          <p:nvPr/>
+        </p:nvSpPr>
+        <p:spPr>
+          <a:xfrm>
+            <a:off x="1600200" y="4297680"/>
+            <a:ext cx="1367028" cy="896112"/>
+          </a:xfrm>
+          <a:prstGeom prst="rect">
+            <a:avLst/>
+          </a:prstGeom>
+          <a:noFill/>
+          <a:ln/>
+        </p:spPr>
+        <p:txBody>
+          <a:bodyPr wrap="square" lIns="0" tIns="0" rIns="0" bIns="0" rtlCol="0" anchor="t"/>
+          <a:lstStyle/>
+          <a:p>
+            <a:pPr indent="0" marL="0">
+              <a:buNone/>
+            </a:pPr>
+            <a:r>
+              <a:rPr lang="en-US" sz="950" dirty="0">
+                <a:solidFill>
+                  <a:srgbClr val="5C6067"/>
+                </a:solidFill>
+                <a:latin typeface="Arial" pitchFamily="34" charset="0"/>
+                <a:ea typeface="Arial" pitchFamily="34" charset="-122"/>
+                <a:cs typeface="Arial" pitchFamily="34" charset="-120"/>
+              </a:rPr>
+              <a:t>проектов реализовано</a:t>
+            </a:r>
+            <a:endParaRPr lang="en-US" sz="950" dirty="0"/>
+          </a:p>
+        </p:txBody>
+      </p:sp>
+      <p:sp>
+        <p:nvSpPr>
+          <p:cNvPr id="24" name="Shape 19"/>
+          <p:cNvSpPr/>
+          <p:nvPr/>
+        </p:nvSpPr>
+        <p:spPr>
+          <a:xfrm>
+            <a:off x="3378708" y="4206240"/>
+            <a:ext cx="2601468" cy="1051560"/>
+          </a:xfrm>
+          <a:prstGeom prst="roundRect">
+            <a:avLst>
+              <a:gd name="adj" fmla="val 12174"/>
+            </a:avLst>
+          </a:prstGeom>
+          <a:solidFill>
+            <a:srgbClr val="FFFFFF"/>
+          </a:solidFill>
+          <a:ln w="9525">
+            <a:solidFill>
+              <a:srgbClr val="DDDFE3"/>
+            </a:solidFill>
+            <a:prstDash val="solid"/>
+          </a:ln>
+        </p:spPr>
+      </p:sp>
+      <p:sp>
+        <p:nvSpPr>
+          <p:cNvPr id="25" name="Text 20"/>
+          <p:cNvSpPr txBox="1"/>
+          <p:nvPr/>
+        </p:nvSpPr>
+        <p:spPr>
+          <a:xfrm>
+            <a:off x="3607308" y="4279392"/>
+            <a:ext cx="868680" cy="457200"/>
+          </a:xfrm>
+          <a:prstGeom prst="rect">
+            <a:avLst/>
+          </a:prstGeom>
+          <a:noFill/>
+          <a:ln/>
+        </p:spPr>
+        <p:txBody>
+          <a:bodyPr wrap="square" lIns="0" tIns="0" rIns="0" bIns="0" rtlCol="0" anchor="ctr"/>
+          <a:lstStyle/>
+          <a:p>
+            <a:pPr indent="0" marL="0">
+              <a:buNone/>
+            </a:pPr>
+            <a:r>
+              <a:rPr lang="en-US" sz="2400" b="1" dirty="0">
+                <a:solidFill>
+                  <a:srgbClr val="141A22"/>
+                </a:solidFill>
+                <a:latin typeface="Arial" pitchFamily="34" charset="0"/>
+                <a:ea typeface="Arial" pitchFamily="34" charset="-122"/>
+                <a:cs typeface="Arial" pitchFamily="34" charset="-120"/>
+              </a:rPr>
+              <a:t>32</a:t>
+            </a:r>
+            <a:endParaRPr lang="en-US" sz="2400" dirty="0"/>
+          </a:p>
+        </p:txBody>
+      </p:sp>
+      <p:sp>
+        <p:nvSpPr>
+          <p:cNvPr id="26" name="Text 21"/>
+          <p:cNvSpPr txBox="1"/>
+          <p:nvPr/>
+        </p:nvSpPr>
+        <p:spPr>
+          <a:xfrm>
+            <a:off x="4430268" y="4297680"/>
+            <a:ext cx="1367028" cy="896112"/>
+          </a:xfrm>
+          <a:prstGeom prst="rect">
+            <a:avLst/>
+          </a:prstGeom>
+          <a:noFill/>
+          <a:ln/>
+        </p:spPr>
+        <p:txBody>
+          <a:bodyPr wrap="square" lIns="0" tIns="0" rIns="0" bIns="0" rtlCol="0" anchor="t"/>
+          <a:lstStyle/>
+          <a:p>
+            <a:pPr indent="0" marL="0">
+              <a:buNone/>
+            </a:pPr>
+            <a:r>
+              <a:rPr lang="en-US" sz="950" dirty="0">
+                <a:solidFill>
+                  <a:srgbClr val="5C6067"/>
+                </a:solidFill>
+                <a:latin typeface="Arial" pitchFamily="34" charset="0"/>
+                <a:ea typeface="Arial" pitchFamily="34" charset="-122"/>
+                <a:cs typeface="Arial" pitchFamily="34" charset="-120"/>
+              </a:rPr>
+              <a:t>клиента из 7 отраслей</a:t>
+            </a:r>
+            <a:endParaRPr lang="en-US" sz="950" dirty="0"/>
+          </a:p>
+        </p:txBody>
+      </p:sp>
+      <p:sp>
+        <p:nvSpPr>
+          <p:cNvPr id="27" name="Shape 22"/>
+          <p:cNvSpPr/>
+          <p:nvPr/>
+        </p:nvSpPr>
+        <p:spPr>
+          <a:xfrm>
+            <a:off x="6208776" y="4206240"/>
+            <a:ext cx="2601468" cy="1051560"/>
+          </a:xfrm>
+          <a:prstGeom prst="roundRect">
+            <a:avLst>
+              <a:gd name="adj" fmla="val 12174"/>
+            </a:avLst>
+          </a:prstGeom>
+          <a:solidFill>
+            <a:srgbClr val="FFFFFF"/>
+          </a:solidFill>
+          <a:ln w="9525">
+            <a:solidFill>
+              <a:srgbClr val="DDDFE3"/>
+            </a:solidFill>
+            <a:prstDash val="solid"/>
+          </a:ln>
+        </p:spPr>
+      </p:sp>
+      <p:sp>
+        <p:nvSpPr>
+          <p:cNvPr id="28" name="Text 23"/>
+          <p:cNvSpPr txBox="1"/>
+          <p:nvPr/>
+        </p:nvSpPr>
+        <p:spPr>
+          <a:xfrm>
+            <a:off x="6437376" y="4279392"/>
+            <a:ext cx="868680" cy="457200"/>
+          </a:xfrm>
+          <a:prstGeom prst="rect">
+            <a:avLst/>
+          </a:prstGeom>
+          <a:noFill/>
+          <a:ln/>
+        </p:spPr>
+        <p:txBody>
+          <a:bodyPr wrap="square" lIns="0" tIns="0" rIns="0" bIns="0" rtlCol="0" anchor="ctr"/>
+          <a:lstStyle/>
+          <a:p>
+            <a:pPr indent="0" marL="0">
+              <a:buNone/>
+            </a:pPr>
+            <a:r>
+              <a:rPr lang="en-US" sz="2400" b="1" dirty="0">
+                <a:solidFill>
+                  <a:srgbClr val="141A22"/>
+                </a:solidFill>
+                <a:latin typeface="Arial" pitchFamily="34" charset="0"/>
+                <a:ea typeface="Arial" pitchFamily="34" charset="-122"/>
+                <a:cs typeface="Arial" pitchFamily="34" charset="-120"/>
+              </a:rPr>
+              <a:t>64</a:t>
+            </a:r>
+            <a:endParaRPr lang="en-US" sz="2400" dirty="0"/>
+          </a:p>
+        </p:txBody>
+      </p:sp>
+      <p:sp>
+        <p:nvSpPr>
+          <p:cNvPr id="29" name="Text 24"/>
+          <p:cNvSpPr txBox="1"/>
+          <p:nvPr/>
+        </p:nvSpPr>
+        <p:spPr>
+          <a:xfrm>
+            <a:off x="7260336" y="4297680"/>
+            <a:ext cx="1367028" cy="896112"/>
+          </a:xfrm>
+          <a:prstGeom prst="rect">
+            <a:avLst/>
+          </a:prstGeom>
+          <a:noFill/>
+          <a:ln/>
+        </p:spPr>
+        <p:txBody>
+          <a:bodyPr wrap="square" lIns="0" tIns="0" rIns="0" bIns="0" rtlCol="0" anchor="t"/>
+          <a:lstStyle/>
+          <a:p>
+            <a:pPr indent="0" marL="0">
+              <a:buNone/>
+            </a:pPr>
+            <a:r>
+              <a:rPr lang="en-US" sz="950" dirty="0">
+                <a:solidFill>
+                  <a:srgbClr val="5C6067"/>
+                </a:solidFill>
+                <a:latin typeface="Arial" pitchFamily="34" charset="0"/>
+                <a:ea typeface="Arial" pitchFamily="34" charset="-122"/>
+                <a:cs typeface="Arial" pitchFamily="34" charset="-120"/>
+              </a:rPr>
+              <a:t>в штате: исследователи, инженеры, дизайнеры</a:t>
+            </a:r>
+            <a:endParaRPr lang="en-US" sz="950" dirty="0"/>
+          </a:p>
+        </p:txBody>
+      </p:sp>
+      <p:sp>
+        <p:nvSpPr>
+          <p:cNvPr id="30" name="Shape 25"/>
+          <p:cNvSpPr/>
+          <p:nvPr/>
+        </p:nvSpPr>
+        <p:spPr>
+          <a:xfrm>
+            <a:off x="9038844" y="4206240"/>
+            <a:ext cx="2601468" cy="1051560"/>
+          </a:xfrm>
+          <a:prstGeom prst="roundRect">
+            <a:avLst>
+              <a:gd name="adj" fmla="val 12174"/>
+            </a:avLst>
+          </a:prstGeom>
+          <a:solidFill>
+            <a:srgbClr val="FFFFFF"/>
+          </a:solidFill>
+          <a:ln w="9525">
+            <a:solidFill>
+              <a:srgbClr val="DDDFE3"/>
+            </a:solidFill>
+            <a:prstDash val="solid"/>
+          </a:ln>
+        </p:spPr>
+      </p:sp>
+      <p:sp>
+        <p:nvSpPr>
+          <p:cNvPr id="31" name="Text 26"/>
+          <p:cNvSpPr txBox="1"/>
+          <p:nvPr/>
+        </p:nvSpPr>
+        <p:spPr>
+          <a:xfrm>
+            <a:off x="9267444" y="4279392"/>
+            <a:ext cx="868680" cy="457200"/>
+          </a:xfrm>
+          <a:prstGeom prst="rect">
+            <a:avLst/>
+          </a:prstGeom>
+          <a:noFill/>
+          <a:ln/>
+        </p:spPr>
+        <p:txBody>
+          <a:bodyPr wrap="square" lIns="0" tIns="0" rIns="0" bIns="0" rtlCol="0" anchor="ctr"/>
+          <a:lstStyle/>
+          <a:p>
+            <a:pPr indent="0" marL="0">
+              <a:buNone/>
+            </a:pPr>
+            <a:r>
+              <a:rPr lang="en-US" sz="2400" b="1" dirty="0">
+                <a:solidFill>
+                  <a:srgbClr val="141A22"/>
+                </a:solidFill>
+                <a:latin typeface="Arial" pitchFamily="34" charset="0"/>
+                <a:ea typeface="Arial" pitchFamily="34" charset="-122"/>
+                <a:cs typeface="Arial" pitchFamily="34" charset="-120"/>
+              </a:rPr>
+              <a:t>14</a:t>
+            </a:r>
+            <a:endParaRPr lang="en-US" sz="2400" dirty="0"/>
+          </a:p>
+        </p:txBody>
+      </p:sp>
+      <p:sp>
+        <p:nvSpPr>
+          <p:cNvPr id="32" name="Text 27"/>
+          <p:cNvSpPr txBox="1"/>
+          <p:nvPr/>
+        </p:nvSpPr>
+        <p:spPr>
+          <a:xfrm>
+            <a:off x="10090404" y="4297680"/>
+            <a:ext cx="1367028" cy="896112"/>
+          </a:xfrm>
+          <a:prstGeom prst="rect">
+            <a:avLst/>
+          </a:prstGeom>
+          <a:noFill/>
+          <a:ln/>
+        </p:spPr>
+        <p:txBody>
+          <a:bodyPr wrap="square" lIns="0" tIns="0" rIns="0" bIns="0" rtlCol="0" anchor="t"/>
+          <a:lstStyle/>
+          <a:p>
+            <a:pPr indent="0" marL="0">
+              <a:buNone/>
+            </a:pPr>
+            <a:r>
+              <a:rPr lang="en-US" sz="950" dirty="0">
+                <a:solidFill>
+                  <a:srgbClr val="5C6067"/>
+                </a:solidFill>
+                <a:latin typeface="Arial" pitchFamily="34" charset="0"/>
+                <a:ea typeface="Arial" pitchFamily="34" charset="-122"/>
+                <a:cs typeface="Arial" pitchFamily="34" charset="-120"/>
+              </a:rPr>
+              <a:t>исследователей и ML-инженеров в Центре исследований; база из 277 кейсов ИИ</a:t>
+            </a:r>
+            <a:endParaRPr lang="en-US" sz="950" dirty="0"/>
+          </a:p>
+        </p:txBody>
+      </p:sp>
+      <p:sp>
+        <p:nvSpPr>
+          <p:cNvPr id="33" name="Text 28"/>
+          <p:cNvSpPr txBox="1"/>
+          <p:nvPr/>
+        </p:nvSpPr>
+        <p:spPr>
+          <a:xfrm>
+            <a:off x="548640" y="5440680"/>
+            <a:ext cx="10725912" cy="777240"/>
           </a:xfrm>
           <a:prstGeom prst="rect">
             <a:avLst/>
@@ -10746,7 +10431,7 @@
               <a:buNone/>
             </a:pPr>
             <a:r>
-              <a:rPr lang="en-US" sz="1500" dirty="0">
+              <a:rPr lang="en-US" sz="1150" dirty="0">
                 <a:solidFill>
                   <a:srgbClr val="141A22"/>
                 </a:solidFill>
@@ -10754,749 +10439,9 @@
                 <a:ea typeface="Arial" pitchFamily="34" charset="-122"/>
                 <a:cs typeface="Arial" pitchFamily="34" charset="-120"/>
               </a:rPr>
-              <a:t>Мы собираем группу по цене около 70 тысяч долларов за инженера — покупая небольшие фирмы там, где инженеры есть. Такие группы стратеги покупают по 445 тысяч за инженера: WSP заплатила именно столько.</a:t>
-            </a:r>
-            <a:endParaRPr lang="en-US" sz="1500" dirty="0"/>
-          </a:p>
-        </p:txBody>
-      </p:sp>
-      <p:sp>
-        <p:nvSpPr>
-          <p:cNvPr id="13" name="Text 11"/>
-          <p:cNvSpPr txBox="1"/>
-          <p:nvPr/>
-        </p:nvSpPr>
-        <p:spPr>
-          <a:xfrm>
-            <a:off x="548640" y="5532120"/>
-            <a:ext cx="10725912" cy="457200"/>
-          </a:xfrm>
-          <a:prstGeom prst="rect">
-            <a:avLst/>
-          </a:prstGeom>
-          <a:noFill/>
-          <a:ln/>
-        </p:spPr>
-        <p:txBody>
-          <a:bodyPr wrap="square" lIns="0" tIns="0" rIns="0" bIns="0" rtlCol="0" anchor="t"/>
-          <a:lstStyle/>
-          <a:p>
-            <a:pPr indent="0" marL="0">
-              <a:buNone/>
-            </a:pPr>
-            <a:r>
-              <a:rPr lang="en-US" sz="1500" i="1" dirty="0">
-                <a:solidFill>
-                  <a:srgbClr val="0460F5"/>
-                </a:solidFill>
-                <a:latin typeface="Arial" pitchFamily="34" charset="0"/>
-                <a:ea typeface="Arial" pitchFamily="34" charset="-122"/>
-                <a:cs typeface="Arial" pitchFamily="34" charset="-120"/>
-              </a:rPr>
-              <a:t>Разница между ценой входа и ценой выхода — и есть сделка.</a:t>
-            </a:r>
-            <a:endParaRPr lang="en-US" sz="1500" dirty="0"/>
-          </a:p>
-        </p:txBody>
-      </p:sp>
-    </p:spTree>
-  </p:cSld>
-  <p:clrMapOvr>
-    <a:masterClrMapping/>
-  </p:clrMapOvr>
-</p:sld>
-</file>
-
-<file path=ppt/slides/slide9.xml><?xml version="1.0" encoding="utf-8"?>
-<p:sld xmlns:a="http://schemas.openxmlformats.org/drawingml/2006/main" xmlns:r="http://schemas.openxmlformats.org/officeDocument/2006/relationships" xmlns:p="http://schemas.openxmlformats.org/presentationml/2006/main">
-  <p:cSld name="Slide 9">
-    <p:bg>
-      <p:bgPr>
-        <a:solidFill>
-          <a:srgbClr val="232323"/>
-        </a:solidFill>
-      </p:bgPr>
-    </p:bg>
-    <p:spTree>
-      <p:nvGrpSpPr>
-        <p:cNvPr id="1" name=""/>
-        <p:cNvGrpSpPr/>
-        <p:nvPr/>
-      </p:nvGrpSpPr>
-      <p:grpSpPr>
-        <a:xfrm>
-          <a:off x="0" y="0"/>
-          <a:ext cx="0" cy="0"/>
-          <a:chOff x="0" y="0"/>
-          <a:chExt cx="0" cy="0"/>
-        </a:xfrm>
-      </p:grpSpPr>
-      <p:sp>
-        <p:nvSpPr>
-          <p:cNvPr id="2" name="Text 0"/>
-          <p:cNvSpPr txBox="1"/>
-          <p:nvPr/>
-        </p:nvSpPr>
-        <p:spPr>
-          <a:xfrm>
-            <a:off x="9354312" y="320040"/>
-            <a:ext cx="2286000" cy="274320"/>
-          </a:xfrm>
-          <a:prstGeom prst="rect">
-            <a:avLst/>
-          </a:prstGeom>
-          <a:noFill/>
-          <a:ln/>
-        </p:spPr>
-        <p:txBody>
-          <a:bodyPr wrap="square" lIns="0" tIns="0" rIns="0" bIns="0" rtlCol="0" anchor="ctr"/>
-          <a:lstStyle/>
-          <a:p>
-            <a:pPr algn="r" indent="0" marL="0">
-              <a:buNone/>
-            </a:pPr>
-            <a:r>
-              <a:rPr lang="en-US" sz="900" spc="300" kern="0" dirty="0">
-                <a:solidFill>
-                  <a:srgbClr val="8C8C8C"/>
-                </a:solidFill>
-                <a:latin typeface="Courier New" pitchFamily="34" charset="0"/>
-                <a:ea typeface="Courier New" pitchFamily="34" charset="-122"/>
-                <a:cs typeface="Courier New" pitchFamily="34" charset="-120"/>
-              </a:rPr>
-              <a:t>ОКЕАН ТЕХ</a:t>
-            </a:r>
-            <a:endParaRPr lang="en-US" sz="900" dirty="0"/>
-          </a:p>
-        </p:txBody>
-      </p:sp>
-      <p:sp>
-        <p:nvSpPr>
-          <p:cNvPr id="3" name="Text 1"/>
-          <p:cNvSpPr txBox="1"/>
-          <p:nvPr/>
-        </p:nvSpPr>
-        <p:spPr>
-          <a:xfrm>
-            <a:off x="548640" y="411480"/>
-            <a:ext cx="7315200" cy="274320"/>
-          </a:xfrm>
-          <a:prstGeom prst="rect">
-            <a:avLst/>
-          </a:prstGeom>
-          <a:noFill/>
-          <a:ln/>
-        </p:spPr>
-        <p:txBody>
-          <a:bodyPr wrap="square" lIns="0" tIns="0" rIns="0" bIns="0" rtlCol="0" anchor="ctr"/>
-          <a:lstStyle/>
-          <a:p>
-            <a:pPr indent="0" marL="0">
-              <a:buNone/>
-            </a:pPr>
-            <a:r>
-              <a:rPr lang="en-US" sz="950" spc="300" kern="0" dirty="0">
-                <a:solidFill>
-                  <a:srgbClr val="D5F774"/>
-                </a:solidFill>
-                <a:latin typeface="Courier New" pitchFamily="34" charset="0"/>
-                <a:ea typeface="Courier New" pitchFamily="34" charset="-122"/>
-                <a:cs typeface="Courier New" pitchFamily="34" charset="-120"/>
-              </a:rPr>
-              <a:t>7 · ПЛАН РАЗВИТИЯ</a:t>
-            </a:r>
-            <a:endParaRPr lang="en-US" sz="950" dirty="0"/>
-          </a:p>
-        </p:txBody>
-      </p:sp>
-      <p:sp>
-        <p:nvSpPr>
-          <p:cNvPr id="4" name="Text 2"/>
-          <p:cNvSpPr txBox="1"/>
-          <p:nvPr/>
-        </p:nvSpPr>
-        <p:spPr>
-          <a:xfrm>
-            <a:off x="548640" y="731520"/>
-            <a:ext cx="11091672" cy="1188720"/>
-          </a:xfrm>
-          <a:prstGeom prst="rect">
-            <a:avLst/>
-          </a:prstGeom>
-          <a:noFill/>
-          <a:ln/>
-        </p:spPr>
-        <p:txBody>
-          <a:bodyPr wrap="square" lIns="0" tIns="0" rIns="0" bIns="0" rtlCol="0" anchor="t"/>
-          <a:lstStyle/>
-          <a:p>
-            <a:pPr indent="0" marL="0">
-              <a:buNone/>
-            </a:pPr>
-            <a:r>
-              <a:rPr lang="en-US" sz="2800" b="1" dirty="0">
-                <a:solidFill>
-                  <a:srgbClr val="FFFFFF"/>
-                </a:solidFill>
-                <a:latin typeface="Arial" pitchFamily="34" charset="0"/>
-                <a:ea typeface="Arial" pitchFamily="34" charset="-122"/>
-                <a:cs typeface="Arial" pitchFamily="34" charset="-120"/>
-              </a:rPr>
-              <a:t>Год 1 — первая фирма. Год 3 — пять фирм. Потом — продажа</a:t>
-            </a:r>
-            <a:endParaRPr lang="en-US" sz="2800" dirty="0"/>
-          </a:p>
-        </p:txBody>
-      </p:sp>
-      <p:sp>
-        <p:nvSpPr>
-          <p:cNvPr id="5" name="Text 3"/>
-          <p:cNvSpPr txBox="1"/>
-          <p:nvPr/>
-        </p:nvSpPr>
-        <p:spPr>
-          <a:xfrm>
-            <a:off x="10268712" y="6400800"/>
-            <a:ext cx="1371600" cy="274320"/>
-          </a:xfrm>
-          <a:prstGeom prst="rect">
-            <a:avLst/>
-          </a:prstGeom>
-          <a:noFill/>
-          <a:ln/>
-        </p:spPr>
-        <p:txBody>
-          <a:bodyPr wrap="square" lIns="0" tIns="0" rIns="0" bIns="0" rtlCol="0" anchor="ctr"/>
-          <a:lstStyle/>
-          <a:p>
-            <a:pPr algn="r" indent="0" marL="0">
-              <a:buNone/>
-            </a:pPr>
-            <a:r>
-              <a:rPr lang="en-US" sz="900" dirty="0">
-                <a:solidFill>
-                  <a:srgbClr val="8C8C8C"/>
-                </a:solidFill>
-                <a:latin typeface="Courier New" pitchFamily="34" charset="0"/>
-                <a:ea typeface="Courier New" pitchFamily="34" charset="-122"/>
-                <a:cs typeface="Courier New" pitchFamily="34" charset="-120"/>
-              </a:rPr>
-              <a:t>9 / 15</a:t>
-            </a:r>
-            <a:endParaRPr lang="en-US" sz="900" dirty="0"/>
-          </a:p>
-        </p:txBody>
-      </p:sp>
-      <p:sp>
-        <p:nvSpPr>
-          <p:cNvPr id="6" name="Shape 4"/>
-          <p:cNvSpPr/>
-          <p:nvPr/>
-        </p:nvSpPr>
-        <p:spPr>
-          <a:xfrm>
-            <a:off x="548640" y="2103120"/>
-            <a:ext cx="3544824" cy="2286000"/>
-          </a:xfrm>
-          <a:prstGeom prst="roundRect">
-            <a:avLst>
-              <a:gd name="adj" fmla="val 7200"/>
-            </a:avLst>
-          </a:prstGeom>
-          <a:solidFill>
-            <a:srgbClr val="343434"/>
-          </a:solidFill>
-          <a:ln w="12700">
-            <a:solidFill>
-              <a:srgbClr val="343434"/>
-            </a:solidFill>
-            <a:prstDash val="solid"/>
-          </a:ln>
-        </p:spPr>
-      </p:sp>
-      <p:sp>
-        <p:nvSpPr>
-          <p:cNvPr id="7" name="Text 5"/>
-          <p:cNvSpPr txBox="1"/>
-          <p:nvPr/>
-        </p:nvSpPr>
-        <p:spPr>
-          <a:xfrm>
-            <a:off x="822960" y="2331720"/>
-            <a:ext cx="2996184" cy="274320"/>
-          </a:xfrm>
-          <a:prstGeom prst="rect">
-            <a:avLst/>
-          </a:prstGeom>
-          <a:noFill/>
-          <a:ln/>
-        </p:spPr>
-        <p:txBody>
-          <a:bodyPr wrap="square" lIns="0" tIns="0" rIns="0" bIns="0" rtlCol="0" anchor="ctr"/>
-          <a:lstStyle/>
-          <a:p>
-            <a:pPr indent="0" marL="0">
-              <a:buNone/>
-            </a:pPr>
-            <a:r>
-              <a:rPr lang="en-US" sz="950" spc="200" kern="0" dirty="0">
-                <a:solidFill>
-                  <a:srgbClr val="D5F774"/>
-                </a:solidFill>
-                <a:latin typeface="Courier New" pitchFamily="34" charset="0"/>
-                <a:ea typeface="Courier New" pitchFamily="34" charset="-122"/>
-                <a:cs typeface="Courier New" pitchFamily="34" charset="-120"/>
-              </a:rPr>
-              <a:t>ГОД 1</a:t>
-            </a:r>
-            <a:endParaRPr lang="en-US" sz="950" dirty="0"/>
-          </a:p>
-        </p:txBody>
-      </p:sp>
-      <p:sp>
-        <p:nvSpPr>
-          <p:cNvPr id="8" name="Text 6"/>
-          <p:cNvSpPr txBox="1"/>
-          <p:nvPr/>
-        </p:nvSpPr>
-        <p:spPr>
-          <a:xfrm>
-            <a:off x="822960" y="2651760"/>
-            <a:ext cx="2996184" cy="411480"/>
-          </a:xfrm>
-          <a:prstGeom prst="rect">
-            <a:avLst/>
-          </a:prstGeom>
-          <a:noFill/>
-          <a:ln/>
-        </p:spPr>
-        <p:txBody>
-          <a:bodyPr wrap="square" lIns="0" tIns="0" rIns="0" bIns="0" rtlCol="0" anchor="ctr"/>
-          <a:lstStyle/>
-          <a:p>
-            <a:pPr indent="0" marL="0">
-              <a:buNone/>
-            </a:pPr>
-            <a:r>
-              <a:rPr lang="en-US" sz="1600" b="1" dirty="0">
-                <a:solidFill>
-                  <a:srgbClr val="FFFFFF"/>
-                </a:solidFill>
-                <a:latin typeface="Arial" pitchFamily="34" charset="0"/>
-                <a:ea typeface="Arial" pitchFamily="34" charset="-122"/>
-                <a:cs typeface="Arial" pitchFamily="34" charset="-120"/>
-              </a:rPr>
-              <a:t>Первая фирма</a:t>
-            </a:r>
-            <a:endParaRPr lang="en-US" sz="1600" dirty="0"/>
-          </a:p>
-        </p:txBody>
-      </p:sp>
-      <p:sp>
-        <p:nvSpPr>
-          <p:cNvPr id="9" name="Text 7"/>
-          <p:cNvSpPr txBox="1"/>
-          <p:nvPr/>
-        </p:nvSpPr>
-        <p:spPr>
-          <a:xfrm>
-            <a:off x="822960" y="3108960"/>
-            <a:ext cx="2996184" cy="1097280"/>
-          </a:xfrm>
-          <a:prstGeom prst="rect">
-            <a:avLst/>
-          </a:prstGeom>
-          <a:noFill/>
-          <a:ln/>
-        </p:spPr>
-        <p:txBody>
-          <a:bodyPr wrap="square" lIns="0" tIns="0" rIns="0" bIns="0" rtlCol="0" anchor="t"/>
-          <a:lstStyle/>
-          <a:p>
-            <a:pPr indent="0" marL="0">
-              <a:buNone/>
-            </a:pPr>
-            <a:r>
-              <a:rPr lang="en-US" sz="1250" dirty="0">
-                <a:solidFill>
-                  <a:srgbClr val="B8B8B8"/>
-                </a:solidFill>
-                <a:latin typeface="Arial" pitchFamily="34" charset="0"/>
-                <a:ea typeface="Arial" pitchFamily="34" charset="-122"/>
-                <a:cs typeface="Arial" pitchFamily="34" charset="-120"/>
-              </a:rPr>
-              <a:t>ИИ работает на реальных проектах. Куплена первая компания на 20–50 инженеров. Проекты — вдвое быстрее.</a:t>
-            </a:r>
-            <a:endParaRPr lang="en-US" sz="1250" dirty="0"/>
-          </a:p>
-        </p:txBody>
-      </p:sp>
-      <p:sp>
-        <p:nvSpPr>
-          <p:cNvPr id="10" name="Shape 8"/>
-          <p:cNvSpPr/>
-          <p:nvPr/>
-        </p:nvSpPr>
-        <p:spPr>
-          <a:xfrm>
-            <a:off x="4322064" y="2103120"/>
-            <a:ext cx="3544824" cy="2286000"/>
-          </a:xfrm>
-          <a:prstGeom prst="roundRect">
-            <a:avLst>
-              <a:gd name="adj" fmla="val 7200"/>
-            </a:avLst>
-          </a:prstGeom>
-          <a:solidFill>
-            <a:srgbClr val="343434"/>
-          </a:solidFill>
-          <a:ln w="12700">
-            <a:solidFill>
-              <a:srgbClr val="343434"/>
-            </a:solidFill>
-            <a:prstDash val="solid"/>
-          </a:ln>
-        </p:spPr>
-      </p:sp>
-      <p:sp>
-        <p:nvSpPr>
-          <p:cNvPr id="11" name="Text 9"/>
-          <p:cNvSpPr txBox="1"/>
-          <p:nvPr/>
-        </p:nvSpPr>
-        <p:spPr>
-          <a:xfrm>
-            <a:off x="4596384" y="2331720"/>
-            <a:ext cx="2996184" cy="274320"/>
-          </a:xfrm>
-          <a:prstGeom prst="rect">
-            <a:avLst/>
-          </a:prstGeom>
-          <a:noFill/>
-          <a:ln/>
-        </p:spPr>
-        <p:txBody>
-          <a:bodyPr wrap="square" lIns="0" tIns="0" rIns="0" bIns="0" rtlCol="0" anchor="ctr"/>
-          <a:lstStyle/>
-          <a:p>
-            <a:pPr indent="0" marL="0">
-              <a:buNone/>
-            </a:pPr>
-            <a:r>
-              <a:rPr lang="en-US" sz="950" spc="200" kern="0" dirty="0">
-                <a:solidFill>
-                  <a:srgbClr val="D5F774"/>
-                </a:solidFill>
-                <a:latin typeface="Courier New" pitchFamily="34" charset="0"/>
-                <a:ea typeface="Courier New" pitchFamily="34" charset="-122"/>
-                <a:cs typeface="Courier New" pitchFamily="34" charset="-120"/>
-              </a:rPr>
-              <a:t>ГОДЫ 2–3</a:t>
-            </a:r>
-            <a:endParaRPr lang="en-US" sz="950" dirty="0"/>
-          </a:p>
-        </p:txBody>
-      </p:sp>
-      <p:sp>
-        <p:nvSpPr>
-          <p:cNvPr id="12" name="Text 10"/>
-          <p:cNvSpPr txBox="1"/>
-          <p:nvPr/>
-        </p:nvSpPr>
-        <p:spPr>
-          <a:xfrm>
-            <a:off x="4596384" y="2651760"/>
-            <a:ext cx="2996184" cy="411480"/>
-          </a:xfrm>
-          <a:prstGeom prst="rect">
-            <a:avLst/>
-          </a:prstGeom>
-          <a:noFill/>
-          <a:ln/>
-        </p:spPr>
-        <p:txBody>
-          <a:bodyPr wrap="square" lIns="0" tIns="0" rIns="0" bIns="0" rtlCol="0" anchor="ctr"/>
-          <a:lstStyle/>
-          <a:p>
-            <a:pPr indent="0" marL="0">
-              <a:buNone/>
-            </a:pPr>
-            <a:r>
-              <a:rPr lang="en-US" sz="1600" b="1" dirty="0">
-                <a:solidFill>
-                  <a:srgbClr val="FFFFFF"/>
-                </a:solidFill>
-                <a:latin typeface="Arial" pitchFamily="34" charset="0"/>
-                <a:ea typeface="Arial" pitchFamily="34" charset="-122"/>
-                <a:cs typeface="Arial" pitchFamily="34" charset="-120"/>
-              </a:rPr>
-              <a:t>Пять фирм</a:t>
-            </a:r>
-            <a:endParaRPr lang="en-US" sz="1600" dirty="0"/>
-          </a:p>
-        </p:txBody>
-      </p:sp>
-      <p:sp>
-        <p:nvSpPr>
-          <p:cNvPr id="13" name="Text 11"/>
-          <p:cNvSpPr txBox="1"/>
-          <p:nvPr/>
-        </p:nvSpPr>
-        <p:spPr>
-          <a:xfrm>
-            <a:off x="4596384" y="3108960"/>
-            <a:ext cx="2996184" cy="1097280"/>
-          </a:xfrm>
-          <a:prstGeom prst="rect">
-            <a:avLst/>
-          </a:prstGeom>
-          <a:noFill/>
-          <a:ln/>
-        </p:spPr>
-        <p:txBody>
-          <a:bodyPr wrap="square" lIns="0" tIns="0" rIns="0" bIns="0" rtlCol="0" anchor="t"/>
-          <a:lstStyle/>
-          <a:p>
-            <a:pPr indent="0" marL="0">
-              <a:buNone/>
-            </a:pPr>
-            <a:r>
-              <a:rPr lang="en-US" sz="1250" dirty="0">
-                <a:solidFill>
-                  <a:srgbClr val="B8B8B8"/>
-                </a:solidFill>
-                <a:latin typeface="Arial" pitchFamily="34" charset="0"/>
-                <a:ea typeface="Arial" pitchFamily="34" charset="-122"/>
-                <a:cs typeface="Arial" pitchFamily="34" charset="-120"/>
-              </a:rPr>
-              <a:t>200 инженеров, один ИИ на всех, 20 млн $ выручки в год.</a:t>
-            </a:r>
-            <a:endParaRPr lang="en-US" sz="1250" dirty="0"/>
-          </a:p>
-        </p:txBody>
-      </p:sp>
-      <p:sp>
-        <p:nvSpPr>
-          <p:cNvPr id="14" name="Shape 12"/>
-          <p:cNvSpPr/>
-          <p:nvPr/>
-        </p:nvSpPr>
-        <p:spPr>
-          <a:xfrm>
-            <a:off x="8095488" y="2103120"/>
-            <a:ext cx="3544824" cy="2286000"/>
-          </a:xfrm>
-          <a:prstGeom prst="roundRect">
-            <a:avLst>
-              <a:gd name="adj" fmla="val 7200"/>
-            </a:avLst>
-          </a:prstGeom>
-          <a:solidFill>
-            <a:srgbClr val="343434"/>
-          </a:solidFill>
-          <a:ln w="12700">
-            <a:solidFill>
-              <a:srgbClr val="343434"/>
-            </a:solidFill>
-            <a:prstDash val="solid"/>
-          </a:ln>
-        </p:spPr>
-      </p:sp>
-      <p:sp>
-        <p:nvSpPr>
-          <p:cNvPr id="15" name="Text 13"/>
-          <p:cNvSpPr txBox="1"/>
-          <p:nvPr/>
-        </p:nvSpPr>
-        <p:spPr>
-          <a:xfrm>
-            <a:off x="8369808" y="2331720"/>
-            <a:ext cx="2996184" cy="274320"/>
-          </a:xfrm>
-          <a:prstGeom prst="rect">
-            <a:avLst/>
-          </a:prstGeom>
-          <a:noFill/>
-          <a:ln/>
-        </p:spPr>
-        <p:txBody>
-          <a:bodyPr wrap="square" lIns="0" tIns="0" rIns="0" bIns="0" rtlCol="0" anchor="ctr"/>
-          <a:lstStyle/>
-          <a:p>
-            <a:pPr indent="0" marL="0">
-              <a:buNone/>
-            </a:pPr>
-            <a:r>
-              <a:rPr lang="en-US" sz="950" spc="200" kern="0" dirty="0">
-                <a:solidFill>
-                  <a:srgbClr val="D5F774"/>
-                </a:solidFill>
-                <a:latin typeface="Courier New" pitchFamily="34" charset="0"/>
-                <a:ea typeface="Courier New" pitchFamily="34" charset="-122"/>
-                <a:cs typeface="Courier New" pitchFamily="34" charset="-120"/>
-              </a:rPr>
-              <a:t>ГОДЫ 4–5</a:t>
-            </a:r>
-            <a:endParaRPr lang="en-US" sz="950" dirty="0"/>
-          </a:p>
-        </p:txBody>
-      </p:sp>
-      <p:sp>
-        <p:nvSpPr>
-          <p:cNvPr id="16" name="Text 14"/>
-          <p:cNvSpPr txBox="1"/>
-          <p:nvPr/>
-        </p:nvSpPr>
-        <p:spPr>
-          <a:xfrm>
-            <a:off x="8369808" y="2651760"/>
-            <a:ext cx="2996184" cy="411480"/>
-          </a:xfrm>
-          <a:prstGeom prst="rect">
-            <a:avLst/>
-          </a:prstGeom>
-          <a:noFill/>
-          <a:ln/>
-        </p:spPr>
-        <p:txBody>
-          <a:bodyPr wrap="square" lIns="0" tIns="0" rIns="0" bIns="0" rtlCol="0" anchor="ctr"/>
-          <a:lstStyle/>
-          <a:p>
-            <a:pPr indent="0" marL="0">
-              <a:buNone/>
-            </a:pPr>
-            <a:r>
-              <a:rPr lang="en-US" sz="1600" b="1" dirty="0">
-                <a:solidFill>
-                  <a:srgbClr val="FFFFFF"/>
-                </a:solidFill>
-                <a:latin typeface="Arial" pitchFamily="34" charset="0"/>
-                <a:ea typeface="Arial" pitchFamily="34" charset="-122"/>
-                <a:cs typeface="Arial" pitchFamily="34" charset="-120"/>
-              </a:rPr>
-              <a:t>Продажа</a:t>
-            </a:r>
-            <a:endParaRPr lang="en-US" sz="1600" dirty="0"/>
-          </a:p>
-        </p:txBody>
-      </p:sp>
-      <p:sp>
-        <p:nvSpPr>
-          <p:cNvPr id="17" name="Text 15"/>
-          <p:cNvSpPr txBox="1"/>
-          <p:nvPr/>
-        </p:nvSpPr>
-        <p:spPr>
-          <a:xfrm>
-            <a:off x="8369808" y="3108960"/>
-            <a:ext cx="2996184" cy="1097280"/>
-          </a:xfrm>
-          <a:prstGeom prst="rect">
-            <a:avLst/>
-          </a:prstGeom>
-          <a:noFill/>
-          <a:ln/>
-        </p:spPr>
-        <p:txBody>
-          <a:bodyPr wrap="square" lIns="0" tIns="0" rIns="0" bIns="0" rtlCol="0" anchor="t"/>
-          <a:lstStyle/>
-          <a:p>
-            <a:pPr indent="0" marL="0">
-              <a:buNone/>
-            </a:pPr>
-            <a:r>
-              <a:rPr lang="en-US" sz="1250" dirty="0">
-                <a:solidFill>
-                  <a:srgbClr val="B8B8B8"/>
-                </a:solidFill>
-                <a:latin typeface="Arial" pitchFamily="34" charset="0"/>
-                <a:ea typeface="Arial" pitchFamily="34" charset="-122"/>
-                <a:cs typeface="Arial" pitchFamily="34" charset="-120"/>
-              </a:rPr>
-              <a:t>Группа на 500 инженеров: рост с 200 — на выручку группы и долг под неё, не из этого раунда. Покупатель — те, кто уже платит за инженеров миллиарды: WSP, Stantec, Cyient.</a:t>
-            </a:r>
-            <a:endParaRPr lang="en-US" sz="1250" dirty="0"/>
-          </a:p>
-        </p:txBody>
-      </p:sp>
-      <p:sp>
-        <p:nvSpPr>
-          <p:cNvPr id="18" name="Text 16"/>
-          <p:cNvSpPr txBox="1"/>
-          <p:nvPr/>
-        </p:nvSpPr>
-        <p:spPr>
-          <a:xfrm>
-            <a:off x="548640" y="4617720"/>
-            <a:ext cx="10725912" cy="914400"/>
-          </a:xfrm>
-          <a:prstGeom prst="rect">
-            <a:avLst/>
-          </a:prstGeom>
-          <a:noFill/>
-          <a:ln/>
-        </p:spPr>
-        <p:txBody>
-          <a:bodyPr wrap="square" lIns="0" tIns="0" rIns="0" bIns="0" rtlCol="0" anchor="t"/>
-          <a:lstStyle/>
-          <a:p>
-            <a:pPr indent="0" marL="0">
-              <a:lnSpc>
-                <a:spcPct val="115000"/>
-              </a:lnSpc>
-              <a:buNone/>
-            </a:pPr>
-            <a:r>
-              <a:rPr lang="en-US" sz="1450" dirty="0">
-                <a:solidFill>
-                  <a:srgbClr val="FFFFFF"/>
-                </a:solidFill>
-                <a:latin typeface="Arial" pitchFamily="34" charset="0"/>
-                <a:ea typeface="Arial" pitchFamily="34" charset="-122"/>
-                <a:cs typeface="Arial" pitchFamily="34" charset="-120"/>
-              </a:rPr>
-              <a:t>Почему сейчас: гиганты только начали нанимать менеджеров по ИИ — Black &amp; Veatch открыл такую вакансию в августе 2026. ИИ будет у всех через год-два. Первый, кто соберёт группу с ИИ внутри, станет консолидатором отрасли.</a:t>
-            </a:r>
-            <a:endParaRPr lang="en-US" sz="1450" dirty="0"/>
-          </a:p>
-        </p:txBody>
-      </p:sp>
-      <p:sp>
-        <p:nvSpPr>
-          <p:cNvPr id="19" name="Text 17"/>
-          <p:cNvSpPr txBox="1"/>
-          <p:nvPr/>
-        </p:nvSpPr>
-        <p:spPr>
-          <a:xfrm>
-            <a:off x="548640" y="5669280"/>
-            <a:ext cx="9445752" cy="457200"/>
-          </a:xfrm>
-          <a:prstGeom prst="rect">
-            <a:avLst/>
-          </a:prstGeom>
-          <a:noFill/>
-          <a:ln/>
-        </p:spPr>
-        <p:txBody>
-          <a:bodyPr wrap="square" lIns="0" tIns="0" rIns="0" bIns="0" rtlCol="0" anchor="t"/>
-          <a:lstStyle/>
-          <a:p>
-            <a:pPr indent="0" marL="0">
-              <a:buNone/>
-            </a:pPr>
-            <a:r>
-              <a:rPr lang="en-US" sz="1000" dirty="0">
-                <a:solidFill>
-                  <a:srgbClr val="8C8C8C"/>
-                </a:solidFill>
-                <a:latin typeface="Arial" pitchFamily="34" charset="0"/>
-                <a:ea typeface="Arial" pitchFamily="34" charset="-122"/>
-                <a:cs typeface="Arial" pitchFamily="34" charset="-120"/>
-              </a:rPr>
-              <a:t>Годы 2–5 — цели, не прогноз. Ориентиры масштаба — сделки-аналоги.</a:t>
-            </a:r>
-            <a:endParaRPr lang="en-US" sz="1000" dirty="0"/>
+              <a:t>Прежде чем прийти с этой идеей, мы проверили и отбросили десять других. Раунд идёт в новую международную компанию, которая владеет купленными фирмами; Океан Тех вносит ИИ, метод и команду. Чего в команде пока нет и кого добавляем первым — инженер-партнёр с лицензией на целевом рынке.</a:t>
+            </a:r>
+            <a:endParaRPr lang="en-US" sz="1150" dirty="0"/>
           </a:p>
         </p:txBody>
       </p:sp>

--- a/ai-case-library/research/ventures/grid-plain-deck.pptx
+++ b/ai-case-library/research/ventures/grid-plain-deck.pptx
@@ -1306,7 +1306,7 @@
           <a:p>
             <a:r>
               <a:rPr lang="en-US" dirty="0"/>
-              <a:t>Финмодель: базовый сценарий ×1,5 к выработке, маржа 24%; при ×1,2 — убыток, это критерий остановки. Цена покупки 0,8–1,2× выручки — допущение. Не обещать «вдвое» как факт.</a:t>
+              <a:t>Финмодель: базовый сценарий ×1,5 к выработке, маржа 24% — цель, не факт (сектор от ИИ +0,1 п.п., SPI/Kantata 2026); при ×1,2 — убыток, это критерий остановки. Цена покупки 0,8–1,2× выручки — допущение. Не обещать «вдвое» как факт.</a:t>
             </a:r>
             <a:endParaRPr lang="en-US" dirty="0"/>
           </a:p>
@@ -2670,7 +2670,7 @@
                 <a:ea typeface="Arial" pitchFamily="34" charset="-122"/>
                 <a:cs typeface="Arial" pitchFamily="34" charset="-120"/>
               </a:rPr>
-              <a:t>Это бизнес на людях. Покупаем фирмы с отложенной выплатой основателям, а ИИ делает работу инженеров легче, а не заменяет их.</a:t>
+              <a:t>Это бизнес на людях: после сделок за год уходит до половины ключевых людей. Поэтому фирмы сохраняют бренд и самостоятельность (так вышел NV5 — 49 покупок), а ИИ дают инженеру как инструмент, не как контроль.</a:t>
             </a:r>
             <a:endParaRPr lang="en-US" sz="1250" dirty="0"/>
           </a:p>
@@ -2856,7 +2856,7 @@
                 <a:ea typeface="Arial" pitchFamily="34" charset="-122"/>
                 <a:cs typeface="Arial" pitchFamily="34" charset="-120"/>
               </a:rPr>
-              <a:t>Четвёртый риск — что ИИ не даст даже полтора раза. Его снимает первый шаг: 250 тысяч и восемь недель до любых покупок.</a:t>
+              <a:t>Четвёртый риск — что ИИ не даст даже полтора раза: по сектору ИИ пока прибавил лишь 0,1 п.п. маржи. Его снимает первый шаг: 250 тысяч и восемь недель до любых покупок.</a:t>
             </a:r>
             <a:endParaRPr lang="en-US" sz="1450" dirty="0"/>
           </a:p>
@@ -4714,7 +4714,7 @@
                 <a:ea typeface="Arial" pitchFamily="34" charset="-122"/>
                 <a:cs typeface="Arial" pitchFamily="34" charset="-120"/>
               </a:rPr>
-              <a:t>445 тыс. $ за инженера — 1,78 млрд $ / 4000; 70 тыс. $ — допущение финмодели (покупка за годовую выручку, 60–80 тыс. $ на инженера).</a:t>
+              <a:t>445 тыс. $ за инженера — 1,78 млрд $ / 4000, цена за группу на 4000 человек; 70 тыс. $ — допущение финмодели (покупка за годовую выручку, 60–80 тыс. $ на инженера).</a:t>
             </a:r>
             <a:endParaRPr lang="en-US" sz="1200" dirty="0"/>
           </a:p>
@@ -4841,6 +4841,27 @@
                 <a:cs typeface="Arial" pitchFamily="34" charset="-120"/>
               </a:rPr>
               <a:t>Годы 2–5, 200 и 500 инженеров, 20 млн $ — цели, не прогноз.</a:t>
+            </a:r>
+            <a:endParaRPr lang="en-US" sz="1200" dirty="0"/>
+          </a:p>
+          <a:p>
+            <a:pPr marL="342900" indent="-342900">
+              <a:spcAft>
+                <a:spcPts val="600"/>
+              </a:spcAft>
+              <a:buSzPct val="100000"/>
+              <a:buChar char="•"/>
+            </a:pPr>
+            <a:r>
+              <a:rPr lang="en-US" sz="1200" dirty="0">
+                <a:solidFill>
+                  <a:srgbClr val="5C6067"/>
+                </a:solidFill>
+                <a:latin typeface="Arial" pitchFamily="34" charset="0"/>
+                <a:ea typeface="Arial" pitchFamily="34" charset="-122"/>
+                <a:cs typeface="Arial" pitchFamily="34" charset="-120"/>
+              </a:rPr>
+              <a:t>Сверка с паспортом роллапа (engineering-rollup-passport.md, 02.09.2026): маржа сектора 9,8 → 9,9% — SPI/Kantata 2026; малые фирмы 5,4–7,5× EBITDA — ROG Partners; фонды 10,75× против стратегов 7,34× — ACEC / Morrissey Goodale 2018–2023; двузначный мультипликатор с выручки 75–100 млн $; Qualus → Clearlake ~14,9× (25.03.2026); E Source → CF Power (09.2025); Littlejohn + GDS (05.03.2026); отток 47%/75% — EY; NV5 — 49 покупок, 1,7 млрд $ (08.2025).</a:t>
             </a:r>
             <a:endParaRPr lang="en-US" sz="1200" dirty="0"/>
           </a:p>
@@ -6140,7 +6161,7 @@
                 <a:ea typeface="Arial" pitchFamily="34" charset="-122"/>
                 <a:cs typeface="Arial" pitchFamily="34" charset="-120"/>
               </a:rPr>
-              <a:t>Почему покупаем, а не нанимаем: вместе с фирмой приходят клиенты, лицензии и репутация — этого не наймёшь. Почему это не сделает WSP: гиганты покупают тысячи инженеров разом, фирмы на сорок человек им не видны. Мы не заменяем инженеров — мы делаем так, чтобы их хватало.</a:t>
+              <a:t>Почему покупаем, а не нанимаем: вместе с фирмой приходят клиенты, лицензии и репутация — этого не наймёшь. Почему это не сделали гиганты: они покупают тысячи инженеров разом. Фонды-консолидаторы малые фирмы покупают — но в США и Европе, не в Заливе и Индии. Мы не заменяем инженеров — мы делаем так, чтобы их хватало.</a:t>
             </a:r>
             <a:endParaRPr lang="en-US" sz="1400" dirty="0"/>
           </a:p>
@@ -8018,7 +8039,7 @@
                 <a:ea typeface="Arial" pitchFamily="34" charset="-122"/>
                 <a:cs typeface="Arial" pitchFamily="34" charset="-120"/>
               </a:rPr>
-              <a:t>выручки в год · те же 40 инженеров · маржа 24% после оплаты ИИ-команды</a:t>
+              <a:t>выручки в год · те же 40 инженеров · маржа 24% — цель модели, не факт: по сектору ИИ пока дал +0,1 п.п.</a:t>
             </a:r>
             <a:endParaRPr lang="en-US" sz="1300" dirty="0"/>
           </a:p>
@@ -8539,7 +8560,7 @@
                 <a:ea typeface="Arial" pitchFamily="34" charset="-122"/>
                 <a:cs typeface="Arial" pitchFamily="34" charset="-120"/>
               </a:rPr>
-              <a:t>Мы собираем группу по цене около 70 тысяч долларов за инженера — покупая небольшие фирмы там, где инженеры есть. Такие группы стратеги покупают по 445 тысяч за инженера: WSP заплатила именно столько.</a:t>
+              <a:t>Мы собираем группу по цене около 70 тысяч долларов за инженера — покупая небольшие фирмы там, где инженеры есть. Крупные группы уходят по 445 тысяч за инженера — столько заплатила WSP. Этот разрыв платят за масштаб, не за ИИ: малые фирмы стоят 5–7 годовых прибылей, и покупают их чаще фонды, чем стратеги.</a:t>
             </a:r>
             <a:endParaRPr lang="en-US" sz="1500" dirty="0"/>
           </a:p>
@@ -8578,7 +8599,7 @@
                 <a:ea typeface="Arial" pitchFamily="34" charset="-122"/>
                 <a:cs typeface="Arial" pitchFamily="34" charset="-120"/>
               </a:rPr>
-              <a:t>Разница между ценой входа и ценой выхода — и есть сделка.</a:t>
+              <a:t>Разрыв реален — но платят его за масштаб. Масштаб и собираем.</a:t>
             </a:r>
             <a:endParaRPr lang="en-US" sz="1500" dirty="0"/>
           </a:p>
@@ -9198,7 +9219,7 @@
                 <a:ea typeface="Arial" pitchFamily="34" charset="-122"/>
                 <a:cs typeface="Arial" pitchFamily="34" charset="-120"/>
               </a:rPr>
-              <a:t>Группа на 500 инженеров: рост с 200 — на выручку группы и долг под неё, не из этого раунда. Покупатель — те, кто уже платит за инженеров миллиарды: WSP, Stantec, Cyient.</a:t>
+              <a:t>Группа на 500 инженеров: рост с 200 — на выручку группы и долг под неё, не из этого раунда. Покупатель — фонды, которые собирают такие группы: они платят больше стратегов, 10,8× против 7,3× прибыли.</a:t>
             </a:r>
             <a:endParaRPr lang="en-US" sz="1250" dirty="0"/>
           </a:p>
@@ -9240,7 +9261,7 @@
                 <a:ea typeface="Arial" pitchFamily="34" charset="-122"/>
                 <a:cs typeface="Arial" pitchFamily="34" charset="-120"/>
               </a:rPr>
-              <a:t>Почему сейчас: гиганты только начали нанимать менеджеров по ИИ — Black &amp; Veatch открыл такую вакансию в августе 2026. ИИ будет у всех через год-два. Первый, кто соберёт группу с ИИ внутри, станет консолидатором отрасли.</a:t>
+              <a:t>Почему сейчас: гиганты только начали нанимать менеджеров по ИИ — Black &amp; Veatch открыл такую вакансию в августе 2026. ИИ будет у всех через год-два. Консолидаторы уже есть (Trilon, Verdantas, E Source) — но ни один не идёт в Залив и Индию.</a:t>
             </a:r>
             <a:endParaRPr lang="en-US" sz="1450" dirty="0"/>
           </a:p>
@@ -9502,7 +9523,7 @@
       </p:sp>
       <p:pic>
         <p:nvPicPr>
-          <p:cNvPr id="7" name="Image 0" descr="/tmp/claude-0/-home-user/5ac64fc3-708b-5ba2-8575-a96a48f05f03/scratchpad/okean/penkov.png">    </p:cNvPr>
+          <p:cNvPr id="7" name="Image 0" descr="/tmp/claude-0/-home-user/5ac64fc3-708b-5ba2-8575-a96a48f05f03/scratchpad/pptx/_team/penkov.png">    </p:cNvPr>
           <p:cNvPicPr>
             <a:picLocks noChangeAspect="1"/>
           </p:cNvPicPr>
@@ -9672,7 +9693,7 @@
       </p:sp>
       <p:pic>
         <p:nvPicPr>
-          <p:cNvPr id="12" name="Image 1" descr="/tmp/claude-0/-home-user/5ac64fc3-708b-5ba2-8575-a96a48f05f03/scratchpad/okean/moroshin.png">    </p:cNvPr>
+          <p:cNvPr id="12" name="Image 1" descr="/tmp/claude-0/-home-user/5ac64fc3-708b-5ba2-8575-a96a48f05f03/scratchpad/pptx/_team/moroshin.png">    </p:cNvPr>
           <p:cNvPicPr>
             <a:picLocks noChangeAspect="1"/>
           </p:cNvPicPr>
@@ -9842,7 +9863,7 @@
       </p:sp>
       <p:pic>
         <p:nvPicPr>
-          <p:cNvPr id="17" name="Image 2" descr="/tmp/claude-0/-home-user/5ac64fc3-708b-5ba2-8575-a96a48f05f03/scratchpad/okean/kovalev.png">    </p:cNvPr>
+          <p:cNvPr id="17" name="Image 2" descr="/tmp/claude-0/-home-user/5ac64fc3-708b-5ba2-8575-a96a48f05f03/scratchpad/pptx/_team/kovalev.png">    </p:cNvPr>
           <p:cNvPicPr>
             <a:picLocks noChangeAspect="1"/>
           </p:cNvPicPr>

--- a/ai-case-library/research/ventures/grid-plain-deck.pptx
+++ b/ai-case-library/research/ventures/grid-plain-deck.pptx
@@ -1306,7 +1306,7 @@
           <a:p>
             <a:r>
               <a:rPr lang="en-US" dirty="0"/>
-              <a:t>Финмодель: базовый сценарий ×1,5 к выработке, маржа 24% — цель, не факт (сектор от ИИ +0,1 п.п., SPI/Kantata 2026); при ×1,2 — убыток, это критерий остановки. Цена покупки 0,8–1,2× выручки — допущение. Не обещать «вдвое» как факт.</a:t>
+              <a:t>Финмодель: базовый сценарий ×1,5 к выработке, маржа 24% — цель, не факт; при ×1,2 — убыток, это критерий остановки. Про «сектор дал +0,1 п.п.» (SPI/Kantata 2026): это замер того, кому достаётся выигрыш, а не того, что умеет инструмент. В услугах экономия уходит клиенту через цену и тендер, поэтому маржа сектора плоская даже при растущей выработке. Плюс замер запаздывающий: он смотрит на внедрения прошлых лет. Мы поэтому меряем часы на проект у себя на пилотах, а не ждём отраслевой статистики. Цена покупки 0,8–1,2× выручки — допущение. Не обещать «вдвое» как факт.</a:t>
             </a:r>
             <a:endParaRPr lang="en-US" dirty="0"/>
           </a:p>
@@ -2856,7 +2856,7 @@
                 <a:ea typeface="Arial" pitchFamily="34" charset="-122"/>
                 <a:cs typeface="Arial" pitchFamily="34" charset="-120"/>
               </a:rPr>
-              <a:t>Четвёртый риск — что ИИ не даст даже полтора раза: по сектору ИИ пока прибавил лишь 0,1 п.п. маржи. Его снимает первый шаг: 250 тысяч и восемь недель до любых покупок.</a:t>
+              <a:t>Четвёртый риск — что ИИ не даст даже полтора раза. По сектору маржа плоская, но там экономию забирает клиент через цену; нас интересуют часы на проект. Его снимает первый шаг: 250 тысяч и восемь недель до любых покупок.</a:t>
             </a:r>
             <a:endParaRPr lang="en-US" sz="1450" dirty="0"/>
           </a:p>
@@ -8039,7 +8039,7 @@
                 <a:ea typeface="Arial" pitchFamily="34" charset="-122"/>
                 <a:cs typeface="Arial" pitchFamily="34" charset="-120"/>
               </a:rPr>
-              <a:t>выручки в год · те же 40 инженеров · маржа 24% — цель модели, не факт: по сектору ИИ пока дал +0,1 п.п.</a:t>
+              <a:t>выручки в год · те же 40 инженеров · маржа 24% — цель, которую меряем часами на проект, а не отчётностью сектора</a:t>
             </a:r>
             <a:endParaRPr lang="en-US" sz="1300" dirty="0"/>
           </a:p>

--- a/ai-case-library/research/ventures/grid-plain-deck.pptx
+++ b/ai-case-library/research/ventures/grid-plain-deck.pptx
@@ -1306,7 +1306,7 @@
           <a:p>
             <a:r>
               <a:rPr lang="en-US" dirty="0"/>
-              <a:t>Финмодель: базовый сценарий ×1,5 к выработке, маржа 24% — цель, не факт; при ×1,2 — убыток, это критерий остановки. Про «сектор дал +0,1 п.п.» (SPI/Kantata 2026): это замер того, кому достаётся выигрыш, а не того, что умеет инструмент. В услугах экономия уходит клиенту через цену и тендер, поэтому маржа сектора плоская даже при растущей выработке. Плюс замер запаздывающий: он смотрит на внедрения прошлых лет. Мы поэтому меряем часы на проект у себя на пилотах, а не ждём отраслевой статистики. Цена покупки 0,8–1,2× выручки — допущение. Не обещать «вдвое» как факт.</a:t>
+              <a:t>Финмодель: базовый сценарий ×1,5 к выработке, маржа 24% — цель, не факт; при ×1,2 — убыток, это критерий остановки. Про плоскую маржу сектора (SPI/Kantata 2026): в том же отчёте маржа проекта выросла с 35,9% до 37,7%, а утилизация упала до 66,4% — исторический минимум. Фирмы стали делать проекты дешевле, но не продали освободившиеся часы. То есть выигрыш на поставке есть, а в EBITDA он не доходит из-за спроса. Плюс замер запаздывающий. Поэтому меряем часы на типовой пакет у себя на пилотах, а не ждём отраслевой статистики. Цена покупки 0,8–1,2× выручки — допущение. Не обещать «вдвое» как факт.</a:t>
             </a:r>
             <a:endParaRPr lang="en-US" dirty="0"/>
           </a:p>
@@ -2814,7 +2814,7 @@
                 <a:ea typeface="Arial" pitchFamily="34" charset="-122"/>
                 <a:cs typeface="Arial" pitchFamily="34" charset="-120"/>
               </a:rPr>
-              <a:t>Команда из России: в США и Европе нас ждут проверки и ограничения. Поэтому стартуем там, где строят и куда пускают: Залив, Индия. Международная структура с первого дня.</a:t>
+              <a:t>Команда из России. В США заказчику запрещено давать нам доступ к своему проектному софту: нарушителем будет он. В ЕС ограничение по гражданству, юрлицо не спасает. Стартуем в Заливе и Индии.</a:t>
             </a:r>
             <a:endParaRPr lang="en-US" sz="1250" dirty="0"/>
           </a:p>
@@ -2856,7 +2856,7 @@
                 <a:ea typeface="Arial" pitchFamily="34" charset="-122"/>
                 <a:cs typeface="Arial" pitchFamily="34" charset="-120"/>
               </a:rPr>
-              <a:t>Четвёртый риск — что ИИ не даст даже полтора раза. По сектору маржа плоская, но там экономию забирает клиент через цену; нас интересуют часы на проект. Его снимает первый шаг: 250 тысяч и восемь недель до любых покупок.</a:t>
+              <a:t>Четвёртый риск — что ИИ не даст даже полтора раза. По сектору маржа плоская, но там же рекордно низкая загрузка: фирмы стали делать проекты дешевле и не продали освободившиеся часы. Нас интересуют часы на пакет. Его снимает первый шаг: 250 тысяч и восемь недель до любых покупок.</a:t>
             </a:r>
             <a:endParaRPr lang="en-US" sz="1450" dirty="0"/>
           </a:p>

--- a/ai-case-library/research/ventures/grid-plain-deck.pptx
+++ b/ai-case-library/research/ventures/grid-plain-deck.pptx
@@ -7563,7 +7563,7 @@
                 <a:ea typeface="Arial" pitchFamily="34" charset="-122"/>
                 <a:cs typeface="Arial" pitchFamily="34" charset="-120"/>
               </a:rPr>
-              <a:t>В США проблему лучше всего измерили. Начинаем мы с Персидского залива и Индии: там строят больше, а инженеров не хватает так же — Саудовская Аравия законом требует 30% местных инженеров, и компании не знают, где их взять. Стоят инженеры по-разному: в Индии в несколько раз дешевле, чем в США. Для команды из России США и Европа — позже и через партнёров.</a:t>
+              <a:t>В США проблему лучше всего измерили. Начинаем мы с Персидского залива и Индии. В Заливе строят больше и не хватает проектировщиков с допуском сетевых компаний, а Саудовская Аравия ещё и требует по закону 30% местных инженеров. В Индии дефицита нет, там инженеры просто дёшевы. Стоят инженеры по-разному: в Индии в несколько раз дешевле, чем в США. Для команды из России США и Европа — позже и через партнёров.</a:t>
             </a:r>
             <a:endParaRPr lang="en-US" sz="1400" dirty="0"/>
           </a:p>
